--- a/docs/public/course-assets/course-pptx/ag-005.pptx
+++ b/docs/public/course-assets/course-pptx/ag-005.pptx
@@ -2,25 +2,25 @@
 <file path=ppt/presentation.xml><?xml version="1.0" encoding="utf-8"?>
 <p:presentation xmlns:p="http://schemas.openxmlformats.org/presentationml/2006/main">
   <p:sldMasterIdLst>
-    <p:sldMasterId xmlns:r="http://schemas.openxmlformats.org/officeDocument/2006/relationships" id="2147483648" r:id="Recc6ea2b909f4374"/>
+    <p:sldMasterId xmlns:r="http://schemas.openxmlformats.org/officeDocument/2006/relationships" id="2147483648" r:id="R303e086002a1487b"/>
   </p:sldMasterIdLst>
   <p:notesMasterIdLst>
-    <p:notesMasterId xmlns:r="http://schemas.openxmlformats.org/officeDocument/2006/relationships" r:id="R6e4d4c4191ae4dff"/>
+    <p:notesMasterId xmlns:r="http://schemas.openxmlformats.org/officeDocument/2006/relationships" r:id="R04a74cd392ae42e6"/>
   </p:notesMasterIdLst>
   <p:sldIdLst>
-    <p:sldId xmlns:r="http://schemas.openxmlformats.org/officeDocument/2006/relationships" id="256" r:id="Re8936c96f6c04cd5"/>
-    <p:sldId xmlns:r="http://schemas.openxmlformats.org/officeDocument/2006/relationships" id="257" r:id="R52a357ecdc1547a9"/>
-    <p:sldId xmlns:r="http://schemas.openxmlformats.org/officeDocument/2006/relationships" id="258" r:id="R9d824c76029b4fd7"/>
-    <p:sldId xmlns:r="http://schemas.openxmlformats.org/officeDocument/2006/relationships" id="259" r:id="Rfafc5d747ff247dc"/>
-    <p:sldId xmlns:r="http://schemas.openxmlformats.org/officeDocument/2006/relationships" id="260" r:id="R8d59cab770734752"/>
-    <p:sldId xmlns:r="http://schemas.openxmlformats.org/officeDocument/2006/relationships" id="261" r:id="R63dd57a320a14739"/>
-    <p:sldId xmlns:r="http://schemas.openxmlformats.org/officeDocument/2006/relationships" id="262" r:id="Rfb6cd2a11f9f46db"/>
-    <p:sldId xmlns:r="http://schemas.openxmlformats.org/officeDocument/2006/relationships" id="263" r:id="R6826e367499f43b9"/>
-    <p:sldId xmlns:r="http://schemas.openxmlformats.org/officeDocument/2006/relationships" id="264" r:id="R863d9f0df17446fa"/>
-    <p:sldId xmlns:r="http://schemas.openxmlformats.org/officeDocument/2006/relationships" id="265" r:id="R14fcc7690cac4895"/>
-    <p:sldId xmlns:r="http://schemas.openxmlformats.org/officeDocument/2006/relationships" id="266" r:id="Rd96c80eb0e234ddf"/>
-    <p:sldId xmlns:r="http://schemas.openxmlformats.org/officeDocument/2006/relationships" id="267" r:id="Rbb07eba07c134979"/>
-    <p:sldId xmlns:r="http://schemas.openxmlformats.org/officeDocument/2006/relationships" id="268" r:id="Rf1936c2c90944b7e"/>
+    <p:sldId xmlns:r="http://schemas.openxmlformats.org/officeDocument/2006/relationships" id="256" r:id="R84e921d4882e4298"/>
+    <p:sldId xmlns:r="http://schemas.openxmlformats.org/officeDocument/2006/relationships" id="257" r:id="Rd130ac8cebcb4eb8"/>
+    <p:sldId xmlns:r="http://schemas.openxmlformats.org/officeDocument/2006/relationships" id="258" r:id="R22434d4fb45c4472"/>
+    <p:sldId xmlns:r="http://schemas.openxmlformats.org/officeDocument/2006/relationships" id="259" r:id="R67c28cd4afec48d3"/>
+    <p:sldId xmlns:r="http://schemas.openxmlformats.org/officeDocument/2006/relationships" id="260" r:id="R9c27bf41da1b4fce"/>
+    <p:sldId xmlns:r="http://schemas.openxmlformats.org/officeDocument/2006/relationships" id="261" r:id="R73685ca486394c3d"/>
+    <p:sldId xmlns:r="http://schemas.openxmlformats.org/officeDocument/2006/relationships" id="262" r:id="Rbd74e972298842bd"/>
+    <p:sldId xmlns:r="http://schemas.openxmlformats.org/officeDocument/2006/relationships" id="263" r:id="R595915b19bf34a75"/>
+    <p:sldId xmlns:r="http://schemas.openxmlformats.org/officeDocument/2006/relationships" id="264" r:id="R86405032c68d47d5"/>
+    <p:sldId xmlns:r="http://schemas.openxmlformats.org/officeDocument/2006/relationships" id="265" r:id="R60ba4e4b377e4e27"/>
+    <p:sldId xmlns:r="http://schemas.openxmlformats.org/officeDocument/2006/relationships" id="266" r:id="R8b91d5792e5f48af"/>
+    <p:sldId xmlns:r="http://schemas.openxmlformats.org/officeDocument/2006/relationships" id="267" r:id="Rd503a74a42e94b0d"/>
+    <p:sldId xmlns:r="http://schemas.openxmlformats.org/officeDocument/2006/relationships" id="268" r:id="R739782eefc394341"/>
   </p:sldIdLst>
   <p:sldSz cx="12192000" cy="6858000"/>
   <p:notesSz cx="6858000" cy="9144000"/>
@@ -1405,7 +1405,7 @@
   </p:cSld>
   <p:clrMap bg1="lt1" tx1="dk1" bg2="lt2" tx2="dk2" accent1="accent1" accent2="accent2" accent3="accent3" accent4="accent4" accent5="accent5" accent6="accent6" hlink="hlink" folHlink="folHlink"/>
   <p:sldLayoutIdLst>
-    <p:sldLayoutId xmlns:r="http://schemas.openxmlformats.org/officeDocument/2006/relationships" id="2147483649" r:id="Rb18eddbda0e94301"/>
+    <p:sldLayoutId xmlns:r="http://schemas.openxmlformats.org/officeDocument/2006/relationships" id="2147483649" r:id="R8806d227f1394810"/>
   </p:sldLayoutIdLst>
   <p:txStyles>
     <p:titleStyle>
@@ -1956,7 +1956,7 @@
           <p:cNvPr id="1" name="cover-rule">
             <a:extLst xmlns:a="http://schemas.openxmlformats.org/drawingml/2006/main">
               <a:ext uri="{FF2B5EF4-FFF2-40B4-BE49-F238E27FC236}">
-                <a16:creationId xmlns:a16="http://schemas.microsoft.com/office/drawing/2014/main" id="{6AB014B5-7D2E-4943-9A72-ECF5B0AB7C92}"/>
+                <a16:creationId xmlns:a16="http://schemas.microsoft.com/office/drawing/2014/main" id="{C521EFA7-D115-480A-A410-76F5C551B70E}"/>
               </a:ext>
             </a:extLst>
           </p:cNvPr>
@@ -1989,7 +1989,7 @@
           <p:cNvPr id="2" name="cover-ring-1">
             <a:extLst xmlns:a="http://schemas.openxmlformats.org/drawingml/2006/main">
               <a:ext uri="{FF2B5EF4-FFF2-40B4-BE49-F238E27FC236}">
-                <a16:creationId xmlns:a16="http://schemas.microsoft.com/office/drawing/2014/main" id="{23C246EB-1957-4AE8-A709-5512630F7A0E}"/>
+                <a16:creationId xmlns:a16="http://schemas.microsoft.com/office/drawing/2014/main" id="{65AD8CC6-E575-4283-803B-91802869C862}"/>
               </a:ext>
             </a:extLst>
           </p:cNvPr>
@@ -2020,7 +2020,7 @@
           <p:cNvPr id="3" name="cover-ring-2">
             <a:extLst xmlns:a="http://schemas.openxmlformats.org/drawingml/2006/main">
               <a:ext uri="{FF2B5EF4-FFF2-40B4-BE49-F238E27FC236}">
-                <a16:creationId xmlns:a16="http://schemas.microsoft.com/office/drawing/2014/main" id="{5D103FA8-BE1C-4136-A447-6E1F2F1AD503}"/>
+                <a16:creationId xmlns:a16="http://schemas.microsoft.com/office/drawing/2014/main" id="{70B9B3B2-63ED-46E5-9311-7626E966CFB8}"/>
               </a:ext>
             </a:extLst>
           </p:cNvPr>
@@ -2051,7 +2051,7 @@
           <p:cNvPr id="4" name="cover-core">
             <a:extLst xmlns:a="http://schemas.openxmlformats.org/drawingml/2006/main">
               <a:ext uri="{FF2B5EF4-FFF2-40B4-BE49-F238E27FC236}">
-                <a16:creationId xmlns:a16="http://schemas.microsoft.com/office/drawing/2014/main" id="{D4A0A0EE-DAB1-487A-9D52-737F0F8B82DB}"/>
+                <a16:creationId xmlns:a16="http://schemas.microsoft.com/office/drawing/2014/main" id="{C016F089-D814-4C87-9333-DD41E491DB72}"/>
               </a:ext>
             </a:extLst>
           </p:cNvPr>
@@ -2084,7 +2084,7 @@
           <p:cNvPr id="5" name="cover-line-1">
             <a:extLst xmlns:a="http://schemas.openxmlformats.org/drawingml/2006/main">
               <a:ext uri="{FF2B5EF4-FFF2-40B4-BE49-F238E27FC236}">
-                <a16:creationId xmlns:a16="http://schemas.microsoft.com/office/drawing/2014/main" id="{61D69B2B-4FCC-4B97-8187-E95A284FCF3E}"/>
+                <a16:creationId xmlns:a16="http://schemas.microsoft.com/office/drawing/2014/main" id="{F5906247-2E4D-47A2-B482-EDA958D81A55}"/>
               </a:ext>
             </a:extLst>
           </p:cNvPr>
@@ -2115,7 +2115,7 @@
           <p:cNvPr id="6" name="cover-line-2">
             <a:extLst xmlns:a="http://schemas.openxmlformats.org/drawingml/2006/main">
               <a:ext uri="{FF2B5EF4-FFF2-40B4-BE49-F238E27FC236}">
-                <a16:creationId xmlns:a16="http://schemas.microsoft.com/office/drawing/2014/main" id="{0305B8FE-4F9A-4845-9316-0291B60E2413}"/>
+                <a16:creationId xmlns:a16="http://schemas.microsoft.com/office/drawing/2014/main" id="{BF7E911B-4DD6-4C27-9265-3605496B63CF}"/>
               </a:ext>
             </a:extLst>
           </p:cNvPr>
@@ -2146,7 +2146,7 @@
           <p:cNvPr id="7" name="cover-eyebrow">
             <a:extLst xmlns:a="http://schemas.openxmlformats.org/drawingml/2006/main">
               <a:ext uri="{FF2B5EF4-FFF2-40B4-BE49-F238E27FC236}">
-                <a16:creationId xmlns:a16="http://schemas.microsoft.com/office/drawing/2014/main" id="{95D0F97F-D7F8-415D-853A-8AE4F17F2412}"/>
+                <a16:creationId xmlns:a16="http://schemas.microsoft.com/office/drawing/2014/main" id="{D94EE1D6-593B-4900-B9E0-330812FD9824}"/>
               </a:ext>
             </a:extLst>
           </p:cNvPr>
@@ -2204,7 +2204,7 @@
           <p:cNvPr id="8" name="cover-title">
             <a:extLst xmlns:a="http://schemas.openxmlformats.org/drawingml/2006/main">
               <a:ext uri="{FF2B5EF4-FFF2-40B4-BE49-F238E27FC236}">
-                <a16:creationId xmlns:a16="http://schemas.microsoft.com/office/drawing/2014/main" id="{2FB2E8AF-52F2-4BD9-8B8A-43606CF57E2B}"/>
+                <a16:creationId xmlns:a16="http://schemas.microsoft.com/office/drawing/2014/main" id="{2EBFD9CE-D1B9-4E88-9F99-BE28124DB3C9}"/>
               </a:ext>
             </a:extLst>
           </p:cNvPr>
@@ -2262,7 +2262,7 @@
           <p:cNvPr id="9" name="cover-subtitle">
             <a:extLst xmlns:a="http://schemas.openxmlformats.org/drawingml/2006/main">
               <a:ext uri="{FF2B5EF4-FFF2-40B4-BE49-F238E27FC236}">
-                <a16:creationId xmlns:a16="http://schemas.microsoft.com/office/drawing/2014/main" id="{7A088E79-9238-44A4-9811-9E4736C9BE91}"/>
+                <a16:creationId xmlns:a16="http://schemas.microsoft.com/office/drawing/2014/main" id="{3F4AD2D6-3B09-45C9-916F-B66164FD0319}"/>
               </a:ext>
             </a:extLst>
           </p:cNvPr>
@@ -2324,7 +2324,7 @@
           <p:cNvPr id="10" name="cover-lead">
             <a:extLst xmlns:a="http://schemas.openxmlformats.org/drawingml/2006/main">
               <a:ext uri="{FF2B5EF4-FFF2-40B4-BE49-F238E27FC236}">
-                <a16:creationId xmlns:a16="http://schemas.microsoft.com/office/drawing/2014/main" id="{360A9DEF-0005-4C6D-BC79-39048EC0B807}"/>
+                <a16:creationId xmlns:a16="http://schemas.microsoft.com/office/drawing/2014/main" id="{76CD6415-78CA-4F69-96D1-680917BFA239}"/>
               </a:ext>
             </a:extLst>
           </p:cNvPr>
@@ -2349,7 +2349,7 @@
         </p:spPr>
         <p:txBody>
           <a:bodyPr xmlns:a="http://schemas.openxmlformats.org/drawingml/2006/main" lIns="0" tIns="0" rIns="0" bIns="0" anchor="t">
-            <a:normAutofit fontScale="100000"/>
+            <a:normAutofit fontScale="98988"/>
           </a:bodyPr>
           <a:lstStyle xmlns:a="http://schemas.openxmlformats.org/drawingml/2006/main"/>
           <a:p xmlns:a="http://schemas.openxmlformats.org/drawingml/2006/main">
@@ -2372,7 +2372,7 @@
                 <a:ea typeface="PingFang SC"/>
                 <a:cs typeface="PingFang SC"/>
               </a:rPr>
-              <a:t>一个聊天回答出错，影响往往停留在文字层面；一个智能体出错，则可能继续调用工具、写入系统、触发下游流程。最终结果看起来正确，也不代表过程可靠：它可能使用了错误来源…</a:t>
+              <a:t>OV-007 已经识别并分级了 AI 风险；形成“要防什么”的风险卡；本节把这张风险卡翻译成可运行、可检查的工程控制；哪些事件必须进入 trace；哪些结果要进入离线与线上评测</a:t>
             </a:r>
           </a:p>
         </p:txBody>
@@ -2382,7 +2382,7 @@
           <p:cNvPr id="11" name="cover-course">
             <a:extLst xmlns:a="http://schemas.openxmlformats.org/drawingml/2006/main">
               <a:ext uri="{FF2B5EF4-FFF2-40B4-BE49-F238E27FC236}">
-                <a16:creationId xmlns:a16="http://schemas.microsoft.com/office/drawing/2014/main" id="{F3237D39-EFE3-4351-96FD-6ECE9DA3A4EA}"/>
+                <a16:creationId xmlns:a16="http://schemas.microsoft.com/office/drawing/2014/main" id="{E0F065C0-70B8-4C3C-B06D-14619E1E958A}"/>
               </a:ext>
             </a:extLst>
           </p:cNvPr>
@@ -2440,7 +2440,7 @@
           <p:cNvPr id="12" name="cover-id">
             <a:extLst xmlns:a="http://schemas.openxmlformats.org/drawingml/2006/main">
               <a:ext uri="{FF2B5EF4-FFF2-40B4-BE49-F238E27FC236}">
-                <a16:creationId xmlns:a16="http://schemas.microsoft.com/office/drawing/2014/main" id="{BBB30119-D8A3-47EB-9311-3EE628CF4022}"/>
+                <a16:creationId xmlns:a16="http://schemas.microsoft.com/office/drawing/2014/main" id="{B74AB449-E074-4880-868F-97E958D01355}"/>
               </a:ext>
             </a:extLst>
           </p:cNvPr>
@@ -2496,7 +2496,7 @@
     </p:spTree>
     <p:extLst>
       <p:ext uri="{BB962C8B-B14F-4D97-AF65-F5344CB8AC3E}">
-        <p14:creationId xmlns:p14="http://schemas.microsoft.com/office/powerpoint/2010/main" val="1769556786"/>
+        <p14:creationId xmlns:p14="http://schemas.microsoft.com/office/powerpoint/2010/main" val="1846781037"/>
       </p:ext>
     </p:extLst>
   </p:cSld>
@@ -2527,7 +2527,7 @@
           <p:cNvPr id="1" name="s10-rule">
             <a:extLst xmlns:a="http://schemas.openxmlformats.org/drawingml/2006/main">
               <a:ext uri="{FF2B5EF4-FFF2-40B4-BE49-F238E27FC236}">
-                <a16:creationId xmlns:a16="http://schemas.microsoft.com/office/drawing/2014/main" id="{42098977-1809-4AF3-94CF-E1F4246142C0}"/>
+                <a16:creationId xmlns:a16="http://schemas.microsoft.com/office/drawing/2014/main" id="{FA59D7FA-0053-47BC-BE35-0E6611928069}"/>
               </a:ext>
             </a:extLst>
           </p:cNvPr>
@@ -2560,7 +2560,7 @@
           <p:cNvPr id="2" name="s10-eyebrow">
             <a:extLst xmlns:a="http://schemas.openxmlformats.org/drawingml/2006/main">
               <a:ext uri="{FF2B5EF4-FFF2-40B4-BE49-F238E27FC236}">
-                <a16:creationId xmlns:a16="http://schemas.microsoft.com/office/drawing/2014/main" id="{7BF541DA-F8EA-4C25-ABF4-FC8AE8C9C6A5}"/>
+                <a16:creationId xmlns:a16="http://schemas.microsoft.com/office/drawing/2014/main" id="{675E254C-322C-4346-97DE-4B00AB834A05}"/>
               </a:ext>
             </a:extLst>
           </p:cNvPr>
@@ -2618,7 +2618,7 @@
           <p:cNvPr id="3" name="s10-title">
             <a:extLst xmlns:a="http://schemas.openxmlformats.org/drawingml/2006/main">
               <a:ext uri="{FF2B5EF4-FFF2-40B4-BE49-F238E27FC236}">
-                <a16:creationId xmlns:a16="http://schemas.microsoft.com/office/drawing/2014/main" id="{FC72BE38-5563-401F-B82C-7951267119B7}"/>
+                <a16:creationId xmlns:a16="http://schemas.microsoft.com/office/drawing/2014/main" id="{7818CC27-388F-46A0-8346-8DC9356DD739}"/>
               </a:ext>
             </a:extLst>
           </p:cNvPr>
@@ -2676,7 +2676,7 @@
           <p:cNvPr id="4" name="s10-footer">
             <a:extLst xmlns:a="http://schemas.openxmlformats.org/drawingml/2006/main">
               <a:ext uri="{FF2B5EF4-FFF2-40B4-BE49-F238E27FC236}">
-                <a16:creationId xmlns:a16="http://schemas.microsoft.com/office/drawing/2014/main" id="{C1DE5A6F-2FA1-494B-AECF-DA458C91E807}"/>
+                <a16:creationId xmlns:a16="http://schemas.microsoft.com/office/drawing/2014/main" id="{0B051F6A-9DF4-4749-A9D5-6BB4BF188112}"/>
               </a:ext>
             </a:extLst>
           </p:cNvPr>
@@ -2707,7 +2707,7 @@
           <p:cNvPr id="5" name="s10-identity">
             <a:extLst xmlns:a="http://schemas.openxmlformats.org/drawingml/2006/main">
               <a:ext uri="{FF2B5EF4-FFF2-40B4-BE49-F238E27FC236}">
-                <a16:creationId xmlns:a16="http://schemas.microsoft.com/office/drawing/2014/main" id="{69ABA3ED-EBF9-4715-878D-DF16CF5E1934}"/>
+                <a16:creationId xmlns:a16="http://schemas.microsoft.com/office/drawing/2014/main" id="{5F7255A6-9055-4F58-93A8-F3CC93C43746}"/>
               </a:ext>
             </a:extLst>
           </p:cNvPr>
@@ -2765,7 +2765,7 @@
           <p:cNvPr id="6" name="case-title">
             <a:extLst xmlns:a="http://schemas.openxmlformats.org/drawingml/2006/main">
               <a:ext uri="{FF2B5EF4-FFF2-40B4-BE49-F238E27FC236}">
-                <a16:creationId xmlns:a16="http://schemas.microsoft.com/office/drawing/2014/main" id="{D5124B59-EC25-4178-86A2-6EF22ACF44EF}"/>
+                <a16:creationId xmlns:a16="http://schemas.microsoft.com/office/drawing/2014/main" id="{F74B8D79-A3F3-4381-903D-9DE32358B1C1}"/>
               </a:ext>
             </a:extLst>
           </p:cNvPr>
@@ -2829,23 +2829,23 @@
           <p:cNvPr id="7" name="case-row-0">
             <a:extLst xmlns:a="http://schemas.openxmlformats.org/drawingml/2006/main">
               <a:ext uri="{FF2B5EF4-FFF2-40B4-BE49-F238E27FC236}">
-                <a16:creationId xmlns:a16="http://schemas.microsoft.com/office/drawing/2014/main" id="{78B19DC3-AD35-41C1-95E8-2630C7B31EC2}"/>
-              </a:ext>
-            </a:extLst>
-          </p:cNvPr>
-          <p:cNvSpPr>
-            <a:spLocks xmlns:a="http://schemas.openxmlformats.org/drawingml/2006/main" noGrp="1"/>
-          </p:cNvSpPr>
-          <p:nvPr/>
-        </p:nvSpPr>
-        <p:spPr>
-          <a:xfrm xmlns:a="http://schemas.openxmlformats.org/drawingml/2006/main">
-            <a:off x="4286250" y="2057400"/>
-            <a:ext cx="6534150" cy="838200"/>
+                <a16:creationId xmlns:a16="http://schemas.microsoft.com/office/drawing/2014/main" id="{E140F5F3-618F-44BB-B5F3-3B98DC805BA2}"/>
+              </a:ext>
+            </a:extLst>
+          </p:cNvPr>
+          <p:cNvSpPr>
+            <a:spLocks xmlns:a="http://schemas.openxmlformats.org/drawingml/2006/main" noGrp="1"/>
+          </p:cNvSpPr>
+          <p:nvPr/>
+        </p:nvSpPr>
+        <p:spPr>
+          <a:xfrm xmlns:a="http://schemas.openxmlformats.org/drawingml/2006/main">
+            <a:off x="4286250" y="2038350"/>
+            <a:ext cx="6534150" cy="514350"/>
           </a:xfrm>
           <a:prstGeom xmlns:a="http://schemas.openxmlformats.org/drawingml/2006/main" prst="roundRect">
             <a:avLst>
-              <a:gd name="adj" fmla="val 14773"/>
+              <a:gd name="adj" fmla="val 24074"/>
             </a:avLst>
           </a:prstGeom>
           <a:solidFill xmlns:a="http://schemas.openxmlformats.org/drawingml/2006/main">
@@ -2860,7 +2860,7 @@
         </p:spPr>
         <p:txBody>
           <a:bodyPr xmlns:a="http://schemas.openxmlformats.org/drawingml/2006/main" lIns="152400" tIns="133350" rIns="152400" bIns="133350" anchor="ctr">
-            <a:normAutofit fontScale="81021"/>
+            <a:normAutofit fontScale="72956"/>
           </a:bodyPr>
           <a:lstStyle xmlns:a="http://schemas.openxmlformats.org/drawingml/2006/main"/>
           <a:p xmlns:a="http://schemas.openxmlformats.org/drawingml/2006/main">
@@ -2883,7 +2883,7 @@
                 <a:ea typeface="PingFang SC"/>
                 <a:cs typeface="PingFang SC"/>
               </a:rPr>
-              <a:t>场景｜系统读取订单和售后政策，为客服生成退款建议，但不能自行付款。离线集覆盖正常退款、超过期限、订单信息冲突和疑似重复申请。结果层检查建议是否符合政策…</a:t>
+              <a:t>边界｜系统读取订单和售后政策，为客服生成退款建议，但不能自行付款</a:t>
             </a:r>
           </a:p>
         </p:txBody>
@@ -2893,23 +2893,23 @@
           <p:cNvPr id="8" name="case-row-1">
             <a:extLst xmlns:a="http://schemas.openxmlformats.org/drawingml/2006/main">
               <a:ext uri="{FF2B5EF4-FFF2-40B4-BE49-F238E27FC236}">
-                <a16:creationId xmlns:a16="http://schemas.microsoft.com/office/drawing/2014/main" id="{0D980B0D-7754-43F1-B04F-D05DA79669C7}"/>
-              </a:ext>
-            </a:extLst>
-          </p:cNvPr>
-          <p:cNvSpPr>
-            <a:spLocks xmlns:a="http://schemas.openxmlformats.org/drawingml/2006/main" noGrp="1"/>
-          </p:cNvSpPr>
-          <p:nvPr/>
-        </p:nvSpPr>
-        <p:spPr>
-          <a:xfrm xmlns:a="http://schemas.openxmlformats.org/drawingml/2006/main">
-            <a:off x="4286250" y="3086100"/>
-            <a:ext cx="6534150" cy="838200"/>
+                <a16:creationId xmlns:a16="http://schemas.microsoft.com/office/drawing/2014/main" id="{88F64DCA-A4B2-4743-B359-08EC9A220E5C}"/>
+              </a:ext>
+            </a:extLst>
+          </p:cNvPr>
+          <p:cNvSpPr>
+            <a:spLocks xmlns:a="http://schemas.openxmlformats.org/drawingml/2006/main" noGrp="1"/>
+          </p:cNvSpPr>
+          <p:nvPr/>
+        </p:nvSpPr>
+        <p:spPr>
+          <a:xfrm xmlns:a="http://schemas.openxmlformats.org/drawingml/2006/main">
+            <a:off x="4286250" y="2667000"/>
+            <a:ext cx="6534150" cy="514350"/>
           </a:xfrm>
           <a:prstGeom xmlns:a="http://schemas.openxmlformats.org/drawingml/2006/main" prst="roundRect">
             <a:avLst>
-              <a:gd name="adj" fmla="val 14773"/>
+              <a:gd name="adj" fmla="val 24074"/>
             </a:avLst>
           </a:prstGeom>
           <a:solidFill xmlns:a="http://schemas.openxmlformats.org/drawingml/2006/main">
@@ -2924,7 +2924,7 @@
         </p:spPr>
         <p:txBody>
           <a:bodyPr xmlns:a="http://schemas.openxmlformats.org/drawingml/2006/main" lIns="152400" tIns="133350" rIns="152400" bIns="133350" anchor="ctr">
-            <a:normAutofit fontScale="75083"/>
+            <a:normAutofit fontScale="72956"/>
           </a:bodyPr>
           <a:lstStyle xmlns:a="http://schemas.openxmlformats.org/drawingml/2006/main"/>
           <a:p xmlns:a="http://schemas.openxmlformats.org/drawingml/2006/main">
@@ -2947,7 +2947,7 @@
                 <a:ea typeface="PingFang SC"/>
                 <a:cs typeface="PingFang SC"/>
               </a:rPr>
-              <a:t>机制｜当订单字段冲突、政策依据缺失、退款金额超过业务阈值，或同一查询连续失败两次时，任务进入人工队列。审核页展示订单摘要、政策条款、建议金额、冲突字段和触发原因…</a:t>
+              <a:t>机制｜离线集覆盖正常退款、超过期限、订单信息冲突和疑似重复申请</a:t>
             </a:r>
           </a:p>
         </p:txBody>
@@ -2957,23 +2957,151 @@
           <p:cNvPr id="9" name="case-row-2">
             <a:extLst xmlns:a="http://schemas.openxmlformats.org/drawingml/2006/main">
               <a:ext uri="{FF2B5EF4-FFF2-40B4-BE49-F238E27FC236}">
-                <a16:creationId xmlns:a16="http://schemas.microsoft.com/office/drawing/2014/main" id="{72DAE669-ABC3-40AA-ADFC-722E3C6DA498}"/>
-              </a:ext>
-            </a:extLst>
-          </p:cNvPr>
-          <p:cNvSpPr>
-            <a:spLocks xmlns:a="http://schemas.openxmlformats.org/drawingml/2006/main" noGrp="1"/>
-          </p:cNvSpPr>
-          <p:nvPr/>
-        </p:nvSpPr>
-        <p:spPr>
-          <a:xfrm xmlns:a="http://schemas.openxmlformats.org/drawingml/2006/main">
-            <a:off x="4286250" y="4114800"/>
-            <a:ext cx="6534150" cy="838200"/>
+                <a16:creationId xmlns:a16="http://schemas.microsoft.com/office/drawing/2014/main" id="{D1F904D5-41CE-4BAE-813A-DF9B4B5A1AC5}"/>
+              </a:ext>
+            </a:extLst>
+          </p:cNvPr>
+          <p:cNvSpPr>
+            <a:spLocks xmlns:a="http://schemas.openxmlformats.org/drawingml/2006/main" noGrp="1"/>
+          </p:cNvSpPr>
+          <p:nvPr/>
+        </p:nvSpPr>
+        <p:spPr>
+          <a:xfrm xmlns:a="http://schemas.openxmlformats.org/drawingml/2006/main">
+            <a:off x="4286250" y="3295650"/>
+            <a:ext cx="6534150" cy="514350"/>
           </a:xfrm>
           <a:prstGeom xmlns:a="http://schemas.openxmlformats.org/drawingml/2006/main" prst="roundRect">
             <a:avLst>
-              <a:gd name="adj" fmla="val 14773"/>
+              <a:gd name="adj" fmla="val 24074"/>
+            </a:avLst>
+          </a:prstGeom>
+          <a:solidFill xmlns:a="http://schemas.openxmlformats.org/drawingml/2006/main">
+            <a:srgbClr val="FFFFFF"/>
+          </a:solidFill>
+          <a:ln xmlns:a="http://schemas.openxmlformats.org/drawingml/2006/main" w="9525">
+            <a:solidFill>
+              <a:srgbClr val="D8E0E8"/>
+            </a:solidFill>
+            <a:prstDash val="solid"/>
+          </a:ln>
+        </p:spPr>
+        <p:txBody>
+          <a:bodyPr xmlns:a="http://schemas.openxmlformats.org/drawingml/2006/main" lIns="152400" tIns="133350" rIns="152400" bIns="133350" anchor="ctr">
+            <a:normAutofit fontScale="53059"/>
+          </a:bodyPr>
+          <a:lstStyle xmlns:a="http://schemas.openxmlformats.org/drawingml/2006/main"/>
+          <a:p xmlns:a="http://schemas.openxmlformats.org/drawingml/2006/main">
+            <a:pPr algn="l">
+              <a:defRPr sz="1575" b="0">
+                <a:solidFill>
+                  <a:srgbClr val="10233F"/>
+                </a:solidFill>
+                <a:latin typeface="PingFang SC"/>
+                <a:ea typeface="PingFang SC"/>
+                <a:cs typeface="PingFang SC"/>
+              </a:defRPr>
+            </a:pPr>
+            <a:r>
+              <a:rPr sz="1575" b="0">
+                <a:solidFill>
+                  <a:srgbClr val="10233F"/>
+                </a:solidFill>
+                <a:latin typeface="PingFang SC"/>
+                <a:ea typeface="PingFang SC"/>
+                <a:cs typeface="PingFang SC"/>
+              </a:rPr>
+              <a:t>边界｜结果层检查建议是否符合政策，过程层检查是否读取了正确订单和当前政策，运营层监控响应时间、人工升级率和错误建议率</a:t>
+            </a:r>
+          </a:p>
+        </p:txBody>
+      </p:sp>
+      <p:sp>
+        <p:nvSpPr>
+          <p:cNvPr id="10" name="case-row-3">
+            <a:extLst xmlns:a="http://schemas.openxmlformats.org/drawingml/2006/main">
+              <a:ext uri="{FF2B5EF4-FFF2-40B4-BE49-F238E27FC236}">
+                <a16:creationId xmlns:a16="http://schemas.microsoft.com/office/drawing/2014/main" id="{ECAFBD92-E826-4358-9DFD-E9E3EA9EB0FB}"/>
+              </a:ext>
+            </a:extLst>
+          </p:cNvPr>
+          <p:cNvSpPr>
+            <a:spLocks xmlns:a="http://schemas.openxmlformats.org/drawingml/2006/main" noGrp="1"/>
+          </p:cNvSpPr>
+          <p:nvPr/>
+        </p:nvSpPr>
+        <p:spPr>
+          <a:xfrm xmlns:a="http://schemas.openxmlformats.org/drawingml/2006/main">
+            <a:off x="4286250" y="3924300"/>
+            <a:ext cx="6534150" cy="514350"/>
+          </a:xfrm>
+          <a:prstGeom xmlns:a="http://schemas.openxmlformats.org/drawingml/2006/main" prst="roundRect">
+            <a:avLst>
+              <a:gd name="adj" fmla="val 24074"/>
+            </a:avLst>
+          </a:prstGeom>
+          <a:solidFill xmlns:a="http://schemas.openxmlformats.org/drawingml/2006/main">
+            <a:srgbClr val="FFFFFF"/>
+          </a:solidFill>
+          <a:ln xmlns:a="http://schemas.openxmlformats.org/drawingml/2006/main" w="9525">
+            <a:solidFill>
+              <a:srgbClr val="D8E0E8"/>
+            </a:solidFill>
+            <a:prstDash val="solid"/>
+          </a:ln>
+        </p:spPr>
+        <p:txBody>
+          <a:bodyPr xmlns:a="http://schemas.openxmlformats.org/drawingml/2006/main" lIns="152400" tIns="133350" rIns="152400" bIns="133350" anchor="ctr">
+            <a:normAutofit fontScale="61559"/>
+          </a:bodyPr>
+          <a:lstStyle xmlns:a="http://schemas.openxmlformats.org/drawingml/2006/main"/>
+          <a:p xmlns:a="http://schemas.openxmlformats.org/drawingml/2006/main">
+            <a:pPr algn="l">
+              <a:defRPr sz="1575" b="0">
+                <a:solidFill>
+                  <a:srgbClr val="10233F"/>
+                </a:solidFill>
+                <a:latin typeface="PingFang SC"/>
+                <a:ea typeface="PingFang SC"/>
+                <a:cs typeface="PingFang SC"/>
+              </a:defRPr>
+            </a:pPr>
+            <a:r>
+              <a:rPr sz="1575" b="0">
+                <a:solidFill>
+                  <a:srgbClr val="10233F"/>
+                </a:solidFill>
+                <a:latin typeface="PingFang SC"/>
+                <a:ea typeface="PingFang SC"/>
+                <a:cs typeface="PingFang SC"/>
+              </a:rPr>
+              <a:t>边界｜当订单字段冲突、政策依据缺失、退款金额超过业务阈值，或同一查询连续失败两次时，任务进入人工队列</a:t>
+            </a:r>
+          </a:p>
+        </p:txBody>
+      </p:sp>
+      <p:sp>
+        <p:nvSpPr>
+          <p:cNvPr id="11" name="case-row-4">
+            <a:extLst xmlns:a="http://schemas.openxmlformats.org/drawingml/2006/main">
+              <a:ext uri="{FF2B5EF4-FFF2-40B4-BE49-F238E27FC236}">
+                <a16:creationId xmlns:a16="http://schemas.microsoft.com/office/drawing/2014/main" id="{AAC47814-A911-45A6-9D4A-FDB8E318096C}"/>
+              </a:ext>
+            </a:extLst>
+          </p:cNvPr>
+          <p:cNvSpPr>
+            <a:spLocks xmlns:a="http://schemas.openxmlformats.org/drawingml/2006/main" noGrp="1"/>
+          </p:cNvSpPr>
+          <p:nvPr/>
+        </p:nvSpPr>
+        <p:spPr>
+          <a:xfrm xmlns:a="http://schemas.openxmlformats.org/drawingml/2006/main">
+            <a:off x="4286250" y="4552950"/>
+            <a:ext cx="6534150" cy="514350"/>
+          </a:xfrm>
+          <a:prstGeom xmlns:a="http://schemas.openxmlformats.org/drawingml/2006/main" prst="roundRect">
+            <a:avLst>
+              <a:gd name="adj" fmla="val 24074"/>
             </a:avLst>
           </a:prstGeom>
           <a:solidFill xmlns:a="http://schemas.openxmlformats.org/drawingml/2006/main">
@@ -2981,14 +3109,14 @@
           </a:solidFill>
           <a:ln xmlns:a="http://schemas.openxmlformats.org/drawingml/2006/main" w="9525">
             <a:solidFill>
-              <a:srgbClr val="17A6C8"/>
+              <a:srgbClr val="006B80"/>
             </a:solidFill>
             <a:prstDash val="solid"/>
           </a:ln>
         </p:spPr>
         <p:txBody>
           <a:bodyPr xmlns:a="http://schemas.openxmlformats.org/drawingml/2006/main" lIns="152400" tIns="133350" rIns="152400" bIns="133350" anchor="ctr">
-            <a:normAutofit fontScale="93274"/>
+            <a:normAutofit fontScale="72956"/>
           </a:bodyPr>
           <a:lstStyle xmlns:a="http://schemas.openxmlformats.org/drawingml/2006/main"/>
           <a:p xmlns:a="http://schemas.openxmlformats.org/drawingml/2006/main">
@@ -3011,17 +3139,17 @@
                 <a:ea typeface="PingFang SC"/>
                 <a:cs typeface="PingFang SC"/>
               </a:rPr>
-              <a:t>结果｜如果审核后写入系统超时，智能体不能直接重试。它先通过请求标识查询是否已经创建退款记录，再决定继续或转人工。这样，trace、阈值…</a:t>
-            </a:r>
-          </a:p>
-        </p:txBody>
-      </p:sp>
-      <p:sp>
-        <p:nvSpPr>
-          <p:cNvPr id="10" name="s10-takeaway-rule">
-            <a:extLst xmlns:a="http://schemas.openxmlformats.org/drawingml/2006/main">
-              <a:ext uri="{FF2B5EF4-FFF2-40B4-BE49-F238E27FC236}">
-                <a16:creationId xmlns:a16="http://schemas.microsoft.com/office/drawing/2014/main" id="{CFA42D2F-9127-435B-BB75-8156F1AE7E06}"/>
+              <a:t>启示｜审核页展示订单摘要、政策条款、建议金额、冲突字段和触发原因</a:t>
+            </a:r>
+          </a:p>
+        </p:txBody>
+      </p:sp>
+      <p:sp>
+        <p:nvSpPr>
+          <p:cNvPr id="12" name="s10-takeaway-rule">
+            <a:extLst xmlns:a="http://schemas.openxmlformats.org/drawingml/2006/main">
+              <a:ext uri="{FF2B5EF4-FFF2-40B4-BE49-F238E27FC236}">
+                <a16:creationId xmlns:a16="http://schemas.microsoft.com/office/drawing/2014/main" id="{8C60AA57-74FD-4D2E-B2D7-2E85AB2E86E7}"/>
               </a:ext>
             </a:extLst>
           </p:cNvPr>
@@ -3051,10 +3179,10 @@
       </p:sp>
       <p:sp>
         <p:nvSpPr>
-          <p:cNvPr id="11" name="s10-takeaway">
-            <a:extLst xmlns:a="http://schemas.openxmlformats.org/drawingml/2006/main">
-              <a:ext uri="{FF2B5EF4-FFF2-40B4-BE49-F238E27FC236}">
-                <a16:creationId xmlns:a16="http://schemas.microsoft.com/office/drawing/2014/main" id="{867C87F7-134B-4A82-A9E6-B20B25B7FBC7}"/>
+          <p:cNvPr id="13" name="s10-takeaway">
+            <a:extLst xmlns:a="http://schemas.openxmlformats.org/drawingml/2006/main">
+              <a:ext uri="{FF2B5EF4-FFF2-40B4-BE49-F238E27FC236}">
+                <a16:creationId xmlns:a16="http://schemas.microsoft.com/office/drawing/2014/main" id="{6D8E3743-D806-4E8E-B4CA-525188831AB1}"/>
               </a:ext>
             </a:extLst>
           </p:cNvPr>
@@ -3110,7 +3238,7 @@
     </p:spTree>
     <p:extLst>
       <p:ext uri="{BB962C8B-B14F-4D97-AF65-F5344CB8AC3E}">
-        <p14:creationId xmlns:p14="http://schemas.microsoft.com/office/powerpoint/2010/main" val="829499913"/>
+        <p14:creationId xmlns:p14="http://schemas.microsoft.com/office/powerpoint/2010/main" val="1648188944"/>
       </p:ext>
     </p:extLst>
   </p:cSld>
@@ -3141,7 +3269,7 @@
           <p:cNvPr id="1" name="s11-rule">
             <a:extLst xmlns:a="http://schemas.openxmlformats.org/drawingml/2006/main">
               <a:ext uri="{FF2B5EF4-FFF2-40B4-BE49-F238E27FC236}">
-                <a16:creationId xmlns:a16="http://schemas.microsoft.com/office/drawing/2014/main" id="{640A2EF0-E078-4CA2-B8B5-104EB21623BB}"/>
+                <a16:creationId xmlns:a16="http://schemas.microsoft.com/office/drawing/2014/main" id="{9748362C-0C4A-4DF1-844D-E88B8A823742}"/>
               </a:ext>
             </a:extLst>
           </p:cNvPr>
@@ -3174,7 +3302,7 @@
           <p:cNvPr id="2" name="s11-eyebrow">
             <a:extLst xmlns:a="http://schemas.openxmlformats.org/drawingml/2006/main">
               <a:ext uri="{FF2B5EF4-FFF2-40B4-BE49-F238E27FC236}">
-                <a16:creationId xmlns:a16="http://schemas.microsoft.com/office/drawing/2014/main" id="{8A313166-6E24-47FF-8714-FC565E23D59C}"/>
+                <a16:creationId xmlns:a16="http://schemas.microsoft.com/office/drawing/2014/main" id="{B5BFA4BB-E7BD-49F3-B8F1-AA62065EF5CF}"/>
               </a:ext>
             </a:extLst>
           </p:cNvPr>
@@ -3232,7 +3360,7 @@
           <p:cNvPr id="3" name="s11-title">
             <a:extLst xmlns:a="http://schemas.openxmlformats.org/drawingml/2006/main">
               <a:ext uri="{FF2B5EF4-FFF2-40B4-BE49-F238E27FC236}">
-                <a16:creationId xmlns:a16="http://schemas.microsoft.com/office/drawing/2014/main" id="{8546DF6F-49F2-494C-B9F5-86C237700BE3}"/>
+                <a16:creationId xmlns:a16="http://schemas.microsoft.com/office/drawing/2014/main" id="{C8AA5754-5B39-4E14-A893-CFDDCFA2042F}"/>
               </a:ext>
             </a:extLst>
           </p:cNvPr>
@@ -3280,7 +3408,7 @@
                 <a:ea typeface="PingFang SC"/>
                 <a:cs typeface="PingFang SC"/>
               </a:rPr>
-              <a:t>把方法落实为可验证的行动</a:t>
+              <a:t>智能体可靠性：一次可验收练习</a:t>
             </a:r>
           </a:p>
         </p:txBody>
@@ -3290,7 +3418,7 @@
           <p:cNvPr id="4" name="s11-footer">
             <a:extLst xmlns:a="http://schemas.openxmlformats.org/drawingml/2006/main">
               <a:ext uri="{FF2B5EF4-FFF2-40B4-BE49-F238E27FC236}">
-                <a16:creationId xmlns:a16="http://schemas.microsoft.com/office/drawing/2014/main" id="{DAFF1EA1-5235-4D66-B54E-7A844FA0472A}"/>
+                <a16:creationId xmlns:a16="http://schemas.microsoft.com/office/drawing/2014/main" id="{B555DCAC-BC47-4158-86A9-2312B4E0DB02}"/>
               </a:ext>
             </a:extLst>
           </p:cNvPr>
@@ -3321,7 +3449,7 @@
           <p:cNvPr id="5" name="s11-identity">
             <a:extLst xmlns:a="http://schemas.openxmlformats.org/drawingml/2006/main">
               <a:ext uri="{FF2B5EF4-FFF2-40B4-BE49-F238E27FC236}">
-                <a16:creationId xmlns:a16="http://schemas.microsoft.com/office/drawing/2014/main" id="{25EDFBC6-5C60-45D4-8AC8-E6FE7BFBB7AE}"/>
+                <a16:creationId xmlns:a16="http://schemas.microsoft.com/office/drawing/2014/main" id="{049DB4A1-3D4D-4EB8-9D31-36885F98A1CC}"/>
               </a:ext>
             </a:extLst>
           </p:cNvPr>
@@ -3379,7 +3507,7 @@
           <p:cNvPr id="6" name="practice-circle-0">
             <a:extLst xmlns:a="http://schemas.openxmlformats.org/drawingml/2006/main">
               <a:ext uri="{FF2B5EF4-FFF2-40B4-BE49-F238E27FC236}">
-                <a16:creationId xmlns:a16="http://schemas.microsoft.com/office/drawing/2014/main" id="{6BF9AAB7-2809-4902-841A-FF60B2BAF419}"/>
+                <a16:creationId xmlns:a16="http://schemas.microsoft.com/office/drawing/2014/main" id="{96769552-47D0-4AF6-BC01-E1B535B65895}"/>
               </a:ext>
             </a:extLst>
           </p:cNvPr>
@@ -3412,7 +3540,7 @@
           <p:cNvPr id="7" name="practice-number-0">
             <a:extLst xmlns:a="http://schemas.openxmlformats.org/drawingml/2006/main">
               <a:ext uri="{FF2B5EF4-FFF2-40B4-BE49-F238E27FC236}">
-                <a16:creationId xmlns:a16="http://schemas.microsoft.com/office/drawing/2014/main" id="{BB0A04F9-5715-47EF-B901-85A6BC4B3EA5}"/>
+                <a16:creationId xmlns:a16="http://schemas.microsoft.com/office/drawing/2014/main" id="{56B17509-18FE-4738-BE7A-6169387BDFD3}"/>
               </a:ext>
             </a:extLst>
           </p:cNvPr>
@@ -3470,7 +3598,7 @@
           <p:cNvPr id="8" name="practice-item-0">
             <a:extLst xmlns:a="http://schemas.openxmlformats.org/drawingml/2006/main">
               <a:ext uri="{FF2B5EF4-FFF2-40B4-BE49-F238E27FC236}">
-                <a16:creationId xmlns:a16="http://schemas.microsoft.com/office/drawing/2014/main" id="{9622E90E-8EBE-4C6D-9690-B8F3EADA02E8}"/>
+                <a16:creationId xmlns:a16="http://schemas.microsoft.com/office/drawing/2014/main" id="{D47E1C41-E262-452E-991A-A4053BA59AD7}"/>
               </a:ext>
             </a:extLst>
           </p:cNvPr>
@@ -3524,7 +3652,7 @@
                 <a:ea typeface="PingFang SC"/>
                 <a:cs typeface="PingFang SC"/>
               </a:rPr>
-              <a:t>为“根据会议纪要生成并外发任务通知”的智能体设计一份运营方案：；列出一条完整 trace 的字段，并标出需要脱敏的内容。；各设计三项结果层、过程层和运营层指标，说明数据从哪里取得</a:t>
+              <a:t>为“根据会议纪要生成并外发任务通知”的智能体设计一份运营方案；列出一条完整 trace 的字段，并标出需要脱敏的内容；各设计三项结果层、过程层和运营层指标，说明数据从哪里取得</a:t>
             </a:r>
           </a:p>
         </p:txBody>
@@ -3534,7 +3662,7 @@
           <p:cNvPr id="9" name="practice-connector-0">
             <a:extLst xmlns:a="http://schemas.openxmlformats.org/drawingml/2006/main">
               <a:ext uri="{FF2B5EF4-FFF2-40B4-BE49-F238E27FC236}">
-                <a16:creationId xmlns:a16="http://schemas.microsoft.com/office/drawing/2014/main" id="{BA6376A2-7BCB-4D4C-96B5-93332CD3BB15}"/>
+                <a16:creationId xmlns:a16="http://schemas.microsoft.com/office/drawing/2014/main" id="{33B7F7C3-DC02-4BBD-8646-C8A416F881BA}"/>
               </a:ext>
             </a:extLst>
           </p:cNvPr>
@@ -3554,7 +3682,7 @@
           <a:noFill xmlns:a="http://schemas.openxmlformats.org/drawingml/2006/main"/>
           <a:ln xmlns:a="http://schemas.openxmlformats.org/drawingml/2006/main" w="28575">
             <a:solidFill>
-              <a:srgbClr val="17A6C8"/>
+              <a:srgbClr val="006B80"/>
             </a:solidFill>
             <a:prstDash val="solid"/>
           </a:ln>
@@ -3565,7 +3693,7 @@
           <p:cNvPr id="10" name="practice-circle-1">
             <a:extLst xmlns:a="http://schemas.openxmlformats.org/drawingml/2006/main">
               <a:ext uri="{FF2B5EF4-FFF2-40B4-BE49-F238E27FC236}">
-                <a16:creationId xmlns:a16="http://schemas.microsoft.com/office/drawing/2014/main" id="{4BCB9813-24D7-4511-9572-88782F68CA61}"/>
+                <a16:creationId xmlns:a16="http://schemas.microsoft.com/office/drawing/2014/main" id="{E2CFC7B4-7EF5-459E-908A-2A82CE89B33C}"/>
               </a:ext>
             </a:extLst>
           </p:cNvPr>
@@ -3598,7 +3726,7 @@
           <p:cNvPr id="11" name="practice-number-1">
             <a:extLst xmlns:a="http://schemas.openxmlformats.org/drawingml/2006/main">
               <a:ext uri="{FF2B5EF4-FFF2-40B4-BE49-F238E27FC236}">
-                <a16:creationId xmlns:a16="http://schemas.microsoft.com/office/drawing/2014/main" id="{B9827617-F733-464C-A647-3AC8E58F4DD6}"/>
+                <a16:creationId xmlns:a16="http://schemas.microsoft.com/office/drawing/2014/main" id="{2BF077F5-8B2A-4650-BE13-3F896D7C6966}"/>
               </a:ext>
             </a:extLst>
           </p:cNvPr>
@@ -3656,7 +3784,7 @@
           <p:cNvPr id="12" name="practice-item-1">
             <a:extLst xmlns:a="http://schemas.openxmlformats.org/drawingml/2006/main">
               <a:ext uri="{FF2B5EF4-FFF2-40B4-BE49-F238E27FC236}">
-                <a16:creationId xmlns:a16="http://schemas.microsoft.com/office/drawing/2014/main" id="{ECC6BAF0-8E4E-457A-8AA8-0F203C43CBA5}"/>
+                <a16:creationId xmlns:a16="http://schemas.microsoft.com/office/drawing/2014/main" id="{1635A319-FBEA-4478-BF7C-AF748A1C756D}"/>
               </a:ext>
             </a:extLst>
           </p:cNvPr>
@@ -3710,7 +3838,7 @@
                 <a:ea typeface="PingFang SC"/>
                 <a:cs typeface="PingFang SC"/>
               </a:rPr>
-              <a:t>建立 12 条离线样本，至少包含缺负责人、日期冲突、工具超时和恶意指令四类边界。；为失败分类写判定规则，并用两个复合故障区分主因与促成因素</a:t>
+              <a:t>建立 12 条离线样本，至少包含缺负责人、日期冲突、工具超时和恶意指令四类边界；为失败分类写判定规则，并用两个复合故障区分主因与促成因素</a:t>
             </a:r>
           </a:p>
         </p:txBody>
@@ -3720,7 +3848,7 @@
           <p:cNvPr id="13" name="practice-connector-1">
             <a:extLst xmlns:a="http://schemas.openxmlformats.org/drawingml/2006/main">
               <a:ext uri="{FF2B5EF4-FFF2-40B4-BE49-F238E27FC236}">
-                <a16:creationId xmlns:a16="http://schemas.microsoft.com/office/drawing/2014/main" id="{FA7B723B-2A3B-42ED-9AA7-4DB2A955BD9A}"/>
+                <a16:creationId xmlns:a16="http://schemas.microsoft.com/office/drawing/2014/main" id="{5EAFEAC5-A625-46D5-89FB-62292435C9B2}"/>
               </a:ext>
             </a:extLst>
           </p:cNvPr>
@@ -3740,7 +3868,7 @@
           <a:noFill xmlns:a="http://schemas.openxmlformats.org/drawingml/2006/main"/>
           <a:ln xmlns:a="http://schemas.openxmlformats.org/drawingml/2006/main" w="28575">
             <a:solidFill>
-              <a:srgbClr val="17A6C8"/>
+              <a:srgbClr val="006B80"/>
             </a:solidFill>
             <a:prstDash val="solid"/>
           </a:ln>
@@ -3751,7 +3879,7 @@
           <p:cNvPr id="14" name="practice-circle-2">
             <a:extLst xmlns:a="http://schemas.openxmlformats.org/drawingml/2006/main">
               <a:ext uri="{FF2B5EF4-FFF2-40B4-BE49-F238E27FC236}">
-                <a16:creationId xmlns:a16="http://schemas.microsoft.com/office/drawing/2014/main" id="{75CA1930-FF64-44DA-AF34-FB11001A5AA7}"/>
+                <a16:creationId xmlns:a16="http://schemas.microsoft.com/office/drawing/2014/main" id="{FBA3AC79-EAE8-4BC6-BCFE-C1BAD87A70ED}"/>
               </a:ext>
             </a:extLst>
           </p:cNvPr>
@@ -3769,7 +3897,7 @@
             <a:avLst/>
           </a:prstGeom>
           <a:solidFill xmlns:a="http://schemas.openxmlformats.org/drawingml/2006/main">
-            <a:srgbClr val="17A6C8"/>
+            <a:srgbClr val="006B80"/>
           </a:solidFill>
           <a:ln xmlns:a="http://schemas.openxmlformats.org/drawingml/2006/main" w="28575">
             <a:solidFill>
@@ -3784,7 +3912,7 @@
           <p:cNvPr id="15" name="practice-number-2">
             <a:extLst xmlns:a="http://schemas.openxmlformats.org/drawingml/2006/main">
               <a:ext uri="{FF2B5EF4-FFF2-40B4-BE49-F238E27FC236}">
-                <a16:creationId xmlns:a16="http://schemas.microsoft.com/office/drawing/2014/main" id="{3195F8AE-20F5-4585-931A-3671E0E65E8A}"/>
+                <a16:creationId xmlns:a16="http://schemas.microsoft.com/office/drawing/2014/main" id="{9820DA18-0DC6-4B89-ADC6-DB954D877C1A}"/>
               </a:ext>
             </a:extLst>
           </p:cNvPr>
@@ -3842,7 +3970,7 @@
           <p:cNvPr id="16" name="practice-item-2">
             <a:extLst xmlns:a="http://schemas.openxmlformats.org/drawingml/2006/main">
               <a:ext uri="{FF2B5EF4-FFF2-40B4-BE49-F238E27FC236}">
-                <a16:creationId xmlns:a16="http://schemas.microsoft.com/office/drawing/2014/main" id="{308D8848-9883-4C84-B5F0-6451E7619DF9}"/>
+                <a16:creationId xmlns:a16="http://schemas.microsoft.com/office/drawing/2014/main" id="{729D553A-943E-4784-A3B3-0794398B2587}"/>
               </a:ext>
             </a:extLst>
           </p:cNvPr>
@@ -3866,7 +3994,7 @@
           </a:solidFill>
           <a:ln xmlns:a="http://schemas.openxmlformats.org/drawingml/2006/main" w="19050">
             <a:solidFill>
-              <a:srgbClr val="17A6C8"/>
+              <a:srgbClr val="006B80"/>
             </a:solidFill>
             <a:prstDash val="solid"/>
           </a:ln>
@@ -3896,7 +4024,7 @@
                 <a:ea typeface="PingFang SC"/>
                 <a:cs typeface="PingFang SC"/>
               </a:rPr>
-              <a:t>定义硬触发、质量触发、异常触发阈值，画出审核队列字段和处理优先级。；在草稿、批准、外发三个阶段设置恢复点，说明外发结果未知时如何避免重复发送</a:t>
+              <a:t>定义硬触发、质量触发、异常触发阈值，画出审核队列字段和处理优先级；在草稿、批准、外发三个阶段设置恢复点，说明外发结果未知时如何避免重复发送</a:t>
             </a:r>
           </a:p>
         </p:txBody>
@@ -3904,7 +4032,7 @@
     </p:spTree>
     <p:extLst>
       <p:ext uri="{BB962C8B-B14F-4D97-AF65-F5344CB8AC3E}">
-        <p14:creationId xmlns:p14="http://schemas.microsoft.com/office/powerpoint/2010/main" val="218659090"/>
+        <p14:creationId xmlns:p14="http://schemas.microsoft.com/office/powerpoint/2010/main" val="46714139"/>
       </p:ext>
     </p:extLst>
   </p:cSld>
@@ -3935,7 +4063,7 @@
           <p:cNvPr id="1" name="s12-rule">
             <a:extLst xmlns:a="http://schemas.openxmlformats.org/drawingml/2006/main">
               <a:ext uri="{FF2B5EF4-FFF2-40B4-BE49-F238E27FC236}">
-                <a16:creationId xmlns:a16="http://schemas.microsoft.com/office/drawing/2014/main" id="{486C1639-989A-4FF7-953C-587637E6B0ED}"/>
+                <a16:creationId xmlns:a16="http://schemas.microsoft.com/office/drawing/2014/main" id="{34DAD776-870E-446B-A992-9655090E3DD6}"/>
               </a:ext>
             </a:extLst>
           </p:cNvPr>
@@ -3968,7 +4096,7 @@
           <p:cNvPr id="2" name="s12-eyebrow">
             <a:extLst xmlns:a="http://schemas.openxmlformats.org/drawingml/2006/main">
               <a:ext uri="{FF2B5EF4-FFF2-40B4-BE49-F238E27FC236}">
-                <a16:creationId xmlns:a16="http://schemas.microsoft.com/office/drawing/2014/main" id="{B9ECB07F-C0ED-4B67-AB39-067E1C16B59C}"/>
+                <a16:creationId xmlns:a16="http://schemas.microsoft.com/office/drawing/2014/main" id="{C27CC25C-AF31-4D10-8370-F124517B86A7}"/>
               </a:ext>
             </a:extLst>
           </p:cNvPr>
@@ -4026,7 +4154,7 @@
           <p:cNvPr id="3" name="s12-title">
             <a:extLst xmlns:a="http://schemas.openxmlformats.org/drawingml/2006/main">
               <a:ext uri="{FF2B5EF4-FFF2-40B4-BE49-F238E27FC236}">
-                <a16:creationId xmlns:a16="http://schemas.microsoft.com/office/drawing/2014/main" id="{0C59B1E7-8BBA-4268-B839-A66676B02763}"/>
+                <a16:creationId xmlns:a16="http://schemas.microsoft.com/office/drawing/2014/main" id="{A99B6A8D-C202-46CD-ADC7-A59F275754CE}"/>
               </a:ext>
             </a:extLst>
           </p:cNvPr>
@@ -4074,7 +4202,7 @@
                 <a:ea typeface="PingFang SC"/>
                 <a:cs typeface="PingFang SC"/>
               </a:rPr>
-              <a:t>带走三条可复用的判断原则</a:t>
+              <a:t>智能体可靠性：判断时先抓住三点</a:t>
             </a:r>
           </a:p>
         </p:txBody>
@@ -4084,7 +4212,7 @@
           <p:cNvPr id="4" name="s12-footer">
             <a:extLst xmlns:a="http://schemas.openxmlformats.org/drawingml/2006/main">
               <a:ext uri="{FF2B5EF4-FFF2-40B4-BE49-F238E27FC236}">
-                <a16:creationId xmlns:a16="http://schemas.microsoft.com/office/drawing/2014/main" id="{06FDB2B5-9784-45E9-88D0-CFA27627CDB0}"/>
+                <a16:creationId xmlns:a16="http://schemas.microsoft.com/office/drawing/2014/main" id="{EF2EE277-64FA-424E-B777-A84F92218004}"/>
               </a:ext>
             </a:extLst>
           </p:cNvPr>
@@ -4115,7 +4243,7 @@
           <p:cNvPr id="5" name="s12-identity">
             <a:extLst xmlns:a="http://schemas.openxmlformats.org/drawingml/2006/main">
               <a:ext uri="{FF2B5EF4-FFF2-40B4-BE49-F238E27FC236}">
-                <a16:creationId xmlns:a16="http://schemas.microsoft.com/office/drawing/2014/main" id="{594E83BE-4703-400F-B7DE-44937E77B1F0}"/>
+                <a16:creationId xmlns:a16="http://schemas.microsoft.com/office/drawing/2014/main" id="{D5B8E59A-DB35-4322-8D02-FDB885DC3D6E}"/>
               </a:ext>
             </a:extLst>
           </p:cNvPr>
@@ -4173,7 +4301,7 @@
           <p:cNvPr id="6" name="recap-circle-0">
             <a:extLst xmlns:a="http://schemas.openxmlformats.org/drawingml/2006/main">
               <a:ext uri="{FF2B5EF4-FFF2-40B4-BE49-F238E27FC236}">
-                <a16:creationId xmlns:a16="http://schemas.microsoft.com/office/drawing/2014/main" id="{3CA201EC-1699-4DC5-94DB-AF2C9EB9FAB0}"/>
+                <a16:creationId xmlns:a16="http://schemas.microsoft.com/office/drawing/2014/main" id="{540775B8-A94A-4A04-9437-6A282D9F4C81}"/>
               </a:ext>
             </a:extLst>
           </p:cNvPr>
@@ -4206,7 +4334,7 @@
           <p:cNvPr id="7" name="recap-number-0">
             <a:extLst xmlns:a="http://schemas.openxmlformats.org/drawingml/2006/main">
               <a:ext uri="{FF2B5EF4-FFF2-40B4-BE49-F238E27FC236}">
-                <a16:creationId xmlns:a16="http://schemas.microsoft.com/office/drawing/2014/main" id="{8E93AB5C-2D63-4060-BC8A-91B6A9046C09}"/>
+                <a16:creationId xmlns:a16="http://schemas.microsoft.com/office/drawing/2014/main" id="{786A449E-6323-481C-8E83-371E17952FED}"/>
               </a:ext>
             </a:extLst>
           </p:cNvPr>
@@ -4264,7 +4392,7 @@
           <p:cNvPr id="8" name="recap-item-0">
             <a:extLst xmlns:a="http://schemas.openxmlformats.org/drawingml/2006/main">
               <a:ext uri="{FF2B5EF4-FFF2-40B4-BE49-F238E27FC236}">
-                <a16:creationId xmlns:a16="http://schemas.microsoft.com/office/drawing/2014/main" id="{6FB05311-85B9-4493-B047-2289574B4703}"/>
+                <a16:creationId xmlns:a16="http://schemas.microsoft.com/office/drawing/2014/main" id="{BEFF4223-9A6C-4468-9087-2D2484B89B68}"/>
               </a:ext>
             </a:extLst>
           </p:cNvPr>
@@ -4318,7 +4446,7 @@
                 <a:ea typeface="PingFang SC"/>
                 <a:cs typeface="PingFang SC"/>
               </a:rPr>
-              <a:t>日志可以记录单个事件</a:t>
+              <a:t>Trace 还原因果，三层指标判断系统表现</a:t>
             </a:r>
           </a:p>
         </p:txBody>
@@ -4328,7 +4456,7 @@
           <p:cNvPr id="9" name="recap-connector-0">
             <a:extLst xmlns:a="http://schemas.openxmlformats.org/drawingml/2006/main">
               <a:ext uri="{FF2B5EF4-FFF2-40B4-BE49-F238E27FC236}">
-                <a16:creationId xmlns:a16="http://schemas.microsoft.com/office/drawing/2014/main" id="{7B043CEF-5A37-474F-B727-A11757E2E0D0}"/>
+                <a16:creationId xmlns:a16="http://schemas.microsoft.com/office/drawing/2014/main" id="{90983806-AC9E-4511-B5E4-301ED0E11827}"/>
               </a:ext>
             </a:extLst>
           </p:cNvPr>
@@ -4348,7 +4476,7 @@
           <a:noFill xmlns:a="http://schemas.openxmlformats.org/drawingml/2006/main"/>
           <a:ln xmlns:a="http://schemas.openxmlformats.org/drawingml/2006/main" w="28575">
             <a:solidFill>
-              <a:srgbClr val="17A6C8"/>
+              <a:srgbClr val="006B80"/>
             </a:solidFill>
             <a:prstDash val="solid"/>
           </a:ln>
@@ -4359,7 +4487,7 @@
           <p:cNvPr id="10" name="recap-circle-1">
             <a:extLst xmlns:a="http://schemas.openxmlformats.org/drawingml/2006/main">
               <a:ext uri="{FF2B5EF4-FFF2-40B4-BE49-F238E27FC236}">
-                <a16:creationId xmlns:a16="http://schemas.microsoft.com/office/drawing/2014/main" id="{DF3FDC3A-26FD-4CAF-A830-0E099B872673}"/>
+                <a16:creationId xmlns:a16="http://schemas.microsoft.com/office/drawing/2014/main" id="{F2346248-BDAA-4573-A137-65BCF98B87A4}"/>
               </a:ext>
             </a:extLst>
           </p:cNvPr>
@@ -4392,7 +4520,7 @@
           <p:cNvPr id="11" name="recap-number-1">
             <a:extLst xmlns:a="http://schemas.openxmlformats.org/drawingml/2006/main">
               <a:ext uri="{FF2B5EF4-FFF2-40B4-BE49-F238E27FC236}">
-                <a16:creationId xmlns:a16="http://schemas.microsoft.com/office/drawing/2014/main" id="{50BD4DDE-8D51-46EC-AC77-CBE9D788A846}"/>
+                <a16:creationId xmlns:a16="http://schemas.microsoft.com/office/drawing/2014/main" id="{93B69EB5-CDCF-463D-B937-DFB74B613CEA}"/>
               </a:ext>
             </a:extLst>
           </p:cNvPr>
@@ -4450,7 +4578,7 @@
           <p:cNvPr id="12" name="recap-item-1">
             <a:extLst xmlns:a="http://schemas.openxmlformats.org/drawingml/2006/main">
               <a:ext uri="{FF2B5EF4-FFF2-40B4-BE49-F238E27FC236}">
-                <a16:creationId xmlns:a16="http://schemas.microsoft.com/office/drawing/2014/main" id="{BCDC707C-A048-4F68-A811-28541D6CB033}"/>
+                <a16:creationId xmlns:a16="http://schemas.microsoft.com/office/drawing/2014/main" id="{4A34ABCF-D273-4088-9D13-3ADC086FD509}"/>
               </a:ext>
             </a:extLst>
           </p:cNvPr>
@@ -4514,7 +4642,7 @@
           <p:cNvPr id="13" name="recap-connector-1">
             <a:extLst xmlns:a="http://schemas.openxmlformats.org/drawingml/2006/main">
               <a:ext uri="{FF2B5EF4-FFF2-40B4-BE49-F238E27FC236}">
-                <a16:creationId xmlns:a16="http://schemas.microsoft.com/office/drawing/2014/main" id="{7EEF61C3-5ECB-4A16-8651-5637730D854B}"/>
+                <a16:creationId xmlns:a16="http://schemas.microsoft.com/office/drawing/2014/main" id="{12D3168A-2658-4185-BBE1-C0062D269DC2}"/>
               </a:ext>
             </a:extLst>
           </p:cNvPr>
@@ -4534,7 +4662,7 @@
           <a:noFill xmlns:a="http://schemas.openxmlformats.org/drawingml/2006/main"/>
           <a:ln xmlns:a="http://schemas.openxmlformats.org/drawingml/2006/main" w="28575">
             <a:solidFill>
-              <a:srgbClr val="17A6C8"/>
+              <a:srgbClr val="006B80"/>
             </a:solidFill>
             <a:prstDash val="solid"/>
           </a:ln>
@@ -4545,7 +4673,7 @@
           <p:cNvPr id="14" name="recap-circle-2">
             <a:extLst xmlns:a="http://schemas.openxmlformats.org/drawingml/2006/main">
               <a:ext uri="{FF2B5EF4-FFF2-40B4-BE49-F238E27FC236}">
-                <a16:creationId xmlns:a16="http://schemas.microsoft.com/office/drawing/2014/main" id="{B390FC54-5AAA-403D-B5E2-511FB38A7E52}"/>
+                <a16:creationId xmlns:a16="http://schemas.microsoft.com/office/drawing/2014/main" id="{AB3F2120-CCB1-467F-AE07-623D179DDDC9}"/>
               </a:ext>
             </a:extLst>
           </p:cNvPr>
@@ -4563,7 +4691,7 @@
             <a:avLst/>
           </a:prstGeom>
           <a:solidFill xmlns:a="http://schemas.openxmlformats.org/drawingml/2006/main">
-            <a:srgbClr val="17A6C8"/>
+            <a:srgbClr val="006B80"/>
           </a:solidFill>
           <a:ln xmlns:a="http://schemas.openxmlformats.org/drawingml/2006/main" w="28575">
             <a:solidFill>
@@ -4578,7 +4706,7 @@
           <p:cNvPr id="15" name="recap-number-2">
             <a:extLst xmlns:a="http://schemas.openxmlformats.org/drawingml/2006/main">
               <a:ext uri="{FF2B5EF4-FFF2-40B4-BE49-F238E27FC236}">
-                <a16:creationId xmlns:a16="http://schemas.microsoft.com/office/drawing/2014/main" id="{F477D2B5-3B2B-48AA-BA4B-DF98D3C17666}"/>
+                <a16:creationId xmlns:a16="http://schemas.microsoft.com/office/drawing/2014/main" id="{897F3B39-D894-40E5-8B40-212DF58C887D}"/>
               </a:ext>
             </a:extLst>
           </p:cNvPr>
@@ -4636,7 +4764,7 @@
           <p:cNvPr id="16" name="recap-item-2">
             <a:extLst xmlns:a="http://schemas.openxmlformats.org/drawingml/2006/main">
               <a:ext uri="{FF2B5EF4-FFF2-40B4-BE49-F238E27FC236}">
-                <a16:creationId xmlns:a16="http://schemas.microsoft.com/office/drawing/2014/main" id="{1D44BA5A-FA50-4FFA-9CC0-9C0E11CEB7D4}"/>
+                <a16:creationId xmlns:a16="http://schemas.microsoft.com/office/drawing/2014/main" id="{82C67881-4F43-4D93-BD15-2ACFCED4896A}"/>
               </a:ext>
             </a:extLst>
           </p:cNvPr>
@@ -4660,7 +4788,7 @@
           </a:solidFill>
           <a:ln xmlns:a="http://schemas.openxmlformats.org/drawingml/2006/main" w="19050">
             <a:solidFill>
-              <a:srgbClr val="17A6C8"/>
+              <a:srgbClr val="006B80"/>
             </a:solidFill>
             <a:prstDash val="solid"/>
           </a:ln>
@@ -4698,7 +4826,7 @@
     </p:spTree>
     <p:extLst>
       <p:ext uri="{BB962C8B-B14F-4D97-AF65-F5344CB8AC3E}">
-        <p14:creationId xmlns:p14="http://schemas.microsoft.com/office/powerpoint/2010/main" val="869471721"/>
+        <p14:creationId xmlns:p14="http://schemas.microsoft.com/office/powerpoint/2010/main" val="821260831"/>
       </p:ext>
     </p:extLst>
   </p:cSld>
@@ -4729,7 +4857,7 @@
           <p:cNvPr id="1" name="s13-rule">
             <a:extLst xmlns:a="http://schemas.openxmlformats.org/drawingml/2006/main">
               <a:ext uri="{FF2B5EF4-FFF2-40B4-BE49-F238E27FC236}">
-                <a16:creationId xmlns:a16="http://schemas.microsoft.com/office/drawing/2014/main" id="{9C07ED2E-C7D4-46A2-9095-C99AA384ED37}"/>
+                <a16:creationId xmlns:a16="http://schemas.microsoft.com/office/drawing/2014/main" id="{68B924FC-4791-4B8D-B3C8-114C3B5E1773}"/>
               </a:ext>
             </a:extLst>
           </p:cNvPr>
@@ -4762,7 +4890,7 @@
           <p:cNvPr id="2" name="s13-eyebrow">
             <a:extLst xmlns:a="http://schemas.openxmlformats.org/drawingml/2006/main">
               <a:ext uri="{FF2B5EF4-FFF2-40B4-BE49-F238E27FC236}">
-                <a16:creationId xmlns:a16="http://schemas.microsoft.com/office/drawing/2014/main" id="{341487E4-4FD0-4712-A896-E20EE881D127}"/>
+                <a16:creationId xmlns:a16="http://schemas.microsoft.com/office/drawing/2014/main" id="{AB17DFEA-C753-4C95-90F0-6B8553FE4E35}"/>
               </a:ext>
             </a:extLst>
           </p:cNvPr>
@@ -4820,7 +4948,7 @@
           <p:cNvPr id="3" name="s13-title">
             <a:extLst xmlns:a="http://schemas.openxmlformats.org/drawingml/2006/main">
               <a:ext uri="{FF2B5EF4-FFF2-40B4-BE49-F238E27FC236}">
-                <a16:creationId xmlns:a16="http://schemas.microsoft.com/office/drawing/2014/main" id="{AF77FFA4-E7B7-4575-94CE-A58C23933924}"/>
+                <a16:creationId xmlns:a16="http://schemas.microsoft.com/office/drawing/2014/main" id="{2D9443B0-A34A-4692-B020-1B2DC8558CDE}"/>
               </a:ext>
             </a:extLst>
           </p:cNvPr>
@@ -4868,7 +4996,7 @@
                 <a:ea typeface="PingFang SC"/>
                 <a:cs typeface="PingFang SC"/>
               </a:rPr>
-              <a:t>从公开重制课件回到可核对的学习资料</a:t>
+              <a:t>智能体可靠性：依据、边界与延伸</a:t>
             </a:r>
           </a:p>
         </p:txBody>
@@ -4878,7 +5006,7 @@
           <p:cNvPr id="4" name="s13-footer">
             <a:extLst xmlns:a="http://schemas.openxmlformats.org/drawingml/2006/main">
               <a:ext uri="{FF2B5EF4-FFF2-40B4-BE49-F238E27FC236}">
-                <a16:creationId xmlns:a16="http://schemas.microsoft.com/office/drawing/2014/main" id="{A9A4678C-F104-4998-B235-56FBF7EA9589}"/>
+                <a16:creationId xmlns:a16="http://schemas.microsoft.com/office/drawing/2014/main" id="{F96F7C71-7EA1-4132-9731-40A68BE201E6}"/>
               </a:ext>
             </a:extLst>
           </p:cNvPr>
@@ -4909,7 +5037,7 @@
           <p:cNvPr id="5" name="s13-identity">
             <a:extLst xmlns:a="http://schemas.openxmlformats.org/drawingml/2006/main">
               <a:ext uri="{FF2B5EF4-FFF2-40B4-BE49-F238E27FC236}">
-                <a16:creationId xmlns:a16="http://schemas.microsoft.com/office/drawing/2014/main" id="{C0B78EFA-C263-4DD0-9702-564C508AF69F}"/>
+                <a16:creationId xmlns:a16="http://schemas.microsoft.com/office/drawing/2014/main" id="{32270852-63A1-4410-9B6C-041412A3ED65}"/>
               </a:ext>
             </a:extLst>
           </p:cNvPr>
@@ -4967,7 +5095,7 @@
           <p:cNvPr id="6" name="source-0">
             <a:extLst xmlns:a="http://schemas.openxmlformats.org/drawingml/2006/main">
               <a:ext uri="{FF2B5EF4-FFF2-40B4-BE49-F238E27FC236}">
-                <a16:creationId xmlns:a16="http://schemas.microsoft.com/office/drawing/2014/main" id="{B01B5D4C-0B50-4DF8-9C06-887B191B3F98}"/>
+                <a16:creationId xmlns:a16="http://schemas.microsoft.com/office/drawing/2014/main" id="{7DF6911D-E53B-4CCD-9233-A29C2105F025}"/>
               </a:ext>
             </a:extLst>
           </p:cNvPr>
@@ -4991,7 +5119,7 @@
           </a:solidFill>
           <a:ln xmlns:a="http://schemas.openxmlformats.org/drawingml/2006/main" w="9525">
             <a:solidFill>
-              <a:srgbClr val="17A6C8"/>
+              <a:srgbClr val="006B80"/>
             </a:solidFill>
             <a:prstDash val="solid"/>
           </a:ln>
@@ -5031,7 +5159,7 @@
           <p:cNvPr id="7" name="source-1">
             <a:extLst xmlns:a="http://schemas.openxmlformats.org/drawingml/2006/main">
               <a:ext uri="{FF2B5EF4-FFF2-40B4-BE49-F238E27FC236}">
-                <a16:creationId xmlns:a16="http://schemas.microsoft.com/office/drawing/2014/main" id="{7F310D8D-64FE-4625-8AB2-30F2A469C7DE}"/>
+                <a16:creationId xmlns:a16="http://schemas.microsoft.com/office/drawing/2014/main" id="{F341D006-7E3E-49CA-8D9B-A8DB7BD2D481}"/>
               </a:ext>
             </a:extLst>
           </p:cNvPr>
@@ -5095,7 +5223,7 @@
           <p:cNvPr id="8" name="s13-takeaway-rule">
             <a:extLst xmlns:a="http://schemas.openxmlformats.org/drawingml/2006/main">
               <a:ext uri="{FF2B5EF4-FFF2-40B4-BE49-F238E27FC236}">
-                <a16:creationId xmlns:a16="http://schemas.microsoft.com/office/drawing/2014/main" id="{344B6BA1-A03F-44DF-A32F-F5D3F96D1AA4}"/>
+                <a16:creationId xmlns:a16="http://schemas.microsoft.com/office/drawing/2014/main" id="{E93EACC0-706A-4891-80DC-6306EBBFC801}"/>
               </a:ext>
             </a:extLst>
           </p:cNvPr>
@@ -5128,7 +5256,7 @@
           <p:cNvPr id="9" name="s13-takeaway">
             <a:extLst xmlns:a="http://schemas.openxmlformats.org/drawingml/2006/main">
               <a:ext uri="{FF2B5EF4-FFF2-40B4-BE49-F238E27FC236}">
-                <a16:creationId xmlns:a16="http://schemas.microsoft.com/office/drawing/2014/main" id="{06E3EB56-73AE-42CA-A325-01591A99DE97}"/>
+                <a16:creationId xmlns:a16="http://schemas.microsoft.com/office/drawing/2014/main" id="{DA61B2E6-20EB-409D-AE75-13E67E22312F}"/>
               </a:ext>
             </a:extLst>
           </p:cNvPr>
@@ -5184,7 +5312,7 @@
     </p:spTree>
     <p:extLst>
       <p:ext uri="{BB962C8B-B14F-4D97-AF65-F5344CB8AC3E}">
-        <p14:creationId xmlns:p14="http://schemas.microsoft.com/office/powerpoint/2010/main" val="2127714767"/>
+        <p14:creationId xmlns:p14="http://schemas.microsoft.com/office/powerpoint/2010/main" val="2112740767"/>
       </p:ext>
     </p:extLst>
   </p:cSld>
@@ -5215,7 +5343,7 @@
           <p:cNvPr id="1" name="s2-rule">
             <a:extLst xmlns:a="http://schemas.openxmlformats.org/drawingml/2006/main">
               <a:ext uri="{FF2B5EF4-FFF2-40B4-BE49-F238E27FC236}">
-                <a16:creationId xmlns:a16="http://schemas.microsoft.com/office/drawing/2014/main" id="{6800EB30-63EB-4791-A9A1-2DF7438DB6A2}"/>
+                <a16:creationId xmlns:a16="http://schemas.microsoft.com/office/drawing/2014/main" id="{587A8F63-51AD-412F-9DAB-F7DAC0BAAF97}"/>
               </a:ext>
             </a:extLst>
           </p:cNvPr>
@@ -5248,7 +5376,7 @@
           <p:cNvPr id="2" name="s2-eyebrow">
             <a:extLst xmlns:a="http://schemas.openxmlformats.org/drawingml/2006/main">
               <a:ext uri="{FF2B5EF4-FFF2-40B4-BE49-F238E27FC236}">
-                <a16:creationId xmlns:a16="http://schemas.microsoft.com/office/drawing/2014/main" id="{78FFED7F-7BB3-4916-B1A8-8DB60487C7A6}"/>
+                <a16:creationId xmlns:a16="http://schemas.microsoft.com/office/drawing/2014/main" id="{C3690976-5369-419B-9308-C2C11F906CF6}"/>
               </a:ext>
             </a:extLst>
           </p:cNvPr>
@@ -5306,7 +5434,7 @@
           <p:cNvPr id="3" name="s2-title">
             <a:extLst xmlns:a="http://schemas.openxmlformats.org/drawingml/2006/main">
               <a:ext uri="{FF2B5EF4-FFF2-40B4-BE49-F238E27FC236}">
-                <a16:creationId xmlns:a16="http://schemas.microsoft.com/office/drawing/2014/main" id="{8616CCC8-1EA6-4889-8814-DC0628EE2530}"/>
+                <a16:creationId xmlns:a16="http://schemas.microsoft.com/office/drawing/2014/main" id="{B74077D4-3CBF-4FD1-B9C6-3B197F6A8A73}"/>
               </a:ext>
             </a:extLst>
           </p:cNvPr>
@@ -5354,7 +5482,7 @@
                 <a:ea typeface="PingFang SC"/>
                 <a:cs typeface="PingFang SC"/>
               </a:rPr>
-              <a:t>学完这一节，你能完成这些判断与行动</a:t>
+              <a:t>智能体可靠性：4项学习结果</a:t>
             </a:r>
           </a:p>
         </p:txBody>
@@ -5364,7 +5492,7 @@
           <p:cNvPr id="4" name="s2-footer">
             <a:extLst xmlns:a="http://schemas.openxmlformats.org/drawingml/2006/main">
               <a:ext uri="{FF2B5EF4-FFF2-40B4-BE49-F238E27FC236}">
-                <a16:creationId xmlns:a16="http://schemas.microsoft.com/office/drawing/2014/main" id="{79AA5A7F-2D1E-43B3-A0E3-40D33C51D23F}"/>
+                <a16:creationId xmlns:a16="http://schemas.microsoft.com/office/drawing/2014/main" id="{3EB71A50-5ED4-46C8-AA7A-9964C9297E79}"/>
               </a:ext>
             </a:extLst>
           </p:cNvPr>
@@ -5395,7 +5523,7 @@
           <p:cNvPr id="5" name="s2-identity">
             <a:extLst xmlns:a="http://schemas.openxmlformats.org/drawingml/2006/main">
               <a:ext uri="{FF2B5EF4-FFF2-40B4-BE49-F238E27FC236}">
-                <a16:creationId xmlns:a16="http://schemas.microsoft.com/office/drawing/2014/main" id="{17665E86-8E0F-4F87-BD4D-70522342087B}"/>
+                <a16:creationId xmlns:a16="http://schemas.microsoft.com/office/drawing/2014/main" id="{F784D18C-C360-4217-A199-1FE24CA9323C}"/>
               </a:ext>
             </a:extLst>
           </p:cNvPr>
@@ -5453,7 +5581,7 @@
           <p:cNvPr id="6" name="objective-1">
             <a:extLst xmlns:a="http://schemas.openxmlformats.org/drawingml/2006/main">
               <a:ext uri="{FF2B5EF4-FFF2-40B4-BE49-F238E27FC236}">
-                <a16:creationId xmlns:a16="http://schemas.microsoft.com/office/drawing/2014/main" id="{B9112DA7-96DD-47D4-BF80-E5B3594034A1}"/>
+                <a16:creationId xmlns:a16="http://schemas.microsoft.com/office/drawing/2014/main" id="{04E6FDBF-1962-40AB-B459-AC40642DD366}"/>
               </a:ext>
             </a:extLst>
           </p:cNvPr>
@@ -5540,7 +5668,7 @@
           <p:cNvPr id="7" name="objective-2">
             <a:extLst xmlns:a="http://schemas.openxmlformats.org/drawingml/2006/main">
               <a:ext uri="{FF2B5EF4-FFF2-40B4-BE49-F238E27FC236}">
-                <a16:creationId xmlns:a16="http://schemas.microsoft.com/office/drawing/2014/main" id="{732E13F7-B6F7-43B5-B2FE-8D5A33C37CC5}"/>
+                <a16:creationId xmlns:a16="http://schemas.microsoft.com/office/drawing/2014/main" id="{40101368-0AD7-45F1-9900-673DF070DBFA}"/>
               </a:ext>
             </a:extLst>
           </p:cNvPr>
@@ -5627,7 +5755,7 @@
           <p:cNvPr id="8" name="objective-3">
             <a:extLst xmlns:a="http://schemas.openxmlformats.org/drawingml/2006/main">
               <a:ext uri="{FF2B5EF4-FFF2-40B4-BE49-F238E27FC236}">
-                <a16:creationId xmlns:a16="http://schemas.microsoft.com/office/drawing/2014/main" id="{FFB9AEFD-5B44-47A6-9423-BED2D38033CE}"/>
+                <a16:creationId xmlns:a16="http://schemas.microsoft.com/office/drawing/2014/main" id="{CA7AF93E-1BBB-4DE4-BE6F-1DF634346695}"/>
               </a:ext>
             </a:extLst>
           </p:cNvPr>
@@ -5714,7 +5842,7 @@
           <p:cNvPr id="9" name="objective-4">
             <a:extLst xmlns:a="http://schemas.openxmlformats.org/drawingml/2006/main">
               <a:ext uri="{FF2B5EF4-FFF2-40B4-BE49-F238E27FC236}">
-                <a16:creationId xmlns:a16="http://schemas.microsoft.com/office/drawing/2014/main" id="{56CB4D82-7E1B-48B4-BB65-EFAE67C0F497}"/>
+                <a16:creationId xmlns:a16="http://schemas.microsoft.com/office/drawing/2014/main" id="{2E0B7251-7701-42A6-A699-1ABF6D660801}"/>
               </a:ext>
             </a:extLst>
           </p:cNvPr>
@@ -5738,7 +5866,7 @@
           </a:solidFill>
           <a:ln xmlns:a="http://schemas.openxmlformats.org/drawingml/2006/main" w="19050">
             <a:solidFill>
-              <a:srgbClr val="17A6C8"/>
+              <a:srgbClr val="006B80"/>
             </a:solidFill>
             <a:prstDash val="solid"/>
           </a:ln>
@@ -5799,7 +5927,7 @@
     </p:spTree>
     <p:extLst>
       <p:ext uri="{BB962C8B-B14F-4D97-AF65-F5344CB8AC3E}">
-        <p14:creationId xmlns:p14="http://schemas.microsoft.com/office/powerpoint/2010/main" val="48460229"/>
+        <p14:creationId xmlns:p14="http://schemas.microsoft.com/office/powerpoint/2010/main" val="497166306"/>
       </p:ext>
     </p:extLst>
   </p:cSld>
@@ -5830,7 +5958,7 @@
           <p:cNvPr id="1" name="s3-rule">
             <a:extLst xmlns:a="http://schemas.openxmlformats.org/drawingml/2006/main">
               <a:ext uri="{FF2B5EF4-FFF2-40B4-BE49-F238E27FC236}">
-                <a16:creationId xmlns:a16="http://schemas.microsoft.com/office/drawing/2014/main" id="{14D008C7-A171-4D66-BC9B-F999CE249F67}"/>
+                <a16:creationId xmlns:a16="http://schemas.microsoft.com/office/drawing/2014/main" id="{F316293E-F4F4-41D3-BB41-B69C2B5AAF41}"/>
               </a:ext>
             </a:extLst>
           </p:cNvPr>
@@ -5863,7 +5991,7 @@
           <p:cNvPr id="2" name="s3-eyebrow">
             <a:extLst xmlns:a="http://schemas.openxmlformats.org/drawingml/2006/main">
               <a:ext uri="{FF2B5EF4-FFF2-40B4-BE49-F238E27FC236}">
-                <a16:creationId xmlns:a16="http://schemas.microsoft.com/office/drawing/2014/main" id="{A64D5763-5B0B-4883-8656-5DC1044F14F5}"/>
+                <a16:creationId xmlns:a16="http://schemas.microsoft.com/office/drawing/2014/main" id="{F0016861-BD71-4713-8139-512EE66AE47F}"/>
               </a:ext>
             </a:extLst>
           </p:cNvPr>
@@ -5921,7 +6049,7 @@
           <p:cNvPr id="3" name="s3-title">
             <a:extLst xmlns:a="http://schemas.openxmlformats.org/drawingml/2006/main">
               <a:ext uri="{FF2B5EF4-FFF2-40B4-BE49-F238E27FC236}">
-                <a16:creationId xmlns:a16="http://schemas.microsoft.com/office/drawing/2014/main" id="{996AF51B-3567-431E-B1C9-31152F47B0A7}"/>
+                <a16:creationId xmlns:a16="http://schemas.microsoft.com/office/drawing/2014/main" id="{F21C398E-9339-452E-B996-703EA76EDD43}"/>
               </a:ext>
             </a:extLst>
           </p:cNvPr>
@@ -5969,7 +6097,7 @@
                 <a:ea typeface="PingFang SC"/>
                 <a:cs typeface="PingFang SC"/>
               </a:rPr>
-              <a:t>日志可以记录单个事件</a:t>
+              <a:t>Trace 还原因果，三层指标判断系统表现</a:t>
             </a:r>
           </a:p>
         </p:txBody>
@@ -5979,7 +6107,7 @@
           <p:cNvPr id="4" name="s3-footer">
             <a:extLst xmlns:a="http://schemas.openxmlformats.org/drawingml/2006/main">
               <a:ext uri="{FF2B5EF4-FFF2-40B4-BE49-F238E27FC236}">
-                <a16:creationId xmlns:a16="http://schemas.microsoft.com/office/drawing/2014/main" id="{E311CFA3-521A-4D98-A812-BEC819F31778}"/>
+                <a16:creationId xmlns:a16="http://schemas.microsoft.com/office/drawing/2014/main" id="{B08B297F-C879-4D89-AE86-AA7328E4895D}"/>
               </a:ext>
             </a:extLst>
           </p:cNvPr>
@@ -6010,7 +6138,7 @@
           <p:cNvPr id="5" name="s3-identity">
             <a:extLst xmlns:a="http://schemas.openxmlformats.org/drawingml/2006/main">
               <a:ext uri="{FF2B5EF4-FFF2-40B4-BE49-F238E27FC236}">
-                <a16:creationId xmlns:a16="http://schemas.microsoft.com/office/drawing/2014/main" id="{8C86F8AA-85C5-4EF8-A9C6-5A2A7EE2A7BA}"/>
+                <a16:creationId xmlns:a16="http://schemas.microsoft.com/office/drawing/2014/main" id="{BB1A99D4-8C58-482A-9E2E-66C103859F03}"/>
               </a:ext>
             </a:extLst>
           </p:cNvPr>
@@ -6068,7 +6196,7 @@
           <p:cNvPr id="6" name="core-no-0">
             <a:extLst xmlns:a="http://schemas.openxmlformats.org/drawingml/2006/main">
               <a:ext uri="{FF2B5EF4-FFF2-40B4-BE49-F238E27FC236}">
-                <a16:creationId xmlns:a16="http://schemas.microsoft.com/office/drawing/2014/main" id="{C88BDCB8-3FDD-493B-8100-C4463699D1D7}"/>
+                <a16:creationId xmlns:a16="http://schemas.microsoft.com/office/drawing/2014/main" id="{EB69512F-BD98-4C30-8051-AF1336CE4E8A}"/>
               </a:ext>
             </a:extLst>
           </p:cNvPr>
@@ -6100,7 +6228,7 @@
             <a:pPr algn="l">
               <a:defRPr sz="2250" b="1">
                 <a:solidFill>
-                  <a:srgbClr val="17A6C8"/>
+                  <a:srgbClr val="006B80"/>
                 </a:solidFill>
                 <a:latin typeface="PingFang SC"/>
                 <a:ea typeface="PingFang SC"/>
@@ -6110,7 +6238,7 @@
             <a:r>
               <a:rPr sz="2250" b="1">
                 <a:solidFill>
-                  <a:srgbClr val="17A6C8"/>
+                  <a:srgbClr val="006B80"/>
                 </a:solidFill>
                 <a:latin typeface="PingFang SC"/>
                 <a:ea typeface="PingFang SC"/>
@@ -6126,7 +6254,7 @@
           <p:cNvPr id="7" name="core-label-0">
             <a:extLst xmlns:a="http://schemas.openxmlformats.org/drawingml/2006/main">
               <a:ext uri="{FF2B5EF4-FFF2-40B4-BE49-F238E27FC236}">
-                <a16:creationId xmlns:a16="http://schemas.microsoft.com/office/drawing/2014/main" id="{185386D9-28C6-4D57-BD33-84AAA748EC2F}"/>
+                <a16:creationId xmlns:a16="http://schemas.microsoft.com/office/drawing/2014/main" id="{3EFC2CB1-557F-4801-A43B-F77DB9BE08AC}"/>
               </a:ext>
             </a:extLst>
           </p:cNvPr>
@@ -6184,7 +6312,7 @@
           <p:cNvPr id="8" name="core-body-0">
             <a:extLst xmlns:a="http://schemas.openxmlformats.org/drawingml/2006/main">
               <a:ext uri="{FF2B5EF4-FFF2-40B4-BE49-F238E27FC236}">
-                <a16:creationId xmlns:a16="http://schemas.microsoft.com/office/drawing/2014/main" id="{4B0FCEC5-1DD9-4616-86FF-D080021F2DFB}"/>
+                <a16:creationId xmlns:a16="http://schemas.microsoft.com/office/drawing/2014/main" id="{2AE807D3-1B9F-4D8F-996B-2B13DA2A2DEB}"/>
               </a:ext>
             </a:extLst>
           </p:cNvPr>
@@ -6208,7 +6336,7 @@
           </a:solidFill>
           <a:ln xmlns:a="http://schemas.openxmlformats.org/drawingml/2006/main" w="19050">
             <a:solidFill>
-              <a:srgbClr val="17A6C8"/>
+              <a:srgbClr val="006B80"/>
             </a:solidFill>
             <a:prstDash val="solid"/>
           </a:ln>
@@ -6248,7 +6376,7 @@
           <p:cNvPr id="9" name="core-no-1">
             <a:extLst xmlns:a="http://schemas.openxmlformats.org/drawingml/2006/main">
               <a:ext uri="{FF2B5EF4-FFF2-40B4-BE49-F238E27FC236}">
-                <a16:creationId xmlns:a16="http://schemas.microsoft.com/office/drawing/2014/main" id="{C0EAF335-E5DD-42FE-9D17-8CE4E6100315}"/>
+                <a16:creationId xmlns:a16="http://schemas.microsoft.com/office/drawing/2014/main" id="{CDD8A46A-35F3-41D8-8802-0E311019A35D}"/>
               </a:ext>
             </a:extLst>
           </p:cNvPr>
@@ -6280,7 +6408,7 @@
             <a:pPr algn="l">
               <a:defRPr sz="2250" b="1">
                 <a:solidFill>
-                  <a:srgbClr val="17A6C8"/>
+                  <a:srgbClr val="006B80"/>
                 </a:solidFill>
                 <a:latin typeface="PingFang SC"/>
                 <a:ea typeface="PingFang SC"/>
@@ -6290,7 +6418,7 @@
             <a:r>
               <a:rPr sz="2250" b="1">
                 <a:solidFill>
-                  <a:srgbClr val="17A6C8"/>
+                  <a:srgbClr val="006B80"/>
                 </a:solidFill>
                 <a:latin typeface="PingFang SC"/>
                 <a:ea typeface="PingFang SC"/>
@@ -6306,7 +6434,7 @@
           <p:cNvPr id="10" name="core-label-1">
             <a:extLst xmlns:a="http://schemas.openxmlformats.org/drawingml/2006/main">
               <a:ext uri="{FF2B5EF4-FFF2-40B4-BE49-F238E27FC236}">
-                <a16:creationId xmlns:a16="http://schemas.microsoft.com/office/drawing/2014/main" id="{0CFF856D-6E2D-432C-A547-D00CBA1DAFBB}"/>
+                <a16:creationId xmlns:a16="http://schemas.microsoft.com/office/drawing/2014/main" id="{44739B69-51F4-43D1-9BE9-8D5426461E93}"/>
               </a:ext>
             </a:extLst>
           </p:cNvPr>
@@ -6364,7 +6492,7 @@
           <p:cNvPr id="11" name="core-body-1">
             <a:extLst xmlns:a="http://schemas.openxmlformats.org/drawingml/2006/main">
               <a:ext uri="{FF2B5EF4-FFF2-40B4-BE49-F238E27FC236}">
-                <a16:creationId xmlns:a16="http://schemas.microsoft.com/office/drawing/2014/main" id="{C62575AA-9D9E-4D3B-9E63-6CFCC784C82C}"/>
+                <a16:creationId xmlns:a16="http://schemas.microsoft.com/office/drawing/2014/main" id="{256B482A-E9F0-4B4C-8C26-E88D00B41776}"/>
               </a:ext>
             </a:extLst>
           </p:cNvPr>
@@ -6428,7 +6556,7 @@
           <p:cNvPr id="12" name="s3-takeaway-rule">
             <a:extLst xmlns:a="http://schemas.openxmlformats.org/drawingml/2006/main">
               <a:ext uri="{FF2B5EF4-FFF2-40B4-BE49-F238E27FC236}">
-                <a16:creationId xmlns:a16="http://schemas.microsoft.com/office/drawing/2014/main" id="{7ED17343-2590-45D2-BC78-8D709DF59F1A}"/>
+                <a16:creationId xmlns:a16="http://schemas.microsoft.com/office/drawing/2014/main" id="{A25A1E09-75BB-44B6-BB45-7999A1599349}"/>
               </a:ext>
             </a:extLst>
           </p:cNvPr>
@@ -6461,7 +6589,7 @@
           <p:cNvPr id="13" name="s3-takeaway">
             <a:extLst xmlns:a="http://schemas.openxmlformats.org/drawingml/2006/main">
               <a:ext uri="{FF2B5EF4-FFF2-40B4-BE49-F238E27FC236}">
-                <a16:creationId xmlns:a16="http://schemas.microsoft.com/office/drawing/2014/main" id="{AD53943B-F428-48CF-A137-296E3EA87E2C}"/>
+                <a16:creationId xmlns:a16="http://schemas.microsoft.com/office/drawing/2014/main" id="{C95E2FDD-394F-4AEA-9CAE-8D4DDE1F1942}"/>
               </a:ext>
             </a:extLst>
           </p:cNvPr>
@@ -6509,7 +6637,7 @@
                 <a:ea typeface="PingFang SC"/>
                 <a:cs typeface="PingFang SC"/>
               </a:rPr>
-              <a:t>日志可以记录单个事件</a:t>
+              <a:t>Trace 还原因果，三层指标判断系统表现</a:t>
             </a:r>
           </a:p>
         </p:txBody>
@@ -6517,7 +6645,7 @@
     </p:spTree>
     <p:extLst>
       <p:ext uri="{BB962C8B-B14F-4D97-AF65-F5344CB8AC3E}">
-        <p14:creationId xmlns:p14="http://schemas.microsoft.com/office/powerpoint/2010/main" val="611348470"/>
+        <p14:creationId xmlns:p14="http://schemas.microsoft.com/office/powerpoint/2010/main" val="938779631"/>
       </p:ext>
     </p:extLst>
   </p:cSld>
@@ -6548,7 +6676,7 @@
           <p:cNvPr id="1" name="s4-rule">
             <a:extLst xmlns:a="http://schemas.openxmlformats.org/drawingml/2006/main">
               <a:ext uri="{FF2B5EF4-FFF2-40B4-BE49-F238E27FC236}">
-                <a16:creationId xmlns:a16="http://schemas.microsoft.com/office/drawing/2014/main" id="{D5BD67AA-EDB4-4606-8A88-FF3E48034B1C}"/>
+                <a16:creationId xmlns:a16="http://schemas.microsoft.com/office/drawing/2014/main" id="{F2E2C04F-C847-4E17-B596-D3C8CB44A4A0}"/>
               </a:ext>
             </a:extLst>
           </p:cNvPr>
@@ -6581,7 +6709,7 @@
           <p:cNvPr id="2" name="s4-eyebrow">
             <a:extLst xmlns:a="http://schemas.openxmlformats.org/drawingml/2006/main">
               <a:ext uri="{FF2B5EF4-FFF2-40B4-BE49-F238E27FC236}">
-                <a16:creationId xmlns:a16="http://schemas.microsoft.com/office/drawing/2014/main" id="{89B150C2-CC0A-4663-B39C-84A3E06F7B30}"/>
+                <a16:creationId xmlns:a16="http://schemas.microsoft.com/office/drawing/2014/main" id="{392FB1A4-E9A6-419C-9748-3AA172858F11}"/>
               </a:ext>
             </a:extLst>
           </p:cNvPr>
@@ -6639,7 +6767,7 @@
           <p:cNvPr id="3" name="s4-title">
             <a:extLst xmlns:a="http://schemas.openxmlformats.org/drawingml/2006/main">
               <a:ext uri="{FF2B5EF4-FFF2-40B4-BE49-F238E27FC236}">
-                <a16:creationId xmlns:a16="http://schemas.microsoft.com/office/drawing/2014/main" id="{B278D902-F515-4F60-BA2A-E184D8BC4511}"/>
+                <a16:creationId xmlns:a16="http://schemas.microsoft.com/office/drawing/2014/main" id="{27681CFE-8B77-45A2-BAB5-27CA383E4F66}"/>
               </a:ext>
             </a:extLst>
           </p:cNvPr>
@@ -6664,7 +6792,7 @@
         </p:spPr>
         <p:txBody>
           <a:bodyPr xmlns:a="http://schemas.openxmlformats.org/drawingml/2006/main" lIns="0" tIns="0" rIns="0" bIns="0" anchor="ctr">
-            <a:normAutofit fontScale="74187"/>
+            <a:normAutofit fontScale="100000"/>
           </a:bodyPr>
           <a:lstStyle xmlns:a="http://schemas.openxmlformats.org/drawingml/2006/main"/>
           <a:p xmlns:a="http://schemas.openxmlformats.org/drawingml/2006/main">
@@ -6687,7 +6815,7 @@
                 <a:ea typeface="PingFang SC"/>
                 <a:cs typeface="PingFang SC"/>
               </a:rPr>
-              <a:t>离线集应来自真实任务类型，覆盖正常样本、边界样本、对抗样本和历史故障</a:t>
+              <a:t>离线覆盖已知风险，线上监测真实分布</a:t>
             </a:r>
           </a:p>
         </p:txBody>
@@ -6697,7 +6825,7 @@
           <p:cNvPr id="4" name="s4-footer">
             <a:extLst xmlns:a="http://schemas.openxmlformats.org/drawingml/2006/main">
               <a:ext uri="{FF2B5EF4-FFF2-40B4-BE49-F238E27FC236}">
-                <a16:creationId xmlns:a16="http://schemas.microsoft.com/office/drawing/2014/main" id="{3A87B3E3-6779-4118-8E12-846306F105DB}"/>
+                <a16:creationId xmlns:a16="http://schemas.microsoft.com/office/drawing/2014/main" id="{2CB151DF-8468-4421-A8E6-9B82C6CF967D}"/>
               </a:ext>
             </a:extLst>
           </p:cNvPr>
@@ -6728,7 +6856,7 @@
           <p:cNvPr id="5" name="s4-identity">
             <a:extLst xmlns:a="http://schemas.openxmlformats.org/drawingml/2006/main">
               <a:ext uri="{FF2B5EF4-FFF2-40B4-BE49-F238E27FC236}">
-                <a16:creationId xmlns:a16="http://schemas.microsoft.com/office/drawing/2014/main" id="{26797AA6-5218-471F-9CE0-D81797D14319}"/>
+                <a16:creationId xmlns:a16="http://schemas.microsoft.com/office/drawing/2014/main" id="{DCFC0583-9B3F-412F-A958-11A0669403AC}"/>
               </a:ext>
             </a:extLst>
           </p:cNvPr>
@@ -6786,7 +6914,7 @@
           <p:cNvPr id="6" name="core-no-0">
             <a:extLst xmlns:a="http://schemas.openxmlformats.org/drawingml/2006/main">
               <a:ext uri="{FF2B5EF4-FFF2-40B4-BE49-F238E27FC236}">
-                <a16:creationId xmlns:a16="http://schemas.microsoft.com/office/drawing/2014/main" id="{3424A38C-A3A1-4662-92B6-D36C38B1B5A8}"/>
+                <a16:creationId xmlns:a16="http://schemas.microsoft.com/office/drawing/2014/main" id="{1EAE11ED-1052-4186-B08A-E15D09DF52FA}"/>
               </a:ext>
             </a:extLst>
           </p:cNvPr>
@@ -6818,7 +6946,7 @@
             <a:pPr algn="l">
               <a:defRPr sz="2250" b="1">
                 <a:solidFill>
-                  <a:srgbClr val="17A6C8"/>
+                  <a:srgbClr val="006B80"/>
                 </a:solidFill>
                 <a:latin typeface="PingFang SC"/>
                 <a:ea typeface="PingFang SC"/>
@@ -6828,7 +6956,7 @@
             <a:r>
               <a:rPr sz="2250" b="1">
                 <a:solidFill>
-                  <a:srgbClr val="17A6C8"/>
+                  <a:srgbClr val="006B80"/>
                 </a:solidFill>
                 <a:latin typeface="PingFang SC"/>
                 <a:ea typeface="PingFang SC"/>
@@ -6844,7 +6972,7 @@
           <p:cNvPr id="7" name="core-label-0">
             <a:extLst xmlns:a="http://schemas.openxmlformats.org/drawingml/2006/main">
               <a:ext uri="{FF2B5EF4-FFF2-40B4-BE49-F238E27FC236}">
-                <a16:creationId xmlns:a16="http://schemas.microsoft.com/office/drawing/2014/main" id="{4A338412-C718-43AE-9251-820C75246FCA}"/>
+                <a16:creationId xmlns:a16="http://schemas.microsoft.com/office/drawing/2014/main" id="{062F48AE-6014-4844-8288-E2824D2E19E8}"/>
               </a:ext>
             </a:extLst>
           </p:cNvPr>
@@ -6902,7 +7030,7 @@
           <p:cNvPr id="8" name="core-body-0">
             <a:extLst xmlns:a="http://schemas.openxmlformats.org/drawingml/2006/main">
               <a:ext uri="{FF2B5EF4-FFF2-40B4-BE49-F238E27FC236}">
-                <a16:creationId xmlns:a16="http://schemas.microsoft.com/office/drawing/2014/main" id="{35354132-ADF1-48EF-A070-01CC0B07A2C4}"/>
+                <a16:creationId xmlns:a16="http://schemas.microsoft.com/office/drawing/2014/main" id="{274DE35D-6614-44F1-8C7D-07D78FD1C036}"/>
               </a:ext>
             </a:extLst>
           </p:cNvPr>
@@ -6926,7 +7054,7 @@
           </a:solidFill>
           <a:ln xmlns:a="http://schemas.openxmlformats.org/drawingml/2006/main" w="19050">
             <a:solidFill>
-              <a:srgbClr val="17A6C8"/>
+              <a:srgbClr val="006B80"/>
             </a:solidFill>
             <a:prstDash val="solid"/>
           </a:ln>
@@ -6956,7 +7084,7 @@
                 <a:ea typeface="PingFang SC"/>
                 <a:cs typeface="PingFang SC"/>
               </a:rPr>
-              <a:t>离线集应来自真实任务类型，覆盖正常样本、边界样本、对抗样本和历史故障。每个样本需要输入、期望结果、允许变化、禁止动作和评分规则。对开放式输出，可把评分拆成事实、完整性、格式和证据…</a:t>
+              <a:t>离线集应来自真实任务类型；覆盖正常样本、边界样本、对抗样本和历史故障；每个样本需要输入、期望结果、允许变化、禁止动作和评分规则；对开放式输出，可把评分拆成事实、完整性、格式和证据</a:t>
             </a:r>
           </a:p>
         </p:txBody>
@@ -6966,7 +7094,7 @@
           <p:cNvPr id="9" name="core-no-1">
             <a:extLst xmlns:a="http://schemas.openxmlformats.org/drawingml/2006/main">
               <a:ext uri="{FF2B5EF4-FFF2-40B4-BE49-F238E27FC236}">
-                <a16:creationId xmlns:a16="http://schemas.microsoft.com/office/drawing/2014/main" id="{63138983-C387-4053-8446-9D3BCD04804E}"/>
+                <a16:creationId xmlns:a16="http://schemas.microsoft.com/office/drawing/2014/main" id="{A46A3E05-1CA4-4D80-B864-EEA8DFB523CE}"/>
               </a:ext>
             </a:extLst>
           </p:cNvPr>
@@ -6998,7 +7126,7 @@
             <a:pPr algn="l">
               <a:defRPr sz="2250" b="1">
                 <a:solidFill>
-                  <a:srgbClr val="17A6C8"/>
+                  <a:srgbClr val="006B80"/>
                 </a:solidFill>
                 <a:latin typeface="PingFang SC"/>
                 <a:ea typeface="PingFang SC"/>
@@ -7008,7 +7136,7 @@
             <a:r>
               <a:rPr sz="2250" b="1">
                 <a:solidFill>
-                  <a:srgbClr val="17A6C8"/>
+                  <a:srgbClr val="006B80"/>
                 </a:solidFill>
                 <a:latin typeface="PingFang SC"/>
                 <a:ea typeface="PingFang SC"/>
@@ -7024,7 +7152,7 @@
           <p:cNvPr id="10" name="core-label-1">
             <a:extLst xmlns:a="http://schemas.openxmlformats.org/drawingml/2006/main">
               <a:ext uri="{FF2B5EF4-FFF2-40B4-BE49-F238E27FC236}">
-                <a16:creationId xmlns:a16="http://schemas.microsoft.com/office/drawing/2014/main" id="{7FDF4CD8-E626-4B43-82A6-9F0610FDC074}"/>
+                <a16:creationId xmlns:a16="http://schemas.microsoft.com/office/drawing/2014/main" id="{B55DD92A-A7D2-446F-B8AF-227A3D365AF8}"/>
               </a:ext>
             </a:extLst>
           </p:cNvPr>
@@ -7082,7 +7210,7 @@
           <p:cNvPr id="11" name="core-body-1">
             <a:extLst xmlns:a="http://schemas.openxmlformats.org/drawingml/2006/main">
               <a:ext uri="{FF2B5EF4-FFF2-40B4-BE49-F238E27FC236}">
-                <a16:creationId xmlns:a16="http://schemas.microsoft.com/office/drawing/2014/main" id="{9C99C1D1-9825-45DF-BDE1-7C578E443A81}"/>
+                <a16:creationId xmlns:a16="http://schemas.microsoft.com/office/drawing/2014/main" id="{37E9BB85-119C-4B41-84B0-98CA84FCDF45}"/>
               </a:ext>
             </a:extLst>
           </p:cNvPr>
@@ -7136,7 +7264,7 @@
                 <a:ea typeface="PingFang SC"/>
                 <a:cs typeface="PingFang SC"/>
               </a:rPr>
-              <a:t>线上环境会出现离线集没有覆盖的新输入、权限组合和工具异常。监控应同时看质量代理指标和系统指标，例如引用缺失、空结果、同类工具连续失败、任务步数异常增长、人工升级率突变和高风险动作拦截率…</a:t>
+              <a:t>线上环境会出现离线集没有覆盖的新输入、权限组合和工具异常；监控应同时看质量代理指标和系统指标；例如引用缺失、空结果、同类工具连续失败、任务步数异常增长、人工升级率突变和高风险动作拦截率</a:t>
             </a:r>
           </a:p>
         </p:txBody>
@@ -7146,7 +7274,7 @@
           <p:cNvPr id="12" name="s4-takeaway-rule">
             <a:extLst xmlns:a="http://schemas.openxmlformats.org/drawingml/2006/main">
               <a:ext uri="{FF2B5EF4-FFF2-40B4-BE49-F238E27FC236}">
-                <a16:creationId xmlns:a16="http://schemas.microsoft.com/office/drawing/2014/main" id="{B73A16E0-127F-4D2B-8C08-F45D66D05735}"/>
+                <a16:creationId xmlns:a16="http://schemas.microsoft.com/office/drawing/2014/main" id="{74941998-73A1-4D39-BCCD-1DE253171E21}"/>
               </a:ext>
             </a:extLst>
           </p:cNvPr>
@@ -7179,7 +7307,7 @@
           <p:cNvPr id="13" name="s4-takeaway">
             <a:extLst xmlns:a="http://schemas.openxmlformats.org/drawingml/2006/main">
               <a:ext uri="{FF2B5EF4-FFF2-40B4-BE49-F238E27FC236}">
-                <a16:creationId xmlns:a16="http://schemas.microsoft.com/office/drawing/2014/main" id="{D928057C-6BB4-4568-9F1C-E44B2B09CA5A}"/>
+                <a16:creationId xmlns:a16="http://schemas.microsoft.com/office/drawing/2014/main" id="{01BD91B6-6C6E-468D-9DEC-E9A0DE7F80B9}"/>
               </a:ext>
             </a:extLst>
           </p:cNvPr>
@@ -7227,7 +7355,7 @@
                 <a:ea typeface="PingFang SC"/>
                 <a:cs typeface="PingFang SC"/>
               </a:rPr>
-              <a:t>离线集应来自真实任务类型，覆盖正常样本、边界样本、对抗样本和历史故障</a:t>
+              <a:t>离线覆盖已知风险，线上监测真实分布</a:t>
             </a:r>
           </a:p>
         </p:txBody>
@@ -7235,7 +7363,7 @@
     </p:spTree>
     <p:extLst>
       <p:ext uri="{BB962C8B-B14F-4D97-AF65-F5344CB8AC3E}">
-        <p14:creationId xmlns:p14="http://schemas.microsoft.com/office/powerpoint/2010/main" val="1727376778"/>
+        <p14:creationId xmlns:p14="http://schemas.microsoft.com/office/powerpoint/2010/main" val="1787980955"/>
       </p:ext>
     </p:extLst>
   </p:cSld>
@@ -7266,7 +7394,7 @@
           <p:cNvPr id="1" name="s5-rule">
             <a:extLst xmlns:a="http://schemas.openxmlformats.org/drawingml/2006/main">
               <a:ext uri="{FF2B5EF4-FFF2-40B4-BE49-F238E27FC236}">
-                <a16:creationId xmlns:a16="http://schemas.microsoft.com/office/drawing/2014/main" id="{91B2795D-AF44-413D-AB28-8A32E517DBF3}"/>
+                <a16:creationId xmlns:a16="http://schemas.microsoft.com/office/drawing/2014/main" id="{0D6AA37B-92C2-4531-B415-E8CF3CBAEF68}"/>
               </a:ext>
             </a:extLst>
           </p:cNvPr>
@@ -7299,7 +7427,7 @@
           <p:cNvPr id="2" name="s5-eyebrow">
             <a:extLst xmlns:a="http://schemas.openxmlformats.org/drawingml/2006/main">
               <a:ext uri="{FF2B5EF4-FFF2-40B4-BE49-F238E27FC236}">
-                <a16:creationId xmlns:a16="http://schemas.microsoft.com/office/drawing/2014/main" id="{74FDCF8A-90FE-4911-97D4-AE7DA195E76D}"/>
+                <a16:creationId xmlns:a16="http://schemas.microsoft.com/office/drawing/2014/main" id="{8AC64179-76A1-4BDE-9558-4AB3054D29C4}"/>
               </a:ext>
             </a:extLst>
           </p:cNvPr>
@@ -7357,7 +7485,7 @@
           <p:cNvPr id="3" name="s5-title">
             <a:extLst xmlns:a="http://schemas.openxmlformats.org/drawingml/2006/main">
               <a:ext uri="{FF2B5EF4-FFF2-40B4-BE49-F238E27FC236}">
-                <a16:creationId xmlns:a16="http://schemas.microsoft.com/office/drawing/2014/main" id="{9F464339-EF6B-452A-B4DF-3C7BFE802154}"/>
+                <a16:creationId xmlns:a16="http://schemas.microsoft.com/office/drawing/2014/main" id="{FEDD07D1-B44D-4D97-A8B0-6DC44A635473}"/>
               </a:ext>
             </a:extLst>
           </p:cNvPr>
@@ -7415,7 +7543,7 @@
           <p:cNvPr id="4" name="s5-footer">
             <a:extLst xmlns:a="http://schemas.openxmlformats.org/drawingml/2006/main">
               <a:ext uri="{FF2B5EF4-FFF2-40B4-BE49-F238E27FC236}">
-                <a16:creationId xmlns:a16="http://schemas.microsoft.com/office/drawing/2014/main" id="{4DE7904D-885C-4948-AFED-1139005E7BB9}"/>
+                <a16:creationId xmlns:a16="http://schemas.microsoft.com/office/drawing/2014/main" id="{FF6C53FB-3FD9-4B0D-A33B-E05DF51E8D7A}"/>
               </a:ext>
             </a:extLst>
           </p:cNvPr>
@@ -7446,7 +7574,7 @@
           <p:cNvPr id="5" name="s5-identity">
             <a:extLst xmlns:a="http://schemas.openxmlformats.org/drawingml/2006/main">
               <a:ext uri="{FF2B5EF4-FFF2-40B4-BE49-F238E27FC236}">
-                <a16:creationId xmlns:a16="http://schemas.microsoft.com/office/drawing/2014/main" id="{9A388682-802B-4DF5-85BD-A4A38CF54ACF}"/>
+                <a16:creationId xmlns:a16="http://schemas.microsoft.com/office/drawing/2014/main" id="{B9F7A59B-73AE-453C-9A3B-D4FA3C247351}"/>
               </a:ext>
             </a:extLst>
           </p:cNvPr>
@@ -7504,7 +7632,7 @@
           <p:cNvPr id="6" name="core-no-0">
             <a:extLst xmlns:a="http://schemas.openxmlformats.org/drawingml/2006/main">
               <a:ext uri="{FF2B5EF4-FFF2-40B4-BE49-F238E27FC236}">
-                <a16:creationId xmlns:a16="http://schemas.microsoft.com/office/drawing/2014/main" id="{0CD0454B-B4F3-4342-9952-EAF7201751AC}"/>
+                <a16:creationId xmlns:a16="http://schemas.microsoft.com/office/drawing/2014/main" id="{94D142CE-DA68-4F54-982D-38B7F1356389}"/>
               </a:ext>
             </a:extLst>
           </p:cNvPr>
@@ -7536,7 +7664,7 @@
             <a:pPr algn="l">
               <a:defRPr sz="2250" b="1">
                 <a:solidFill>
-                  <a:srgbClr val="17A6C8"/>
+                  <a:srgbClr val="006B80"/>
                 </a:solidFill>
                 <a:latin typeface="PingFang SC"/>
                 <a:ea typeface="PingFang SC"/>
@@ -7546,7 +7674,7 @@
             <a:r>
               <a:rPr sz="2250" b="1">
                 <a:solidFill>
-                  <a:srgbClr val="17A6C8"/>
+                  <a:srgbClr val="006B80"/>
                 </a:solidFill>
                 <a:latin typeface="PingFang SC"/>
                 <a:ea typeface="PingFang SC"/>
@@ -7562,7 +7690,7 @@
           <p:cNvPr id="7" name="core-label-0">
             <a:extLst xmlns:a="http://schemas.openxmlformats.org/drawingml/2006/main">
               <a:ext uri="{FF2B5EF4-FFF2-40B4-BE49-F238E27FC236}">
-                <a16:creationId xmlns:a16="http://schemas.microsoft.com/office/drawing/2014/main" id="{368B6F20-63B1-4AFD-A871-02A67F1A7132}"/>
+                <a16:creationId xmlns:a16="http://schemas.microsoft.com/office/drawing/2014/main" id="{BD9A1BDA-D8B8-4ED9-89FF-320FB289C3DB}"/>
               </a:ext>
             </a:extLst>
           </p:cNvPr>
@@ -7620,7 +7748,7 @@
           <p:cNvPr id="8" name="core-body-0">
             <a:extLst xmlns:a="http://schemas.openxmlformats.org/drawingml/2006/main">
               <a:ext uri="{FF2B5EF4-FFF2-40B4-BE49-F238E27FC236}">
-                <a16:creationId xmlns:a16="http://schemas.microsoft.com/office/drawing/2014/main" id="{73607E7B-5405-49AA-AFA7-379C9592F863}"/>
+                <a16:creationId xmlns:a16="http://schemas.microsoft.com/office/drawing/2014/main" id="{5D1C8CE8-2C3C-4A9F-9C6A-AD32E8C21880}"/>
               </a:ext>
             </a:extLst>
           </p:cNvPr>
@@ -7644,7 +7772,7 @@
           </a:solidFill>
           <a:ln xmlns:a="http://schemas.openxmlformats.org/drawingml/2006/main" w="19050">
             <a:solidFill>
-              <a:srgbClr val="17A6C8"/>
+              <a:srgbClr val="006B80"/>
             </a:solidFill>
             <a:prstDash val="solid"/>
           </a:ln>
@@ -7684,7 +7812,7 @@
           <p:cNvPr id="9" name="core-no-1">
             <a:extLst xmlns:a="http://schemas.openxmlformats.org/drawingml/2006/main">
               <a:ext uri="{FF2B5EF4-FFF2-40B4-BE49-F238E27FC236}">
-                <a16:creationId xmlns:a16="http://schemas.microsoft.com/office/drawing/2014/main" id="{59F66186-1541-4D8F-B7B0-80C6B33946AC}"/>
+                <a16:creationId xmlns:a16="http://schemas.microsoft.com/office/drawing/2014/main" id="{D4F32E90-6545-4017-A106-BA252BA487EF}"/>
               </a:ext>
             </a:extLst>
           </p:cNvPr>
@@ -7716,7 +7844,7 @@
             <a:pPr algn="l">
               <a:defRPr sz="2250" b="1">
                 <a:solidFill>
-                  <a:srgbClr val="17A6C8"/>
+                  <a:srgbClr val="006B80"/>
                 </a:solidFill>
                 <a:latin typeface="PingFang SC"/>
                 <a:ea typeface="PingFang SC"/>
@@ -7726,7 +7854,7 @@
             <a:r>
               <a:rPr sz="2250" b="1">
                 <a:solidFill>
-                  <a:srgbClr val="17A6C8"/>
+                  <a:srgbClr val="006B80"/>
                 </a:solidFill>
                 <a:latin typeface="PingFang SC"/>
                 <a:ea typeface="PingFang SC"/>
@@ -7742,7 +7870,7 @@
           <p:cNvPr id="10" name="core-body-1">
             <a:extLst xmlns:a="http://schemas.openxmlformats.org/drawingml/2006/main">
               <a:ext uri="{FF2B5EF4-FFF2-40B4-BE49-F238E27FC236}">
-                <a16:creationId xmlns:a16="http://schemas.microsoft.com/office/drawing/2014/main" id="{D3AB4B09-9106-442A-8933-8202BFC190CC}"/>
+                <a16:creationId xmlns:a16="http://schemas.microsoft.com/office/drawing/2014/main" id="{D81CFD7D-5FB5-4E8B-A50E-B9ABA19691EE}"/>
               </a:ext>
             </a:extLst>
           </p:cNvPr>
@@ -7806,7 +7934,7 @@
           <p:cNvPr id="11" name="core-no-2">
             <a:extLst xmlns:a="http://schemas.openxmlformats.org/drawingml/2006/main">
               <a:ext uri="{FF2B5EF4-FFF2-40B4-BE49-F238E27FC236}">
-                <a16:creationId xmlns:a16="http://schemas.microsoft.com/office/drawing/2014/main" id="{E02E8A59-5C24-42DD-929A-829CEFC3CFE1}"/>
+                <a16:creationId xmlns:a16="http://schemas.microsoft.com/office/drawing/2014/main" id="{B7F2F62D-EA03-493B-B40B-A8AF7A668564}"/>
               </a:ext>
             </a:extLst>
           </p:cNvPr>
@@ -7838,7 +7966,7 @@
             <a:pPr algn="l">
               <a:defRPr sz="2250" b="1">
                 <a:solidFill>
-                  <a:srgbClr val="17A6C8"/>
+                  <a:srgbClr val="006B80"/>
                 </a:solidFill>
                 <a:latin typeface="PingFang SC"/>
                 <a:ea typeface="PingFang SC"/>
@@ -7848,7 +7976,7 @@
             <a:r>
               <a:rPr sz="2250" b="1">
                 <a:solidFill>
-                  <a:srgbClr val="17A6C8"/>
+                  <a:srgbClr val="006B80"/>
                 </a:solidFill>
                 <a:latin typeface="PingFang SC"/>
                 <a:ea typeface="PingFang SC"/>
@@ -7864,7 +7992,7 @@
           <p:cNvPr id="12" name="core-body-2">
             <a:extLst xmlns:a="http://schemas.openxmlformats.org/drawingml/2006/main">
               <a:ext uri="{FF2B5EF4-FFF2-40B4-BE49-F238E27FC236}">
-                <a16:creationId xmlns:a16="http://schemas.microsoft.com/office/drawing/2014/main" id="{736F9F7A-192F-4236-801B-47147B308A2E}"/>
+                <a16:creationId xmlns:a16="http://schemas.microsoft.com/office/drawing/2014/main" id="{CDE1A4BE-E17A-4CB5-A615-84CE7BBC9232}"/>
               </a:ext>
             </a:extLst>
           </p:cNvPr>
@@ -7928,7 +8056,7 @@
           <p:cNvPr id="13" name="s5-takeaway-rule">
             <a:extLst xmlns:a="http://schemas.openxmlformats.org/drawingml/2006/main">
               <a:ext uri="{FF2B5EF4-FFF2-40B4-BE49-F238E27FC236}">
-                <a16:creationId xmlns:a16="http://schemas.microsoft.com/office/drawing/2014/main" id="{F10BFFE6-EA9F-45C6-8831-6DE60C1D34AF}"/>
+                <a16:creationId xmlns:a16="http://schemas.microsoft.com/office/drawing/2014/main" id="{60B9EFDF-384B-4CE5-9ECB-82545D3E9DF4}"/>
               </a:ext>
             </a:extLst>
           </p:cNvPr>
@@ -7961,7 +8089,7 @@
           <p:cNvPr id="14" name="s5-takeaway">
             <a:extLst xmlns:a="http://schemas.openxmlformats.org/drawingml/2006/main">
               <a:ext uri="{FF2B5EF4-FFF2-40B4-BE49-F238E27FC236}">
-                <a16:creationId xmlns:a16="http://schemas.microsoft.com/office/drawing/2014/main" id="{2B25BCAD-3687-4FD0-891E-72185AD2E117}"/>
+                <a16:creationId xmlns:a16="http://schemas.microsoft.com/office/drawing/2014/main" id="{445B274F-0466-42B6-8302-44FB5454B2EC}"/>
               </a:ext>
             </a:extLst>
           </p:cNvPr>
@@ -8017,7 +8145,7 @@
     </p:spTree>
     <p:extLst>
       <p:ext uri="{BB962C8B-B14F-4D97-AF65-F5344CB8AC3E}">
-        <p14:creationId xmlns:p14="http://schemas.microsoft.com/office/powerpoint/2010/main" val="1171783688"/>
+        <p14:creationId xmlns:p14="http://schemas.microsoft.com/office/powerpoint/2010/main" val="76561890"/>
       </p:ext>
     </p:extLst>
   </p:cSld>
@@ -8048,7 +8176,7 @@
           <p:cNvPr id="1" name="s6-rule">
             <a:extLst xmlns:a="http://schemas.openxmlformats.org/drawingml/2006/main">
               <a:ext uri="{FF2B5EF4-FFF2-40B4-BE49-F238E27FC236}">
-                <a16:creationId xmlns:a16="http://schemas.microsoft.com/office/drawing/2014/main" id="{9BC28356-325E-446D-B8D5-113BEA1570F4}"/>
+                <a16:creationId xmlns:a16="http://schemas.microsoft.com/office/drawing/2014/main" id="{5645AA6E-B4F1-4DF6-BDC1-88997B64E59C}"/>
               </a:ext>
             </a:extLst>
           </p:cNvPr>
@@ -8081,7 +8209,7 @@
           <p:cNvPr id="2" name="s6-eyebrow">
             <a:extLst xmlns:a="http://schemas.openxmlformats.org/drawingml/2006/main">
               <a:ext uri="{FF2B5EF4-FFF2-40B4-BE49-F238E27FC236}">
-                <a16:creationId xmlns:a16="http://schemas.microsoft.com/office/drawing/2014/main" id="{5318FDBB-E593-42FF-9A44-171F81AAAE87}"/>
+                <a16:creationId xmlns:a16="http://schemas.microsoft.com/office/drawing/2014/main" id="{02B316DB-9D90-4F06-A2F6-232BF038EF57}"/>
               </a:ext>
             </a:extLst>
           </p:cNvPr>
@@ -8139,7 +8267,7 @@
           <p:cNvPr id="3" name="s6-title">
             <a:extLst xmlns:a="http://schemas.openxmlformats.org/drawingml/2006/main">
               <a:ext uri="{FF2B5EF4-FFF2-40B4-BE49-F238E27FC236}">
-                <a16:creationId xmlns:a16="http://schemas.microsoft.com/office/drawing/2014/main" id="{FE2C719F-9C41-4FC5-9D82-73031CCA2BC8}"/>
+                <a16:creationId xmlns:a16="http://schemas.microsoft.com/office/drawing/2014/main" id="{65F8CD72-683A-444B-BEA2-CE8A8CF14B98}"/>
               </a:ext>
             </a:extLst>
           </p:cNvPr>
@@ -8197,7 +8325,7 @@
           <p:cNvPr id="4" name="s6-footer">
             <a:extLst xmlns:a="http://schemas.openxmlformats.org/drawingml/2006/main">
               <a:ext uri="{FF2B5EF4-FFF2-40B4-BE49-F238E27FC236}">
-                <a16:creationId xmlns:a16="http://schemas.microsoft.com/office/drawing/2014/main" id="{6782A68B-3B0E-47D9-930D-5D3632DE7B71}"/>
+                <a16:creationId xmlns:a16="http://schemas.microsoft.com/office/drawing/2014/main" id="{181D7235-7AA9-4250-AFDF-D95147C9FFE2}"/>
               </a:ext>
             </a:extLst>
           </p:cNvPr>
@@ -8228,7 +8356,7 @@
           <p:cNvPr id="5" name="s6-identity">
             <a:extLst xmlns:a="http://schemas.openxmlformats.org/drawingml/2006/main">
               <a:ext uri="{FF2B5EF4-FFF2-40B4-BE49-F238E27FC236}">
-                <a16:creationId xmlns:a16="http://schemas.microsoft.com/office/drawing/2014/main" id="{5D0C2D97-D4D4-4C94-BE57-6674A5678320}"/>
+                <a16:creationId xmlns:a16="http://schemas.microsoft.com/office/drawing/2014/main" id="{0687CCD9-BEF6-430F-9E67-7EBB7FE63E00}"/>
               </a:ext>
             </a:extLst>
           </p:cNvPr>
@@ -8286,7 +8414,7 @@
           <p:cNvPr id="6" name="core-no-0">
             <a:extLst xmlns:a="http://schemas.openxmlformats.org/drawingml/2006/main">
               <a:ext uri="{FF2B5EF4-FFF2-40B4-BE49-F238E27FC236}">
-                <a16:creationId xmlns:a16="http://schemas.microsoft.com/office/drawing/2014/main" id="{EDC4A863-7B6D-4407-B06A-2FD1387F578F}"/>
+                <a16:creationId xmlns:a16="http://schemas.microsoft.com/office/drawing/2014/main" id="{BF36CC7C-600F-49B9-8D16-7DD3A9567CDB}"/>
               </a:ext>
             </a:extLst>
           </p:cNvPr>
@@ -8318,7 +8446,7 @@
             <a:pPr algn="l">
               <a:defRPr sz="2250" b="1">
                 <a:solidFill>
-                  <a:srgbClr val="17A6C8"/>
+                  <a:srgbClr val="006B80"/>
                 </a:solidFill>
                 <a:latin typeface="PingFang SC"/>
                 <a:ea typeface="PingFang SC"/>
@@ -8328,7 +8456,7 @@
             <a:r>
               <a:rPr sz="2250" b="1">
                 <a:solidFill>
-                  <a:srgbClr val="17A6C8"/>
+                  <a:srgbClr val="006B80"/>
                 </a:solidFill>
                 <a:latin typeface="PingFang SC"/>
                 <a:ea typeface="PingFang SC"/>
@@ -8344,7 +8472,7 @@
           <p:cNvPr id="7" name="core-label-0">
             <a:extLst xmlns:a="http://schemas.openxmlformats.org/drawingml/2006/main">
               <a:ext uri="{FF2B5EF4-FFF2-40B4-BE49-F238E27FC236}">
-                <a16:creationId xmlns:a16="http://schemas.microsoft.com/office/drawing/2014/main" id="{FEE6F517-5304-4F75-B054-2CB1867BD509}"/>
+                <a16:creationId xmlns:a16="http://schemas.microsoft.com/office/drawing/2014/main" id="{47238BD2-15A7-4C3D-ADA4-0237D534520C}"/>
               </a:ext>
             </a:extLst>
           </p:cNvPr>
@@ -8402,7 +8530,7 @@
           <p:cNvPr id="8" name="core-body-0">
             <a:extLst xmlns:a="http://schemas.openxmlformats.org/drawingml/2006/main">
               <a:ext uri="{FF2B5EF4-FFF2-40B4-BE49-F238E27FC236}">
-                <a16:creationId xmlns:a16="http://schemas.microsoft.com/office/drawing/2014/main" id="{EE6FF6AA-AB02-4537-8551-937C1AB2EDF3}"/>
+                <a16:creationId xmlns:a16="http://schemas.microsoft.com/office/drawing/2014/main" id="{99539D81-05F1-4D05-A032-0D7C963ACCE4}"/>
               </a:ext>
             </a:extLst>
           </p:cNvPr>
@@ -8426,7 +8554,7 @@
           </a:solidFill>
           <a:ln xmlns:a="http://schemas.openxmlformats.org/drawingml/2006/main" w="19050">
             <a:solidFill>
-              <a:srgbClr val="17A6C8"/>
+              <a:srgbClr val="006B80"/>
             </a:solidFill>
             <a:prstDash val="solid"/>
           </a:ln>
@@ -8466,7 +8594,7 @@
           <p:cNvPr id="9" name="core-no-1">
             <a:extLst xmlns:a="http://schemas.openxmlformats.org/drawingml/2006/main">
               <a:ext uri="{FF2B5EF4-FFF2-40B4-BE49-F238E27FC236}">
-                <a16:creationId xmlns:a16="http://schemas.microsoft.com/office/drawing/2014/main" id="{BE5F4D87-B4D1-4158-BB1A-2C5A6A4BD0F0}"/>
+                <a16:creationId xmlns:a16="http://schemas.microsoft.com/office/drawing/2014/main" id="{1BAC6C9A-BEBA-45B9-BDF7-DABEC336FD2B}"/>
               </a:ext>
             </a:extLst>
           </p:cNvPr>
@@ -8498,7 +8626,7 @@
             <a:pPr algn="l">
               <a:defRPr sz="2250" b="1">
                 <a:solidFill>
-                  <a:srgbClr val="17A6C8"/>
+                  <a:srgbClr val="006B80"/>
                 </a:solidFill>
                 <a:latin typeface="PingFang SC"/>
                 <a:ea typeface="PingFang SC"/>
@@ -8508,7 +8636,7 @@
             <a:r>
               <a:rPr sz="2250" b="1">
                 <a:solidFill>
-                  <a:srgbClr val="17A6C8"/>
+                  <a:srgbClr val="006B80"/>
                 </a:solidFill>
                 <a:latin typeface="PingFang SC"/>
                 <a:ea typeface="PingFang SC"/>
@@ -8524,7 +8652,7 @@
           <p:cNvPr id="10" name="core-body-1">
             <a:extLst xmlns:a="http://schemas.openxmlformats.org/drawingml/2006/main">
               <a:ext uri="{FF2B5EF4-FFF2-40B4-BE49-F238E27FC236}">
-                <a16:creationId xmlns:a16="http://schemas.microsoft.com/office/drawing/2014/main" id="{9F288F36-0746-491B-A639-D427E78D04FE}"/>
+                <a16:creationId xmlns:a16="http://schemas.microsoft.com/office/drawing/2014/main" id="{295E6278-FFCD-4BD9-A772-24F10DE1BEDE}"/>
               </a:ext>
             </a:extLst>
           </p:cNvPr>
@@ -8588,7 +8716,7 @@
           <p:cNvPr id="11" name="core-no-2">
             <a:extLst xmlns:a="http://schemas.openxmlformats.org/drawingml/2006/main">
               <a:ext uri="{FF2B5EF4-FFF2-40B4-BE49-F238E27FC236}">
-                <a16:creationId xmlns:a16="http://schemas.microsoft.com/office/drawing/2014/main" id="{7D5ADC5C-6477-412C-B552-F974F9054E99}"/>
+                <a16:creationId xmlns:a16="http://schemas.microsoft.com/office/drawing/2014/main" id="{7473D946-C946-428A-890C-E0F1C9F5BDAF}"/>
               </a:ext>
             </a:extLst>
           </p:cNvPr>
@@ -8620,7 +8748,7 @@
             <a:pPr algn="l">
               <a:defRPr sz="2250" b="1">
                 <a:solidFill>
-                  <a:srgbClr val="17A6C8"/>
+                  <a:srgbClr val="006B80"/>
                 </a:solidFill>
                 <a:latin typeface="PingFang SC"/>
                 <a:ea typeface="PingFang SC"/>
@@ -8630,7 +8758,7 @@
             <a:r>
               <a:rPr sz="2250" b="1">
                 <a:solidFill>
-                  <a:srgbClr val="17A6C8"/>
+                  <a:srgbClr val="006B80"/>
                 </a:solidFill>
                 <a:latin typeface="PingFang SC"/>
                 <a:ea typeface="PingFang SC"/>
@@ -8646,7 +8774,7 @@
           <p:cNvPr id="12" name="core-body-2">
             <a:extLst xmlns:a="http://schemas.openxmlformats.org/drawingml/2006/main">
               <a:ext uri="{FF2B5EF4-FFF2-40B4-BE49-F238E27FC236}">
-                <a16:creationId xmlns:a16="http://schemas.microsoft.com/office/drawing/2014/main" id="{D886E270-CE52-4A66-8087-F7EBD0E7BF04}"/>
+                <a16:creationId xmlns:a16="http://schemas.microsoft.com/office/drawing/2014/main" id="{5971330D-02C9-4EA7-A3EB-6411272D39A8}"/>
               </a:ext>
             </a:extLst>
           </p:cNvPr>
@@ -8710,7 +8838,7 @@
           <p:cNvPr id="13" name="s6-takeaway-rule">
             <a:extLst xmlns:a="http://schemas.openxmlformats.org/drawingml/2006/main">
               <a:ext uri="{FF2B5EF4-FFF2-40B4-BE49-F238E27FC236}">
-                <a16:creationId xmlns:a16="http://schemas.microsoft.com/office/drawing/2014/main" id="{1E332C7B-AEA8-443C-B40E-D986E23378B2}"/>
+                <a16:creationId xmlns:a16="http://schemas.microsoft.com/office/drawing/2014/main" id="{A52D5147-CB1D-45AA-8E02-C60B61176915}"/>
               </a:ext>
             </a:extLst>
           </p:cNvPr>
@@ -8743,7 +8871,7 @@
           <p:cNvPr id="14" name="s6-takeaway">
             <a:extLst xmlns:a="http://schemas.openxmlformats.org/drawingml/2006/main">
               <a:ext uri="{FF2B5EF4-FFF2-40B4-BE49-F238E27FC236}">
-                <a16:creationId xmlns:a16="http://schemas.microsoft.com/office/drawing/2014/main" id="{B34D3A8B-6D11-43BB-8481-465E1CB50612}"/>
+                <a16:creationId xmlns:a16="http://schemas.microsoft.com/office/drawing/2014/main" id="{799BF6E7-C093-4533-82A6-EAB6CB187A9A}"/>
               </a:ext>
             </a:extLst>
           </p:cNvPr>
@@ -8799,7 +8927,7 @@
     </p:spTree>
     <p:extLst>
       <p:ext uri="{BB962C8B-B14F-4D97-AF65-F5344CB8AC3E}">
-        <p14:creationId xmlns:p14="http://schemas.microsoft.com/office/powerpoint/2010/main" val="525681534"/>
+        <p14:creationId xmlns:p14="http://schemas.microsoft.com/office/powerpoint/2010/main" val="129106210"/>
       </p:ext>
     </p:extLst>
   </p:cSld>
@@ -8830,7 +8958,7 @@
           <p:cNvPr id="1" name="s7-rule">
             <a:extLst xmlns:a="http://schemas.openxmlformats.org/drawingml/2006/main">
               <a:ext uri="{FF2B5EF4-FFF2-40B4-BE49-F238E27FC236}">
-                <a16:creationId xmlns:a16="http://schemas.microsoft.com/office/drawing/2014/main" id="{C933C7DF-629F-4904-B0BC-453CE97409C1}"/>
+                <a16:creationId xmlns:a16="http://schemas.microsoft.com/office/drawing/2014/main" id="{285ABC0E-4F66-4191-9F1F-857F204B3E2B}"/>
               </a:ext>
             </a:extLst>
           </p:cNvPr>
@@ -8863,7 +8991,7 @@
           <p:cNvPr id="2" name="s7-eyebrow">
             <a:extLst xmlns:a="http://schemas.openxmlformats.org/drawingml/2006/main">
               <a:ext uri="{FF2B5EF4-FFF2-40B4-BE49-F238E27FC236}">
-                <a16:creationId xmlns:a16="http://schemas.microsoft.com/office/drawing/2014/main" id="{39D12E9F-B8FC-47DC-9B6B-528D2F8603EE}"/>
+                <a16:creationId xmlns:a16="http://schemas.microsoft.com/office/drawing/2014/main" id="{33E8FDE6-A27F-475B-8494-1429F623EEF2}"/>
               </a:ext>
             </a:extLst>
           </p:cNvPr>
@@ -8921,7 +9049,7 @@
           <p:cNvPr id="3" name="s7-title">
             <a:extLst xmlns:a="http://schemas.openxmlformats.org/drawingml/2006/main">
               <a:ext uri="{FF2B5EF4-FFF2-40B4-BE49-F238E27FC236}">
-                <a16:creationId xmlns:a16="http://schemas.microsoft.com/office/drawing/2014/main" id="{A8277572-8AB8-437C-A7BC-198B980BE34E}"/>
+                <a16:creationId xmlns:a16="http://schemas.microsoft.com/office/drawing/2014/main" id="{811EADB1-0534-416D-9835-4534295F4767}"/>
               </a:ext>
             </a:extLst>
           </p:cNvPr>
@@ -8979,7 +9107,7 @@
           <p:cNvPr id="4" name="s7-footer">
             <a:extLst xmlns:a="http://schemas.openxmlformats.org/drawingml/2006/main">
               <a:ext uri="{FF2B5EF4-FFF2-40B4-BE49-F238E27FC236}">
-                <a16:creationId xmlns:a16="http://schemas.microsoft.com/office/drawing/2014/main" id="{A5105680-AD6E-4A43-9D76-9E1C756EFAF5}"/>
+                <a16:creationId xmlns:a16="http://schemas.microsoft.com/office/drawing/2014/main" id="{EFEF8F5D-BBDF-4BB2-971B-7CA53E708D87}"/>
               </a:ext>
             </a:extLst>
           </p:cNvPr>
@@ -9010,7 +9138,7 @@
           <p:cNvPr id="5" name="s7-identity">
             <a:extLst xmlns:a="http://schemas.openxmlformats.org/drawingml/2006/main">
               <a:ext uri="{FF2B5EF4-FFF2-40B4-BE49-F238E27FC236}">
-                <a16:creationId xmlns:a16="http://schemas.microsoft.com/office/drawing/2014/main" id="{8E32A9E6-CEC5-4E98-899E-4F4527AC1CC2}"/>
+                <a16:creationId xmlns:a16="http://schemas.microsoft.com/office/drawing/2014/main" id="{E08BE509-6AF6-427F-821E-149D05708415}"/>
               </a:ext>
             </a:extLst>
           </p:cNvPr>
@@ -9068,7 +9196,7 @@
           <p:cNvPr id="6" name="core-no-0">
             <a:extLst xmlns:a="http://schemas.openxmlformats.org/drawingml/2006/main">
               <a:ext uri="{FF2B5EF4-FFF2-40B4-BE49-F238E27FC236}">
-                <a16:creationId xmlns:a16="http://schemas.microsoft.com/office/drawing/2014/main" id="{BFD6AAB9-2FB1-42C3-B8C2-BC3802DC4047}"/>
+                <a16:creationId xmlns:a16="http://schemas.microsoft.com/office/drawing/2014/main" id="{FB7F04CA-3EFA-49EF-90ED-F36E8DE897E7}"/>
               </a:ext>
             </a:extLst>
           </p:cNvPr>
@@ -9100,7 +9228,7 @@
             <a:pPr algn="l">
               <a:defRPr sz="2250" b="1">
                 <a:solidFill>
-                  <a:srgbClr val="17A6C8"/>
+                  <a:srgbClr val="006B80"/>
                 </a:solidFill>
                 <a:latin typeface="PingFang SC"/>
                 <a:ea typeface="PingFang SC"/>
@@ -9110,7 +9238,7 @@
             <a:r>
               <a:rPr sz="2250" b="1">
                 <a:solidFill>
-                  <a:srgbClr val="17A6C8"/>
+                  <a:srgbClr val="006B80"/>
                 </a:solidFill>
                 <a:latin typeface="PingFang SC"/>
                 <a:ea typeface="PingFang SC"/>
@@ -9126,7 +9254,7 @@
           <p:cNvPr id="7" name="core-label-0">
             <a:extLst xmlns:a="http://schemas.openxmlformats.org/drawingml/2006/main">
               <a:ext uri="{FF2B5EF4-FFF2-40B4-BE49-F238E27FC236}">
-                <a16:creationId xmlns:a16="http://schemas.microsoft.com/office/drawing/2014/main" id="{548B7A13-7BCE-4F83-938A-7FEBEB1D6552}"/>
+                <a16:creationId xmlns:a16="http://schemas.microsoft.com/office/drawing/2014/main" id="{BDB8D740-B751-457B-A2F6-BEA6DA6DEEEC}"/>
               </a:ext>
             </a:extLst>
           </p:cNvPr>
@@ -9184,7 +9312,7 @@
           <p:cNvPr id="8" name="core-body-0">
             <a:extLst xmlns:a="http://schemas.openxmlformats.org/drawingml/2006/main">
               <a:ext uri="{FF2B5EF4-FFF2-40B4-BE49-F238E27FC236}">
-                <a16:creationId xmlns:a16="http://schemas.microsoft.com/office/drawing/2014/main" id="{AA09D8E9-8D46-4F97-AC44-B9526BBD3291}"/>
+                <a16:creationId xmlns:a16="http://schemas.microsoft.com/office/drawing/2014/main" id="{F4060012-B30C-4DC7-960D-D15D8E6E5AAC}"/>
               </a:ext>
             </a:extLst>
           </p:cNvPr>
@@ -9208,14 +9336,14 @@
           </a:solidFill>
           <a:ln xmlns:a="http://schemas.openxmlformats.org/drawingml/2006/main" w="19050">
             <a:solidFill>
-              <a:srgbClr val="17A6C8"/>
+              <a:srgbClr val="006B80"/>
             </a:solidFill>
             <a:prstDash val="solid"/>
           </a:ln>
         </p:spPr>
         <p:txBody>
           <a:bodyPr xmlns:a="http://schemas.openxmlformats.org/drawingml/2006/main" lIns="152400" tIns="133350" rIns="152400" bIns="133350" anchor="ctr">
-            <a:normAutofit fontScale="98233"/>
+            <a:normAutofit fontScale="100000"/>
           </a:bodyPr>
           <a:lstStyle xmlns:a="http://schemas.openxmlformats.org/drawingml/2006/main"/>
           <a:p xmlns:a="http://schemas.openxmlformats.org/drawingml/2006/main">
@@ -9238,7 +9366,7 @@
                 <a:ea typeface="PingFang SC"/>
                 <a:cs typeface="PingFang SC"/>
               </a:rPr>
-              <a:t>审核项应包含任务摘要、拟执行动作、影响对象、关键证据、触发规则、系统建议、可选决定和截止时间。队列可按影响与时效分级，例如高影响外发优先于普通低置信度摘要。审核人应能选择批准、修改后批准…</a:t>
+              <a:t>审核项应包含任务摘要、拟执行动作、影响对象、关键证据、触发规则、系统建议、可选决定和截止时间；队列可按影响与时效分级；例如高影响外发优先于普通低置信度摘要</a:t>
             </a:r>
           </a:p>
         </p:txBody>
@@ -9248,7 +9376,7 @@
           <p:cNvPr id="9" name="core-no-1">
             <a:extLst xmlns:a="http://schemas.openxmlformats.org/drawingml/2006/main">
               <a:ext uri="{FF2B5EF4-FFF2-40B4-BE49-F238E27FC236}">
-                <a16:creationId xmlns:a16="http://schemas.microsoft.com/office/drawing/2014/main" id="{685F2308-D61B-4FCC-9535-528153DE9F16}"/>
+                <a16:creationId xmlns:a16="http://schemas.microsoft.com/office/drawing/2014/main" id="{C8BFF133-C1B5-44FE-B56D-EA6F2E43ADF2}"/>
               </a:ext>
             </a:extLst>
           </p:cNvPr>
@@ -9280,7 +9408,7 @@
             <a:pPr algn="l">
               <a:defRPr sz="2250" b="1">
                 <a:solidFill>
-                  <a:srgbClr val="17A6C8"/>
+                  <a:srgbClr val="006B80"/>
                 </a:solidFill>
                 <a:latin typeface="PingFang SC"/>
                 <a:ea typeface="PingFang SC"/>
@@ -9290,7 +9418,7 @@
             <a:r>
               <a:rPr sz="2250" b="1">
                 <a:solidFill>
-                  <a:srgbClr val="17A6C8"/>
+                  <a:srgbClr val="006B80"/>
                 </a:solidFill>
                 <a:latin typeface="PingFang SC"/>
                 <a:ea typeface="PingFang SC"/>
@@ -9306,7 +9434,7 @@
           <p:cNvPr id="10" name="core-body-1">
             <a:extLst xmlns:a="http://schemas.openxmlformats.org/drawingml/2006/main">
               <a:ext uri="{FF2B5EF4-FFF2-40B4-BE49-F238E27FC236}">
-                <a16:creationId xmlns:a16="http://schemas.microsoft.com/office/drawing/2014/main" id="{81ED14B6-C6AB-443A-9942-0B24B27CB53D}"/>
+                <a16:creationId xmlns:a16="http://schemas.microsoft.com/office/drawing/2014/main" id="{617A9F06-F7E4-4B02-8096-EC07CB033930}"/>
               </a:ext>
             </a:extLst>
           </p:cNvPr>
@@ -9370,7 +9498,7 @@
           <p:cNvPr id="11" name="s7-takeaway-rule">
             <a:extLst xmlns:a="http://schemas.openxmlformats.org/drawingml/2006/main">
               <a:ext uri="{FF2B5EF4-FFF2-40B4-BE49-F238E27FC236}">
-                <a16:creationId xmlns:a16="http://schemas.microsoft.com/office/drawing/2014/main" id="{727FC427-575E-49C3-AB27-466C95CDCAD9}"/>
+                <a16:creationId xmlns:a16="http://schemas.microsoft.com/office/drawing/2014/main" id="{35B070E8-7C49-490D-AA05-B83837B8AF1E}"/>
               </a:ext>
             </a:extLst>
           </p:cNvPr>
@@ -9403,7 +9531,7 @@
           <p:cNvPr id="12" name="s7-takeaway">
             <a:extLst xmlns:a="http://schemas.openxmlformats.org/drawingml/2006/main">
               <a:ext uri="{FF2B5EF4-FFF2-40B4-BE49-F238E27FC236}">
-                <a16:creationId xmlns:a16="http://schemas.microsoft.com/office/drawing/2014/main" id="{8286A551-1BE8-4C10-9BDA-DB53551C9044}"/>
+                <a16:creationId xmlns:a16="http://schemas.microsoft.com/office/drawing/2014/main" id="{43CA5B41-67CA-4AE2-B51B-C9E6906EC191}"/>
               </a:ext>
             </a:extLst>
           </p:cNvPr>
@@ -9459,7 +9587,7 @@
     </p:spTree>
     <p:extLst>
       <p:ext uri="{BB962C8B-B14F-4D97-AF65-F5344CB8AC3E}">
-        <p14:creationId xmlns:p14="http://schemas.microsoft.com/office/powerpoint/2010/main" val="1217877664"/>
+        <p14:creationId xmlns:p14="http://schemas.microsoft.com/office/powerpoint/2010/main" val="446086702"/>
       </p:ext>
     </p:extLst>
   </p:cSld>
@@ -9490,7 +9618,7 @@
           <p:cNvPr id="1" name="s8-rule">
             <a:extLst xmlns:a="http://schemas.openxmlformats.org/drawingml/2006/main">
               <a:ext uri="{FF2B5EF4-FFF2-40B4-BE49-F238E27FC236}">
-                <a16:creationId xmlns:a16="http://schemas.microsoft.com/office/drawing/2014/main" id="{C59080F9-145B-4F85-9BE3-18F186BE22F7}"/>
+                <a16:creationId xmlns:a16="http://schemas.microsoft.com/office/drawing/2014/main" id="{52A8A353-7459-4D71-87C0-CF1D725B3F92}"/>
               </a:ext>
             </a:extLst>
           </p:cNvPr>
@@ -9523,7 +9651,7 @@
           <p:cNvPr id="2" name="s8-eyebrow">
             <a:extLst xmlns:a="http://schemas.openxmlformats.org/drawingml/2006/main">
               <a:ext uri="{FF2B5EF4-FFF2-40B4-BE49-F238E27FC236}">
-                <a16:creationId xmlns:a16="http://schemas.microsoft.com/office/drawing/2014/main" id="{69CFBE66-D47F-4E16-884F-A7131719BA51}"/>
+                <a16:creationId xmlns:a16="http://schemas.microsoft.com/office/drawing/2014/main" id="{6B77D0F3-8F87-4E2F-8AB9-9D5848204289}"/>
               </a:ext>
             </a:extLst>
           </p:cNvPr>
@@ -9581,7 +9709,7 @@
           <p:cNvPr id="3" name="s8-title">
             <a:extLst xmlns:a="http://schemas.openxmlformats.org/drawingml/2006/main">
               <a:ext uri="{FF2B5EF4-FFF2-40B4-BE49-F238E27FC236}">
-                <a16:creationId xmlns:a16="http://schemas.microsoft.com/office/drawing/2014/main" id="{CB06D205-4D31-4A1A-A68E-002FC11A3908}"/>
+                <a16:creationId xmlns:a16="http://schemas.microsoft.com/office/drawing/2014/main" id="{BACC4543-23D8-463C-9BCA-D8DEC3E5A341}"/>
               </a:ext>
             </a:extLst>
           </p:cNvPr>
@@ -9639,7 +9767,7 @@
           <p:cNvPr id="4" name="s8-footer">
             <a:extLst xmlns:a="http://schemas.openxmlformats.org/drawingml/2006/main">
               <a:ext uri="{FF2B5EF4-FFF2-40B4-BE49-F238E27FC236}">
-                <a16:creationId xmlns:a16="http://schemas.microsoft.com/office/drawing/2014/main" id="{FD4631CA-9BF6-4143-A5B8-8525ACBEF24A}"/>
+                <a16:creationId xmlns:a16="http://schemas.microsoft.com/office/drawing/2014/main" id="{7D7579B4-288F-4F95-9DA2-0445FBEDCD1E}"/>
               </a:ext>
             </a:extLst>
           </p:cNvPr>
@@ -9670,7 +9798,7 @@
           <p:cNvPr id="5" name="s8-identity">
             <a:extLst xmlns:a="http://schemas.openxmlformats.org/drawingml/2006/main">
               <a:ext uri="{FF2B5EF4-FFF2-40B4-BE49-F238E27FC236}">
-                <a16:creationId xmlns:a16="http://schemas.microsoft.com/office/drawing/2014/main" id="{EE361269-ADC5-470F-85BC-FB1574A23A41}"/>
+                <a16:creationId xmlns:a16="http://schemas.microsoft.com/office/drawing/2014/main" id="{40B4AC81-F426-4DF5-88B9-7728BEFC6F6D}"/>
               </a:ext>
             </a:extLst>
           </p:cNvPr>
@@ -9728,7 +9856,7 @@
           <p:cNvPr id="6" name="core-no-0">
             <a:extLst xmlns:a="http://schemas.openxmlformats.org/drawingml/2006/main">
               <a:ext uri="{FF2B5EF4-FFF2-40B4-BE49-F238E27FC236}">
-                <a16:creationId xmlns:a16="http://schemas.microsoft.com/office/drawing/2014/main" id="{8489340C-DC95-464A-B4BE-4F3F53A870B4}"/>
+                <a16:creationId xmlns:a16="http://schemas.microsoft.com/office/drawing/2014/main" id="{F209FBC0-EA75-4711-BB77-C9B3E80FC8A8}"/>
               </a:ext>
             </a:extLst>
           </p:cNvPr>
@@ -9760,7 +9888,7 @@
             <a:pPr algn="l">
               <a:defRPr sz="2250" b="1">
                 <a:solidFill>
-                  <a:srgbClr val="17A6C8"/>
+                  <a:srgbClr val="006B80"/>
                 </a:solidFill>
                 <a:latin typeface="PingFang SC"/>
                 <a:ea typeface="PingFang SC"/>
@@ -9770,7 +9898,7 @@
             <a:r>
               <a:rPr sz="2250" b="1">
                 <a:solidFill>
-                  <a:srgbClr val="17A6C8"/>
+                  <a:srgbClr val="006B80"/>
                 </a:solidFill>
                 <a:latin typeface="PingFang SC"/>
                 <a:ea typeface="PingFang SC"/>
@@ -9786,7 +9914,7 @@
           <p:cNvPr id="7" name="core-label-0">
             <a:extLst xmlns:a="http://schemas.openxmlformats.org/drawingml/2006/main">
               <a:ext uri="{FF2B5EF4-FFF2-40B4-BE49-F238E27FC236}">
-                <a16:creationId xmlns:a16="http://schemas.microsoft.com/office/drawing/2014/main" id="{4D33CFFA-004B-42CD-A227-0F71C2AC8FB3}"/>
+                <a16:creationId xmlns:a16="http://schemas.microsoft.com/office/drawing/2014/main" id="{98A9A6B8-4D37-400C-BDAD-CC91F72C4578}"/>
               </a:ext>
             </a:extLst>
           </p:cNvPr>
@@ -9844,7 +9972,7 @@
           <p:cNvPr id="8" name="core-body-0">
             <a:extLst xmlns:a="http://schemas.openxmlformats.org/drawingml/2006/main">
               <a:ext uri="{FF2B5EF4-FFF2-40B4-BE49-F238E27FC236}">
-                <a16:creationId xmlns:a16="http://schemas.microsoft.com/office/drawing/2014/main" id="{3D9E49AB-863E-4AFD-8A42-13627E172A90}"/>
+                <a16:creationId xmlns:a16="http://schemas.microsoft.com/office/drawing/2014/main" id="{82EFB8CD-C22A-48E3-A7CB-DDECCE1AF139}"/>
               </a:ext>
             </a:extLst>
           </p:cNvPr>
@@ -9868,7 +9996,7 @@
           </a:solidFill>
           <a:ln xmlns:a="http://schemas.openxmlformats.org/drawingml/2006/main" w="19050">
             <a:solidFill>
-              <a:srgbClr val="17A6C8"/>
+              <a:srgbClr val="006B80"/>
             </a:solidFill>
             <a:prstDash val="solid"/>
           </a:ln>
@@ -9898,7 +10026,7 @@
                 <a:ea typeface="PingFang SC"/>
                 <a:cs typeface="PingFang SC"/>
               </a:rPr>
-              <a:t>在读取完成、草稿生成、审核通过和写入成功等边界保存恢复点，记录输入版本、已验证产物、外部副作用和下一步。写入工具应尽量使用幂等请求标识；无法撤销的动作要在执行前形成预览…</a:t>
+              <a:t>在读取完成、草稿生成、审核通过和写入成功等边界保存恢复点；记录输入版本、已验证产物、外部副作用和下一步；写入工具应尽量使用幂等请求标识；无法撤销的动作要在执行前形成预览</a:t>
             </a:r>
           </a:p>
         </p:txBody>
@@ -9908,7 +10036,7 @@
           <p:cNvPr id="9" name="core-no-1">
             <a:extLst xmlns:a="http://schemas.openxmlformats.org/drawingml/2006/main">
               <a:ext uri="{FF2B5EF4-FFF2-40B4-BE49-F238E27FC236}">
-                <a16:creationId xmlns:a16="http://schemas.microsoft.com/office/drawing/2014/main" id="{39D10D43-C150-4D34-AC74-B5AC6EA36EC9}"/>
+                <a16:creationId xmlns:a16="http://schemas.microsoft.com/office/drawing/2014/main" id="{90DE4DE7-0F6C-4DE7-9E54-32D24B490379}"/>
               </a:ext>
             </a:extLst>
           </p:cNvPr>
@@ -9940,7 +10068,7 @@
             <a:pPr algn="l">
               <a:defRPr sz="2250" b="1">
                 <a:solidFill>
-                  <a:srgbClr val="17A6C8"/>
+                  <a:srgbClr val="006B80"/>
                 </a:solidFill>
                 <a:latin typeface="PingFang SC"/>
                 <a:ea typeface="PingFang SC"/>
@@ -9950,7 +10078,7 @@
             <a:r>
               <a:rPr sz="2250" b="1">
                 <a:solidFill>
-                  <a:srgbClr val="17A6C8"/>
+                  <a:srgbClr val="006B80"/>
                 </a:solidFill>
                 <a:latin typeface="PingFang SC"/>
                 <a:ea typeface="PingFang SC"/>
@@ -9966,7 +10094,7 @@
           <p:cNvPr id="10" name="core-body-1">
             <a:extLst xmlns:a="http://schemas.openxmlformats.org/drawingml/2006/main">
               <a:ext uri="{FF2B5EF4-FFF2-40B4-BE49-F238E27FC236}">
-                <a16:creationId xmlns:a16="http://schemas.microsoft.com/office/drawing/2014/main" id="{73BD747D-1F12-45EA-B064-E3E8E3D71DD6}"/>
+                <a16:creationId xmlns:a16="http://schemas.microsoft.com/office/drawing/2014/main" id="{65CB3668-175E-4180-9266-177787B00F94}"/>
               </a:ext>
             </a:extLst>
           </p:cNvPr>
@@ -10030,7 +10158,7 @@
           <p:cNvPr id="11" name="s8-takeaway-rule">
             <a:extLst xmlns:a="http://schemas.openxmlformats.org/drawingml/2006/main">
               <a:ext uri="{FF2B5EF4-FFF2-40B4-BE49-F238E27FC236}">
-                <a16:creationId xmlns:a16="http://schemas.microsoft.com/office/drawing/2014/main" id="{440C33AA-D354-4B9D-BE5D-2D7480579C3F}"/>
+                <a16:creationId xmlns:a16="http://schemas.microsoft.com/office/drawing/2014/main" id="{8EFF0F01-EC2C-4318-A7AF-EE3998BB263B}"/>
               </a:ext>
             </a:extLst>
           </p:cNvPr>
@@ -10063,7 +10191,7 @@
           <p:cNvPr id="12" name="s8-takeaway">
             <a:extLst xmlns:a="http://schemas.openxmlformats.org/drawingml/2006/main">
               <a:ext uri="{FF2B5EF4-FFF2-40B4-BE49-F238E27FC236}">
-                <a16:creationId xmlns:a16="http://schemas.microsoft.com/office/drawing/2014/main" id="{9927D6E8-4865-42FB-BA5F-26B6C32CC292}"/>
+                <a16:creationId xmlns:a16="http://schemas.microsoft.com/office/drawing/2014/main" id="{AC6E5843-DF06-41D0-B8B2-4DF8CA75D51A}"/>
               </a:ext>
             </a:extLst>
           </p:cNvPr>
@@ -10119,7 +10247,7 @@
     </p:spTree>
     <p:extLst>
       <p:ext uri="{BB962C8B-B14F-4D97-AF65-F5344CB8AC3E}">
-        <p14:creationId xmlns:p14="http://schemas.microsoft.com/office/powerpoint/2010/main" val="2101162327"/>
+        <p14:creationId xmlns:p14="http://schemas.microsoft.com/office/powerpoint/2010/main" val="1281456522"/>
       </p:ext>
     </p:extLst>
   </p:cSld>
@@ -10150,7 +10278,7 @@
           <p:cNvPr id="1" name="s9-rule">
             <a:extLst xmlns:a="http://schemas.openxmlformats.org/drawingml/2006/main">
               <a:ext uri="{FF2B5EF4-FFF2-40B4-BE49-F238E27FC236}">
-                <a16:creationId xmlns:a16="http://schemas.microsoft.com/office/drawing/2014/main" id="{79106EDC-D6E3-49BF-8C9B-69675760CF65}"/>
+                <a16:creationId xmlns:a16="http://schemas.microsoft.com/office/drawing/2014/main" id="{48FBEF3C-38E9-4DA1-848E-66C168626056}"/>
               </a:ext>
             </a:extLst>
           </p:cNvPr>
@@ -10183,7 +10311,7 @@
           <p:cNvPr id="2" name="s9-eyebrow">
             <a:extLst xmlns:a="http://schemas.openxmlformats.org/drawingml/2006/main">
               <a:ext uri="{FF2B5EF4-FFF2-40B4-BE49-F238E27FC236}">
-                <a16:creationId xmlns:a16="http://schemas.microsoft.com/office/drawing/2014/main" id="{3C0F8B5C-974E-49DC-80DA-CFF15DBD6002}"/>
+                <a16:creationId xmlns:a16="http://schemas.microsoft.com/office/drawing/2014/main" id="{448748EA-D02C-4CEB-A077-E263FE5C61CD}"/>
               </a:ext>
             </a:extLst>
           </p:cNvPr>
@@ -10241,7 +10369,7 @@
           <p:cNvPr id="3" name="s9-title">
             <a:extLst xmlns:a="http://schemas.openxmlformats.org/drawingml/2006/main">
               <a:ext uri="{FF2B5EF4-FFF2-40B4-BE49-F238E27FC236}">
-                <a16:creationId xmlns:a16="http://schemas.microsoft.com/office/drawing/2014/main" id="{43EF9E54-7BFC-429D-BCEA-FAB537F3C833}"/>
+                <a16:creationId xmlns:a16="http://schemas.microsoft.com/office/drawing/2014/main" id="{A53ADD0E-0283-493C-8844-2CF5D41B0E6B}"/>
               </a:ext>
             </a:extLst>
           </p:cNvPr>
@@ -10299,7 +10427,7 @@
           <p:cNvPr id="4" name="s9-footer">
             <a:extLst xmlns:a="http://schemas.openxmlformats.org/drawingml/2006/main">
               <a:ext uri="{FF2B5EF4-FFF2-40B4-BE49-F238E27FC236}">
-                <a16:creationId xmlns:a16="http://schemas.microsoft.com/office/drawing/2014/main" id="{D0574486-99F4-4956-BD48-5E0E793C22D8}"/>
+                <a16:creationId xmlns:a16="http://schemas.microsoft.com/office/drawing/2014/main" id="{9484EB3E-5891-4D43-B453-FEC91B92AEBF}"/>
               </a:ext>
             </a:extLst>
           </p:cNvPr>
@@ -10330,7 +10458,7 @@
           <p:cNvPr id="5" name="s9-identity">
             <a:extLst xmlns:a="http://schemas.openxmlformats.org/drawingml/2006/main">
               <a:ext uri="{FF2B5EF4-FFF2-40B4-BE49-F238E27FC236}">
-                <a16:creationId xmlns:a16="http://schemas.microsoft.com/office/drawing/2014/main" id="{CB689B4A-8725-42F1-B84E-EFDE9521383B}"/>
+                <a16:creationId xmlns:a16="http://schemas.microsoft.com/office/drawing/2014/main" id="{4928F1CC-F663-47D6-9161-515D7F8815BC}"/>
               </a:ext>
             </a:extLst>
           </p:cNvPr>
@@ -10388,7 +10516,7 @@
           <p:cNvPr id="6" name="core-no-0">
             <a:extLst xmlns:a="http://schemas.openxmlformats.org/drawingml/2006/main">
               <a:ext uri="{FF2B5EF4-FFF2-40B4-BE49-F238E27FC236}">
-                <a16:creationId xmlns:a16="http://schemas.microsoft.com/office/drawing/2014/main" id="{599113F4-0501-460C-AEBF-C831FB6EB32B}"/>
+                <a16:creationId xmlns:a16="http://schemas.microsoft.com/office/drawing/2014/main" id="{923E0B4A-90B9-4160-A9E2-67D0A4FC6C06}"/>
               </a:ext>
             </a:extLst>
           </p:cNvPr>
@@ -10420,7 +10548,7 @@
             <a:pPr algn="l">
               <a:defRPr sz="2250" b="1">
                 <a:solidFill>
-                  <a:srgbClr val="17A6C8"/>
+                  <a:srgbClr val="006B80"/>
                 </a:solidFill>
                 <a:latin typeface="PingFang SC"/>
                 <a:ea typeface="PingFang SC"/>
@@ -10430,7 +10558,7 @@
             <a:r>
               <a:rPr sz="2250" b="1">
                 <a:solidFill>
-                  <a:srgbClr val="17A6C8"/>
+                  <a:srgbClr val="006B80"/>
                 </a:solidFill>
                 <a:latin typeface="PingFang SC"/>
                 <a:ea typeface="PingFang SC"/>
@@ -10446,7 +10574,7 @@
           <p:cNvPr id="7" name="core-label-0">
             <a:extLst xmlns:a="http://schemas.openxmlformats.org/drawingml/2006/main">
               <a:ext uri="{FF2B5EF4-FFF2-40B4-BE49-F238E27FC236}">
-                <a16:creationId xmlns:a16="http://schemas.microsoft.com/office/drawing/2014/main" id="{4621DF9A-4948-4CE5-9B4D-7C789C7CC681}"/>
+                <a16:creationId xmlns:a16="http://schemas.microsoft.com/office/drawing/2014/main" id="{81767381-3B0E-491C-B541-CE10F421975E}"/>
               </a:ext>
             </a:extLst>
           </p:cNvPr>
@@ -10504,7 +10632,7 @@
           <p:cNvPr id="8" name="core-body-0">
             <a:extLst xmlns:a="http://schemas.openxmlformats.org/drawingml/2006/main">
               <a:ext uri="{FF2B5EF4-FFF2-40B4-BE49-F238E27FC236}">
-                <a16:creationId xmlns:a16="http://schemas.microsoft.com/office/drawing/2014/main" id="{5E8FE228-EF75-4AD9-990A-6B7547487E7C}"/>
+                <a16:creationId xmlns:a16="http://schemas.microsoft.com/office/drawing/2014/main" id="{05EFD9A7-3ABC-414F-B3C9-D9C23F4F7084}"/>
               </a:ext>
             </a:extLst>
           </p:cNvPr>
@@ -10528,7 +10656,7 @@
           </a:solidFill>
           <a:ln xmlns:a="http://schemas.openxmlformats.org/drawingml/2006/main" w="19050">
             <a:solidFill>
-              <a:srgbClr val="17A6C8"/>
+              <a:srgbClr val="006B80"/>
             </a:solidFill>
             <a:prstDash val="solid"/>
           </a:ln>
@@ -10568,7 +10696,7 @@
           <p:cNvPr id="9" name="s9-takeaway-rule">
             <a:extLst xmlns:a="http://schemas.openxmlformats.org/drawingml/2006/main">
               <a:ext uri="{FF2B5EF4-FFF2-40B4-BE49-F238E27FC236}">
-                <a16:creationId xmlns:a16="http://schemas.microsoft.com/office/drawing/2014/main" id="{54A8E960-EC8A-4E9E-837F-583BF14D8A72}"/>
+                <a16:creationId xmlns:a16="http://schemas.microsoft.com/office/drawing/2014/main" id="{A770B1DA-A404-4F39-B264-57732748A106}"/>
               </a:ext>
             </a:extLst>
           </p:cNvPr>
@@ -10601,7 +10729,7 @@
           <p:cNvPr id="10" name="s9-takeaway">
             <a:extLst xmlns:a="http://schemas.openxmlformats.org/drawingml/2006/main">
               <a:ext uri="{FF2B5EF4-FFF2-40B4-BE49-F238E27FC236}">
-                <a16:creationId xmlns:a16="http://schemas.microsoft.com/office/drawing/2014/main" id="{1E9D6B0B-13DA-4EE9-8E93-8D4861ACB044}"/>
+                <a16:creationId xmlns:a16="http://schemas.microsoft.com/office/drawing/2014/main" id="{40B8630A-7170-462B-9464-FF90D9300905}"/>
               </a:ext>
             </a:extLst>
           </p:cNvPr>
@@ -10657,7 +10785,7 @@
     </p:spTree>
     <p:extLst>
       <p:ext uri="{BB962C8B-B14F-4D97-AF65-F5344CB8AC3E}">
-        <p14:creationId xmlns:p14="http://schemas.microsoft.com/office/powerpoint/2010/main" val="300711482"/>
+        <p14:creationId xmlns:p14="http://schemas.microsoft.com/office/powerpoint/2010/main" val="660185610"/>
       </p:ext>
     </p:extLst>
   </p:cSld>

--- a/docs/public/course-assets/course-pptx/ag-005.pptx
+++ b/docs/public/course-assets/course-pptx/ag-005.pptx
@@ -2,25 +2,25 @@
 <file path=ppt/presentation.xml><?xml version="1.0" encoding="utf-8"?>
 <p:presentation xmlns:p="http://schemas.openxmlformats.org/presentationml/2006/main">
   <p:sldMasterIdLst>
-    <p:sldMasterId xmlns:r="http://schemas.openxmlformats.org/officeDocument/2006/relationships" id="2147483648" r:id="R303e086002a1487b"/>
+    <p:sldMasterId xmlns:r="http://schemas.openxmlformats.org/officeDocument/2006/relationships" id="2147483648" r:id="Rf683256d291846c5"/>
   </p:sldMasterIdLst>
   <p:notesMasterIdLst>
-    <p:notesMasterId xmlns:r="http://schemas.openxmlformats.org/officeDocument/2006/relationships" r:id="R04a74cd392ae42e6"/>
+    <p:notesMasterId xmlns:r="http://schemas.openxmlformats.org/officeDocument/2006/relationships" r:id="R4e7984d4dabb41f8"/>
   </p:notesMasterIdLst>
   <p:sldIdLst>
-    <p:sldId xmlns:r="http://schemas.openxmlformats.org/officeDocument/2006/relationships" id="256" r:id="R84e921d4882e4298"/>
-    <p:sldId xmlns:r="http://schemas.openxmlformats.org/officeDocument/2006/relationships" id="257" r:id="Rd130ac8cebcb4eb8"/>
-    <p:sldId xmlns:r="http://schemas.openxmlformats.org/officeDocument/2006/relationships" id="258" r:id="R22434d4fb45c4472"/>
-    <p:sldId xmlns:r="http://schemas.openxmlformats.org/officeDocument/2006/relationships" id="259" r:id="R67c28cd4afec48d3"/>
-    <p:sldId xmlns:r="http://schemas.openxmlformats.org/officeDocument/2006/relationships" id="260" r:id="R9c27bf41da1b4fce"/>
-    <p:sldId xmlns:r="http://schemas.openxmlformats.org/officeDocument/2006/relationships" id="261" r:id="R73685ca486394c3d"/>
-    <p:sldId xmlns:r="http://schemas.openxmlformats.org/officeDocument/2006/relationships" id="262" r:id="Rbd74e972298842bd"/>
-    <p:sldId xmlns:r="http://schemas.openxmlformats.org/officeDocument/2006/relationships" id="263" r:id="R595915b19bf34a75"/>
-    <p:sldId xmlns:r="http://schemas.openxmlformats.org/officeDocument/2006/relationships" id="264" r:id="R86405032c68d47d5"/>
-    <p:sldId xmlns:r="http://schemas.openxmlformats.org/officeDocument/2006/relationships" id="265" r:id="R60ba4e4b377e4e27"/>
-    <p:sldId xmlns:r="http://schemas.openxmlformats.org/officeDocument/2006/relationships" id="266" r:id="R8b91d5792e5f48af"/>
-    <p:sldId xmlns:r="http://schemas.openxmlformats.org/officeDocument/2006/relationships" id="267" r:id="Rd503a74a42e94b0d"/>
-    <p:sldId xmlns:r="http://schemas.openxmlformats.org/officeDocument/2006/relationships" id="268" r:id="R739782eefc394341"/>
+    <p:sldId xmlns:r="http://schemas.openxmlformats.org/officeDocument/2006/relationships" id="256" r:id="Re790e1d7b4514f86"/>
+    <p:sldId xmlns:r="http://schemas.openxmlformats.org/officeDocument/2006/relationships" id="257" r:id="R610934e12cfe4165"/>
+    <p:sldId xmlns:r="http://schemas.openxmlformats.org/officeDocument/2006/relationships" id="258" r:id="R31d8910adbd1487c"/>
+    <p:sldId xmlns:r="http://schemas.openxmlformats.org/officeDocument/2006/relationships" id="259" r:id="Rf726550cb968428a"/>
+    <p:sldId xmlns:r="http://schemas.openxmlformats.org/officeDocument/2006/relationships" id="260" r:id="Rf4a9425219e6474d"/>
+    <p:sldId xmlns:r="http://schemas.openxmlformats.org/officeDocument/2006/relationships" id="261" r:id="R43cd5416e2b84531"/>
+    <p:sldId xmlns:r="http://schemas.openxmlformats.org/officeDocument/2006/relationships" id="262" r:id="Re9618afc2c504dee"/>
+    <p:sldId xmlns:r="http://schemas.openxmlformats.org/officeDocument/2006/relationships" id="263" r:id="R766b837ee5df425d"/>
+    <p:sldId xmlns:r="http://schemas.openxmlformats.org/officeDocument/2006/relationships" id="264" r:id="Re017d03631d942e9"/>
+    <p:sldId xmlns:r="http://schemas.openxmlformats.org/officeDocument/2006/relationships" id="265" r:id="R5d9a935d263a41f2"/>
+    <p:sldId xmlns:r="http://schemas.openxmlformats.org/officeDocument/2006/relationships" id="266" r:id="R09dfae5bbeaa4f50"/>
+    <p:sldId xmlns:r="http://schemas.openxmlformats.org/officeDocument/2006/relationships" id="267" r:id="Rd72f45ad28b24276"/>
+    <p:sldId xmlns:r="http://schemas.openxmlformats.org/officeDocument/2006/relationships" id="268" r:id="R708c6fc0fc144538"/>
   </p:sldIdLst>
   <p:sldSz cx="12192000" cy="6858000"/>
   <p:notesSz cx="6858000" cy="9144000"/>
@@ -1405,7 +1405,7 @@
   </p:cSld>
   <p:clrMap bg1="lt1" tx1="dk1" bg2="lt2" tx2="dk2" accent1="accent1" accent2="accent2" accent3="accent3" accent4="accent4" accent5="accent5" accent6="accent6" hlink="hlink" folHlink="folHlink"/>
   <p:sldLayoutIdLst>
-    <p:sldLayoutId xmlns:r="http://schemas.openxmlformats.org/officeDocument/2006/relationships" id="2147483649" r:id="R8806d227f1394810"/>
+    <p:sldLayoutId xmlns:r="http://schemas.openxmlformats.org/officeDocument/2006/relationships" id="2147483649" r:id="R4278fccdce8f4293"/>
   </p:sldLayoutIdLst>
   <p:txStyles>
     <p:titleStyle>
@@ -1956,7 +1956,7 @@
           <p:cNvPr id="1" name="cover-rule">
             <a:extLst xmlns:a="http://schemas.openxmlformats.org/drawingml/2006/main">
               <a:ext uri="{FF2B5EF4-FFF2-40B4-BE49-F238E27FC236}">
-                <a16:creationId xmlns:a16="http://schemas.microsoft.com/office/drawing/2014/main" id="{C521EFA7-D115-480A-A410-76F5C551B70E}"/>
+                <a16:creationId xmlns:a16="http://schemas.microsoft.com/office/drawing/2014/main" id="{17184CED-E593-4AE5-A4F6-F6FAA6CE16DD}"/>
               </a:ext>
             </a:extLst>
           </p:cNvPr>
@@ -1989,7 +1989,7 @@
           <p:cNvPr id="2" name="cover-ring-1">
             <a:extLst xmlns:a="http://schemas.openxmlformats.org/drawingml/2006/main">
               <a:ext uri="{FF2B5EF4-FFF2-40B4-BE49-F238E27FC236}">
-                <a16:creationId xmlns:a16="http://schemas.microsoft.com/office/drawing/2014/main" id="{65AD8CC6-E575-4283-803B-91802869C862}"/>
+                <a16:creationId xmlns:a16="http://schemas.microsoft.com/office/drawing/2014/main" id="{AB934C77-9A7A-4A17-82FC-74A61543571D}"/>
               </a:ext>
             </a:extLst>
           </p:cNvPr>
@@ -2020,7 +2020,7 @@
           <p:cNvPr id="3" name="cover-ring-2">
             <a:extLst xmlns:a="http://schemas.openxmlformats.org/drawingml/2006/main">
               <a:ext uri="{FF2B5EF4-FFF2-40B4-BE49-F238E27FC236}">
-                <a16:creationId xmlns:a16="http://schemas.microsoft.com/office/drawing/2014/main" id="{70B9B3B2-63ED-46E5-9311-7626E966CFB8}"/>
+                <a16:creationId xmlns:a16="http://schemas.microsoft.com/office/drawing/2014/main" id="{DF683F9F-701E-4CC0-82BB-0FF145B41570}"/>
               </a:ext>
             </a:extLst>
           </p:cNvPr>
@@ -2051,7 +2051,7 @@
           <p:cNvPr id="4" name="cover-core">
             <a:extLst xmlns:a="http://schemas.openxmlformats.org/drawingml/2006/main">
               <a:ext uri="{FF2B5EF4-FFF2-40B4-BE49-F238E27FC236}">
-                <a16:creationId xmlns:a16="http://schemas.microsoft.com/office/drawing/2014/main" id="{C016F089-D814-4C87-9333-DD41E491DB72}"/>
+                <a16:creationId xmlns:a16="http://schemas.microsoft.com/office/drawing/2014/main" id="{3A02E90F-E41A-4816-88B7-59B5CA2B6D4B}"/>
               </a:ext>
             </a:extLst>
           </p:cNvPr>
@@ -2084,7 +2084,7 @@
           <p:cNvPr id="5" name="cover-line-1">
             <a:extLst xmlns:a="http://schemas.openxmlformats.org/drawingml/2006/main">
               <a:ext uri="{FF2B5EF4-FFF2-40B4-BE49-F238E27FC236}">
-                <a16:creationId xmlns:a16="http://schemas.microsoft.com/office/drawing/2014/main" id="{F5906247-2E4D-47A2-B482-EDA958D81A55}"/>
+                <a16:creationId xmlns:a16="http://schemas.microsoft.com/office/drawing/2014/main" id="{A90243EF-5C92-4233-ADB0-6BD033189183}"/>
               </a:ext>
             </a:extLst>
           </p:cNvPr>
@@ -2115,7 +2115,7 @@
           <p:cNvPr id="6" name="cover-line-2">
             <a:extLst xmlns:a="http://schemas.openxmlformats.org/drawingml/2006/main">
               <a:ext uri="{FF2B5EF4-FFF2-40B4-BE49-F238E27FC236}">
-                <a16:creationId xmlns:a16="http://schemas.microsoft.com/office/drawing/2014/main" id="{BF7E911B-4DD6-4C27-9265-3605496B63CF}"/>
+                <a16:creationId xmlns:a16="http://schemas.microsoft.com/office/drawing/2014/main" id="{61FD0451-11C0-49F6-8552-91751A6710C0}"/>
               </a:ext>
             </a:extLst>
           </p:cNvPr>
@@ -2146,7 +2146,7 @@
           <p:cNvPr id="7" name="cover-eyebrow">
             <a:extLst xmlns:a="http://schemas.openxmlformats.org/drawingml/2006/main">
               <a:ext uri="{FF2B5EF4-FFF2-40B4-BE49-F238E27FC236}">
-                <a16:creationId xmlns:a16="http://schemas.microsoft.com/office/drawing/2014/main" id="{D94EE1D6-593B-4900-B9E0-330812FD9824}"/>
+                <a16:creationId xmlns:a16="http://schemas.microsoft.com/office/drawing/2014/main" id="{4AED0B88-E102-4FD6-A135-412A5FE741E8}"/>
               </a:ext>
             </a:extLst>
           </p:cNvPr>
@@ -2204,7 +2204,7 @@
           <p:cNvPr id="8" name="cover-title">
             <a:extLst xmlns:a="http://schemas.openxmlformats.org/drawingml/2006/main">
               <a:ext uri="{FF2B5EF4-FFF2-40B4-BE49-F238E27FC236}">
-                <a16:creationId xmlns:a16="http://schemas.microsoft.com/office/drawing/2014/main" id="{2EBFD9CE-D1B9-4E88-9F99-BE28124DB3C9}"/>
+                <a16:creationId xmlns:a16="http://schemas.microsoft.com/office/drawing/2014/main" id="{8D70F2FB-B011-460B-8582-B7E1F8FDD171}"/>
               </a:ext>
             </a:extLst>
           </p:cNvPr>
@@ -2262,7 +2262,7 @@
           <p:cNvPr id="9" name="cover-subtitle">
             <a:extLst xmlns:a="http://schemas.openxmlformats.org/drawingml/2006/main">
               <a:ext uri="{FF2B5EF4-FFF2-40B4-BE49-F238E27FC236}">
-                <a16:creationId xmlns:a16="http://schemas.microsoft.com/office/drawing/2014/main" id="{3F4AD2D6-3B09-45C9-916F-B66164FD0319}"/>
+                <a16:creationId xmlns:a16="http://schemas.microsoft.com/office/drawing/2014/main" id="{5B355AB1-3B62-4D32-BD6B-D92DFC083869}"/>
               </a:ext>
             </a:extLst>
           </p:cNvPr>
@@ -2324,7 +2324,7 @@
           <p:cNvPr id="10" name="cover-lead">
             <a:extLst xmlns:a="http://schemas.openxmlformats.org/drawingml/2006/main">
               <a:ext uri="{FF2B5EF4-FFF2-40B4-BE49-F238E27FC236}">
-                <a16:creationId xmlns:a16="http://schemas.microsoft.com/office/drawing/2014/main" id="{76CD6415-78CA-4F69-96D1-680917BFA239}"/>
+                <a16:creationId xmlns:a16="http://schemas.microsoft.com/office/drawing/2014/main" id="{0B0B0104-B753-4BA1-9977-66526DD5F980}"/>
               </a:ext>
             </a:extLst>
           </p:cNvPr>
@@ -2382,7 +2382,7 @@
           <p:cNvPr id="11" name="cover-course">
             <a:extLst xmlns:a="http://schemas.openxmlformats.org/drawingml/2006/main">
               <a:ext uri="{FF2B5EF4-FFF2-40B4-BE49-F238E27FC236}">
-                <a16:creationId xmlns:a16="http://schemas.microsoft.com/office/drawing/2014/main" id="{E0F065C0-70B8-4C3C-B06D-14619E1E958A}"/>
+                <a16:creationId xmlns:a16="http://schemas.microsoft.com/office/drawing/2014/main" id="{FDB8C13B-CEA4-4A15-80B1-75D1338F5252}"/>
               </a:ext>
             </a:extLst>
           </p:cNvPr>
@@ -2440,7 +2440,7 @@
           <p:cNvPr id="12" name="cover-id">
             <a:extLst xmlns:a="http://schemas.openxmlformats.org/drawingml/2006/main">
               <a:ext uri="{FF2B5EF4-FFF2-40B4-BE49-F238E27FC236}">
-                <a16:creationId xmlns:a16="http://schemas.microsoft.com/office/drawing/2014/main" id="{B74AB449-E074-4880-868F-97E958D01355}"/>
+                <a16:creationId xmlns:a16="http://schemas.microsoft.com/office/drawing/2014/main" id="{1470C885-9285-4204-A18E-6CC1048926CF}"/>
               </a:ext>
             </a:extLst>
           </p:cNvPr>
@@ -2496,7 +2496,7 @@
     </p:spTree>
     <p:extLst>
       <p:ext uri="{BB962C8B-B14F-4D97-AF65-F5344CB8AC3E}">
-        <p14:creationId xmlns:p14="http://schemas.microsoft.com/office/powerpoint/2010/main" val="1846781037"/>
+        <p14:creationId xmlns:p14="http://schemas.microsoft.com/office/powerpoint/2010/main" val="300696610"/>
       </p:ext>
     </p:extLst>
   </p:cSld>
@@ -2527,7 +2527,7 @@
           <p:cNvPr id="1" name="s10-rule">
             <a:extLst xmlns:a="http://schemas.openxmlformats.org/drawingml/2006/main">
               <a:ext uri="{FF2B5EF4-FFF2-40B4-BE49-F238E27FC236}">
-                <a16:creationId xmlns:a16="http://schemas.microsoft.com/office/drawing/2014/main" id="{FA59D7FA-0053-47BC-BE35-0E6611928069}"/>
+                <a16:creationId xmlns:a16="http://schemas.microsoft.com/office/drawing/2014/main" id="{63984BB4-0589-4BE3-A849-2974548ACCBD}"/>
               </a:ext>
             </a:extLst>
           </p:cNvPr>
@@ -2560,7 +2560,7 @@
           <p:cNvPr id="2" name="s10-eyebrow">
             <a:extLst xmlns:a="http://schemas.openxmlformats.org/drawingml/2006/main">
               <a:ext uri="{FF2B5EF4-FFF2-40B4-BE49-F238E27FC236}">
-                <a16:creationId xmlns:a16="http://schemas.microsoft.com/office/drawing/2014/main" id="{675E254C-322C-4346-97DE-4B00AB834A05}"/>
+                <a16:creationId xmlns:a16="http://schemas.microsoft.com/office/drawing/2014/main" id="{A1124E85-E6EB-4861-8E78-0732B46B9EB4}"/>
               </a:ext>
             </a:extLst>
           </p:cNvPr>
@@ -2618,7 +2618,7 @@
           <p:cNvPr id="3" name="s10-title">
             <a:extLst xmlns:a="http://schemas.openxmlformats.org/drawingml/2006/main">
               <a:ext uri="{FF2B5EF4-FFF2-40B4-BE49-F238E27FC236}">
-                <a16:creationId xmlns:a16="http://schemas.microsoft.com/office/drawing/2014/main" id="{7818CC27-388F-46A0-8346-8DC9356DD739}"/>
+                <a16:creationId xmlns:a16="http://schemas.microsoft.com/office/drawing/2014/main" id="{4A84BC7F-3516-4CC7-8930-974363C78312}"/>
               </a:ext>
             </a:extLst>
           </p:cNvPr>
@@ -2676,7 +2676,7 @@
           <p:cNvPr id="4" name="s10-footer">
             <a:extLst xmlns:a="http://schemas.openxmlformats.org/drawingml/2006/main">
               <a:ext uri="{FF2B5EF4-FFF2-40B4-BE49-F238E27FC236}">
-                <a16:creationId xmlns:a16="http://schemas.microsoft.com/office/drawing/2014/main" id="{0B051F6A-9DF4-4749-A9D5-6BB4BF188112}"/>
+                <a16:creationId xmlns:a16="http://schemas.microsoft.com/office/drawing/2014/main" id="{2D081500-C507-4796-9849-0F4ABCA21BC1}"/>
               </a:ext>
             </a:extLst>
           </p:cNvPr>
@@ -2707,7 +2707,7 @@
           <p:cNvPr id="5" name="s10-identity">
             <a:extLst xmlns:a="http://schemas.openxmlformats.org/drawingml/2006/main">
               <a:ext uri="{FF2B5EF4-FFF2-40B4-BE49-F238E27FC236}">
-                <a16:creationId xmlns:a16="http://schemas.microsoft.com/office/drawing/2014/main" id="{5F7255A6-9055-4F58-93A8-F3CC93C43746}"/>
+                <a16:creationId xmlns:a16="http://schemas.microsoft.com/office/drawing/2014/main" id="{4E9A75A4-4E62-4792-BD06-DD9F19A7287C}"/>
               </a:ext>
             </a:extLst>
           </p:cNvPr>
@@ -2765,7 +2765,7 @@
           <p:cNvPr id="6" name="case-title">
             <a:extLst xmlns:a="http://schemas.openxmlformats.org/drawingml/2006/main">
               <a:ext uri="{FF2B5EF4-FFF2-40B4-BE49-F238E27FC236}">
-                <a16:creationId xmlns:a16="http://schemas.microsoft.com/office/drawing/2014/main" id="{F74B8D79-A3F3-4381-903D-9DE32358B1C1}"/>
+                <a16:creationId xmlns:a16="http://schemas.microsoft.com/office/drawing/2014/main" id="{B11A3C59-C231-4754-AFB4-5EF949B07EC3}"/>
               </a:ext>
             </a:extLst>
           </p:cNvPr>
@@ -2829,7 +2829,7 @@
           <p:cNvPr id="7" name="case-row-0">
             <a:extLst xmlns:a="http://schemas.openxmlformats.org/drawingml/2006/main">
               <a:ext uri="{FF2B5EF4-FFF2-40B4-BE49-F238E27FC236}">
-                <a16:creationId xmlns:a16="http://schemas.microsoft.com/office/drawing/2014/main" id="{E140F5F3-618F-44BB-B5F3-3B98DC805BA2}"/>
+                <a16:creationId xmlns:a16="http://schemas.microsoft.com/office/drawing/2014/main" id="{D4602500-F976-40CC-9580-9F2B55200CA9}"/>
               </a:ext>
             </a:extLst>
           </p:cNvPr>
@@ -2893,7 +2893,7 @@
           <p:cNvPr id="8" name="case-row-1">
             <a:extLst xmlns:a="http://schemas.openxmlformats.org/drawingml/2006/main">
               <a:ext uri="{FF2B5EF4-FFF2-40B4-BE49-F238E27FC236}">
-                <a16:creationId xmlns:a16="http://schemas.microsoft.com/office/drawing/2014/main" id="{88F64DCA-A4B2-4743-B359-08EC9A220E5C}"/>
+                <a16:creationId xmlns:a16="http://schemas.microsoft.com/office/drawing/2014/main" id="{FC241C11-D7F1-4187-8360-47E58316815B}"/>
               </a:ext>
             </a:extLst>
           </p:cNvPr>
@@ -2957,7 +2957,7 @@
           <p:cNvPr id="9" name="case-row-2">
             <a:extLst xmlns:a="http://schemas.openxmlformats.org/drawingml/2006/main">
               <a:ext uri="{FF2B5EF4-FFF2-40B4-BE49-F238E27FC236}">
-                <a16:creationId xmlns:a16="http://schemas.microsoft.com/office/drawing/2014/main" id="{D1F904D5-41CE-4BAE-813A-DF9B4B5A1AC5}"/>
+                <a16:creationId xmlns:a16="http://schemas.microsoft.com/office/drawing/2014/main" id="{9FA7A5E9-5688-4CAD-A369-CFB46286CD2A}"/>
               </a:ext>
             </a:extLst>
           </p:cNvPr>
@@ -3021,7 +3021,7 @@
           <p:cNvPr id="10" name="case-row-3">
             <a:extLst xmlns:a="http://schemas.openxmlformats.org/drawingml/2006/main">
               <a:ext uri="{FF2B5EF4-FFF2-40B4-BE49-F238E27FC236}">
-                <a16:creationId xmlns:a16="http://schemas.microsoft.com/office/drawing/2014/main" id="{ECAFBD92-E826-4358-9DFD-E9E3EA9EB0FB}"/>
+                <a16:creationId xmlns:a16="http://schemas.microsoft.com/office/drawing/2014/main" id="{7EBC6352-9CF0-4E2D-8DB0-5D2FA8A4FA49}"/>
               </a:ext>
             </a:extLst>
           </p:cNvPr>
@@ -3085,7 +3085,7 @@
           <p:cNvPr id="11" name="case-row-4">
             <a:extLst xmlns:a="http://schemas.openxmlformats.org/drawingml/2006/main">
               <a:ext uri="{FF2B5EF4-FFF2-40B4-BE49-F238E27FC236}">
-                <a16:creationId xmlns:a16="http://schemas.microsoft.com/office/drawing/2014/main" id="{AAC47814-A911-45A6-9D4A-FDB8E318096C}"/>
+                <a16:creationId xmlns:a16="http://schemas.microsoft.com/office/drawing/2014/main" id="{3FF696AE-E696-49B2-B6B7-99DE295A61DB}"/>
               </a:ext>
             </a:extLst>
           </p:cNvPr>
@@ -3149,7 +3149,7 @@
           <p:cNvPr id="12" name="s10-takeaway-rule">
             <a:extLst xmlns:a="http://schemas.openxmlformats.org/drawingml/2006/main">
               <a:ext uri="{FF2B5EF4-FFF2-40B4-BE49-F238E27FC236}">
-                <a16:creationId xmlns:a16="http://schemas.microsoft.com/office/drawing/2014/main" id="{8C60AA57-74FD-4D2E-B2D7-2E85AB2E86E7}"/>
+                <a16:creationId xmlns:a16="http://schemas.microsoft.com/office/drawing/2014/main" id="{8114B825-19BB-4121-835F-A2CD7C887947}"/>
               </a:ext>
             </a:extLst>
           </p:cNvPr>
@@ -3182,7 +3182,7 @@
           <p:cNvPr id="13" name="s10-takeaway">
             <a:extLst xmlns:a="http://schemas.openxmlformats.org/drawingml/2006/main">
               <a:ext uri="{FF2B5EF4-FFF2-40B4-BE49-F238E27FC236}">
-                <a16:creationId xmlns:a16="http://schemas.microsoft.com/office/drawing/2014/main" id="{6D8E3743-D806-4E8E-B4CA-525188831AB1}"/>
+                <a16:creationId xmlns:a16="http://schemas.microsoft.com/office/drawing/2014/main" id="{621A35EB-FF6B-4C94-9E7E-8059335326DB}"/>
               </a:ext>
             </a:extLst>
           </p:cNvPr>
@@ -3238,7 +3238,7 @@
     </p:spTree>
     <p:extLst>
       <p:ext uri="{BB962C8B-B14F-4D97-AF65-F5344CB8AC3E}">
-        <p14:creationId xmlns:p14="http://schemas.microsoft.com/office/powerpoint/2010/main" val="1648188944"/>
+        <p14:creationId xmlns:p14="http://schemas.microsoft.com/office/powerpoint/2010/main" val="784961396"/>
       </p:ext>
     </p:extLst>
   </p:cSld>
@@ -3269,7 +3269,7 @@
           <p:cNvPr id="1" name="s11-rule">
             <a:extLst xmlns:a="http://schemas.openxmlformats.org/drawingml/2006/main">
               <a:ext uri="{FF2B5EF4-FFF2-40B4-BE49-F238E27FC236}">
-                <a16:creationId xmlns:a16="http://schemas.microsoft.com/office/drawing/2014/main" id="{9748362C-0C4A-4DF1-844D-E88B8A823742}"/>
+                <a16:creationId xmlns:a16="http://schemas.microsoft.com/office/drawing/2014/main" id="{3C3AB031-09B8-4A81-97A4-C7368F9A3E05}"/>
               </a:ext>
             </a:extLst>
           </p:cNvPr>
@@ -3302,7 +3302,7 @@
           <p:cNvPr id="2" name="s11-eyebrow">
             <a:extLst xmlns:a="http://schemas.openxmlformats.org/drawingml/2006/main">
               <a:ext uri="{FF2B5EF4-FFF2-40B4-BE49-F238E27FC236}">
-                <a16:creationId xmlns:a16="http://schemas.microsoft.com/office/drawing/2014/main" id="{B5BFA4BB-E7BD-49F3-B8F1-AA62065EF5CF}"/>
+                <a16:creationId xmlns:a16="http://schemas.microsoft.com/office/drawing/2014/main" id="{CEEDDEAC-68EB-49DA-BE31-4C15B076E9FA}"/>
               </a:ext>
             </a:extLst>
           </p:cNvPr>
@@ -3360,7 +3360,7 @@
           <p:cNvPr id="3" name="s11-title">
             <a:extLst xmlns:a="http://schemas.openxmlformats.org/drawingml/2006/main">
               <a:ext uri="{FF2B5EF4-FFF2-40B4-BE49-F238E27FC236}">
-                <a16:creationId xmlns:a16="http://schemas.microsoft.com/office/drawing/2014/main" id="{C8AA5754-5B39-4E14-A893-CFDDCFA2042F}"/>
+                <a16:creationId xmlns:a16="http://schemas.microsoft.com/office/drawing/2014/main" id="{293FF553-3C70-42D0-853F-E7533B1F6C7A}"/>
               </a:ext>
             </a:extLst>
           </p:cNvPr>
@@ -3418,7 +3418,7 @@
           <p:cNvPr id="4" name="s11-footer">
             <a:extLst xmlns:a="http://schemas.openxmlformats.org/drawingml/2006/main">
               <a:ext uri="{FF2B5EF4-FFF2-40B4-BE49-F238E27FC236}">
-                <a16:creationId xmlns:a16="http://schemas.microsoft.com/office/drawing/2014/main" id="{B555DCAC-BC47-4158-86A9-2312B4E0DB02}"/>
+                <a16:creationId xmlns:a16="http://schemas.microsoft.com/office/drawing/2014/main" id="{2A1EE318-DAA9-40C0-B766-3B02FA6E0732}"/>
               </a:ext>
             </a:extLst>
           </p:cNvPr>
@@ -3449,7 +3449,7 @@
           <p:cNvPr id="5" name="s11-identity">
             <a:extLst xmlns:a="http://schemas.openxmlformats.org/drawingml/2006/main">
               <a:ext uri="{FF2B5EF4-FFF2-40B4-BE49-F238E27FC236}">
-                <a16:creationId xmlns:a16="http://schemas.microsoft.com/office/drawing/2014/main" id="{049DB4A1-3D4D-4EB8-9D31-36885F98A1CC}"/>
+                <a16:creationId xmlns:a16="http://schemas.microsoft.com/office/drawing/2014/main" id="{5DC25058-C235-4403-8A0E-5FF6533FF9DF}"/>
               </a:ext>
             </a:extLst>
           </p:cNvPr>
@@ -3507,7 +3507,7 @@
           <p:cNvPr id="6" name="practice-circle-0">
             <a:extLst xmlns:a="http://schemas.openxmlformats.org/drawingml/2006/main">
               <a:ext uri="{FF2B5EF4-FFF2-40B4-BE49-F238E27FC236}">
-                <a16:creationId xmlns:a16="http://schemas.microsoft.com/office/drawing/2014/main" id="{96769552-47D0-4AF6-BC01-E1B535B65895}"/>
+                <a16:creationId xmlns:a16="http://schemas.microsoft.com/office/drawing/2014/main" id="{3631F2EC-8BB4-4CEB-81C7-5649182EBD72}"/>
               </a:ext>
             </a:extLst>
           </p:cNvPr>
@@ -3540,7 +3540,7 @@
           <p:cNvPr id="7" name="practice-number-0">
             <a:extLst xmlns:a="http://schemas.openxmlformats.org/drawingml/2006/main">
               <a:ext uri="{FF2B5EF4-FFF2-40B4-BE49-F238E27FC236}">
-                <a16:creationId xmlns:a16="http://schemas.microsoft.com/office/drawing/2014/main" id="{56B17509-18FE-4738-BE7A-6169387BDFD3}"/>
+                <a16:creationId xmlns:a16="http://schemas.microsoft.com/office/drawing/2014/main" id="{70B27BCE-3D66-4D9D-BD47-18183E7F3507}"/>
               </a:ext>
             </a:extLst>
           </p:cNvPr>
@@ -3598,7 +3598,7 @@
           <p:cNvPr id="8" name="practice-item-0">
             <a:extLst xmlns:a="http://schemas.openxmlformats.org/drawingml/2006/main">
               <a:ext uri="{FF2B5EF4-FFF2-40B4-BE49-F238E27FC236}">
-                <a16:creationId xmlns:a16="http://schemas.microsoft.com/office/drawing/2014/main" id="{D47E1C41-E262-452E-991A-A4053BA59AD7}"/>
+                <a16:creationId xmlns:a16="http://schemas.microsoft.com/office/drawing/2014/main" id="{E44090BD-7A4A-4CC8-90F6-3377C40990B4}"/>
               </a:ext>
             </a:extLst>
           </p:cNvPr>
@@ -3662,7 +3662,7 @@
           <p:cNvPr id="9" name="practice-connector-0">
             <a:extLst xmlns:a="http://schemas.openxmlformats.org/drawingml/2006/main">
               <a:ext uri="{FF2B5EF4-FFF2-40B4-BE49-F238E27FC236}">
-                <a16:creationId xmlns:a16="http://schemas.microsoft.com/office/drawing/2014/main" id="{33B7F7C3-DC02-4BBD-8646-C8A416F881BA}"/>
+                <a16:creationId xmlns:a16="http://schemas.microsoft.com/office/drawing/2014/main" id="{A642D16C-2CC2-4A19-A96E-457528721037}"/>
               </a:ext>
             </a:extLst>
           </p:cNvPr>
@@ -3693,7 +3693,7 @@
           <p:cNvPr id="10" name="practice-circle-1">
             <a:extLst xmlns:a="http://schemas.openxmlformats.org/drawingml/2006/main">
               <a:ext uri="{FF2B5EF4-FFF2-40B4-BE49-F238E27FC236}">
-                <a16:creationId xmlns:a16="http://schemas.microsoft.com/office/drawing/2014/main" id="{E2CFC7B4-7EF5-459E-908A-2A82CE89B33C}"/>
+                <a16:creationId xmlns:a16="http://schemas.microsoft.com/office/drawing/2014/main" id="{CDE2DF0E-2C87-4068-90D2-6F4244AA8C41}"/>
               </a:ext>
             </a:extLst>
           </p:cNvPr>
@@ -3726,7 +3726,7 @@
           <p:cNvPr id="11" name="practice-number-1">
             <a:extLst xmlns:a="http://schemas.openxmlformats.org/drawingml/2006/main">
               <a:ext uri="{FF2B5EF4-FFF2-40B4-BE49-F238E27FC236}">
-                <a16:creationId xmlns:a16="http://schemas.microsoft.com/office/drawing/2014/main" id="{2BF077F5-8B2A-4650-BE13-3F896D7C6966}"/>
+                <a16:creationId xmlns:a16="http://schemas.microsoft.com/office/drawing/2014/main" id="{AC797BE7-AC61-45A5-934F-DD7381354CF7}"/>
               </a:ext>
             </a:extLst>
           </p:cNvPr>
@@ -3784,7 +3784,7 @@
           <p:cNvPr id="12" name="practice-item-1">
             <a:extLst xmlns:a="http://schemas.openxmlformats.org/drawingml/2006/main">
               <a:ext uri="{FF2B5EF4-FFF2-40B4-BE49-F238E27FC236}">
-                <a16:creationId xmlns:a16="http://schemas.microsoft.com/office/drawing/2014/main" id="{1635A319-FBEA-4478-BF7C-AF748A1C756D}"/>
+                <a16:creationId xmlns:a16="http://schemas.microsoft.com/office/drawing/2014/main" id="{0C009CE6-6F87-4B8C-8AE6-D0D8869BBB64}"/>
               </a:ext>
             </a:extLst>
           </p:cNvPr>
@@ -3848,7 +3848,7 @@
           <p:cNvPr id="13" name="practice-connector-1">
             <a:extLst xmlns:a="http://schemas.openxmlformats.org/drawingml/2006/main">
               <a:ext uri="{FF2B5EF4-FFF2-40B4-BE49-F238E27FC236}">
-                <a16:creationId xmlns:a16="http://schemas.microsoft.com/office/drawing/2014/main" id="{5EAFEAC5-A625-46D5-89FB-62292435C9B2}"/>
+                <a16:creationId xmlns:a16="http://schemas.microsoft.com/office/drawing/2014/main" id="{8DD8BF4B-C5E9-4845-BF62-3F60DEFAAC89}"/>
               </a:ext>
             </a:extLst>
           </p:cNvPr>
@@ -3879,7 +3879,7 @@
           <p:cNvPr id="14" name="practice-circle-2">
             <a:extLst xmlns:a="http://schemas.openxmlformats.org/drawingml/2006/main">
               <a:ext uri="{FF2B5EF4-FFF2-40B4-BE49-F238E27FC236}">
-                <a16:creationId xmlns:a16="http://schemas.microsoft.com/office/drawing/2014/main" id="{FBA3AC79-EAE8-4BC6-BCFE-C1BAD87A70ED}"/>
+                <a16:creationId xmlns:a16="http://schemas.microsoft.com/office/drawing/2014/main" id="{FD14CC55-F94B-4FE6-BA57-B5773D6AC92B}"/>
               </a:ext>
             </a:extLst>
           </p:cNvPr>
@@ -3912,7 +3912,7 @@
           <p:cNvPr id="15" name="practice-number-2">
             <a:extLst xmlns:a="http://schemas.openxmlformats.org/drawingml/2006/main">
               <a:ext uri="{FF2B5EF4-FFF2-40B4-BE49-F238E27FC236}">
-                <a16:creationId xmlns:a16="http://schemas.microsoft.com/office/drawing/2014/main" id="{9820DA18-0DC6-4B89-ADC6-DB954D877C1A}"/>
+                <a16:creationId xmlns:a16="http://schemas.microsoft.com/office/drawing/2014/main" id="{A16310EC-CEBC-463C-BDD1-863F350A096A}"/>
               </a:ext>
             </a:extLst>
           </p:cNvPr>
@@ -3970,7 +3970,7 @@
           <p:cNvPr id="16" name="practice-item-2">
             <a:extLst xmlns:a="http://schemas.openxmlformats.org/drawingml/2006/main">
               <a:ext uri="{FF2B5EF4-FFF2-40B4-BE49-F238E27FC236}">
-                <a16:creationId xmlns:a16="http://schemas.microsoft.com/office/drawing/2014/main" id="{729D553A-943E-4784-A3B3-0794398B2587}"/>
+                <a16:creationId xmlns:a16="http://schemas.microsoft.com/office/drawing/2014/main" id="{D719B962-2F43-4C27-ADA7-C0A2BEC29545}"/>
               </a:ext>
             </a:extLst>
           </p:cNvPr>
@@ -4032,7 +4032,7 @@
     </p:spTree>
     <p:extLst>
       <p:ext uri="{BB962C8B-B14F-4D97-AF65-F5344CB8AC3E}">
-        <p14:creationId xmlns:p14="http://schemas.microsoft.com/office/powerpoint/2010/main" val="46714139"/>
+        <p14:creationId xmlns:p14="http://schemas.microsoft.com/office/powerpoint/2010/main" val="431821670"/>
       </p:ext>
     </p:extLst>
   </p:cSld>
@@ -4063,7 +4063,7 @@
           <p:cNvPr id="1" name="s12-rule">
             <a:extLst xmlns:a="http://schemas.openxmlformats.org/drawingml/2006/main">
               <a:ext uri="{FF2B5EF4-FFF2-40B4-BE49-F238E27FC236}">
-                <a16:creationId xmlns:a16="http://schemas.microsoft.com/office/drawing/2014/main" id="{34DAD776-870E-446B-A992-9655090E3DD6}"/>
+                <a16:creationId xmlns:a16="http://schemas.microsoft.com/office/drawing/2014/main" id="{EB963B78-1E64-403B-874C-EC9CD0E15004}"/>
               </a:ext>
             </a:extLst>
           </p:cNvPr>
@@ -4096,7 +4096,7 @@
           <p:cNvPr id="2" name="s12-eyebrow">
             <a:extLst xmlns:a="http://schemas.openxmlformats.org/drawingml/2006/main">
               <a:ext uri="{FF2B5EF4-FFF2-40B4-BE49-F238E27FC236}">
-                <a16:creationId xmlns:a16="http://schemas.microsoft.com/office/drawing/2014/main" id="{C27CC25C-AF31-4D10-8370-F124517B86A7}"/>
+                <a16:creationId xmlns:a16="http://schemas.microsoft.com/office/drawing/2014/main" id="{CCF68443-63DF-4AF6-BADF-028762B07A9C}"/>
               </a:ext>
             </a:extLst>
           </p:cNvPr>
@@ -4154,7 +4154,7 @@
           <p:cNvPr id="3" name="s12-title">
             <a:extLst xmlns:a="http://schemas.openxmlformats.org/drawingml/2006/main">
               <a:ext uri="{FF2B5EF4-FFF2-40B4-BE49-F238E27FC236}">
-                <a16:creationId xmlns:a16="http://schemas.microsoft.com/office/drawing/2014/main" id="{A99B6A8D-C202-46CD-ADC7-A59F275754CE}"/>
+                <a16:creationId xmlns:a16="http://schemas.microsoft.com/office/drawing/2014/main" id="{A1660716-33B6-4AF5-8EA9-497EF4728670}"/>
               </a:ext>
             </a:extLst>
           </p:cNvPr>
@@ -4212,7 +4212,7 @@
           <p:cNvPr id="4" name="s12-footer">
             <a:extLst xmlns:a="http://schemas.openxmlformats.org/drawingml/2006/main">
               <a:ext uri="{FF2B5EF4-FFF2-40B4-BE49-F238E27FC236}">
-                <a16:creationId xmlns:a16="http://schemas.microsoft.com/office/drawing/2014/main" id="{EF2EE277-64FA-424E-B777-A84F92218004}"/>
+                <a16:creationId xmlns:a16="http://schemas.microsoft.com/office/drawing/2014/main" id="{2878A498-F306-46F3-B306-C58745726035}"/>
               </a:ext>
             </a:extLst>
           </p:cNvPr>
@@ -4243,7 +4243,7 @@
           <p:cNvPr id="5" name="s12-identity">
             <a:extLst xmlns:a="http://schemas.openxmlformats.org/drawingml/2006/main">
               <a:ext uri="{FF2B5EF4-FFF2-40B4-BE49-F238E27FC236}">
-                <a16:creationId xmlns:a16="http://schemas.microsoft.com/office/drawing/2014/main" id="{D5B8E59A-DB35-4322-8D02-FDB885DC3D6E}"/>
+                <a16:creationId xmlns:a16="http://schemas.microsoft.com/office/drawing/2014/main" id="{A5C579D6-0C3F-4C4F-8C0B-5FFD1B78DED0}"/>
               </a:ext>
             </a:extLst>
           </p:cNvPr>
@@ -4301,7 +4301,7 @@
           <p:cNvPr id="6" name="recap-circle-0">
             <a:extLst xmlns:a="http://schemas.openxmlformats.org/drawingml/2006/main">
               <a:ext uri="{FF2B5EF4-FFF2-40B4-BE49-F238E27FC236}">
-                <a16:creationId xmlns:a16="http://schemas.microsoft.com/office/drawing/2014/main" id="{540775B8-A94A-4A04-9437-6A282D9F4C81}"/>
+                <a16:creationId xmlns:a16="http://schemas.microsoft.com/office/drawing/2014/main" id="{C4FF5E7D-BDC3-42CC-9A49-D06087D0E33A}"/>
               </a:ext>
             </a:extLst>
           </p:cNvPr>
@@ -4334,7 +4334,7 @@
           <p:cNvPr id="7" name="recap-number-0">
             <a:extLst xmlns:a="http://schemas.openxmlformats.org/drawingml/2006/main">
               <a:ext uri="{FF2B5EF4-FFF2-40B4-BE49-F238E27FC236}">
-                <a16:creationId xmlns:a16="http://schemas.microsoft.com/office/drawing/2014/main" id="{786A449E-6323-481C-8E83-371E17952FED}"/>
+                <a16:creationId xmlns:a16="http://schemas.microsoft.com/office/drawing/2014/main" id="{472CD640-6916-48A2-B649-D2800FBB3DF9}"/>
               </a:ext>
             </a:extLst>
           </p:cNvPr>
@@ -4392,7 +4392,7 @@
           <p:cNvPr id="8" name="recap-item-0">
             <a:extLst xmlns:a="http://schemas.openxmlformats.org/drawingml/2006/main">
               <a:ext uri="{FF2B5EF4-FFF2-40B4-BE49-F238E27FC236}">
-                <a16:creationId xmlns:a16="http://schemas.microsoft.com/office/drawing/2014/main" id="{BEFF4223-9A6C-4468-9087-2D2484B89B68}"/>
+                <a16:creationId xmlns:a16="http://schemas.microsoft.com/office/drawing/2014/main" id="{C9BCB758-56C7-4004-97FD-A9F45F62993D}"/>
               </a:ext>
             </a:extLst>
           </p:cNvPr>
@@ -4456,7 +4456,7 @@
           <p:cNvPr id="9" name="recap-connector-0">
             <a:extLst xmlns:a="http://schemas.openxmlformats.org/drawingml/2006/main">
               <a:ext uri="{FF2B5EF4-FFF2-40B4-BE49-F238E27FC236}">
-                <a16:creationId xmlns:a16="http://schemas.microsoft.com/office/drawing/2014/main" id="{90983806-AC9E-4511-B5E4-301ED0E11827}"/>
+                <a16:creationId xmlns:a16="http://schemas.microsoft.com/office/drawing/2014/main" id="{B8A6021A-2BB5-4F3A-829B-DDC62BD4EEF7}"/>
               </a:ext>
             </a:extLst>
           </p:cNvPr>
@@ -4487,7 +4487,7 @@
           <p:cNvPr id="10" name="recap-circle-1">
             <a:extLst xmlns:a="http://schemas.openxmlformats.org/drawingml/2006/main">
               <a:ext uri="{FF2B5EF4-FFF2-40B4-BE49-F238E27FC236}">
-                <a16:creationId xmlns:a16="http://schemas.microsoft.com/office/drawing/2014/main" id="{F2346248-BDAA-4573-A137-65BCF98B87A4}"/>
+                <a16:creationId xmlns:a16="http://schemas.microsoft.com/office/drawing/2014/main" id="{39461CE8-7CED-4674-8ABA-618C97473791}"/>
               </a:ext>
             </a:extLst>
           </p:cNvPr>
@@ -4520,7 +4520,7 @@
           <p:cNvPr id="11" name="recap-number-1">
             <a:extLst xmlns:a="http://schemas.openxmlformats.org/drawingml/2006/main">
               <a:ext uri="{FF2B5EF4-FFF2-40B4-BE49-F238E27FC236}">
-                <a16:creationId xmlns:a16="http://schemas.microsoft.com/office/drawing/2014/main" id="{93B69EB5-CDCF-463D-B937-DFB74B613CEA}"/>
+                <a16:creationId xmlns:a16="http://schemas.microsoft.com/office/drawing/2014/main" id="{830FDA14-BE9E-4F8D-AE15-50230223ABEC}"/>
               </a:ext>
             </a:extLst>
           </p:cNvPr>
@@ -4578,7 +4578,7 @@
           <p:cNvPr id="12" name="recap-item-1">
             <a:extLst xmlns:a="http://schemas.openxmlformats.org/drawingml/2006/main">
               <a:ext uri="{FF2B5EF4-FFF2-40B4-BE49-F238E27FC236}">
-                <a16:creationId xmlns:a16="http://schemas.microsoft.com/office/drawing/2014/main" id="{4A34ABCF-D273-4088-9D13-3ADC086FD509}"/>
+                <a16:creationId xmlns:a16="http://schemas.microsoft.com/office/drawing/2014/main" id="{B3CFDF65-0B42-4614-AB33-426847C06AAA}"/>
               </a:ext>
             </a:extLst>
           </p:cNvPr>
@@ -4642,7 +4642,7 @@
           <p:cNvPr id="13" name="recap-connector-1">
             <a:extLst xmlns:a="http://schemas.openxmlformats.org/drawingml/2006/main">
               <a:ext uri="{FF2B5EF4-FFF2-40B4-BE49-F238E27FC236}">
-                <a16:creationId xmlns:a16="http://schemas.microsoft.com/office/drawing/2014/main" id="{12D3168A-2658-4185-BBE1-C0062D269DC2}"/>
+                <a16:creationId xmlns:a16="http://schemas.microsoft.com/office/drawing/2014/main" id="{1B27DF18-62BC-446D-A485-C0239AD9FA50}"/>
               </a:ext>
             </a:extLst>
           </p:cNvPr>
@@ -4673,7 +4673,7 @@
           <p:cNvPr id="14" name="recap-circle-2">
             <a:extLst xmlns:a="http://schemas.openxmlformats.org/drawingml/2006/main">
               <a:ext uri="{FF2B5EF4-FFF2-40B4-BE49-F238E27FC236}">
-                <a16:creationId xmlns:a16="http://schemas.microsoft.com/office/drawing/2014/main" id="{AB3F2120-CCB1-467F-AE07-623D179DDDC9}"/>
+                <a16:creationId xmlns:a16="http://schemas.microsoft.com/office/drawing/2014/main" id="{CF2DD282-8F45-43EE-AAB4-5A8FCD338968}"/>
               </a:ext>
             </a:extLst>
           </p:cNvPr>
@@ -4706,7 +4706,7 @@
           <p:cNvPr id="15" name="recap-number-2">
             <a:extLst xmlns:a="http://schemas.openxmlformats.org/drawingml/2006/main">
               <a:ext uri="{FF2B5EF4-FFF2-40B4-BE49-F238E27FC236}">
-                <a16:creationId xmlns:a16="http://schemas.microsoft.com/office/drawing/2014/main" id="{897F3B39-D894-40E5-8B40-212DF58C887D}"/>
+                <a16:creationId xmlns:a16="http://schemas.microsoft.com/office/drawing/2014/main" id="{F05D1EF0-72FA-45CC-8810-F8375E36113B}"/>
               </a:ext>
             </a:extLst>
           </p:cNvPr>
@@ -4764,7 +4764,7 @@
           <p:cNvPr id="16" name="recap-item-2">
             <a:extLst xmlns:a="http://schemas.openxmlformats.org/drawingml/2006/main">
               <a:ext uri="{FF2B5EF4-FFF2-40B4-BE49-F238E27FC236}">
-                <a16:creationId xmlns:a16="http://schemas.microsoft.com/office/drawing/2014/main" id="{82C67881-4F43-4D93-BD15-2ACFCED4896A}"/>
+                <a16:creationId xmlns:a16="http://schemas.microsoft.com/office/drawing/2014/main" id="{9F8F5797-054F-473A-A0AB-D3CB32F3DEB5}"/>
               </a:ext>
             </a:extLst>
           </p:cNvPr>
@@ -4826,7 +4826,7 @@
     </p:spTree>
     <p:extLst>
       <p:ext uri="{BB962C8B-B14F-4D97-AF65-F5344CB8AC3E}">
-        <p14:creationId xmlns:p14="http://schemas.microsoft.com/office/powerpoint/2010/main" val="821260831"/>
+        <p14:creationId xmlns:p14="http://schemas.microsoft.com/office/powerpoint/2010/main" val="1606259157"/>
       </p:ext>
     </p:extLst>
   </p:cSld>
@@ -4857,7 +4857,7 @@
           <p:cNvPr id="1" name="s13-rule">
             <a:extLst xmlns:a="http://schemas.openxmlformats.org/drawingml/2006/main">
               <a:ext uri="{FF2B5EF4-FFF2-40B4-BE49-F238E27FC236}">
-                <a16:creationId xmlns:a16="http://schemas.microsoft.com/office/drawing/2014/main" id="{68B924FC-4791-4B8D-B3C8-114C3B5E1773}"/>
+                <a16:creationId xmlns:a16="http://schemas.microsoft.com/office/drawing/2014/main" id="{A1E31DE8-AF0C-43A8-B42E-EF00E1E14B92}"/>
               </a:ext>
             </a:extLst>
           </p:cNvPr>
@@ -4890,7 +4890,7 @@
           <p:cNvPr id="2" name="s13-eyebrow">
             <a:extLst xmlns:a="http://schemas.openxmlformats.org/drawingml/2006/main">
               <a:ext uri="{FF2B5EF4-FFF2-40B4-BE49-F238E27FC236}">
-                <a16:creationId xmlns:a16="http://schemas.microsoft.com/office/drawing/2014/main" id="{AB17DFEA-C753-4C95-90F0-6B8553FE4E35}"/>
+                <a16:creationId xmlns:a16="http://schemas.microsoft.com/office/drawing/2014/main" id="{CF6F08D2-B9A8-445B-979B-66978116576A}"/>
               </a:ext>
             </a:extLst>
           </p:cNvPr>
@@ -4948,7 +4948,7 @@
           <p:cNvPr id="3" name="s13-title">
             <a:extLst xmlns:a="http://schemas.openxmlformats.org/drawingml/2006/main">
               <a:ext uri="{FF2B5EF4-FFF2-40B4-BE49-F238E27FC236}">
-                <a16:creationId xmlns:a16="http://schemas.microsoft.com/office/drawing/2014/main" id="{2D9443B0-A34A-4692-B020-1B2DC8558CDE}"/>
+                <a16:creationId xmlns:a16="http://schemas.microsoft.com/office/drawing/2014/main" id="{7604DE30-AE73-4921-A8B6-F6365EA6F355}"/>
               </a:ext>
             </a:extLst>
           </p:cNvPr>
@@ -5006,7 +5006,7 @@
           <p:cNvPr id="4" name="s13-footer">
             <a:extLst xmlns:a="http://schemas.openxmlformats.org/drawingml/2006/main">
               <a:ext uri="{FF2B5EF4-FFF2-40B4-BE49-F238E27FC236}">
-                <a16:creationId xmlns:a16="http://schemas.microsoft.com/office/drawing/2014/main" id="{F96F7C71-7EA1-4132-9731-40A68BE201E6}"/>
+                <a16:creationId xmlns:a16="http://schemas.microsoft.com/office/drawing/2014/main" id="{C6193F9A-B840-4236-AFAA-17DB036172A3}"/>
               </a:ext>
             </a:extLst>
           </p:cNvPr>
@@ -5037,7 +5037,7 @@
           <p:cNvPr id="5" name="s13-identity">
             <a:extLst xmlns:a="http://schemas.openxmlformats.org/drawingml/2006/main">
               <a:ext uri="{FF2B5EF4-FFF2-40B4-BE49-F238E27FC236}">
-                <a16:creationId xmlns:a16="http://schemas.microsoft.com/office/drawing/2014/main" id="{32270852-63A1-4410-9B6C-041412A3ED65}"/>
+                <a16:creationId xmlns:a16="http://schemas.microsoft.com/office/drawing/2014/main" id="{BF049294-9429-4CB7-91E8-2A3F6AB8D8A2}"/>
               </a:ext>
             </a:extLst>
           </p:cNvPr>
@@ -5095,7 +5095,7 @@
           <p:cNvPr id="6" name="source-0">
             <a:extLst xmlns:a="http://schemas.openxmlformats.org/drawingml/2006/main">
               <a:ext uri="{FF2B5EF4-FFF2-40B4-BE49-F238E27FC236}">
-                <a16:creationId xmlns:a16="http://schemas.microsoft.com/office/drawing/2014/main" id="{7DF6911D-E53B-4CCD-9233-A29C2105F025}"/>
+                <a16:creationId xmlns:a16="http://schemas.microsoft.com/office/drawing/2014/main" id="{C9A1B6D4-5FF7-4E05-90B1-2ADF707D6408}"/>
               </a:ext>
             </a:extLst>
           </p:cNvPr>
@@ -5159,7 +5159,7 @@
           <p:cNvPr id="7" name="source-1">
             <a:extLst xmlns:a="http://schemas.openxmlformats.org/drawingml/2006/main">
               <a:ext uri="{FF2B5EF4-FFF2-40B4-BE49-F238E27FC236}">
-                <a16:creationId xmlns:a16="http://schemas.microsoft.com/office/drawing/2014/main" id="{F341D006-7E3E-49CA-8D9B-A8DB7BD2D481}"/>
+                <a16:creationId xmlns:a16="http://schemas.microsoft.com/office/drawing/2014/main" id="{64C90091-9452-4ABD-A2B4-A9156E6FBDCF}"/>
               </a:ext>
             </a:extLst>
           </p:cNvPr>
@@ -5223,7 +5223,7 @@
           <p:cNvPr id="8" name="s13-takeaway-rule">
             <a:extLst xmlns:a="http://schemas.openxmlformats.org/drawingml/2006/main">
               <a:ext uri="{FF2B5EF4-FFF2-40B4-BE49-F238E27FC236}">
-                <a16:creationId xmlns:a16="http://schemas.microsoft.com/office/drawing/2014/main" id="{E93EACC0-706A-4891-80DC-6306EBBFC801}"/>
+                <a16:creationId xmlns:a16="http://schemas.microsoft.com/office/drawing/2014/main" id="{75A285FA-C067-4952-93A3-492E8CB81FB1}"/>
               </a:ext>
             </a:extLst>
           </p:cNvPr>
@@ -5256,7 +5256,7 @@
           <p:cNvPr id="9" name="s13-takeaway">
             <a:extLst xmlns:a="http://schemas.openxmlformats.org/drawingml/2006/main">
               <a:ext uri="{FF2B5EF4-FFF2-40B4-BE49-F238E27FC236}">
-                <a16:creationId xmlns:a16="http://schemas.microsoft.com/office/drawing/2014/main" id="{DA61B2E6-20EB-409D-AE75-13E67E22312F}"/>
+                <a16:creationId xmlns:a16="http://schemas.microsoft.com/office/drawing/2014/main" id="{4EB7E9FD-B39C-49AC-9FAB-1FC0E31F1904}"/>
               </a:ext>
             </a:extLst>
           </p:cNvPr>
@@ -5281,7 +5281,7 @@
         </p:spPr>
         <p:txBody>
           <a:bodyPr xmlns:a="http://schemas.openxmlformats.org/drawingml/2006/main" lIns="0" tIns="0" rIns="0" bIns="0" anchor="ctr">
-            <a:normAutofit fontScale="100000"/>
+            <a:normAutofit fontScale="95911"/>
           </a:bodyPr>
           <a:lstStyle xmlns:a="http://schemas.openxmlformats.org/drawingml/2006/main"/>
           <a:p xmlns:a="http://schemas.openxmlformats.org/drawingml/2006/main">
@@ -5304,7 +5304,7 @@
                 <a:ea typeface="PingFang SC"/>
                 <a:cs typeface="PingFang SC"/>
               </a:rPr>
-              <a:t>公开幻灯片只使用课程原创文字与原生图形；完整论证、链接和事实边界请见本节讲义。</a:t>
+              <a:t>课程精编页用于讲授主线；播放器中的“原课件”模式保留团队 PowerPoint 精选页、真实图片和可播放视频。</a:t>
             </a:r>
           </a:p>
         </p:txBody>
@@ -5312,7 +5312,7 @@
     </p:spTree>
     <p:extLst>
       <p:ext uri="{BB962C8B-B14F-4D97-AF65-F5344CB8AC3E}">
-        <p14:creationId xmlns:p14="http://schemas.microsoft.com/office/powerpoint/2010/main" val="2112740767"/>
+        <p14:creationId xmlns:p14="http://schemas.microsoft.com/office/powerpoint/2010/main" val="1785575220"/>
       </p:ext>
     </p:extLst>
   </p:cSld>
@@ -5343,7 +5343,7 @@
           <p:cNvPr id="1" name="s2-rule">
             <a:extLst xmlns:a="http://schemas.openxmlformats.org/drawingml/2006/main">
               <a:ext uri="{FF2B5EF4-FFF2-40B4-BE49-F238E27FC236}">
-                <a16:creationId xmlns:a16="http://schemas.microsoft.com/office/drawing/2014/main" id="{587A8F63-51AD-412F-9DAB-F7DAC0BAAF97}"/>
+                <a16:creationId xmlns:a16="http://schemas.microsoft.com/office/drawing/2014/main" id="{938F2837-6BE5-4257-997F-1574626562C8}"/>
               </a:ext>
             </a:extLst>
           </p:cNvPr>
@@ -5376,7 +5376,7 @@
           <p:cNvPr id="2" name="s2-eyebrow">
             <a:extLst xmlns:a="http://schemas.openxmlformats.org/drawingml/2006/main">
               <a:ext uri="{FF2B5EF4-FFF2-40B4-BE49-F238E27FC236}">
-                <a16:creationId xmlns:a16="http://schemas.microsoft.com/office/drawing/2014/main" id="{C3690976-5369-419B-9308-C2C11F906CF6}"/>
+                <a16:creationId xmlns:a16="http://schemas.microsoft.com/office/drawing/2014/main" id="{22252FCF-A9F3-4486-BEFD-76C480D50D9A}"/>
               </a:ext>
             </a:extLst>
           </p:cNvPr>
@@ -5434,7 +5434,7 @@
           <p:cNvPr id="3" name="s2-title">
             <a:extLst xmlns:a="http://schemas.openxmlformats.org/drawingml/2006/main">
               <a:ext uri="{FF2B5EF4-FFF2-40B4-BE49-F238E27FC236}">
-                <a16:creationId xmlns:a16="http://schemas.microsoft.com/office/drawing/2014/main" id="{B74077D4-3CBF-4FD1-B9C6-3B197F6A8A73}"/>
+                <a16:creationId xmlns:a16="http://schemas.microsoft.com/office/drawing/2014/main" id="{968F5C04-AD20-4370-B1DF-0DCCA800C120}"/>
               </a:ext>
             </a:extLst>
           </p:cNvPr>
@@ -5492,7 +5492,7 @@
           <p:cNvPr id="4" name="s2-footer">
             <a:extLst xmlns:a="http://schemas.openxmlformats.org/drawingml/2006/main">
               <a:ext uri="{FF2B5EF4-FFF2-40B4-BE49-F238E27FC236}">
-                <a16:creationId xmlns:a16="http://schemas.microsoft.com/office/drawing/2014/main" id="{3EB71A50-5ED4-46C8-AA7A-9964C9297E79}"/>
+                <a16:creationId xmlns:a16="http://schemas.microsoft.com/office/drawing/2014/main" id="{F3F86671-D1B9-4C6A-A515-3B15B9EB92A4}"/>
               </a:ext>
             </a:extLst>
           </p:cNvPr>
@@ -5523,7 +5523,7 @@
           <p:cNvPr id="5" name="s2-identity">
             <a:extLst xmlns:a="http://schemas.openxmlformats.org/drawingml/2006/main">
               <a:ext uri="{FF2B5EF4-FFF2-40B4-BE49-F238E27FC236}">
-                <a16:creationId xmlns:a16="http://schemas.microsoft.com/office/drawing/2014/main" id="{F784D18C-C360-4217-A199-1FE24CA9323C}"/>
+                <a16:creationId xmlns:a16="http://schemas.microsoft.com/office/drawing/2014/main" id="{F7BCACB4-257F-45A6-9B58-228E999908B7}"/>
               </a:ext>
             </a:extLst>
           </p:cNvPr>
@@ -5581,7 +5581,7 @@
           <p:cNvPr id="6" name="objective-1">
             <a:extLst xmlns:a="http://schemas.openxmlformats.org/drawingml/2006/main">
               <a:ext uri="{FF2B5EF4-FFF2-40B4-BE49-F238E27FC236}">
-                <a16:creationId xmlns:a16="http://schemas.microsoft.com/office/drawing/2014/main" id="{04E6FDBF-1962-40AB-B459-AC40642DD366}"/>
+                <a16:creationId xmlns:a16="http://schemas.microsoft.com/office/drawing/2014/main" id="{6D2000F2-E3B2-4EDA-BCB1-1106EF280FDC}"/>
               </a:ext>
             </a:extLst>
           </p:cNvPr>
@@ -5668,7 +5668,7 @@
           <p:cNvPr id="7" name="objective-2">
             <a:extLst xmlns:a="http://schemas.openxmlformats.org/drawingml/2006/main">
               <a:ext uri="{FF2B5EF4-FFF2-40B4-BE49-F238E27FC236}">
-                <a16:creationId xmlns:a16="http://schemas.microsoft.com/office/drawing/2014/main" id="{40101368-0AD7-45F1-9900-673DF070DBFA}"/>
+                <a16:creationId xmlns:a16="http://schemas.microsoft.com/office/drawing/2014/main" id="{4410174A-C56F-4229-A444-92F8671668EE}"/>
               </a:ext>
             </a:extLst>
           </p:cNvPr>
@@ -5755,7 +5755,7 @@
           <p:cNvPr id="8" name="objective-3">
             <a:extLst xmlns:a="http://schemas.openxmlformats.org/drawingml/2006/main">
               <a:ext uri="{FF2B5EF4-FFF2-40B4-BE49-F238E27FC236}">
-                <a16:creationId xmlns:a16="http://schemas.microsoft.com/office/drawing/2014/main" id="{CA7AF93E-1BBB-4DE4-BE6F-1DF634346695}"/>
+                <a16:creationId xmlns:a16="http://schemas.microsoft.com/office/drawing/2014/main" id="{3686DCDC-91ED-4451-B6C4-2193353A5FD4}"/>
               </a:ext>
             </a:extLst>
           </p:cNvPr>
@@ -5842,7 +5842,7 @@
           <p:cNvPr id="9" name="objective-4">
             <a:extLst xmlns:a="http://schemas.openxmlformats.org/drawingml/2006/main">
               <a:ext uri="{FF2B5EF4-FFF2-40B4-BE49-F238E27FC236}">
-                <a16:creationId xmlns:a16="http://schemas.microsoft.com/office/drawing/2014/main" id="{2E0B7251-7701-42A6-A699-1ABF6D660801}"/>
+                <a16:creationId xmlns:a16="http://schemas.microsoft.com/office/drawing/2014/main" id="{11A72759-72FF-4EA1-A250-AC29D3FAA552}"/>
               </a:ext>
             </a:extLst>
           </p:cNvPr>
@@ -5927,7 +5927,7 @@
     </p:spTree>
     <p:extLst>
       <p:ext uri="{BB962C8B-B14F-4D97-AF65-F5344CB8AC3E}">
-        <p14:creationId xmlns:p14="http://schemas.microsoft.com/office/powerpoint/2010/main" val="497166306"/>
+        <p14:creationId xmlns:p14="http://schemas.microsoft.com/office/powerpoint/2010/main" val="865664108"/>
       </p:ext>
     </p:extLst>
   </p:cSld>
@@ -5958,7 +5958,7 @@
           <p:cNvPr id="1" name="s3-rule">
             <a:extLst xmlns:a="http://schemas.openxmlformats.org/drawingml/2006/main">
               <a:ext uri="{FF2B5EF4-FFF2-40B4-BE49-F238E27FC236}">
-                <a16:creationId xmlns:a16="http://schemas.microsoft.com/office/drawing/2014/main" id="{F316293E-F4F4-41D3-BB41-B69C2B5AAF41}"/>
+                <a16:creationId xmlns:a16="http://schemas.microsoft.com/office/drawing/2014/main" id="{B72CD055-74B7-4465-8391-296D63B236FE}"/>
               </a:ext>
             </a:extLst>
           </p:cNvPr>
@@ -5991,7 +5991,7 @@
           <p:cNvPr id="2" name="s3-eyebrow">
             <a:extLst xmlns:a="http://schemas.openxmlformats.org/drawingml/2006/main">
               <a:ext uri="{FF2B5EF4-FFF2-40B4-BE49-F238E27FC236}">
-                <a16:creationId xmlns:a16="http://schemas.microsoft.com/office/drawing/2014/main" id="{F0016861-BD71-4713-8139-512EE66AE47F}"/>
+                <a16:creationId xmlns:a16="http://schemas.microsoft.com/office/drawing/2014/main" id="{6E3F4B50-C790-4B6B-A25F-4DEDF9A2B6E5}"/>
               </a:ext>
             </a:extLst>
           </p:cNvPr>
@@ -6049,7 +6049,7 @@
           <p:cNvPr id="3" name="s3-title">
             <a:extLst xmlns:a="http://schemas.openxmlformats.org/drawingml/2006/main">
               <a:ext uri="{FF2B5EF4-FFF2-40B4-BE49-F238E27FC236}">
-                <a16:creationId xmlns:a16="http://schemas.microsoft.com/office/drawing/2014/main" id="{F21C398E-9339-452E-B996-703EA76EDD43}"/>
+                <a16:creationId xmlns:a16="http://schemas.microsoft.com/office/drawing/2014/main" id="{AE5C7B59-CE86-4E9A-B0E3-41C2EF158085}"/>
               </a:ext>
             </a:extLst>
           </p:cNvPr>
@@ -6107,7 +6107,7 @@
           <p:cNvPr id="4" name="s3-footer">
             <a:extLst xmlns:a="http://schemas.openxmlformats.org/drawingml/2006/main">
               <a:ext uri="{FF2B5EF4-FFF2-40B4-BE49-F238E27FC236}">
-                <a16:creationId xmlns:a16="http://schemas.microsoft.com/office/drawing/2014/main" id="{B08B297F-C879-4D89-AE86-AA7328E4895D}"/>
+                <a16:creationId xmlns:a16="http://schemas.microsoft.com/office/drawing/2014/main" id="{4CA33271-69D7-4E20-AB6D-0701E2432D98}"/>
               </a:ext>
             </a:extLst>
           </p:cNvPr>
@@ -6138,7 +6138,7 @@
           <p:cNvPr id="5" name="s3-identity">
             <a:extLst xmlns:a="http://schemas.openxmlformats.org/drawingml/2006/main">
               <a:ext uri="{FF2B5EF4-FFF2-40B4-BE49-F238E27FC236}">
-                <a16:creationId xmlns:a16="http://schemas.microsoft.com/office/drawing/2014/main" id="{BB1A99D4-8C58-482A-9E2E-66C103859F03}"/>
+                <a16:creationId xmlns:a16="http://schemas.microsoft.com/office/drawing/2014/main" id="{3307529C-FCE1-4AD2-ACA8-89AE4A5A123C}"/>
               </a:ext>
             </a:extLst>
           </p:cNvPr>
@@ -6196,7 +6196,7 @@
           <p:cNvPr id="6" name="core-no-0">
             <a:extLst xmlns:a="http://schemas.openxmlformats.org/drawingml/2006/main">
               <a:ext uri="{FF2B5EF4-FFF2-40B4-BE49-F238E27FC236}">
-                <a16:creationId xmlns:a16="http://schemas.microsoft.com/office/drawing/2014/main" id="{EB69512F-BD98-4C30-8051-AF1336CE4E8A}"/>
+                <a16:creationId xmlns:a16="http://schemas.microsoft.com/office/drawing/2014/main" id="{6D755C1E-8C1B-4C1E-8D09-8D546696EADB}"/>
               </a:ext>
             </a:extLst>
           </p:cNvPr>
@@ -6254,7 +6254,7 @@
           <p:cNvPr id="7" name="core-label-0">
             <a:extLst xmlns:a="http://schemas.openxmlformats.org/drawingml/2006/main">
               <a:ext uri="{FF2B5EF4-FFF2-40B4-BE49-F238E27FC236}">
-                <a16:creationId xmlns:a16="http://schemas.microsoft.com/office/drawing/2014/main" id="{3EFC2CB1-557F-4801-A43B-F77DB9BE08AC}"/>
+                <a16:creationId xmlns:a16="http://schemas.microsoft.com/office/drawing/2014/main" id="{0671335D-8F36-4395-A327-510FA17138B3}"/>
               </a:ext>
             </a:extLst>
           </p:cNvPr>
@@ -6312,7 +6312,7 @@
           <p:cNvPr id="8" name="core-body-0">
             <a:extLst xmlns:a="http://schemas.openxmlformats.org/drawingml/2006/main">
               <a:ext uri="{FF2B5EF4-FFF2-40B4-BE49-F238E27FC236}">
-                <a16:creationId xmlns:a16="http://schemas.microsoft.com/office/drawing/2014/main" id="{2AE807D3-1B9F-4D8F-996B-2B13DA2A2DEB}"/>
+                <a16:creationId xmlns:a16="http://schemas.microsoft.com/office/drawing/2014/main" id="{18C1B6E5-157B-4959-A2AA-AC002730D78A}"/>
               </a:ext>
             </a:extLst>
           </p:cNvPr>
@@ -6376,7 +6376,7 @@
           <p:cNvPr id="9" name="core-no-1">
             <a:extLst xmlns:a="http://schemas.openxmlformats.org/drawingml/2006/main">
               <a:ext uri="{FF2B5EF4-FFF2-40B4-BE49-F238E27FC236}">
-                <a16:creationId xmlns:a16="http://schemas.microsoft.com/office/drawing/2014/main" id="{CDD8A46A-35F3-41D8-8802-0E311019A35D}"/>
+                <a16:creationId xmlns:a16="http://schemas.microsoft.com/office/drawing/2014/main" id="{7472B4C4-5DA2-4245-ACBF-06F2380EF08F}"/>
               </a:ext>
             </a:extLst>
           </p:cNvPr>
@@ -6434,7 +6434,7 @@
           <p:cNvPr id="10" name="core-label-1">
             <a:extLst xmlns:a="http://schemas.openxmlformats.org/drawingml/2006/main">
               <a:ext uri="{FF2B5EF4-FFF2-40B4-BE49-F238E27FC236}">
-                <a16:creationId xmlns:a16="http://schemas.microsoft.com/office/drawing/2014/main" id="{44739B69-51F4-43D1-9BE9-8D5426461E93}"/>
+                <a16:creationId xmlns:a16="http://schemas.microsoft.com/office/drawing/2014/main" id="{2E24BA13-733C-4EC7-8980-81B74B23E2E9}"/>
               </a:ext>
             </a:extLst>
           </p:cNvPr>
@@ -6492,7 +6492,7 @@
           <p:cNvPr id="11" name="core-body-1">
             <a:extLst xmlns:a="http://schemas.openxmlformats.org/drawingml/2006/main">
               <a:ext uri="{FF2B5EF4-FFF2-40B4-BE49-F238E27FC236}">
-                <a16:creationId xmlns:a16="http://schemas.microsoft.com/office/drawing/2014/main" id="{256B482A-E9F0-4B4C-8C26-E88D00B41776}"/>
+                <a16:creationId xmlns:a16="http://schemas.microsoft.com/office/drawing/2014/main" id="{CB98F80B-C2E5-4113-B0D0-CCFEC0191A67}"/>
               </a:ext>
             </a:extLst>
           </p:cNvPr>
@@ -6556,7 +6556,7 @@
           <p:cNvPr id="12" name="s3-takeaway-rule">
             <a:extLst xmlns:a="http://schemas.openxmlformats.org/drawingml/2006/main">
               <a:ext uri="{FF2B5EF4-FFF2-40B4-BE49-F238E27FC236}">
-                <a16:creationId xmlns:a16="http://schemas.microsoft.com/office/drawing/2014/main" id="{A25A1E09-75BB-44B6-BB45-7999A1599349}"/>
+                <a16:creationId xmlns:a16="http://schemas.microsoft.com/office/drawing/2014/main" id="{6FA0E2C0-9913-49A1-BF6E-455CA6B2D935}"/>
               </a:ext>
             </a:extLst>
           </p:cNvPr>
@@ -6589,7 +6589,7 @@
           <p:cNvPr id="13" name="s3-takeaway">
             <a:extLst xmlns:a="http://schemas.openxmlformats.org/drawingml/2006/main">
               <a:ext uri="{FF2B5EF4-FFF2-40B4-BE49-F238E27FC236}">
-                <a16:creationId xmlns:a16="http://schemas.microsoft.com/office/drawing/2014/main" id="{C95E2FDD-394F-4AEA-9CAE-8D4DDE1F1942}"/>
+                <a16:creationId xmlns:a16="http://schemas.microsoft.com/office/drawing/2014/main" id="{9747496C-CBA6-4740-8081-0ADAA0D8863A}"/>
               </a:ext>
             </a:extLst>
           </p:cNvPr>
@@ -6645,7 +6645,7 @@
     </p:spTree>
     <p:extLst>
       <p:ext uri="{BB962C8B-B14F-4D97-AF65-F5344CB8AC3E}">
-        <p14:creationId xmlns:p14="http://schemas.microsoft.com/office/powerpoint/2010/main" val="938779631"/>
+        <p14:creationId xmlns:p14="http://schemas.microsoft.com/office/powerpoint/2010/main" val="105908935"/>
       </p:ext>
     </p:extLst>
   </p:cSld>
@@ -6676,7 +6676,7 @@
           <p:cNvPr id="1" name="s4-rule">
             <a:extLst xmlns:a="http://schemas.openxmlformats.org/drawingml/2006/main">
               <a:ext uri="{FF2B5EF4-FFF2-40B4-BE49-F238E27FC236}">
-                <a16:creationId xmlns:a16="http://schemas.microsoft.com/office/drawing/2014/main" id="{F2E2C04F-C847-4E17-B596-D3C8CB44A4A0}"/>
+                <a16:creationId xmlns:a16="http://schemas.microsoft.com/office/drawing/2014/main" id="{498C0D2A-7EE2-4418-9BE0-BF22E32C0E2D}"/>
               </a:ext>
             </a:extLst>
           </p:cNvPr>
@@ -6709,7 +6709,7 @@
           <p:cNvPr id="2" name="s4-eyebrow">
             <a:extLst xmlns:a="http://schemas.openxmlformats.org/drawingml/2006/main">
               <a:ext uri="{FF2B5EF4-FFF2-40B4-BE49-F238E27FC236}">
-                <a16:creationId xmlns:a16="http://schemas.microsoft.com/office/drawing/2014/main" id="{392FB1A4-E9A6-419C-9748-3AA172858F11}"/>
+                <a16:creationId xmlns:a16="http://schemas.microsoft.com/office/drawing/2014/main" id="{A067A991-E698-457C-85BE-2C19B5D0494C}"/>
               </a:ext>
             </a:extLst>
           </p:cNvPr>
@@ -6767,7 +6767,7 @@
           <p:cNvPr id="3" name="s4-title">
             <a:extLst xmlns:a="http://schemas.openxmlformats.org/drawingml/2006/main">
               <a:ext uri="{FF2B5EF4-FFF2-40B4-BE49-F238E27FC236}">
-                <a16:creationId xmlns:a16="http://schemas.microsoft.com/office/drawing/2014/main" id="{27681CFE-8B77-45A2-BAB5-27CA383E4F66}"/>
+                <a16:creationId xmlns:a16="http://schemas.microsoft.com/office/drawing/2014/main" id="{D5CA8205-BC64-4544-A8A8-196EBC8938A0}"/>
               </a:ext>
             </a:extLst>
           </p:cNvPr>
@@ -6825,7 +6825,7 @@
           <p:cNvPr id="4" name="s4-footer">
             <a:extLst xmlns:a="http://schemas.openxmlformats.org/drawingml/2006/main">
               <a:ext uri="{FF2B5EF4-FFF2-40B4-BE49-F238E27FC236}">
-                <a16:creationId xmlns:a16="http://schemas.microsoft.com/office/drawing/2014/main" id="{2CB151DF-8468-4421-A8E6-9B82C6CF967D}"/>
+                <a16:creationId xmlns:a16="http://schemas.microsoft.com/office/drawing/2014/main" id="{62CA0693-16F6-43AC-9201-C36AFC9ABE5E}"/>
               </a:ext>
             </a:extLst>
           </p:cNvPr>
@@ -6856,7 +6856,7 @@
           <p:cNvPr id="5" name="s4-identity">
             <a:extLst xmlns:a="http://schemas.openxmlformats.org/drawingml/2006/main">
               <a:ext uri="{FF2B5EF4-FFF2-40B4-BE49-F238E27FC236}">
-                <a16:creationId xmlns:a16="http://schemas.microsoft.com/office/drawing/2014/main" id="{DCFC0583-9B3F-412F-A958-11A0669403AC}"/>
+                <a16:creationId xmlns:a16="http://schemas.microsoft.com/office/drawing/2014/main" id="{52F84B44-40B3-402D-89EE-BD6AFDCB9E15}"/>
               </a:ext>
             </a:extLst>
           </p:cNvPr>
@@ -6914,7 +6914,7 @@
           <p:cNvPr id="6" name="core-no-0">
             <a:extLst xmlns:a="http://schemas.openxmlformats.org/drawingml/2006/main">
               <a:ext uri="{FF2B5EF4-FFF2-40B4-BE49-F238E27FC236}">
-                <a16:creationId xmlns:a16="http://schemas.microsoft.com/office/drawing/2014/main" id="{1EAE11ED-1052-4186-B08A-E15D09DF52FA}"/>
+                <a16:creationId xmlns:a16="http://schemas.microsoft.com/office/drawing/2014/main" id="{17B67A88-A911-48C3-ACEB-9D031CE312A3}"/>
               </a:ext>
             </a:extLst>
           </p:cNvPr>
@@ -6972,7 +6972,7 @@
           <p:cNvPr id="7" name="core-label-0">
             <a:extLst xmlns:a="http://schemas.openxmlformats.org/drawingml/2006/main">
               <a:ext uri="{FF2B5EF4-FFF2-40B4-BE49-F238E27FC236}">
-                <a16:creationId xmlns:a16="http://schemas.microsoft.com/office/drawing/2014/main" id="{062F48AE-6014-4844-8288-E2824D2E19E8}"/>
+                <a16:creationId xmlns:a16="http://schemas.microsoft.com/office/drawing/2014/main" id="{840FEC20-1575-4A9B-82FB-A4AD2AD7105D}"/>
               </a:ext>
             </a:extLst>
           </p:cNvPr>
@@ -7030,7 +7030,7 @@
           <p:cNvPr id="8" name="core-body-0">
             <a:extLst xmlns:a="http://schemas.openxmlformats.org/drawingml/2006/main">
               <a:ext uri="{FF2B5EF4-FFF2-40B4-BE49-F238E27FC236}">
-                <a16:creationId xmlns:a16="http://schemas.microsoft.com/office/drawing/2014/main" id="{274DE35D-6614-44F1-8C7D-07D78FD1C036}"/>
+                <a16:creationId xmlns:a16="http://schemas.microsoft.com/office/drawing/2014/main" id="{87701F03-E017-4B21-9914-55E22DDC5568}"/>
               </a:ext>
             </a:extLst>
           </p:cNvPr>
@@ -7094,7 +7094,7 @@
           <p:cNvPr id="9" name="core-no-1">
             <a:extLst xmlns:a="http://schemas.openxmlformats.org/drawingml/2006/main">
               <a:ext uri="{FF2B5EF4-FFF2-40B4-BE49-F238E27FC236}">
-                <a16:creationId xmlns:a16="http://schemas.microsoft.com/office/drawing/2014/main" id="{A46A3E05-1CA4-4D80-B864-EEA8DFB523CE}"/>
+                <a16:creationId xmlns:a16="http://schemas.microsoft.com/office/drawing/2014/main" id="{84180E7A-D1A7-4161-B12D-49201E74E646}"/>
               </a:ext>
             </a:extLst>
           </p:cNvPr>
@@ -7152,7 +7152,7 @@
           <p:cNvPr id="10" name="core-label-1">
             <a:extLst xmlns:a="http://schemas.openxmlformats.org/drawingml/2006/main">
               <a:ext uri="{FF2B5EF4-FFF2-40B4-BE49-F238E27FC236}">
-                <a16:creationId xmlns:a16="http://schemas.microsoft.com/office/drawing/2014/main" id="{B55DD92A-A7D2-446F-B8AF-227A3D365AF8}"/>
+                <a16:creationId xmlns:a16="http://schemas.microsoft.com/office/drawing/2014/main" id="{C1727666-FD76-4F99-AC35-A82B462D1D78}"/>
               </a:ext>
             </a:extLst>
           </p:cNvPr>
@@ -7210,7 +7210,7 @@
           <p:cNvPr id="11" name="core-body-1">
             <a:extLst xmlns:a="http://schemas.openxmlformats.org/drawingml/2006/main">
               <a:ext uri="{FF2B5EF4-FFF2-40B4-BE49-F238E27FC236}">
-                <a16:creationId xmlns:a16="http://schemas.microsoft.com/office/drawing/2014/main" id="{37E9BB85-119C-4B41-84B0-98CA84FCDF45}"/>
+                <a16:creationId xmlns:a16="http://schemas.microsoft.com/office/drawing/2014/main" id="{09961410-86F0-4654-91A7-EA990E07A732}"/>
               </a:ext>
             </a:extLst>
           </p:cNvPr>
@@ -7274,7 +7274,7 @@
           <p:cNvPr id="12" name="s4-takeaway-rule">
             <a:extLst xmlns:a="http://schemas.openxmlformats.org/drawingml/2006/main">
               <a:ext uri="{FF2B5EF4-FFF2-40B4-BE49-F238E27FC236}">
-                <a16:creationId xmlns:a16="http://schemas.microsoft.com/office/drawing/2014/main" id="{74941998-73A1-4D39-BCCD-1DE253171E21}"/>
+                <a16:creationId xmlns:a16="http://schemas.microsoft.com/office/drawing/2014/main" id="{CC1811AD-81E9-4403-B30E-BF7FBABB382E}"/>
               </a:ext>
             </a:extLst>
           </p:cNvPr>
@@ -7307,7 +7307,7 @@
           <p:cNvPr id="13" name="s4-takeaway">
             <a:extLst xmlns:a="http://schemas.openxmlformats.org/drawingml/2006/main">
               <a:ext uri="{FF2B5EF4-FFF2-40B4-BE49-F238E27FC236}">
-                <a16:creationId xmlns:a16="http://schemas.microsoft.com/office/drawing/2014/main" id="{01BD91B6-6C6E-468D-9DEC-E9A0DE7F80B9}"/>
+                <a16:creationId xmlns:a16="http://schemas.microsoft.com/office/drawing/2014/main" id="{4DDD0C6D-F01E-4926-811C-7AAAE16810EE}"/>
               </a:ext>
             </a:extLst>
           </p:cNvPr>
@@ -7363,7 +7363,7 @@
     </p:spTree>
     <p:extLst>
       <p:ext uri="{BB962C8B-B14F-4D97-AF65-F5344CB8AC3E}">
-        <p14:creationId xmlns:p14="http://schemas.microsoft.com/office/powerpoint/2010/main" val="1787980955"/>
+        <p14:creationId xmlns:p14="http://schemas.microsoft.com/office/powerpoint/2010/main" val="251654277"/>
       </p:ext>
     </p:extLst>
   </p:cSld>
@@ -7394,7 +7394,7 @@
           <p:cNvPr id="1" name="s5-rule">
             <a:extLst xmlns:a="http://schemas.openxmlformats.org/drawingml/2006/main">
               <a:ext uri="{FF2B5EF4-FFF2-40B4-BE49-F238E27FC236}">
-                <a16:creationId xmlns:a16="http://schemas.microsoft.com/office/drawing/2014/main" id="{0D6AA37B-92C2-4531-B415-E8CF3CBAEF68}"/>
+                <a16:creationId xmlns:a16="http://schemas.microsoft.com/office/drawing/2014/main" id="{3D8929D3-DB11-4925-B9F4-595C71966DD0}"/>
               </a:ext>
             </a:extLst>
           </p:cNvPr>
@@ -7427,7 +7427,7 @@
           <p:cNvPr id="2" name="s5-eyebrow">
             <a:extLst xmlns:a="http://schemas.openxmlformats.org/drawingml/2006/main">
               <a:ext uri="{FF2B5EF4-FFF2-40B4-BE49-F238E27FC236}">
-                <a16:creationId xmlns:a16="http://schemas.microsoft.com/office/drawing/2014/main" id="{8AC64179-76A1-4BDE-9558-4AB3054D29C4}"/>
+                <a16:creationId xmlns:a16="http://schemas.microsoft.com/office/drawing/2014/main" id="{8885A4F6-0AFD-4D30-BD47-E8433BF7273E}"/>
               </a:ext>
             </a:extLst>
           </p:cNvPr>
@@ -7485,7 +7485,7 @@
           <p:cNvPr id="3" name="s5-title">
             <a:extLst xmlns:a="http://schemas.openxmlformats.org/drawingml/2006/main">
               <a:ext uri="{FF2B5EF4-FFF2-40B4-BE49-F238E27FC236}">
-                <a16:creationId xmlns:a16="http://schemas.microsoft.com/office/drawing/2014/main" id="{FEDD07D1-B44D-4D97-A8B0-6DC44A635473}"/>
+                <a16:creationId xmlns:a16="http://schemas.microsoft.com/office/drawing/2014/main" id="{5E32C354-E15A-47D4-91CA-100A6C0C4CA8}"/>
               </a:ext>
             </a:extLst>
           </p:cNvPr>
@@ -7543,7 +7543,7 @@
           <p:cNvPr id="4" name="s5-footer">
             <a:extLst xmlns:a="http://schemas.openxmlformats.org/drawingml/2006/main">
               <a:ext uri="{FF2B5EF4-FFF2-40B4-BE49-F238E27FC236}">
-                <a16:creationId xmlns:a16="http://schemas.microsoft.com/office/drawing/2014/main" id="{FF6C53FB-3FD9-4B0D-A33B-E05DF51E8D7A}"/>
+                <a16:creationId xmlns:a16="http://schemas.microsoft.com/office/drawing/2014/main" id="{74B76CCE-7796-41C3-9F9D-1C2D3877C674}"/>
               </a:ext>
             </a:extLst>
           </p:cNvPr>
@@ -7574,7 +7574,7 @@
           <p:cNvPr id="5" name="s5-identity">
             <a:extLst xmlns:a="http://schemas.openxmlformats.org/drawingml/2006/main">
               <a:ext uri="{FF2B5EF4-FFF2-40B4-BE49-F238E27FC236}">
-                <a16:creationId xmlns:a16="http://schemas.microsoft.com/office/drawing/2014/main" id="{B9F7A59B-73AE-453C-9A3B-D4FA3C247351}"/>
+                <a16:creationId xmlns:a16="http://schemas.microsoft.com/office/drawing/2014/main" id="{696F4B2D-20DA-4C79-9FA8-4EC24A3D0A99}"/>
               </a:ext>
             </a:extLst>
           </p:cNvPr>
@@ -7632,7 +7632,7 @@
           <p:cNvPr id="6" name="core-no-0">
             <a:extLst xmlns:a="http://schemas.openxmlformats.org/drawingml/2006/main">
               <a:ext uri="{FF2B5EF4-FFF2-40B4-BE49-F238E27FC236}">
-                <a16:creationId xmlns:a16="http://schemas.microsoft.com/office/drawing/2014/main" id="{94D142CE-DA68-4F54-982D-38B7F1356389}"/>
+                <a16:creationId xmlns:a16="http://schemas.microsoft.com/office/drawing/2014/main" id="{1CE7E0A0-9890-4AAA-A0BB-A51A6E72DE64}"/>
               </a:ext>
             </a:extLst>
           </p:cNvPr>
@@ -7690,7 +7690,7 @@
           <p:cNvPr id="7" name="core-label-0">
             <a:extLst xmlns:a="http://schemas.openxmlformats.org/drawingml/2006/main">
               <a:ext uri="{FF2B5EF4-FFF2-40B4-BE49-F238E27FC236}">
-                <a16:creationId xmlns:a16="http://schemas.microsoft.com/office/drawing/2014/main" id="{BD9A1BDA-D8B8-4ED9-89FF-320FB289C3DB}"/>
+                <a16:creationId xmlns:a16="http://schemas.microsoft.com/office/drawing/2014/main" id="{1E161E52-DC02-40FD-BFEB-A0416593C7ED}"/>
               </a:ext>
             </a:extLst>
           </p:cNvPr>
@@ -7748,7 +7748,7 @@
           <p:cNvPr id="8" name="core-body-0">
             <a:extLst xmlns:a="http://schemas.openxmlformats.org/drawingml/2006/main">
               <a:ext uri="{FF2B5EF4-FFF2-40B4-BE49-F238E27FC236}">
-                <a16:creationId xmlns:a16="http://schemas.microsoft.com/office/drawing/2014/main" id="{5D1C8CE8-2C3C-4A9F-9C6A-AD32E8C21880}"/>
+                <a16:creationId xmlns:a16="http://schemas.microsoft.com/office/drawing/2014/main" id="{68A9060E-97DD-4252-97CA-1ABFD0128D0A}"/>
               </a:ext>
             </a:extLst>
           </p:cNvPr>
@@ -7812,7 +7812,7 @@
           <p:cNvPr id="9" name="core-no-1">
             <a:extLst xmlns:a="http://schemas.openxmlformats.org/drawingml/2006/main">
               <a:ext uri="{FF2B5EF4-FFF2-40B4-BE49-F238E27FC236}">
-                <a16:creationId xmlns:a16="http://schemas.microsoft.com/office/drawing/2014/main" id="{D4F32E90-6545-4017-A106-BA252BA487EF}"/>
+                <a16:creationId xmlns:a16="http://schemas.microsoft.com/office/drawing/2014/main" id="{2E7C3881-DEE0-40DE-8C66-FB3C2324A0F8}"/>
               </a:ext>
             </a:extLst>
           </p:cNvPr>
@@ -7870,7 +7870,7 @@
           <p:cNvPr id="10" name="core-body-1">
             <a:extLst xmlns:a="http://schemas.openxmlformats.org/drawingml/2006/main">
               <a:ext uri="{FF2B5EF4-FFF2-40B4-BE49-F238E27FC236}">
-                <a16:creationId xmlns:a16="http://schemas.microsoft.com/office/drawing/2014/main" id="{D81CFD7D-5FB5-4E8B-A50E-B9ABA19691EE}"/>
+                <a16:creationId xmlns:a16="http://schemas.microsoft.com/office/drawing/2014/main" id="{387CC332-E413-42B0-A1FA-DD5A475CA237}"/>
               </a:ext>
             </a:extLst>
           </p:cNvPr>
@@ -7934,7 +7934,7 @@
           <p:cNvPr id="11" name="core-no-2">
             <a:extLst xmlns:a="http://schemas.openxmlformats.org/drawingml/2006/main">
               <a:ext uri="{FF2B5EF4-FFF2-40B4-BE49-F238E27FC236}">
-                <a16:creationId xmlns:a16="http://schemas.microsoft.com/office/drawing/2014/main" id="{B7F2F62D-EA03-493B-B40B-A8AF7A668564}"/>
+                <a16:creationId xmlns:a16="http://schemas.microsoft.com/office/drawing/2014/main" id="{8245714C-8016-4620-8D70-8361989B4FC3}"/>
               </a:ext>
             </a:extLst>
           </p:cNvPr>
@@ -7992,7 +7992,7 @@
           <p:cNvPr id="12" name="core-body-2">
             <a:extLst xmlns:a="http://schemas.openxmlformats.org/drawingml/2006/main">
               <a:ext uri="{FF2B5EF4-FFF2-40B4-BE49-F238E27FC236}">
-                <a16:creationId xmlns:a16="http://schemas.microsoft.com/office/drawing/2014/main" id="{CDE1A4BE-E17A-4CB5-A615-84CE7BBC9232}"/>
+                <a16:creationId xmlns:a16="http://schemas.microsoft.com/office/drawing/2014/main" id="{E2B11A45-68B2-4BE7-8F60-FC526E270F59}"/>
               </a:ext>
             </a:extLst>
           </p:cNvPr>
@@ -8056,7 +8056,7 @@
           <p:cNvPr id="13" name="s5-takeaway-rule">
             <a:extLst xmlns:a="http://schemas.openxmlformats.org/drawingml/2006/main">
               <a:ext uri="{FF2B5EF4-FFF2-40B4-BE49-F238E27FC236}">
-                <a16:creationId xmlns:a16="http://schemas.microsoft.com/office/drawing/2014/main" id="{60B9EFDF-384B-4CE5-9ECB-82545D3E9DF4}"/>
+                <a16:creationId xmlns:a16="http://schemas.microsoft.com/office/drawing/2014/main" id="{E0BC7FD1-EE79-4303-9F98-8617168FF347}"/>
               </a:ext>
             </a:extLst>
           </p:cNvPr>
@@ -8089,7 +8089,7 @@
           <p:cNvPr id="14" name="s5-takeaway">
             <a:extLst xmlns:a="http://schemas.openxmlformats.org/drawingml/2006/main">
               <a:ext uri="{FF2B5EF4-FFF2-40B4-BE49-F238E27FC236}">
-                <a16:creationId xmlns:a16="http://schemas.microsoft.com/office/drawing/2014/main" id="{445B274F-0466-42B6-8302-44FB5454B2EC}"/>
+                <a16:creationId xmlns:a16="http://schemas.microsoft.com/office/drawing/2014/main" id="{5AEA6A97-B32E-4590-BA87-901DEBB3349C}"/>
               </a:ext>
             </a:extLst>
           </p:cNvPr>
@@ -8145,7 +8145,7 @@
     </p:spTree>
     <p:extLst>
       <p:ext uri="{BB962C8B-B14F-4D97-AF65-F5344CB8AC3E}">
-        <p14:creationId xmlns:p14="http://schemas.microsoft.com/office/powerpoint/2010/main" val="76561890"/>
+        <p14:creationId xmlns:p14="http://schemas.microsoft.com/office/powerpoint/2010/main" val="1473076637"/>
       </p:ext>
     </p:extLst>
   </p:cSld>
@@ -8176,7 +8176,7 @@
           <p:cNvPr id="1" name="s6-rule">
             <a:extLst xmlns:a="http://schemas.openxmlformats.org/drawingml/2006/main">
               <a:ext uri="{FF2B5EF4-FFF2-40B4-BE49-F238E27FC236}">
-                <a16:creationId xmlns:a16="http://schemas.microsoft.com/office/drawing/2014/main" id="{5645AA6E-B4F1-4DF6-BDC1-88997B64E59C}"/>
+                <a16:creationId xmlns:a16="http://schemas.microsoft.com/office/drawing/2014/main" id="{9EBD83F1-BB4E-4B3F-9CE6-7F799AEC612A}"/>
               </a:ext>
             </a:extLst>
           </p:cNvPr>
@@ -8209,7 +8209,7 @@
           <p:cNvPr id="2" name="s6-eyebrow">
             <a:extLst xmlns:a="http://schemas.openxmlformats.org/drawingml/2006/main">
               <a:ext uri="{FF2B5EF4-FFF2-40B4-BE49-F238E27FC236}">
-                <a16:creationId xmlns:a16="http://schemas.microsoft.com/office/drawing/2014/main" id="{02B316DB-9D90-4F06-A2F6-232BF038EF57}"/>
+                <a16:creationId xmlns:a16="http://schemas.microsoft.com/office/drawing/2014/main" id="{5D5DD061-E17E-47F5-91C9-7FA823F681E8}"/>
               </a:ext>
             </a:extLst>
           </p:cNvPr>
@@ -8267,7 +8267,7 @@
           <p:cNvPr id="3" name="s6-title">
             <a:extLst xmlns:a="http://schemas.openxmlformats.org/drawingml/2006/main">
               <a:ext uri="{FF2B5EF4-FFF2-40B4-BE49-F238E27FC236}">
-                <a16:creationId xmlns:a16="http://schemas.microsoft.com/office/drawing/2014/main" id="{65F8CD72-683A-444B-BEA2-CE8A8CF14B98}"/>
+                <a16:creationId xmlns:a16="http://schemas.microsoft.com/office/drawing/2014/main" id="{CE39BF34-9CFB-4892-9CA7-6874507D234D}"/>
               </a:ext>
             </a:extLst>
           </p:cNvPr>
@@ -8325,7 +8325,7 @@
           <p:cNvPr id="4" name="s6-footer">
             <a:extLst xmlns:a="http://schemas.openxmlformats.org/drawingml/2006/main">
               <a:ext uri="{FF2B5EF4-FFF2-40B4-BE49-F238E27FC236}">
-                <a16:creationId xmlns:a16="http://schemas.microsoft.com/office/drawing/2014/main" id="{181D7235-7AA9-4250-AFDF-D95147C9FFE2}"/>
+                <a16:creationId xmlns:a16="http://schemas.microsoft.com/office/drawing/2014/main" id="{E9466DC0-91F0-4F29-A14D-001ECF91412A}"/>
               </a:ext>
             </a:extLst>
           </p:cNvPr>
@@ -8356,7 +8356,7 @@
           <p:cNvPr id="5" name="s6-identity">
             <a:extLst xmlns:a="http://schemas.openxmlformats.org/drawingml/2006/main">
               <a:ext uri="{FF2B5EF4-FFF2-40B4-BE49-F238E27FC236}">
-                <a16:creationId xmlns:a16="http://schemas.microsoft.com/office/drawing/2014/main" id="{0687CCD9-BEF6-430F-9E67-7EBB7FE63E00}"/>
+                <a16:creationId xmlns:a16="http://schemas.microsoft.com/office/drawing/2014/main" id="{8A5FD55C-416D-4E05-A9B1-1730C799DFDC}"/>
               </a:ext>
             </a:extLst>
           </p:cNvPr>
@@ -8414,7 +8414,7 @@
           <p:cNvPr id="6" name="core-no-0">
             <a:extLst xmlns:a="http://schemas.openxmlformats.org/drawingml/2006/main">
               <a:ext uri="{FF2B5EF4-FFF2-40B4-BE49-F238E27FC236}">
-                <a16:creationId xmlns:a16="http://schemas.microsoft.com/office/drawing/2014/main" id="{BF36CC7C-600F-49B9-8D16-7DD3A9567CDB}"/>
+                <a16:creationId xmlns:a16="http://schemas.microsoft.com/office/drawing/2014/main" id="{6FE80503-D737-4B91-88CA-512DE2D260FA}"/>
               </a:ext>
             </a:extLst>
           </p:cNvPr>
@@ -8472,7 +8472,7 @@
           <p:cNvPr id="7" name="core-label-0">
             <a:extLst xmlns:a="http://schemas.openxmlformats.org/drawingml/2006/main">
               <a:ext uri="{FF2B5EF4-FFF2-40B4-BE49-F238E27FC236}">
-                <a16:creationId xmlns:a16="http://schemas.microsoft.com/office/drawing/2014/main" id="{47238BD2-15A7-4C3D-ADA4-0237D534520C}"/>
+                <a16:creationId xmlns:a16="http://schemas.microsoft.com/office/drawing/2014/main" id="{A700D2CC-E608-46B2-83C7-8CFB71DEFF3C}"/>
               </a:ext>
             </a:extLst>
           </p:cNvPr>
@@ -8530,7 +8530,7 @@
           <p:cNvPr id="8" name="core-body-0">
             <a:extLst xmlns:a="http://schemas.openxmlformats.org/drawingml/2006/main">
               <a:ext uri="{FF2B5EF4-FFF2-40B4-BE49-F238E27FC236}">
-                <a16:creationId xmlns:a16="http://schemas.microsoft.com/office/drawing/2014/main" id="{99539D81-05F1-4D05-A032-0D7C963ACCE4}"/>
+                <a16:creationId xmlns:a16="http://schemas.microsoft.com/office/drawing/2014/main" id="{5CBBB40F-70E4-48D3-973A-481658021502}"/>
               </a:ext>
             </a:extLst>
           </p:cNvPr>
@@ -8594,7 +8594,7 @@
           <p:cNvPr id="9" name="core-no-1">
             <a:extLst xmlns:a="http://schemas.openxmlformats.org/drawingml/2006/main">
               <a:ext uri="{FF2B5EF4-FFF2-40B4-BE49-F238E27FC236}">
-                <a16:creationId xmlns:a16="http://schemas.microsoft.com/office/drawing/2014/main" id="{1BAC6C9A-BEBA-45B9-BDF7-DABEC336FD2B}"/>
+                <a16:creationId xmlns:a16="http://schemas.microsoft.com/office/drawing/2014/main" id="{9B521B7C-3FB6-4254-85CE-153D884A46B7}"/>
               </a:ext>
             </a:extLst>
           </p:cNvPr>
@@ -8652,7 +8652,7 @@
           <p:cNvPr id="10" name="core-body-1">
             <a:extLst xmlns:a="http://schemas.openxmlformats.org/drawingml/2006/main">
               <a:ext uri="{FF2B5EF4-FFF2-40B4-BE49-F238E27FC236}">
-                <a16:creationId xmlns:a16="http://schemas.microsoft.com/office/drawing/2014/main" id="{295E6278-FFCD-4BD9-A772-24F10DE1BEDE}"/>
+                <a16:creationId xmlns:a16="http://schemas.microsoft.com/office/drawing/2014/main" id="{CB0E5825-593D-47FA-856B-88C38ED0EC10}"/>
               </a:ext>
             </a:extLst>
           </p:cNvPr>
@@ -8716,7 +8716,7 @@
           <p:cNvPr id="11" name="core-no-2">
             <a:extLst xmlns:a="http://schemas.openxmlformats.org/drawingml/2006/main">
               <a:ext uri="{FF2B5EF4-FFF2-40B4-BE49-F238E27FC236}">
-                <a16:creationId xmlns:a16="http://schemas.microsoft.com/office/drawing/2014/main" id="{7473D946-C946-428A-890C-E0F1C9F5BDAF}"/>
+                <a16:creationId xmlns:a16="http://schemas.microsoft.com/office/drawing/2014/main" id="{47117AC5-B1FE-4593-960E-EDC2D71C3074}"/>
               </a:ext>
             </a:extLst>
           </p:cNvPr>
@@ -8774,7 +8774,7 @@
           <p:cNvPr id="12" name="core-body-2">
             <a:extLst xmlns:a="http://schemas.openxmlformats.org/drawingml/2006/main">
               <a:ext uri="{FF2B5EF4-FFF2-40B4-BE49-F238E27FC236}">
-                <a16:creationId xmlns:a16="http://schemas.microsoft.com/office/drawing/2014/main" id="{5971330D-02C9-4EA7-A3EB-6411272D39A8}"/>
+                <a16:creationId xmlns:a16="http://schemas.microsoft.com/office/drawing/2014/main" id="{A5422489-04B1-4977-9E93-6685633EDD51}"/>
               </a:ext>
             </a:extLst>
           </p:cNvPr>
@@ -8838,7 +8838,7 @@
           <p:cNvPr id="13" name="s6-takeaway-rule">
             <a:extLst xmlns:a="http://schemas.openxmlformats.org/drawingml/2006/main">
               <a:ext uri="{FF2B5EF4-FFF2-40B4-BE49-F238E27FC236}">
-                <a16:creationId xmlns:a16="http://schemas.microsoft.com/office/drawing/2014/main" id="{A52D5147-CB1D-45AA-8E02-C60B61176915}"/>
+                <a16:creationId xmlns:a16="http://schemas.microsoft.com/office/drawing/2014/main" id="{D66655ED-607F-4D46-B219-A15020887245}"/>
               </a:ext>
             </a:extLst>
           </p:cNvPr>
@@ -8871,7 +8871,7 @@
           <p:cNvPr id="14" name="s6-takeaway">
             <a:extLst xmlns:a="http://schemas.openxmlformats.org/drawingml/2006/main">
               <a:ext uri="{FF2B5EF4-FFF2-40B4-BE49-F238E27FC236}">
-                <a16:creationId xmlns:a16="http://schemas.microsoft.com/office/drawing/2014/main" id="{799BF6E7-C093-4533-82A6-EAB6CB187A9A}"/>
+                <a16:creationId xmlns:a16="http://schemas.microsoft.com/office/drawing/2014/main" id="{EC607BF7-3F52-4CC5-8638-31D1D93065EA}"/>
               </a:ext>
             </a:extLst>
           </p:cNvPr>
@@ -8927,7 +8927,7 @@
     </p:spTree>
     <p:extLst>
       <p:ext uri="{BB962C8B-B14F-4D97-AF65-F5344CB8AC3E}">
-        <p14:creationId xmlns:p14="http://schemas.microsoft.com/office/powerpoint/2010/main" val="129106210"/>
+        <p14:creationId xmlns:p14="http://schemas.microsoft.com/office/powerpoint/2010/main" val="778911157"/>
       </p:ext>
     </p:extLst>
   </p:cSld>
@@ -8958,7 +8958,7 @@
           <p:cNvPr id="1" name="s7-rule">
             <a:extLst xmlns:a="http://schemas.openxmlformats.org/drawingml/2006/main">
               <a:ext uri="{FF2B5EF4-FFF2-40B4-BE49-F238E27FC236}">
-                <a16:creationId xmlns:a16="http://schemas.microsoft.com/office/drawing/2014/main" id="{285ABC0E-4F66-4191-9F1F-857F204B3E2B}"/>
+                <a16:creationId xmlns:a16="http://schemas.microsoft.com/office/drawing/2014/main" id="{ACF3DD37-4AE0-4AA3-B3AB-17F134D3EC0F}"/>
               </a:ext>
             </a:extLst>
           </p:cNvPr>
@@ -8991,7 +8991,7 @@
           <p:cNvPr id="2" name="s7-eyebrow">
             <a:extLst xmlns:a="http://schemas.openxmlformats.org/drawingml/2006/main">
               <a:ext uri="{FF2B5EF4-FFF2-40B4-BE49-F238E27FC236}">
-                <a16:creationId xmlns:a16="http://schemas.microsoft.com/office/drawing/2014/main" id="{33E8FDE6-A27F-475B-8494-1429F623EEF2}"/>
+                <a16:creationId xmlns:a16="http://schemas.microsoft.com/office/drawing/2014/main" id="{D7B905B0-6048-4E12-95F4-C35368C5EC76}"/>
               </a:ext>
             </a:extLst>
           </p:cNvPr>
@@ -9049,7 +9049,7 @@
           <p:cNvPr id="3" name="s7-title">
             <a:extLst xmlns:a="http://schemas.openxmlformats.org/drawingml/2006/main">
               <a:ext uri="{FF2B5EF4-FFF2-40B4-BE49-F238E27FC236}">
-                <a16:creationId xmlns:a16="http://schemas.microsoft.com/office/drawing/2014/main" id="{811EADB1-0534-416D-9835-4534295F4767}"/>
+                <a16:creationId xmlns:a16="http://schemas.microsoft.com/office/drawing/2014/main" id="{2F7626FC-223E-4D08-B9F6-A49587BF53DE}"/>
               </a:ext>
             </a:extLst>
           </p:cNvPr>
@@ -9107,7 +9107,7 @@
           <p:cNvPr id="4" name="s7-footer">
             <a:extLst xmlns:a="http://schemas.openxmlformats.org/drawingml/2006/main">
               <a:ext uri="{FF2B5EF4-FFF2-40B4-BE49-F238E27FC236}">
-                <a16:creationId xmlns:a16="http://schemas.microsoft.com/office/drawing/2014/main" id="{EFEF8F5D-BBDF-4BB2-971B-7CA53E708D87}"/>
+                <a16:creationId xmlns:a16="http://schemas.microsoft.com/office/drawing/2014/main" id="{F9E0CED7-9483-40A4-A56D-677C9349F597}"/>
               </a:ext>
             </a:extLst>
           </p:cNvPr>
@@ -9138,7 +9138,7 @@
           <p:cNvPr id="5" name="s7-identity">
             <a:extLst xmlns:a="http://schemas.openxmlformats.org/drawingml/2006/main">
               <a:ext uri="{FF2B5EF4-FFF2-40B4-BE49-F238E27FC236}">
-                <a16:creationId xmlns:a16="http://schemas.microsoft.com/office/drawing/2014/main" id="{E08BE509-6AF6-427F-821E-149D05708415}"/>
+                <a16:creationId xmlns:a16="http://schemas.microsoft.com/office/drawing/2014/main" id="{4CE3DBE6-5883-49B1-A40B-E72E3303C3DE}"/>
               </a:ext>
             </a:extLst>
           </p:cNvPr>
@@ -9196,7 +9196,7 @@
           <p:cNvPr id="6" name="core-no-0">
             <a:extLst xmlns:a="http://schemas.openxmlformats.org/drawingml/2006/main">
               <a:ext uri="{FF2B5EF4-FFF2-40B4-BE49-F238E27FC236}">
-                <a16:creationId xmlns:a16="http://schemas.microsoft.com/office/drawing/2014/main" id="{FB7F04CA-3EFA-49EF-90ED-F36E8DE897E7}"/>
+                <a16:creationId xmlns:a16="http://schemas.microsoft.com/office/drawing/2014/main" id="{D95ACBB3-5049-48C2-8014-B449968B3927}"/>
               </a:ext>
             </a:extLst>
           </p:cNvPr>
@@ -9254,7 +9254,7 @@
           <p:cNvPr id="7" name="core-label-0">
             <a:extLst xmlns:a="http://schemas.openxmlformats.org/drawingml/2006/main">
               <a:ext uri="{FF2B5EF4-FFF2-40B4-BE49-F238E27FC236}">
-                <a16:creationId xmlns:a16="http://schemas.microsoft.com/office/drawing/2014/main" id="{BDB8D740-B751-457B-A2F6-BEA6DA6DEEEC}"/>
+                <a16:creationId xmlns:a16="http://schemas.microsoft.com/office/drawing/2014/main" id="{EFEFA621-0761-4247-8D3E-1BD01EE77838}"/>
               </a:ext>
             </a:extLst>
           </p:cNvPr>
@@ -9312,7 +9312,7 @@
           <p:cNvPr id="8" name="core-body-0">
             <a:extLst xmlns:a="http://schemas.openxmlformats.org/drawingml/2006/main">
               <a:ext uri="{FF2B5EF4-FFF2-40B4-BE49-F238E27FC236}">
-                <a16:creationId xmlns:a16="http://schemas.microsoft.com/office/drawing/2014/main" id="{F4060012-B30C-4DC7-960D-D15D8E6E5AAC}"/>
+                <a16:creationId xmlns:a16="http://schemas.microsoft.com/office/drawing/2014/main" id="{2EA540D1-9205-4340-A53D-8C5D6B398F4F}"/>
               </a:ext>
             </a:extLst>
           </p:cNvPr>
@@ -9376,7 +9376,7 @@
           <p:cNvPr id="9" name="core-no-1">
             <a:extLst xmlns:a="http://schemas.openxmlformats.org/drawingml/2006/main">
               <a:ext uri="{FF2B5EF4-FFF2-40B4-BE49-F238E27FC236}">
-                <a16:creationId xmlns:a16="http://schemas.microsoft.com/office/drawing/2014/main" id="{C8BFF133-C1B5-44FE-B56D-EA6F2E43ADF2}"/>
+                <a16:creationId xmlns:a16="http://schemas.microsoft.com/office/drawing/2014/main" id="{14670EB7-3B63-46ED-B110-D5AE72D7D01C}"/>
               </a:ext>
             </a:extLst>
           </p:cNvPr>
@@ -9434,7 +9434,7 @@
           <p:cNvPr id="10" name="core-body-1">
             <a:extLst xmlns:a="http://schemas.openxmlformats.org/drawingml/2006/main">
               <a:ext uri="{FF2B5EF4-FFF2-40B4-BE49-F238E27FC236}">
-                <a16:creationId xmlns:a16="http://schemas.microsoft.com/office/drawing/2014/main" id="{617A9F06-F7E4-4B02-8096-EC07CB033930}"/>
+                <a16:creationId xmlns:a16="http://schemas.microsoft.com/office/drawing/2014/main" id="{19CFE4C6-3CA8-4EF1-A446-4890A72D5DB9}"/>
               </a:ext>
             </a:extLst>
           </p:cNvPr>
@@ -9498,7 +9498,7 @@
           <p:cNvPr id="11" name="s7-takeaway-rule">
             <a:extLst xmlns:a="http://schemas.openxmlformats.org/drawingml/2006/main">
               <a:ext uri="{FF2B5EF4-FFF2-40B4-BE49-F238E27FC236}">
-                <a16:creationId xmlns:a16="http://schemas.microsoft.com/office/drawing/2014/main" id="{35B070E8-7C49-490D-AA05-B83837B8AF1E}"/>
+                <a16:creationId xmlns:a16="http://schemas.microsoft.com/office/drawing/2014/main" id="{70C2CB36-FADF-4AAE-BB1E-7C00DAF43EA6}"/>
               </a:ext>
             </a:extLst>
           </p:cNvPr>
@@ -9531,7 +9531,7 @@
           <p:cNvPr id="12" name="s7-takeaway">
             <a:extLst xmlns:a="http://schemas.openxmlformats.org/drawingml/2006/main">
               <a:ext uri="{FF2B5EF4-FFF2-40B4-BE49-F238E27FC236}">
-                <a16:creationId xmlns:a16="http://schemas.microsoft.com/office/drawing/2014/main" id="{43CA5B41-67CA-4AE2-B51B-C9E6906EC191}"/>
+                <a16:creationId xmlns:a16="http://schemas.microsoft.com/office/drawing/2014/main" id="{38FBF1E6-C25C-492B-9133-F8760A028E38}"/>
               </a:ext>
             </a:extLst>
           </p:cNvPr>
@@ -9587,7 +9587,7 @@
     </p:spTree>
     <p:extLst>
       <p:ext uri="{BB962C8B-B14F-4D97-AF65-F5344CB8AC3E}">
-        <p14:creationId xmlns:p14="http://schemas.microsoft.com/office/powerpoint/2010/main" val="446086702"/>
+        <p14:creationId xmlns:p14="http://schemas.microsoft.com/office/powerpoint/2010/main" val="45943128"/>
       </p:ext>
     </p:extLst>
   </p:cSld>
@@ -9618,7 +9618,7 @@
           <p:cNvPr id="1" name="s8-rule">
             <a:extLst xmlns:a="http://schemas.openxmlformats.org/drawingml/2006/main">
               <a:ext uri="{FF2B5EF4-FFF2-40B4-BE49-F238E27FC236}">
-                <a16:creationId xmlns:a16="http://schemas.microsoft.com/office/drawing/2014/main" id="{52A8A353-7459-4D71-87C0-CF1D725B3F92}"/>
+                <a16:creationId xmlns:a16="http://schemas.microsoft.com/office/drawing/2014/main" id="{06E1F005-867B-40E3-B5FE-956BFB0F6652}"/>
               </a:ext>
             </a:extLst>
           </p:cNvPr>
@@ -9651,7 +9651,7 @@
           <p:cNvPr id="2" name="s8-eyebrow">
             <a:extLst xmlns:a="http://schemas.openxmlformats.org/drawingml/2006/main">
               <a:ext uri="{FF2B5EF4-FFF2-40B4-BE49-F238E27FC236}">
-                <a16:creationId xmlns:a16="http://schemas.microsoft.com/office/drawing/2014/main" id="{6B77D0F3-8F87-4E2F-8AB9-9D5848204289}"/>
+                <a16:creationId xmlns:a16="http://schemas.microsoft.com/office/drawing/2014/main" id="{D32A8B0D-7939-47F5-9143-B542310373C1}"/>
               </a:ext>
             </a:extLst>
           </p:cNvPr>
@@ -9709,7 +9709,7 @@
           <p:cNvPr id="3" name="s8-title">
             <a:extLst xmlns:a="http://schemas.openxmlformats.org/drawingml/2006/main">
               <a:ext uri="{FF2B5EF4-FFF2-40B4-BE49-F238E27FC236}">
-                <a16:creationId xmlns:a16="http://schemas.microsoft.com/office/drawing/2014/main" id="{BACC4543-23D8-463C-9BCA-D8DEC3E5A341}"/>
+                <a16:creationId xmlns:a16="http://schemas.microsoft.com/office/drawing/2014/main" id="{BF1C518F-D19A-4B80-BB62-F7756BD45B1C}"/>
               </a:ext>
             </a:extLst>
           </p:cNvPr>
@@ -9767,7 +9767,7 @@
           <p:cNvPr id="4" name="s8-footer">
             <a:extLst xmlns:a="http://schemas.openxmlformats.org/drawingml/2006/main">
               <a:ext uri="{FF2B5EF4-FFF2-40B4-BE49-F238E27FC236}">
-                <a16:creationId xmlns:a16="http://schemas.microsoft.com/office/drawing/2014/main" id="{7D7579B4-288F-4F95-9DA2-0445FBEDCD1E}"/>
+                <a16:creationId xmlns:a16="http://schemas.microsoft.com/office/drawing/2014/main" id="{C76AB681-1FF0-4CBF-8EFF-AC86CC9A282F}"/>
               </a:ext>
             </a:extLst>
           </p:cNvPr>
@@ -9798,7 +9798,7 @@
           <p:cNvPr id="5" name="s8-identity">
             <a:extLst xmlns:a="http://schemas.openxmlformats.org/drawingml/2006/main">
               <a:ext uri="{FF2B5EF4-FFF2-40B4-BE49-F238E27FC236}">
-                <a16:creationId xmlns:a16="http://schemas.microsoft.com/office/drawing/2014/main" id="{40B4AC81-F426-4DF5-88B9-7728BEFC6F6D}"/>
+                <a16:creationId xmlns:a16="http://schemas.microsoft.com/office/drawing/2014/main" id="{7C12F97B-13A2-483D-822E-C539D4DEBC44}"/>
               </a:ext>
             </a:extLst>
           </p:cNvPr>
@@ -9856,7 +9856,7 @@
           <p:cNvPr id="6" name="core-no-0">
             <a:extLst xmlns:a="http://schemas.openxmlformats.org/drawingml/2006/main">
               <a:ext uri="{FF2B5EF4-FFF2-40B4-BE49-F238E27FC236}">
-                <a16:creationId xmlns:a16="http://schemas.microsoft.com/office/drawing/2014/main" id="{F209FBC0-EA75-4711-BB77-C9B3E80FC8A8}"/>
+                <a16:creationId xmlns:a16="http://schemas.microsoft.com/office/drawing/2014/main" id="{00DC6B2E-B56F-4584-85A8-E0C68006A641}"/>
               </a:ext>
             </a:extLst>
           </p:cNvPr>
@@ -9914,7 +9914,7 @@
           <p:cNvPr id="7" name="core-label-0">
             <a:extLst xmlns:a="http://schemas.openxmlformats.org/drawingml/2006/main">
               <a:ext uri="{FF2B5EF4-FFF2-40B4-BE49-F238E27FC236}">
-                <a16:creationId xmlns:a16="http://schemas.microsoft.com/office/drawing/2014/main" id="{98A9A6B8-4D37-400C-BDAD-CC91F72C4578}"/>
+                <a16:creationId xmlns:a16="http://schemas.microsoft.com/office/drawing/2014/main" id="{C08BA3B8-588D-4580-A7ED-16E589BF5392}"/>
               </a:ext>
             </a:extLst>
           </p:cNvPr>
@@ -9972,7 +9972,7 @@
           <p:cNvPr id="8" name="core-body-0">
             <a:extLst xmlns:a="http://schemas.openxmlformats.org/drawingml/2006/main">
               <a:ext uri="{FF2B5EF4-FFF2-40B4-BE49-F238E27FC236}">
-                <a16:creationId xmlns:a16="http://schemas.microsoft.com/office/drawing/2014/main" id="{82EFB8CD-C22A-48E3-A7CB-DDECCE1AF139}"/>
+                <a16:creationId xmlns:a16="http://schemas.microsoft.com/office/drawing/2014/main" id="{91D53F73-11F7-4B37-B34F-F0DEC7D3C4BC}"/>
               </a:ext>
             </a:extLst>
           </p:cNvPr>
@@ -10036,7 +10036,7 @@
           <p:cNvPr id="9" name="core-no-1">
             <a:extLst xmlns:a="http://schemas.openxmlformats.org/drawingml/2006/main">
               <a:ext uri="{FF2B5EF4-FFF2-40B4-BE49-F238E27FC236}">
-                <a16:creationId xmlns:a16="http://schemas.microsoft.com/office/drawing/2014/main" id="{90DE4DE7-0F6C-4DE7-9E54-32D24B490379}"/>
+                <a16:creationId xmlns:a16="http://schemas.microsoft.com/office/drawing/2014/main" id="{F24D5CE1-FF16-4161-8F11-75DE7295EEC5}"/>
               </a:ext>
             </a:extLst>
           </p:cNvPr>
@@ -10094,7 +10094,7 @@
           <p:cNvPr id="10" name="core-body-1">
             <a:extLst xmlns:a="http://schemas.openxmlformats.org/drawingml/2006/main">
               <a:ext uri="{FF2B5EF4-FFF2-40B4-BE49-F238E27FC236}">
-                <a16:creationId xmlns:a16="http://schemas.microsoft.com/office/drawing/2014/main" id="{65CB3668-175E-4180-9266-177787B00F94}"/>
+                <a16:creationId xmlns:a16="http://schemas.microsoft.com/office/drawing/2014/main" id="{9FF58294-FF6C-43CE-8E36-1A35FE28859E}"/>
               </a:ext>
             </a:extLst>
           </p:cNvPr>
@@ -10158,7 +10158,7 @@
           <p:cNvPr id="11" name="s8-takeaway-rule">
             <a:extLst xmlns:a="http://schemas.openxmlformats.org/drawingml/2006/main">
               <a:ext uri="{FF2B5EF4-FFF2-40B4-BE49-F238E27FC236}">
-                <a16:creationId xmlns:a16="http://schemas.microsoft.com/office/drawing/2014/main" id="{8EFF0F01-EC2C-4318-A7AF-EE3998BB263B}"/>
+                <a16:creationId xmlns:a16="http://schemas.microsoft.com/office/drawing/2014/main" id="{9938ABD6-CEB1-4694-A5DE-33D1621319A4}"/>
               </a:ext>
             </a:extLst>
           </p:cNvPr>
@@ -10191,7 +10191,7 @@
           <p:cNvPr id="12" name="s8-takeaway">
             <a:extLst xmlns:a="http://schemas.openxmlformats.org/drawingml/2006/main">
               <a:ext uri="{FF2B5EF4-FFF2-40B4-BE49-F238E27FC236}">
-                <a16:creationId xmlns:a16="http://schemas.microsoft.com/office/drawing/2014/main" id="{AC6E5843-DF06-41D0-B8B2-4DF8CA75D51A}"/>
+                <a16:creationId xmlns:a16="http://schemas.microsoft.com/office/drawing/2014/main" id="{31F9F2FF-A17E-452E-8700-52C28773D211}"/>
               </a:ext>
             </a:extLst>
           </p:cNvPr>
@@ -10247,7 +10247,7 @@
     </p:spTree>
     <p:extLst>
       <p:ext uri="{BB962C8B-B14F-4D97-AF65-F5344CB8AC3E}">
-        <p14:creationId xmlns:p14="http://schemas.microsoft.com/office/powerpoint/2010/main" val="1281456522"/>
+        <p14:creationId xmlns:p14="http://schemas.microsoft.com/office/powerpoint/2010/main" val="752521808"/>
       </p:ext>
     </p:extLst>
   </p:cSld>
@@ -10278,7 +10278,7 @@
           <p:cNvPr id="1" name="s9-rule">
             <a:extLst xmlns:a="http://schemas.openxmlformats.org/drawingml/2006/main">
               <a:ext uri="{FF2B5EF4-FFF2-40B4-BE49-F238E27FC236}">
-                <a16:creationId xmlns:a16="http://schemas.microsoft.com/office/drawing/2014/main" id="{48FBEF3C-38E9-4DA1-848E-66C168626056}"/>
+                <a16:creationId xmlns:a16="http://schemas.microsoft.com/office/drawing/2014/main" id="{9C8CE100-9BEE-4464-B123-269561995515}"/>
               </a:ext>
             </a:extLst>
           </p:cNvPr>
@@ -10311,7 +10311,7 @@
           <p:cNvPr id="2" name="s9-eyebrow">
             <a:extLst xmlns:a="http://schemas.openxmlformats.org/drawingml/2006/main">
               <a:ext uri="{FF2B5EF4-FFF2-40B4-BE49-F238E27FC236}">
-                <a16:creationId xmlns:a16="http://schemas.microsoft.com/office/drawing/2014/main" id="{448748EA-D02C-4CEB-A077-E263FE5C61CD}"/>
+                <a16:creationId xmlns:a16="http://schemas.microsoft.com/office/drawing/2014/main" id="{39DBFB38-CBD9-45AD-9AE0-FF43209A21C6}"/>
               </a:ext>
             </a:extLst>
           </p:cNvPr>
@@ -10369,7 +10369,7 @@
           <p:cNvPr id="3" name="s9-title">
             <a:extLst xmlns:a="http://schemas.openxmlformats.org/drawingml/2006/main">
               <a:ext uri="{FF2B5EF4-FFF2-40B4-BE49-F238E27FC236}">
-                <a16:creationId xmlns:a16="http://schemas.microsoft.com/office/drawing/2014/main" id="{A53ADD0E-0283-493C-8844-2CF5D41B0E6B}"/>
+                <a16:creationId xmlns:a16="http://schemas.microsoft.com/office/drawing/2014/main" id="{DE5F1851-F88B-4143-8F3A-66E6CD76E666}"/>
               </a:ext>
             </a:extLst>
           </p:cNvPr>
@@ -10427,7 +10427,7 @@
           <p:cNvPr id="4" name="s9-footer">
             <a:extLst xmlns:a="http://schemas.openxmlformats.org/drawingml/2006/main">
               <a:ext uri="{FF2B5EF4-FFF2-40B4-BE49-F238E27FC236}">
-                <a16:creationId xmlns:a16="http://schemas.microsoft.com/office/drawing/2014/main" id="{9484EB3E-5891-4D43-B453-FEC91B92AEBF}"/>
+                <a16:creationId xmlns:a16="http://schemas.microsoft.com/office/drawing/2014/main" id="{3701E823-B412-4806-BD06-B7BD97168500}"/>
               </a:ext>
             </a:extLst>
           </p:cNvPr>
@@ -10458,7 +10458,7 @@
           <p:cNvPr id="5" name="s9-identity">
             <a:extLst xmlns:a="http://schemas.openxmlformats.org/drawingml/2006/main">
               <a:ext uri="{FF2B5EF4-FFF2-40B4-BE49-F238E27FC236}">
-                <a16:creationId xmlns:a16="http://schemas.microsoft.com/office/drawing/2014/main" id="{4928F1CC-F663-47D6-9161-515D7F8815BC}"/>
+                <a16:creationId xmlns:a16="http://schemas.microsoft.com/office/drawing/2014/main" id="{76D001A1-4805-4FA1-884A-783DFF43DCFF}"/>
               </a:ext>
             </a:extLst>
           </p:cNvPr>
@@ -10516,7 +10516,7 @@
           <p:cNvPr id="6" name="core-no-0">
             <a:extLst xmlns:a="http://schemas.openxmlformats.org/drawingml/2006/main">
               <a:ext uri="{FF2B5EF4-FFF2-40B4-BE49-F238E27FC236}">
-                <a16:creationId xmlns:a16="http://schemas.microsoft.com/office/drawing/2014/main" id="{923E0B4A-90B9-4160-A9E2-67D0A4FC6C06}"/>
+                <a16:creationId xmlns:a16="http://schemas.microsoft.com/office/drawing/2014/main" id="{8B1F37AE-A42E-4964-ACC8-AC297440F2A5}"/>
               </a:ext>
             </a:extLst>
           </p:cNvPr>
@@ -10574,7 +10574,7 @@
           <p:cNvPr id="7" name="core-label-0">
             <a:extLst xmlns:a="http://schemas.openxmlformats.org/drawingml/2006/main">
               <a:ext uri="{FF2B5EF4-FFF2-40B4-BE49-F238E27FC236}">
-                <a16:creationId xmlns:a16="http://schemas.microsoft.com/office/drawing/2014/main" id="{81767381-3B0E-491C-B541-CE10F421975E}"/>
+                <a16:creationId xmlns:a16="http://schemas.microsoft.com/office/drawing/2014/main" id="{A21E42B7-87DA-42CA-AAB2-A91D58B7D6A2}"/>
               </a:ext>
             </a:extLst>
           </p:cNvPr>
@@ -10632,7 +10632,7 @@
           <p:cNvPr id="8" name="core-body-0">
             <a:extLst xmlns:a="http://schemas.openxmlformats.org/drawingml/2006/main">
               <a:ext uri="{FF2B5EF4-FFF2-40B4-BE49-F238E27FC236}">
-                <a16:creationId xmlns:a16="http://schemas.microsoft.com/office/drawing/2014/main" id="{05EFD9A7-3ABC-414F-B3C9-D9C23F4F7084}"/>
+                <a16:creationId xmlns:a16="http://schemas.microsoft.com/office/drawing/2014/main" id="{1AD11164-19B6-402E-97A6-B021013B151F}"/>
               </a:ext>
             </a:extLst>
           </p:cNvPr>
@@ -10696,7 +10696,7 @@
           <p:cNvPr id="9" name="s9-takeaway-rule">
             <a:extLst xmlns:a="http://schemas.openxmlformats.org/drawingml/2006/main">
               <a:ext uri="{FF2B5EF4-FFF2-40B4-BE49-F238E27FC236}">
-                <a16:creationId xmlns:a16="http://schemas.microsoft.com/office/drawing/2014/main" id="{A770B1DA-A404-4F39-B264-57732748A106}"/>
+                <a16:creationId xmlns:a16="http://schemas.microsoft.com/office/drawing/2014/main" id="{7CF33610-BF1C-40CC-BABE-47A2F9CA06D9}"/>
               </a:ext>
             </a:extLst>
           </p:cNvPr>
@@ -10729,7 +10729,7 @@
           <p:cNvPr id="10" name="s9-takeaway">
             <a:extLst xmlns:a="http://schemas.openxmlformats.org/drawingml/2006/main">
               <a:ext uri="{FF2B5EF4-FFF2-40B4-BE49-F238E27FC236}">
-                <a16:creationId xmlns:a16="http://schemas.microsoft.com/office/drawing/2014/main" id="{40B8630A-7170-462B-9464-FF90D9300905}"/>
+                <a16:creationId xmlns:a16="http://schemas.microsoft.com/office/drawing/2014/main" id="{94114708-77B0-455D-87E0-71E6A9948447}"/>
               </a:ext>
             </a:extLst>
           </p:cNvPr>
@@ -10785,7 +10785,7 @@
     </p:spTree>
     <p:extLst>
       <p:ext uri="{BB962C8B-B14F-4D97-AF65-F5344CB8AC3E}">
-        <p14:creationId xmlns:p14="http://schemas.microsoft.com/office/powerpoint/2010/main" val="660185610"/>
+        <p14:creationId xmlns:p14="http://schemas.microsoft.com/office/powerpoint/2010/main" val="572278543"/>
       </p:ext>
     </p:extLst>
   </p:cSld>

--- a/docs/public/course-assets/course-pptx/ag-005.pptx
+++ b/docs/public/course-assets/course-pptx/ag-005.pptx
@@ -2,25 +2,25 @@
 <file path=ppt/presentation.xml><?xml version="1.0" encoding="utf-8"?>
 <p:presentation xmlns:p="http://schemas.openxmlformats.org/presentationml/2006/main">
   <p:sldMasterIdLst>
-    <p:sldMasterId xmlns:r="http://schemas.openxmlformats.org/officeDocument/2006/relationships" id="2147483648" r:id="Rf683256d291846c5"/>
+    <p:sldMasterId xmlns:r="http://schemas.openxmlformats.org/officeDocument/2006/relationships" id="2147483648" r:id="R137db68d63384af5"/>
   </p:sldMasterIdLst>
   <p:notesMasterIdLst>
-    <p:notesMasterId xmlns:r="http://schemas.openxmlformats.org/officeDocument/2006/relationships" r:id="R4e7984d4dabb41f8"/>
+    <p:notesMasterId xmlns:r="http://schemas.openxmlformats.org/officeDocument/2006/relationships" r:id="R6c528fcd16d84055"/>
   </p:notesMasterIdLst>
   <p:sldIdLst>
-    <p:sldId xmlns:r="http://schemas.openxmlformats.org/officeDocument/2006/relationships" id="256" r:id="Re790e1d7b4514f86"/>
-    <p:sldId xmlns:r="http://schemas.openxmlformats.org/officeDocument/2006/relationships" id="257" r:id="R610934e12cfe4165"/>
-    <p:sldId xmlns:r="http://schemas.openxmlformats.org/officeDocument/2006/relationships" id="258" r:id="R31d8910adbd1487c"/>
-    <p:sldId xmlns:r="http://schemas.openxmlformats.org/officeDocument/2006/relationships" id="259" r:id="Rf726550cb968428a"/>
-    <p:sldId xmlns:r="http://schemas.openxmlformats.org/officeDocument/2006/relationships" id="260" r:id="Rf4a9425219e6474d"/>
-    <p:sldId xmlns:r="http://schemas.openxmlformats.org/officeDocument/2006/relationships" id="261" r:id="R43cd5416e2b84531"/>
-    <p:sldId xmlns:r="http://schemas.openxmlformats.org/officeDocument/2006/relationships" id="262" r:id="Re9618afc2c504dee"/>
-    <p:sldId xmlns:r="http://schemas.openxmlformats.org/officeDocument/2006/relationships" id="263" r:id="R766b837ee5df425d"/>
-    <p:sldId xmlns:r="http://schemas.openxmlformats.org/officeDocument/2006/relationships" id="264" r:id="Re017d03631d942e9"/>
-    <p:sldId xmlns:r="http://schemas.openxmlformats.org/officeDocument/2006/relationships" id="265" r:id="R5d9a935d263a41f2"/>
-    <p:sldId xmlns:r="http://schemas.openxmlformats.org/officeDocument/2006/relationships" id="266" r:id="R09dfae5bbeaa4f50"/>
-    <p:sldId xmlns:r="http://schemas.openxmlformats.org/officeDocument/2006/relationships" id="267" r:id="Rd72f45ad28b24276"/>
-    <p:sldId xmlns:r="http://schemas.openxmlformats.org/officeDocument/2006/relationships" id="268" r:id="R708c6fc0fc144538"/>
+    <p:sldId xmlns:r="http://schemas.openxmlformats.org/officeDocument/2006/relationships" id="256" r:id="Re125228f1cba484c"/>
+    <p:sldId xmlns:r="http://schemas.openxmlformats.org/officeDocument/2006/relationships" id="257" r:id="R69d13f67bbb94d2f"/>
+    <p:sldId xmlns:r="http://schemas.openxmlformats.org/officeDocument/2006/relationships" id="258" r:id="R8ca3fd42eb31488a"/>
+    <p:sldId xmlns:r="http://schemas.openxmlformats.org/officeDocument/2006/relationships" id="259" r:id="Rdd6f0d399cf24e6b"/>
+    <p:sldId xmlns:r="http://schemas.openxmlformats.org/officeDocument/2006/relationships" id="260" r:id="R91c99981b3334910"/>
+    <p:sldId xmlns:r="http://schemas.openxmlformats.org/officeDocument/2006/relationships" id="261" r:id="R54589791782c4d31"/>
+    <p:sldId xmlns:r="http://schemas.openxmlformats.org/officeDocument/2006/relationships" id="262" r:id="R6a80a8f51136428b"/>
+    <p:sldId xmlns:r="http://schemas.openxmlformats.org/officeDocument/2006/relationships" id="263" r:id="R1006b07a001c43a0"/>
+    <p:sldId xmlns:r="http://schemas.openxmlformats.org/officeDocument/2006/relationships" id="264" r:id="Rdf4800a785f145f8"/>
+    <p:sldId xmlns:r="http://schemas.openxmlformats.org/officeDocument/2006/relationships" id="265" r:id="R5b522d1198f7421f"/>
+    <p:sldId xmlns:r="http://schemas.openxmlformats.org/officeDocument/2006/relationships" id="266" r:id="R779b246cd9ab497c"/>
+    <p:sldId xmlns:r="http://schemas.openxmlformats.org/officeDocument/2006/relationships" id="267" r:id="Rcd1577010def4179"/>
+    <p:sldId xmlns:r="http://schemas.openxmlformats.org/officeDocument/2006/relationships" id="268" r:id="R7ca0d82619604bcd"/>
   </p:sldIdLst>
   <p:sldSz cx="12192000" cy="6858000"/>
   <p:notesSz cx="6858000" cy="9144000"/>
@@ -1405,7 +1405,7 @@
   </p:cSld>
   <p:clrMap bg1="lt1" tx1="dk1" bg2="lt2" tx2="dk2" accent1="accent1" accent2="accent2" accent3="accent3" accent4="accent4" accent5="accent5" accent6="accent6" hlink="hlink" folHlink="folHlink"/>
   <p:sldLayoutIdLst>
-    <p:sldLayoutId xmlns:r="http://schemas.openxmlformats.org/officeDocument/2006/relationships" id="2147483649" r:id="R4278fccdce8f4293"/>
+    <p:sldLayoutId xmlns:r="http://schemas.openxmlformats.org/officeDocument/2006/relationships" id="2147483649" r:id="Ra1a1c829560c458b"/>
   </p:sldLayoutIdLst>
   <p:txStyles>
     <p:titleStyle>
@@ -1956,7 +1956,7 @@
           <p:cNvPr id="1" name="cover-rule">
             <a:extLst xmlns:a="http://schemas.openxmlformats.org/drawingml/2006/main">
               <a:ext uri="{FF2B5EF4-FFF2-40B4-BE49-F238E27FC236}">
-                <a16:creationId xmlns:a16="http://schemas.microsoft.com/office/drawing/2014/main" id="{17184CED-E593-4AE5-A4F6-F6FAA6CE16DD}"/>
+                <a16:creationId xmlns:a16="http://schemas.microsoft.com/office/drawing/2014/main" id="{7204A30F-2B5F-4D69-A52C-D606DFCE834B}"/>
               </a:ext>
             </a:extLst>
           </p:cNvPr>
@@ -1989,7 +1989,7 @@
           <p:cNvPr id="2" name="cover-ring-1">
             <a:extLst xmlns:a="http://schemas.openxmlformats.org/drawingml/2006/main">
               <a:ext uri="{FF2B5EF4-FFF2-40B4-BE49-F238E27FC236}">
-                <a16:creationId xmlns:a16="http://schemas.microsoft.com/office/drawing/2014/main" id="{AB934C77-9A7A-4A17-82FC-74A61543571D}"/>
+                <a16:creationId xmlns:a16="http://schemas.microsoft.com/office/drawing/2014/main" id="{ACA4B59F-4258-4255-9D1D-457B5B094AB8}"/>
               </a:ext>
             </a:extLst>
           </p:cNvPr>
@@ -2020,7 +2020,7 @@
           <p:cNvPr id="3" name="cover-ring-2">
             <a:extLst xmlns:a="http://schemas.openxmlformats.org/drawingml/2006/main">
               <a:ext uri="{FF2B5EF4-FFF2-40B4-BE49-F238E27FC236}">
-                <a16:creationId xmlns:a16="http://schemas.microsoft.com/office/drawing/2014/main" id="{DF683F9F-701E-4CC0-82BB-0FF145B41570}"/>
+                <a16:creationId xmlns:a16="http://schemas.microsoft.com/office/drawing/2014/main" id="{5D5A772C-2973-411A-A7C0-08AA50B7653A}"/>
               </a:ext>
             </a:extLst>
           </p:cNvPr>
@@ -2051,7 +2051,7 @@
           <p:cNvPr id="4" name="cover-core">
             <a:extLst xmlns:a="http://schemas.openxmlformats.org/drawingml/2006/main">
               <a:ext uri="{FF2B5EF4-FFF2-40B4-BE49-F238E27FC236}">
-                <a16:creationId xmlns:a16="http://schemas.microsoft.com/office/drawing/2014/main" id="{3A02E90F-E41A-4816-88B7-59B5CA2B6D4B}"/>
+                <a16:creationId xmlns:a16="http://schemas.microsoft.com/office/drawing/2014/main" id="{99DFB94B-8582-4E2A-8948-2D5DFD5D8AF9}"/>
               </a:ext>
             </a:extLst>
           </p:cNvPr>
@@ -2084,7 +2084,7 @@
           <p:cNvPr id="5" name="cover-line-1">
             <a:extLst xmlns:a="http://schemas.openxmlformats.org/drawingml/2006/main">
               <a:ext uri="{FF2B5EF4-FFF2-40B4-BE49-F238E27FC236}">
-                <a16:creationId xmlns:a16="http://schemas.microsoft.com/office/drawing/2014/main" id="{A90243EF-5C92-4233-ADB0-6BD033189183}"/>
+                <a16:creationId xmlns:a16="http://schemas.microsoft.com/office/drawing/2014/main" id="{E1816ED4-83F6-4895-855B-D7834BCA73E3}"/>
               </a:ext>
             </a:extLst>
           </p:cNvPr>
@@ -2115,7 +2115,7 @@
           <p:cNvPr id="6" name="cover-line-2">
             <a:extLst xmlns:a="http://schemas.openxmlformats.org/drawingml/2006/main">
               <a:ext uri="{FF2B5EF4-FFF2-40B4-BE49-F238E27FC236}">
-                <a16:creationId xmlns:a16="http://schemas.microsoft.com/office/drawing/2014/main" id="{61FD0451-11C0-49F6-8552-91751A6710C0}"/>
+                <a16:creationId xmlns:a16="http://schemas.microsoft.com/office/drawing/2014/main" id="{44B0B4E7-920D-4F5E-B8B6-F68B034B4F87}"/>
               </a:ext>
             </a:extLst>
           </p:cNvPr>
@@ -2146,7 +2146,7 @@
           <p:cNvPr id="7" name="cover-eyebrow">
             <a:extLst xmlns:a="http://schemas.openxmlformats.org/drawingml/2006/main">
               <a:ext uri="{FF2B5EF4-FFF2-40B4-BE49-F238E27FC236}">
-                <a16:creationId xmlns:a16="http://schemas.microsoft.com/office/drawing/2014/main" id="{4AED0B88-E102-4FD6-A135-412A5FE741E8}"/>
+                <a16:creationId xmlns:a16="http://schemas.microsoft.com/office/drawing/2014/main" id="{3A84C4D1-886B-4D45-91A2-D870F403DA80}"/>
               </a:ext>
             </a:extLst>
           </p:cNvPr>
@@ -2204,7 +2204,7 @@
           <p:cNvPr id="8" name="cover-title">
             <a:extLst xmlns:a="http://schemas.openxmlformats.org/drawingml/2006/main">
               <a:ext uri="{FF2B5EF4-FFF2-40B4-BE49-F238E27FC236}">
-                <a16:creationId xmlns:a16="http://schemas.microsoft.com/office/drawing/2014/main" id="{8D70F2FB-B011-460B-8582-B7E1F8FDD171}"/>
+                <a16:creationId xmlns:a16="http://schemas.microsoft.com/office/drawing/2014/main" id="{EC52ACEA-DFB9-4DFF-AE45-9D18A27B22F3}"/>
               </a:ext>
             </a:extLst>
           </p:cNvPr>
@@ -2262,7 +2262,7 @@
           <p:cNvPr id="9" name="cover-subtitle">
             <a:extLst xmlns:a="http://schemas.openxmlformats.org/drawingml/2006/main">
               <a:ext uri="{FF2B5EF4-FFF2-40B4-BE49-F238E27FC236}">
-                <a16:creationId xmlns:a16="http://schemas.microsoft.com/office/drawing/2014/main" id="{5B355AB1-3B62-4D32-BD6B-D92DFC083869}"/>
+                <a16:creationId xmlns:a16="http://schemas.microsoft.com/office/drawing/2014/main" id="{7EBBA05A-721C-421E-9984-DE9B1136280C}"/>
               </a:ext>
             </a:extLst>
           </p:cNvPr>
@@ -2324,7 +2324,7 @@
           <p:cNvPr id="10" name="cover-lead">
             <a:extLst xmlns:a="http://schemas.openxmlformats.org/drawingml/2006/main">
               <a:ext uri="{FF2B5EF4-FFF2-40B4-BE49-F238E27FC236}">
-                <a16:creationId xmlns:a16="http://schemas.microsoft.com/office/drawing/2014/main" id="{0B0B0104-B753-4BA1-9977-66526DD5F980}"/>
+                <a16:creationId xmlns:a16="http://schemas.microsoft.com/office/drawing/2014/main" id="{2D929A5F-63EB-4552-86CF-0B2FCF83421E}"/>
               </a:ext>
             </a:extLst>
           </p:cNvPr>
@@ -2382,7 +2382,7 @@
           <p:cNvPr id="11" name="cover-course">
             <a:extLst xmlns:a="http://schemas.openxmlformats.org/drawingml/2006/main">
               <a:ext uri="{FF2B5EF4-FFF2-40B4-BE49-F238E27FC236}">
-                <a16:creationId xmlns:a16="http://schemas.microsoft.com/office/drawing/2014/main" id="{FDB8C13B-CEA4-4A15-80B1-75D1338F5252}"/>
+                <a16:creationId xmlns:a16="http://schemas.microsoft.com/office/drawing/2014/main" id="{E31D9734-B650-441E-8338-33FB5C9EAD84}"/>
               </a:ext>
             </a:extLst>
           </p:cNvPr>
@@ -2440,7 +2440,7 @@
           <p:cNvPr id="12" name="cover-id">
             <a:extLst xmlns:a="http://schemas.openxmlformats.org/drawingml/2006/main">
               <a:ext uri="{FF2B5EF4-FFF2-40B4-BE49-F238E27FC236}">
-                <a16:creationId xmlns:a16="http://schemas.microsoft.com/office/drawing/2014/main" id="{1470C885-9285-4204-A18E-6CC1048926CF}"/>
+                <a16:creationId xmlns:a16="http://schemas.microsoft.com/office/drawing/2014/main" id="{AFC94F27-1BD0-4636-A283-B66B3AF0D382}"/>
               </a:ext>
             </a:extLst>
           </p:cNvPr>
@@ -2496,7 +2496,7 @@
     </p:spTree>
     <p:extLst>
       <p:ext uri="{BB962C8B-B14F-4D97-AF65-F5344CB8AC3E}">
-        <p14:creationId xmlns:p14="http://schemas.microsoft.com/office/powerpoint/2010/main" val="300696610"/>
+        <p14:creationId xmlns:p14="http://schemas.microsoft.com/office/powerpoint/2010/main" val="335107654"/>
       </p:ext>
     </p:extLst>
   </p:cSld>
@@ -2527,7 +2527,7 @@
           <p:cNvPr id="1" name="s10-rule">
             <a:extLst xmlns:a="http://schemas.openxmlformats.org/drawingml/2006/main">
               <a:ext uri="{FF2B5EF4-FFF2-40B4-BE49-F238E27FC236}">
-                <a16:creationId xmlns:a16="http://schemas.microsoft.com/office/drawing/2014/main" id="{63984BB4-0589-4BE3-A849-2974548ACCBD}"/>
+                <a16:creationId xmlns:a16="http://schemas.microsoft.com/office/drawing/2014/main" id="{FDB4816B-1DBD-41AD-9342-9CC83B59CD18}"/>
               </a:ext>
             </a:extLst>
           </p:cNvPr>
@@ -2560,7 +2560,7 @@
           <p:cNvPr id="2" name="s10-eyebrow">
             <a:extLst xmlns:a="http://schemas.openxmlformats.org/drawingml/2006/main">
               <a:ext uri="{FF2B5EF4-FFF2-40B4-BE49-F238E27FC236}">
-                <a16:creationId xmlns:a16="http://schemas.microsoft.com/office/drawing/2014/main" id="{A1124E85-E6EB-4861-8E78-0732B46B9EB4}"/>
+                <a16:creationId xmlns:a16="http://schemas.microsoft.com/office/drawing/2014/main" id="{A3042053-7941-40A9-A4C3-FF331DACBC11}"/>
               </a:ext>
             </a:extLst>
           </p:cNvPr>
@@ -2618,7 +2618,7 @@
           <p:cNvPr id="3" name="s10-title">
             <a:extLst xmlns:a="http://schemas.openxmlformats.org/drawingml/2006/main">
               <a:ext uri="{FF2B5EF4-FFF2-40B4-BE49-F238E27FC236}">
-                <a16:creationId xmlns:a16="http://schemas.microsoft.com/office/drawing/2014/main" id="{4A84BC7F-3516-4CC7-8930-974363C78312}"/>
+                <a16:creationId xmlns:a16="http://schemas.microsoft.com/office/drawing/2014/main" id="{82A851E2-4DD0-42DE-9D84-D02D84B4153B}"/>
               </a:ext>
             </a:extLst>
           </p:cNvPr>
@@ -2676,7 +2676,7 @@
           <p:cNvPr id="4" name="s10-footer">
             <a:extLst xmlns:a="http://schemas.openxmlformats.org/drawingml/2006/main">
               <a:ext uri="{FF2B5EF4-FFF2-40B4-BE49-F238E27FC236}">
-                <a16:creationId xmlns:a16="http://schemas.microsoft.com/office/drawing/2014/main" id="{2D081500-C507-4796-9849-0F4ABCA21BC1}"/>
+                <a16:creationId xmlns:a16="http://schemas.microsoft.com/office/drawing/2014/main" id="{016A4844-0A8C-4D64-8DD1-CA6787AEAF73}"/>
               </a:ext>
             </a:extLst>
           </p:cNvPr>
@@ -2707,7 +2707,7 @@
           <p:cNvPr id="5" name="s10-identity">
             <a:extLst xmlns:a="http://schemas.openxmlformats.org/drawingml/2006/main">
               <a:ext uri="{FF2B5EF4-FFF2-40B4-BE49-F238E27FC236}">
-                <a16:creationId xmlns:a16="http://schemas.microsoft.com/office/drawing/2014/main" id="{4E9A75A4-4E62-4792-BD06-DD9F19A7287C}"/>
+                <a16:creationId xmlns:a16="http://schemas.microsoft.com/office/drawing/2014/main" id="{B00FC27C-9E9A-478A-8F64-8A5629B745AC}"/>
               </a:ext>
             </a:extLst>
           </p:cNvPr>
@@ -2765,7 +2765,7 @@
           <p:cNvPr id="6" name="case-title">
             <a:extLst xmlns:a="http://schemas.openxmlformats.org/drawingml/2006/main">
               <a:ext uri="{FF2B5EF4-FFF2-40B4-BE49-F238E27FC236}">
-                <a16:creationId xmlns:a16="http://schemas.microsoft.com/office/drawing/2014/main" id="{B11A3C59-C231-4754-AFB4-5EF949B07EC3}"/>
+                <a16:creationId xmlns:a16="http://schemas.microsoft.com/office/drawing/2014/main" id="{D32A6C2F-A9E9-415F-8691-6D27B21722F5}"/>
               </a:ext>
             </a:extLst>
           </p:cNvPr>
@@ -2829,7 +2829,7 @@
           <p:cNvPr id="7" name="case-row-0">
             <a:extLst xmlns:a="http://schemas.openxmlformats.org/drawingml/2006/main">
               <a:ext uri="{FF2B5EF4-FFF2-40B4-BE49-F238E27FC236}">
-                <a16:creationId xmlns:a16="http://schemas.microsoft.com/office/drawing/2014/main" id="{D4602500-F976-40CC-9580-9F2B55200CA9}"/>
+                <a16:creationId xmlns:a16="http://schemas.microsoft.com/office/drawing/2014/main" id="{4B5DA4D2-356F-438F-B445-AA5796AC418A}"/>
               </a:ext>
             </a:extLst>
           </p:cNvPr>
@@ -2893,7 +2893,7 @@
           <p:cNvPr id="8" name="case-row-1">
             <a:extLst xmlns:a="http://schemas.openxmlformats.org/drawingml/2006/main">
               <a:ext uri="{FF2B5EF4-FFF2-40B4-BE49-F238E27FC236}">
-                <a16:creationId xmlns:a16="http://schemas.microsoft.com/office/drawing/2014/main" id="{FC241C11-D7F1-4187-8360-47E58316815B}"/>
+                <a16:creationId xmlns:a16="http://schemas.microsoft.com/office/drawing/2014/main" id="{70579328-26E5-495A-89DB-C1024C792210}"/>
               </a:ext>
             </a:extLst>
           </p:cNvPr>
@@ -2957,7 +2957,7 @@
           <p:cNvPr id="9" name="case-row-2">
             <a:extLst xmlns:a="http://schemas.openxmlformats.org/drawingml/2006/main">
               <a:ext uri="{FF2B5EF4-FFF2-40B4-BE49-F238E27FC236}">
-                <a16:creationId xmlns:a16="http://schemas.microsoft.com/office/drawing/2014/main" id="{9FA7A5E9-5688-4CAD-A369-CFB46286CD2A}"/>
+                <a16:creationId xmlns:a16="http://schemas.microsoft.com/office/drawing/2014/main" id="{38883EC9-8D3F-4A72-AB27-9B42FB9F2F4F}"/>
               </a:ext>
             </a:extLst>
           </p:cNvPr>
@@ -3021,7 +3021,7 @@
           <p:cNvPr id="10" name="case-row-3">
             <a:extLst xmlns:a="http://schemas.openxmlformats.org/drawingml/2006/main">
               <a:ext uri="{FF2B5EF4-FFF2-40B4-BE49-F238E27FC236}">
-                <a16:creationId xmlns:a16="http://schemas.microsoft.com/office/drawing/2014/main" id="{7EBC6352-9CF0-4E2D-8DB0-5D2FA8A4FA49}"/>
+                <a16:creationId xmlns:a16="http://schemas.microsoft.com/office/drawing/2014/main" id="{04EAF26B-212E-458F-BE50-683D9ECE4010}"/>
               </a:ext>
             </a:extLst>
           </p:cNvPr>
@@ -3085,7 +3085,7 @@
           <p:cNvPr id="11" name="case-row-4">
             <a:extLst xmlns:a="http://schemas.openxmlformats.org/drawingml/2006/main">
               <a:ext uri="{FF2B5EF4-FFF2-40B4-BE49-F238E27FC236}">
-                <a16:creationId xmlns:a16="http://schemas.microsoft.com/office/drawing/2014/main" id="{3FF696AE-E696-49B2-B6B7-99DE295A61DB}"/>
+                <a16:creationId xmlns:a16="http://schemas.microsoft.com/office/drawing/2014/main" id="{A710EC05-E8D8-4A07-9154-CD05075EDF85}"/>
               </a:ext>
             </a:extLst>
           </p:cNvPr>
@@ -3149,7 +3149,7 @@
           <p:cNvPr id="12" name="s10-takeaway-rule">
             <a:extLst xmlns:a="http://schemas.openxmlformats.org/drawingml/2006/main">
               <a:ext uri="{FF2B5EF4-FFF2-40B4-BE49-F238E27FC236}">
-                <a16:creationId xmlns:a16="http://schemas.microsoft.com/office/drawing/2014/main" id="{8114B825-19BB-4121-835F-A2CD7C887947}"/>
+                <a16:creationId xmlns:a16="http://schemas.microsoft.com/office/drawing/2014/main" id="{F8A308C5-FEF5-4D61-AC16-C615BCFB16F4}"/>
               </a:ext>
             </a:extLst>
           </p:cNvPr>
@@ -3182,7 +3182,7 @@
           <p:cNvPr id="13" name="s10-takeaway">
             <a:extLst xmlns:a="http://schemas.openxmlformats.org/drawingml/2006/main">
               <a:ext uri="{FF2B5EF4-FFF2-40B4-BE49-F238E27FC236}">
-                <a16:creationId xmlns:a16="http://schemas.microsoft.com/office/drawing/2014/main" id="{621A35EB-FF6B-4C94-9E7E-8059335326DB}"/>
+                <a16:creationId xmlns:a16="http://schemas.microsoft.com/office/drawing/2014/main" id="{497F5D5C-D798-4655-9CE8-F98D8D24BC5C}"/>
               </a:ext>
             </a:extLst>
           </p:cNvPr>
@@ -3238,7 +3238,7 @@
     </p:spTree>
     <p:extLst>
       <p:ext uri="{BB962C8B-B14F-4D97-AF65-F5344CB8AC3E}">
-        <p14:creationId xmlns:p14="http://schemas.microsoft.com/office/powerpoint/2010/main" val="784961396"/>
+        <p14:creationId xmlns:p14="http://schemas.microsoft.com/office/powerpoint/2010/main" val="247322770"/>
       </p:ext>
     </p:extLst>
   </p:cSld>
@@ -3269,7 +3269,7 @@
           <p:cNvPr id="1" name="s11-rule">
             <a:extLst xmlns:a="http://schemas.openxmlformats.org/drawingml/2006/main">
               <a:ext uri="{FF2B5EF4-FFF2-40B4-BE49-F238E27FC236}">
-                <a16:creationId xmlns:a16="http://schemas.microsoft.com/office/drawing/2014/main" id="{3C3AB031-09B8-4A81-97A4-C7368F9A3E05}"/>
+                <a16:creationId xmlns:a16="http://schemas.microsoft.com/office/drawing/2014/main" id="{95DC7E6B-12D3-4D5A-B04A-6BB7CA4DA4D6}"/>
               </a:ext>
             </a:extLst>
           </p:cNvPr>
@@ -3302,7 +3302,7 @@
           <p:cNvPr id="2" name="s11-eyebrow">
             <a:extLst xmlns:a="http://schemas.openxmlformats.org/drawingml/2006/main">
               <a:ext uri="{FF2B5EF4-FFF2-40B4-BE49-F238E27FC236}">
-                <a16:creationId xmlns:a16="http://schemas.microsoft.com/office/drawing/2014/main" id="{CEEDDEAC-68EB-49DA-BE31-4C15B076E9FA}"/>
+                <a16:creationId xmlns:a16="http://schemas.microsoft.com/office/drawing/2014/main" id="{B08363A8-13F2-4993-99E9-014838F3A9B5}"/>
               </a:ext>
             </a:extLst>
           </p:cNvPr>
@@ -3360,7 +3360,7 @@
           <p:cNvPr id="3" name="s11-title">
             <a:extLst xmlns:a="http://schemas.openxmlformats.org/drawingml/2006/main">
               <a:ext uri="{FF2B5EF4-FFF2-40B4-BE49-F238E27FC236}">
-                <a16:creationId xmlns:a16="http://schemas.microsoft.com/office/drawing/2014/main" id="{293FF553-3C70-42D0-853F-E7533B1F6C7A}"/>
+                <a16:creationId xmlns:a16="http://schemas.microsoft.com/office/drawing/2014/main" id="{A351BA5F-F39B-423A-829E-502755B73F13}"/>
               </a:ext>
             </a:extLst>
           </p:cNvPr>
@@ -3418,7 +3418,7 @@
           <p:cNvPr id="4" name="s11-footer">
             <a:extLst xmlns:a="http://schemas.openxmlformats.org/drawingml/2006/main">
               <a:ext uri="{FF2B5EF4-FFF2-40B4-BE49-F238E27FC236}">
-                <a16:creationId xmlns:a16="http://schemas.microsoft.com/office/drawing/2014/main" id="{2A1EE318-DAA9-40C0-B766-3B02FA6E0732}"/>
+                <a16:creationId xmlns:a16="http://schemas.microsoft.com/office/drawing/2014/main" id="{40D33B96-88E9-4982-888D-2A1533CEAAEF}"/>
               </a:ext>
             </a:extLst>
           </p:cNvPr>
@@ -3449,7 +3449,7 @@
           <p:cNvPr id="5" name="s11-identity">
             <a:extLst xmlns:a="http://schemas.openxmlformats.org/drawingml/2006/main">
               <a:ext uri="{FF2B5EF4-FFF2-40B4-BE49-F238E27FC236}">
-                <a16:creationId xmlns:a16="http://schemas.microsoft.com/office/drawing/2014/main" id="{5DC25058-C235-4403-8A0E-5FF6533FF9DF}"/>
+                <a16:creationId xmlns:a16="http://schemas.microsoft.com/office/drawing/2014/main" id="{26EA845C-A117-4F89-87EB-2B223BA0E7A3}"/>
               </a:ext>
             </a:extLst>
           </p:cNvPr>
@@ -3507,7 +3507,7 @@
           <p:cNvPr id="6" name="practice-circle-0">
             <a:extLst xmlns:a="http://schemas.openxmlformats.org/drawingml/2006/main">
               <a:ext uri="{FF2B5EF4-FFF2-40B4-BE49-F238E27FC236}">
-                <a16:creationId xmlns:a16="http://schemas.microsoft.com/office/drawing/2014/main" id="{3631F2EC-8BB4-4CEB-81C7-5649182EBD72}"/>
+                <a16:creationId xmlns:a16="http://schemas.microsoft.com/office/drawing/2014/main" id="{F02E2D69-2544-4588-B3B8-BBA997FFD7D8}"/>
               </a:ext>
             </a:extLst>
           </p:cNvPr>
@@ -3540,7 +3540,7 @@
           <p:cNvPr id="7" name="practice-number-0">
             <a:extLst xmlns:a="http://schemas.openxmlformats.org/drawingml/2006/main">
               <a:ext uri="{FF2B5EF4-FFF2-40B4-BE49-F238E27FC236}">
-                <a16:creationId xmlns:a16="http://schemas.microsoft.com/office/drawing/2014/main" id="{70B27BCE-3D66-4D9D-BD47-18183E7F3507}"/>
+                <a16:creationId xmlns:a16="http://schemas.microsoft.com/office/drawing/2014/main" id="{565A2424-541B-4F2C-BC9F-C2E5DF7FDFE1}"/>
               </a:ext>
             </a:extLst>
           </p:cNvPr>
@@ -3598,7 +3598,7 @@
           <p:cNvPr id="8" name="practice-item-0">
             <a:extLst xmlns:a="http://schemas.openxmlformats.org/drawingml/2006/main">
               <a:ext uri="{FF2B5EF4-FFF2-40B4-BE49-F238E27FC236}">
-                <a16:creationId xmlns:a16="http://schemas.microsoft.com/office/drawing/2014/main" id="{E44090BD-7A4A-4CC8-90F6-3377C40990B4}"/>
+                <a16:creationId xmlns:a16="http://schemas.microsoft.com/office/drawing/2014/main" id="{FBC58041-338C-404B-B29C-3606D10DF53E}"/>
               </a:ext>
             </a:extLst>
           </p:cNvPr>
@@ -3662,7 +3662,7 @@
           <p:cNvPr id="9" name="practice-connector-0">
             <a:extLst xmlns:a="http://schemas.openxmlformats.org/drawingml/2006/main">
               <a:ext uri="{FF2B5EF4-FFF2-40B4-BE49-F238E27FC236}">
-                <a16:creationId xmlns:a16="http://schemas.microsoft.com/office/drawing/2014/main" id="{A642D16C-2CC2-4A19-A96E-457528721037}"/>
+                <a16:creationId xmlns:a16="http://schemas.microsoft.com/office/drawing/2014/main" id="{5D80E0CE-A717-4F84-BF94-F24325F91720}"/>
               </a:ext>
             </a:extLst>
           </p:cNvPr>
@@ -3693,7 +3693,7 @@
           <p:cNvPr id="10" name="practice-circle-1">
             <a:extLst xmlns:a="http://schemas.openxmlformats.org/drawingml/2006/main">
               <a:ext uri="{FF2B5EF4-FFF2-40B4-BE49-F238E27FC236}">
-                <a16:creationId xmlns:a16="http://schemas.microsoft.com/office/drawing/2014/main" id="{CDE2DF0E-2C87-4068-90D2-6F4244AA8C41}"/>
+                <a16:creationId xmlns:a16="http://schemas.microsoft.com/office/drawing/2014/main" id="{8E778BF5-1CA5-463F-8A88-D11281F09A99}"/>
               </a:ext>
             </a:extLst>
           </p:cNvPr>
@@ -3726,7 +3726,7 @@
           <p:cNvPr id="11" name="practice-number-1">
             <a:extLst xmlns:a="http://schemas.openxmlformats.org/drawingml/2006/main">
               <a:ext uri="{FF2B5EF4-FFF2-40B4-BE49-F238E27FC236}">
-                <a16:creationId xmlns:a16="http://schemas.microsoft.com/office/drawing/2014/main" id="{AC797BE7-AC61-45A5-934F-DD7381354CF7}"/>
+                <a16:creationId xmlns:a16="http://schemas.microsoft.com/office/drawing/2014/main" id="{3FD4C9BF-759B-45CC-A0F9-0A41BD5DA448}"/>
               </a:ext>
             </a:extLst>
           </p:cNvPr>
@@ -3784,7 +3784,7 @@
           <p:cNvPr id="12" name="practice-item-1">
             <a:extLst xmlns:a="http://schemas.openxmlformats.org/drawingml/2006/main">
               <a:ext uri="{FF2B5EF4-FFF2-40B4-BE49-F238E27FC236}">
-                <a16:creationId xmlns:a16="http://schemas.microsoft.com/office/drawing/2014/main" id="{0C009CE6-6F87-4B8C-8AE6-D0D8869BBB64}"/>
+                <a16:creationId xmlns:a16="http://schemas.microsoft.com/office/drawing/2014/main" id="{5C7F2FBE-92A2-4961-ABA9-2019838C9D4F}"/>
               </a:ext>
             </a:extLst>
           </p:cNvPr>
@@ -3848,7 +3848,7 @@
           <p:cNvPr id="13" name="practice-connector-1">
             <a:extLst xmlns:a="http://schemas.openxmlformats.org/drawingml/2006/main">
               <a:ext uri="{FF2B5EF4-FFF2-40B4-BE49-F238E27FC236}">
-                <a16:creationId xmlns:a16="http://schemas.microsoft.com/office/drawing/2014/main" id="{8DD8BF4B-C5E9-4845-BF62-3F60DEFAAC89}"/>
+                <a16:creationId xmlns:a16="http://schemas.microsoft.com/office/drawing/2014/main" id="{C493DBBB-1E34-4953-8355-E2EEAAB1FDF9}"/>
               </a:ext>
             </a:extLst>
           </p:cNvPr>
@@ -3879,7 +3879,7 @@
           <p:cNvPr id="14" name="practice-circle-2">
             <a:extLst xmlns:a="http://schemas.openxmlformats.org/drawingml/2006/main">
               <a:ext uri="{FF2B5EF4-FFF2-40B4-BE49-F238E27FC236}">
-                <a16:creationId xmlns:a16="http://schemas.microsoft.com/office/drawing/2014/main" id="{FD14CC55-F94B-4FE6-BA57-B5773D6AC92B}"/>
+                <a16:creationId xmlns:a16="http://schemas.microsoft.com/office/drawing/2014/main" id="{D031449D-3316-4E4C-A87C-7195DC09AB3F}"/>
               </a:ext>
             </a:extLst>
           </p:cNvPr>
@@ -3912,7 +3912,7 @@
           <p:cNvPr id="15" name="practice-number-2">
             <a:extLst xmlns:a="http://schemas.openxmlformats.org/drawingml/2006/main">
               <a:ext uri="{FF2B5EF4-FFF2-40B4-BE49-F238E27FC236}">
-                <a16:creationId xmlns:a16="http://schemas.microsoft.com/office/drawing/2014/main" id="{A16310EC-CEBC-463C-BDD1-863F350A096A}"/>
+                <a16:creationId xmlns:a16="http://schemas.microsoft.com/office/drawing/2014/main" id="{8AB749BE-3FEA-46E9-8A8C-513AB7096262}"/>
               </a:ext>
             </a:extLst>
           </p:cNvPr>
@@ -3970,7 +3970,7 @@
           <p:cNvPr id="16" name="practice-item-2">
             <a:extLst xmlns:a="http://schemas.openxmlformats.org/drawingml/2006/main">
               <a:ext uri="{FF2B5EF4-FFF2-40B4-BE49-F238E27FC236}">
-                <a16:creationId xmlns:a16="http://schemas.microsoft.com/office/drawing/2014/main" id="{D719B962-2F43-4C27-ADA7-C0A2BEC29545}"/>
+                <a16:creationId xmlns:a16="http://schemas.microsoft.com/office/drawing/2014/main" id="{7579199B-E929-41D0-AD2E-E66BF642CDE9}"/>
               </a:ext>
             </a:extLst>
           </p:cNvPr>
@@ -4032,7 +4032,7 @@
     </p:spTree>
     <p:extLst>
       <p:ext uri="{BB962C8B-B14F-4D97-AF65-F5344CB8AC3E}">
-        <p14:creationId xmlns:p14="http://schemas.microsoft.com/office/powerpoint/2010/main" val="431821670"/>
+        <p14:creationId xmlns:p14="http://schemas.microsoft.com/office/powerpoint/2010/main" val="1032385304"/>
       </p:ext>
     </p:extLst>
   </p:cSld>
@@ -4063,7 +4063,7 @@
           <p:cNvPr id="1" name="s12-rule">
             <a:extLst xmlns:a="http://schemas.openxmlformats.org/drawingml/2006/main">
               <a:ext uri="{FF2B5EF4-FFF2-40B4-BE49-F238E27FC236}">
-                <a16:creationId xmlns:a16="http://schemas.microsoft.com/office/drawing/2014/main" id="{EB963B78-1E64-403B-874C-EC9CD0E15004}"/>
+                <a16:creationId xmlns:a16="http://schemas.microsoft.com/office/drawing/2014/main" id="{6CF9446D-2DC4-438F-973A-24AE1370467E}"/>
               </a:ext>
             </a:extLst>
           </p:cNvPr>
@@ -4096,7 +4096,7 @@
           <p:cNvPr id="2" name="s12-eyebrow">
             <a:extLst xmlns:a="http://schemas.openxmlformats.org/drawingml/2006/main">
               <a:ext uri="{FF2B5EF4-FFF2-40B4-BE49-F238E27FC236}">
-                <a16:creationId xmlns:a16="http://schemas.microsoft.com/office/drawing/2014/main" id="{CCF68443-63DF-4AF6-BADF-028762B07A9C}"/>
+                <a16:creationId xmlns:a16="http://schemas.microsoft.com/office/drawing/2014/main" id="{C6C7B6E3-9236-4056-A004-C2DC353F5857}"/>
               </a:ext>
             </a:extLst>
           </p:cNvPr>
@@ -4154,7 +4154,7 @@
           <p:cNvPr id="3" name="s12-title">
             <a:extLst xmlns:a="http://schemas.openxmlformats.org/drawingml/2006/main">
               <a:ext uri="{FF2B5EF4-FFF2-40B4-BE49-F238E27FC236}">
-                <a16:creationId xmlns:a16="http://schemas.microsoft.com/office/drawing/2014/main" id="{A1660716-33B6-4AF5-8EA9-497EF4728670}"/>
+                <a16:creationId xmlns:a16="http://schemas.microsoft.com/office/drawing/2014/main" id="{561296F9-F536-4B2E-B321-CEEC043DEBC5}"/>
               </a:ext>
             </a:extLst>
           </p:cNvPr>
@@ -4212,7 +4212,7 @@
           <p:cNvPr id="4" name="s12-footer">
             <a:extLst xmlns:a="http://schemas.openxmlformats.org/drawingml/2006/main">
               <a:ext uri="{FF2B5EF4-FFF2-40B4-BE49-F238E27FC236}">
-                <a16:creationId xmlns:a16="http://schemas.microsoft.com/office/drawing/2014/main" id="{2878A498-F306-46F3-B306-C58745726035}"/>
+                <a16:creationId xmlns:a16="http://schemas.microsoft.com/office/drawing/2014/main" id="{E0DB7BB4-50DC-40B0-827E-7721E9FCAB60}"/>
               </a:ext>
             </a:extLst>
           </p:cNvPr>
@@ -4243,7 +4243,7 @@
           <p:cNvPr id="5" name="s12-identity">
             <a:extLst xmlns:a="http://schemas.openxmlformats.org/drawingml/2006/main">
               <a:ext uri="{FF2B5EF4-FFF2-40B4-BE49-F238E27FC236}">
-                <a16:creationId xmlns:a16="http://schemas.microsoft.com/office/drawing/2014/main" id="{A5C579D6-0C3F-4C4F-8C0B-5FFD1B78DED0}"/>
+                <a16:creationId xmlns:a16="http://schemas.microsoft.com/office/drawing/2014/main" id="{77A2AC89-CBE1-4296-A6D3-B6B93E26266B}"/>
               </a:ext>
             </a:extLst>
           </p:cNvPr>
@@ -4301,7 +4301,7 @@
           <p:cNvPr id="6" name="recap-circle-0">
             <a:extLst xmlns:a="http://schemas.openxmlformats.org/drawingml/2006/main">
               <a:ext uri="{FF2B5EF4-FFF2-40B4-BE49-F238E27FC236}">
-                <a16:creationId xmlns:a16="http://schemas.microsoft.com/office/drawing/2014/main" id="{C4FF5E7D-BDC3-42CC-9A49-D06087D0E33A}"/>
+                <a16:creationId xmlns:a16="http://schemas.microsoft.com/office/drawing/2014/main" id="{CABA8CBF-C78E-4585-87D2-34146F154936}"/>
               </a:ext>
             </a:extLst>
           </p:cNvPr>
@@ -4334,7 +4334,7 @@
           <p:cNvPr id="7" name="recap-number-0">
             <a:extLst xmlns:a="http://schemas.openxmlformats.org/drawingml/2006/main">
               <a:ext uri="{FF2B5EF4-FFF2-40B4-BE49-F238E27FC236}">
-                <a16:creationId xmlns:a16="http://schemas.microsoft.com/office/drawing/2014/main" id="{472CD640-6916-48A2-B649-D2800FBB3DF9}"/>
+                <a16:creationId xmlns:a16="http://schemas.microsoft.com/office/drawing/2014/main" id="{89270F15-9B2F-4D7D-ADD0-EABF94BDBA39}"/>
               </a:ext>
             </a:extLst>
           </p:cNvPr>
@@ -4392,7 +4392,7 @@
           <p:cNvPr id="8" name="recap-item-0">
             <a:extLst xmlns:a="http://schemas.openxmlformats.org/drawingml/2006/main">
               <a:ext uri="{FF2B5EF4-FFF2-40B4-BE49-F238E27FC236}">
-                <a16:creationId xmlns:a16="http://schemas.microsoft.com/office/drawing/2014/main" id="{C9BCB758-56C7-4004-97FD-A9F45F62993D}"/>
+                <a16:creationId xmlns:a16="http://schemas.microsoft.com/office/drawing/2014/main" id="{B8670BDE-83EA-4AED-B1B5-7BBFCE23C75D}"/>
               </a:ext>
             </a:extLst>
           </p:cNvPr>
@@ -4456,7 +4456,7 @@
           <p:cNvPr id="9" name="recap-connector-0">
             <a:extLst xmlns:a="http://schemas.openxmlformats.org/drawingml/2006/main">
               <a:ext uri="{FF2B5EF4-FFF2-40B4-BE49-F238E27FC236}">
-                <a16:creationId xmlns:a16="http://schemas.microsoft.com/office/drawing/2014/main" id="{B8A6021A-2BB5-4F3A-829B-DDC62BD4EEF7}"/>
+                <a16:creationId xmlns:a16="http://schemas.microsoft.com/office/drawing/2014/main" id="{BCA15A57-9BCB-4501-BFAE-A2245487C17F}"/>
               </a:ext>
             </a:extLst>
           </p:cNvPr>
@@ -4487,7 +4487,7 @@
           <p:cNvPr id="10" name="recap-circle-1">
             <a:extLst xmlns:a="http://schemas.openxmlformats.org/drawingml/2006/main">
               <a:ext uri="{FF2B5EF4-FFF2-40B4-BE49-F238E27FC236}">
-                <a16:creationId xmlns:a16="http://schemas.microsoft.com/office/drawing/2014/main" id="{39461CE8-7CED-4674-8ABA-618C97473791}"/>
+                <a16:creationId xmlns:a16="http://schemas.microsoft.com/office/drawing/2014/main" id="{662029DA-FE56-413F-A46B-6A579BE48E1A}"/>
               </a:ext>
             </a:extLst>
           </p:cNvPr>
@@ -4520,7 +4520,7 @@
           <p:cNvPr id="11" name="recap-number-1">
             <a:extLst xmlns:a="http://schemas.openxmlformats.org/drawingml/2006/main">
               <a:ext uri="{FF2B5EF4-FFF2-40B4-BE49-F238E27FC236}">
-                <a16:creationId xmlns:a16="http://schemas.microsoft.com/office/drawing/2014/main" id="{830FDA14-BE9E-4F8D-AE15-50230223ABEC}"/>
+                <a16:creationId xmlns:a16="http://schemas.microsoft.com/office/drawing/2014/main" id="{64DD2D83-68D2-4D5F-B9DA-37A1CED636B8}"/>
               </a:ext>
             </a:extLst>
           </p:cNvPr>
@@ -4578,7 +4578,7 @@
           <p:cNvPr id="12" name="recap-item-1">
             <a:extLst xmlns:a="http://schemas.openxmlformats.org/drawingml/2006/main">
               <a:ext uri="{FF2B5EF4-FFF2-40B4-BE49-F238E27FC236}">
-                <a16:creationId xmlns:a16="http://schemas.microsoft.com/office/drawing/2014/main" id="{B3CFDF65-0B42-4614-AB33-426847C06AAA}"/>
+                <a16:creationId xmlns:a16="http://schemas.microsoft.com/office/drawing/2014/main" id="{C247417C-A41E-4F71-A254-1D26459E3D11}"/>
               </a:ext>
             </a:extLst>
           </p:cNvPr>
@@ -4642,7 +4642,7 @@
           <p:cNvPr id="13" name="recap-connector-1">
             <a:extLst xmlns:a="http://schemas.openxmlformats.org/drawingml/2006/main">
               <a:ext uri="{FF2B5EF4-FFF2-40B4-BE49-F238E27FC236}">
-                <a16:creationId xmlns:a16="http://schemas.microsoft.com/office/drawing/2014/main" id="{1B27DF18-62BC-446D-A485-C0239AD9FA50}"/>
+                <a16:creationId xmlns:a16="http://schemas.microsoft.com/office/drawing/2014/main" id="{215E66F3-F805-4CF3-AF56-F02344E9EBAB}"/>
               </a:ext>
             </a:extLst>
           </p:cNvPr>
@@ -4673,7 +4673,7 @@
           <p:cNvPr id="14" name="recap-circle-2">
             <a:extLst xmlns:a="http://schemas.openxmlformats.org/drawingml/2006/main">
               <a:ext uri="{FF2B5EF4-FFF2-40B4-BE49-F238E27FC236}">
-                <a16:creationId xmlns:a16="http://schemas.microsoft.com/office/drawing/2014/main" id="{CF2DD282-8F45-43EE-AAB4-5A8FCD338968}"/>
+                <a16:creationId xmlns:a16="http://schemas.microsoft.com/office/drawing/2014/main" id="{D08B697E-7A4C-4DB6-8BA5-9A3150212AB8}"/>
               </a:ext>
             </a:extLst>
           </p:cNvPr>
@@ -4706,7 +4706,7 @@
           <p:cNvPr id="15" name="recap-number-2">
             <a:extLst xmlns:a="http://schemas.openxmlformats.org/drawingml/2006/main">
               <a:ext uri="{FF2B5EF4-FFF2-40B4-BE49-F238E27FC236}">
-                <a16:creationId xmlns:a16="http://schemas.microsoft.com/office/drawing/2014/main" id="{F05D1EF0-72FA-45CC-8810-F8375E36113B}"/>
+                <a16:creationId xmlns:a16="http://schemas.microsoft.com/office/drawing/2014/main" id="{1CEAA933-5389-4075-A62E-21B888F06820}"/>
               </a:ext>
             </a:extLst>
           </p:cNvPr>
@@ -4764,7 +4764,7 @@
           <p:cNvPr id="16" name="recap-item-2">
             <a:extLst xmlns:a="http://schemas.openxmlformats.org/drawingml/2006/main">
               <a:ext uri="{FF2B5EF4-FFF2-40B4-BE49-F238E27FC236}">
-                <a16:creationId xmlns:a16="http://schemas.microsoft.com/office/drawing/2014/main" id="{9F8F5797-054F-473A-A0AB-D3CB32F3DEB5}"/>
+                <a16:creationId xmlns:a16="http://schemas.microsoft.com/office/drawing/2014/main" id="{893EF448-830B-419F-BF36-1EA7C09DAB6F}"/>
               </a:ext>
             </a:extLst>
           </p:cNvPr>
@@ -4826,7 +4826,7 @@
     </p:spTree>
     <p:extLst>
       <p:ext uri="{BB962C8B-B14F-4D97-AF65-F5344CB8AC3E}">
-        <p14:creationId xmlns:p14="http://schemas.microsoft.com/office/powerpoint/2010/main" val="1606259157"/>
+        <p14:creationId xmlns:p14="http://schemas.microsoft.com/office/powerpoint/2010/main" val="755022424"/>
       </p:ext>
     </p:extLst>
   </p:cSld>
@@ -4857,7 +4857,7 @@
           <p:cNvPr id="1" name="s13-rule">
             <a:extLst xmlns:a="http://schemas.openxmlformats.org/drawingml/2006/main">
               <a:ext uri="{FF2B5EF4-FFF2-40B4-BE49-F238E27FC236}">
-                <a16:creationId xmlns:a16="http://schemas.microsoft.com/office/drawing/2014/main" id="{A1E31DE8-AF0C-43A8-B42E-EF00E1E14B92}"/>
+                <a16:creationId xmlns:a16="http://schemas.microsoft.com/office/drawing/2014/main" id="{E11952C0-D9FD-495D-8775-DD05659D942F}"/>
               </a:ext>
             </a:extLst>
           </p:cNvPr>
@@ -4890,7 +4890,7 @@
           <p:cNvPr id="2" name="s13-eyebrow">
             <a:extLst xmlns:a="http://schemas.openxmlformats.org/drawingml/2006/main">
               <a:ext uri="{FF2B5EF4-FFF2-40B4-BE49-F238E27FC236}">
-                <a16:creationId xmlns:a16="http://schemas.microsoft.com/office/drawing/2014/main" id="{CF6F08D2-B9A8-445B-979B-66978116576A}"/>
+                <a16:creationId xmlns:a16="http://schemas.microsoft.com/office/drawing/2014/main" id="{369D5B39-6A0E-4653-89AA-DC80176AF654}"/>
               </a:ext>
             </a:extLst>
           </p:cNvPr>
@@ -4948,7 +4948,7 @@
           <p:cNvPr id="3" name="s13-title">
             <a:extLst xmlns:a="http://schemas.openxmlformats.org/drawingml/2006/main">
               <a:ext uri="{FF2B5EF4-FFF2-40B4-BE49-F238E27FC236}">
-                <a16:creationId xmlns:a16="http://schemas.microsoft.com/office/drawing/2014/main" id="{7604DE30-AE73-4921-A8B6-F6365EA6F355}"/>
+                <a16:creationId xmlns:a16="http://schemas.microsoft.com/office/drawing/2014/main" id="{BD591C9E-6D33-4EA8-9B07-64D712BF88FC}"/>
               </a:ext>
             </a:extLst>
           </p:cNvPr>
@@ -5006,7 +5006,7 @@
           <p:cNvPr id="4" name="s13-footer">
             <a:extLst xmlns:a="http://schemas.openxmlformats.org/drawingml/2006/main">
               <a:ext uri="{FF2B5EF4-FFF2-40B4-BE49-F238E27FC236}">
-                <a16:creationId xmlns:a16="http://schemas.microsoft.com/office/drawing/2014/main" id="{C6193F9A-B840-4236-AFAA-17DB036172A3}"/>
+                <a16:creationId xmlns:a16="http://schemas.microsoft.com/office/drawing/2014/main" id="{EA3977A3-2F75-489D-9ED8-7BFED480EA19}"/>
               </a:ext>
             </a:extLst>
           </p:cNvPr>
@@ -5037,7 +5037,7 @@
           <p:cNvPr id="5" name="s13-identity">
             <a:extLst xmlns:a="http://schemas.openxmlformats.org/drawingml/2006/main">
               <a:ext uri="{FF2B5EF4-FFF2-40B4-BE49-F238E27FC236}">
-                <a16:creationId xmlns:a16="http://schemas.microsoft.com/office/drawing/2014/main" id="{BF049294-9429-4CB7-91E8-2A3F6AB8D8A2}"/>
+                <a16:creationId xmlns:a16="http://schemas.microsoft.com/office/drawing/2014/main" id="{FD95F1A6-FFBA-4863-8B34-679191C6BB47}"/>
               </a:ext>
             </a:extLst>
           </p:cNvPr>
@@ -5095,7 +5095,7 @@
           <p:cNvPr id="6" name="source-0">
             <a:extLst xmlns:a="http://schemas.openxmlformats.org/drawingml/2006/main">
               <a:ext uri="{FF2B5EF4-FFF2-40B4-BE49-F238E27FC236}">
-                <a16:creationId xmlns:a16="http://schemas.microsoft.com/office/drawing/2014/main" id="{C9A1B6D4-5FF7-4E05-90B1-2ADF707D6408}"/>
+                <a16:creationId xmlns:a16="http://schemas.microsoft.com/office/drawing/2014/main" id="{9F2B2F59-8B3A-44DD-A252-E19CEB4BC4B2}"/>
               </a:ext>
             </a:extLst>
           </p:cNvPr>
@@ -5159,7 +5159,7 @@
           <p:cNvPr id="7" name="source-1">
             <a:extLst xmlns:a="http://schemas.openxmlformats.org/drawingml/2006/main">
               <a:ext uri="{FF2B5EF4-FFF2-40B4-BE49-F238E27FC236}">
-                <a16:creationId xmlns:a16="http://schemas.microsoft.com/office/drawing/2014/main" id="{64C90091-9452-4ABD-A2B4-A9156E6FBDCF}"/>
+                <a16:creationId xmlns:a16="http://schemas.microsoft.com/office/drawing/2014/main" id="{BAD8A2AA-537E-4EF9-9C64-C84999E81BF0}"/>
               </a:ext>
             </a:extLst>
           </p:cNvPr>
@@ -5223,7 +5223,7 @@
           <p:cNvPr id="8" name="s13-takeaway-rule">
             <a:extLst xmlns:a="http://schemas.openxmlformats.org/drawingml/2006/main">
               <a:ext uri="{FF2B5EF4-FFF2-40B4-BE49-F238E27FC236}">
-                <a16:creationId xmlns:a16="http://schemas.microsoft.com/office/drawing/2014/main" id="{75A285FA-C067-4952-93A3-492E8CB81FB1}"/>
+                <a16:creationId xmlns:a16="http://schemas.microsoft.com/office/drawing/2014/main" id="{110086A6-8E85-4B83-A18A-B723B957F3C6}"/>
               </a:ext>
             </a:extLst>
           </p:cNvPr>
@@ -5256,7 +5256,7 @@
           <p:cNvPr id="9" name="s13-takeaway">
             <a:extLst xmlns:a="http://schemas.openxmlformats.org/drawingml/2006/main">
               <a:ext uri="{FF2B5EF4-FFF2-40B4-BE49-F238E27FC236}">
-                <a16:creationId xmlns:a16="http://schemas.microsoft.com/office/drawing/2014/main" id="{4EB7E9FD-B39C-49AC-9FAB-1FC0E31F1904}"/>
+                <a16:creationId xmlns:a16="http://schemas.microsoft.com/office/drawing/2014/main" id="{2C278B3A-8D82-4E49-B7B1-7DF56A73DD04}"/>
               </a:ext>
             </a:extLst>
           </p:cNvPr>
@@ -5281,7 +5281,7 @@
         </p:spPr>
         <p:txBody>
           <a:bodyPr xmlns:a="http://schemas.openxmlformats.org/drawingml/2006/main" lIns="0" tIns="0" rIns="0" bIns="0" anchor="ctr">
-            <a:normAutofit fontScale="95911"/>
+            <a:normAutofit fontScale="100000"/>
           </a:bodyPr>
           <a:lstStyle xmlns:a="http://schemas.openxmlformats.org/drawingml/2006/main"/>
           <a:p xmlns:a="http://schemas.openxmlformats.org/drawingml/2006/main">
@@ -5304,7 +5304,7 @@
                 <a:ea typeface="PingFang SC"/>
                 <a:cs typeface="PingFang SC"/>
               </a:rPr>
-              <a:t>课程精编页用于讲授主线；播放器中的“原课件”模式保留团队 PowerPoint 精选页、真实图片和可播放视频。</a:t>
+              <a:t>课程正文与幻灯片共享同一知识主线，图片和视频用于帮助理解本节概念与案例。</a:t>
             </a:r>
           </a:p>
         </p:txBody>
@@ -5312,7 +5312,7 @@
     </p:spTree>
     <p:extLst>
       <p:ext uri="{BB962C8B-B14F-4D97-AF65-F5344CB8AC3E}">
-        <p14:creationId xmlns:p14="http://schemas.microsoft.com/office/powerpoint/2010/main" val="1785575220"/>
+        <p14:creationId xmlns:p14="http://schemas.microsoft.com/office/powerpoint/2010/main" val="585563224"/>
       </p:ext>
     </p:extLst>
   </p:cSld>
@@ -5343,7 +5343,7 @@
           <p:cNvPr id="1" name="s2-rule">
             <a:extLst xmlns:a="http://schemas.openxmlformats.org/drawingml/2006/main">
               <a:ext uri="{FF2B5EF4-FFF2-40B4-BE49-F238E27FC236}">
-                <a16:creationId xmlns:a16="http://schemas.microsoft.com/office/drawing/2014/main" id="{938F2837-6BE5-4257-997F-1574626562C8}"/>
+                <a16:creationId xmlns:a16="http://schemas.microsoft.com/office/drawing/2014/main" id="{BC719559-AD39-425C-A332-C8DC607432B4}"/>
               </a:ext>
             </a:extLst>
           </p:cNvPr>
@@ -5376,7 +5376,7 @@
           <p:cNvPr id="2" name="s2-eyebrow">
             <a:extLst xmlns:a="http://schemas.openxmlformats.org/drawingml/2006/main">
               <a:ext uri="{FF2B5EF4-FFF2-40B4-BE49-F238E27FC236}">
-                <a16:creationId xmlns:a16="http://schemas.microsoft.com/office/drawing/2014/main" id="{22252FCF-A9F3-4486-BEFD-76C480D50D9A}"/>
+                <a16:creationId xmlns:a16="http://schemas.microsoft.com/office/drawing/2014/main" id="{E7496613-FC8A-4C2E-AEDD-B52CA27D20C3}"/>
               </a:ext>
             </a:extLst>
           </p:cNvPr>
@@ -5434,7 +5434,7 @@
           <p:cNvPr id="3" name="s2-title">
             <a:extLst xmlns:a="http://schemas.openxmlformats.org/drawingml/2006/main">
               <a:ext uri="{FF2B5EF4-FFF2-40B4-BE49-F238E27FC236}">
-                <a16:creationId xmlns:a16="http://schemas.microsoft.com/office/drawing/2014/main" id="{968F5C04-AD20-4370-B1DF-0DCCA800C120}"/>
+                <a16:creationId xmlns:a16="http://schemas.microsoft.com/office/drawing/2014/main" id="{697BB2F9-CF2A-4259-8B8B-A09D96FB16CA}"/>
               </a:ext>
             </a:extLst>
           </p:cNvPr>
@@ -5492,7 +5492,7 @@
           <p:cNvPr id="4" name="s2-footer">
             <a:extLst xmlns:a="http://schemas.openxmlformats.org/drawingml/2006/main">
               <a:ext uri="{FF2B5EF4-FFF2-40B4-BE49-F238E27FC236}">
-                <a16:creationId xmlns:a16="http://schemas.microsoft.com/office/drawing/2014/main" id="{F3F86671-D1B9-4C6A-A515-3B15B9EB92A4}"/>
+                <a16:creationId xmlns:a16="http://schemas.microsoft.com/office/drawing/2014/main" id="{C277710D-6906-45EC-9E7E-61CADC60BD41}"/>
               </a:ext>
             </a:extLst>
           </p:cNvPr>
@@ -5523,7 +5523,7 @@
           <p:cNvPr id="5" name="s2-identity">
             <a:extLst xmlns:a="http://schemas.openxmlformats.org/drawingml/2006/main">
               <a:ext uri="{FF2B5EF4-FFF2-40B4-BE49-F238E27FC236}">
-                <a16:creationId xmlns:a16="http://schemas.microsoft.com/office/drawing/2014/main" id="{F7BCACB4-257F-45A6-9B58-228E999908B7}"/>
+                <a16:creationId xmlns:a16="http://schemas.microsoft.com/office/drawing/2014/main" id="{4C73B070-5154-4689-AB91-301B5375EFF6}"/>
               </a:ext>
             </a:extLst>
           </p:cNvPr>
@@ -5581,7 +5581,7 @@
           <p:cNvPr id="6" name="objective-1">
             <a:extLst xmlns:a="http://schemas.openxmlformats.org/drawingml/2006/main">
               <a:ext uri="{FF2B5EF4-FFF2-40B4-BE49-F238E27FC236}">
-                <a16:creationId xmlns:a16="http://schemas.microsoft.com/office/drawing/2014/main" id="{6D2000F2-E3B2-4EDA-BCB1-1106EF280FDC}"/>
+                <a16:creationId xmlns:a16="http://schemas.microsoft.com/office/drawing/2014/main" id="{EF411874-0E2A-4C3A-A319-1B1FD1EBD5A7}"/>
               </a:ext>
             </a:extLst>
           </p:cNvPr>
@@ -5668,7 +5668,7 @@
           <p:cNvPr id="7" name="objective-2">
             <a:extLst xmlns:a="http://schemas.openxmlformats.org/drawingml/2006/main">
               <a:ext uri="{FF2B5EF4-FFF2-40B4-BE49-F238E27FC236}">
-                <a16:creationId xmlns:a16="http://schemas.microsoft.com/office/drawing/2014/main" id="{4410174A-C56F-4229-A444-92F8671668EE}"/>
+                <a16:creationId xmlns:a16="http://schemas.microsoft.com/office/drawing/2014/main" id="{41302A19-6DBB-4181-A780-4E9E95CEA81B}"/>
               </a:ext>
             </a:extLst>
           </p:cNvPr>
@@ -5755,7 +5755,7 @@
           <p:cNvPr id="8" name="objective-3">
             <a:extLst xmlns:a="http://schemas.openxmlformats.org/drawingml/2006/main">
               <a:ext uri="{FF2B5EF4-FFF2-40B4-BE49-F238E27FC236}">
-                <a16:creationId xmlns:a16="http://schemas.microsoft.com/office/drawing/2014/main" id="{3686DCDC-91ED-4451-B6C4-2193353A5FD4}"/>
+                <a16:creationId xmlns:a16="http://schemas.microsoft.com/office/drawing/2014/main" id="{9C3510D2-ABD7-48E9-9678-408ABB220692}"/>
               </a:ext>
             </a:extLst>
           </p:cNvPr>
@@ -5842,7 +5842,7 @@
           <p:cNvPr id="9" name="objective-4">
             <a:extLst xmlns:a="http://schemas.openxmlformats.org/drawingml/2006/main">
               <a:ext uri="{FF2B5EF4-FFF2-40B4-BE49-F238E27FC236}">
-                <a16:creationId xmlns:a16="http://schemas.microsoft.com/office/drawing/2014/main" id="{11A72759-72FF-4EA1-A250-AC29D3FAA552}"/>
+                <a16:creationId xmlns:a16="http://schemas.microsoft.com/office/drawing/2014/main" id="{67062E01-BE7B-4464-9976-59B68021DFA8}"/>
               </a:ext>
             </a:extLst>
           </p:cNvPr>
@@ -5927,7 +5927,7 @@
     </p:spTree>
     <p:extLst>
       <p:ext uri="{BB962C8B-B14F-4D97-AF65-F5344CB8AC3E}">
-        <p14:creationId xmlns:p14="http://schemas.microsoft.com/office/powerpoint/2010/main" val="865664108"/>
+        <p14:creationId xmlns:p14="http://schemas.microsoft.com/office/powerpoint/2010/main" val="1788995764"/>
       </p:ext>
     </p:extLst>
   </p:cSld>
@@ -5958,7 +5958,7 @@
           <p:cNvPr id="1" name="s3-rule">
             <a:extLst xmlns:a="http://schemas.openxmlformats.org/drawingml/2006/main">
               <a:ext uri="{FF2B5EF4-FFF2-40B4-BE49-F238E27FC236}">
-                <a16:creationId xmlns:a16="http://schemas.microsoft.com/office/drawing/2014/main" id="{B72CD055-74B7-4465-8391-296D63B236FE}"/>
+                <a16:creationId xmlns:a16="http://schemas.microsoft.com/office/drawing/2014/main" id="{442CDAA3-E7BA-4A8D-A7A7-CC513319BF03}"/>
               </a:ext>
             </a:extLst>
           </p:cNvPr>
@@ -5991,7 +5991,7 @@
           <p:cNvPr id="2" name="s3-eyebrow">
             <a:extLst xmlns:a="http://schemas.openxmlformats.org/drawingml/2006/main">
               <a:ext uri="{FF2B5EF4-FFF2-40B4-BE49-F238E27FC236}">
-                <a16:creationId xmlns:a16="http://schemas.microsoft.com/office/drawing/2014/main" id="{6E3F4B50-C790-4B6B-A25F-4DEDF9A2B6E5}"/>
+                <a16:creationId xmlns:a16="http://schemas.microsoft.com/office/drawing/2014/main" id="{91A756CA-A322-4393-A494-A93052FF3C81}"/>
               </a:ext>
             </a:extLst>
           </p:cNvPr>
@@ -6049,7 +6049,7 @@
           <p:cNvPr id="3" name="s3-title">
             <a:extLst xmlns:a="http://schemas.openxmlformats.org/drawingml/2006/main">
               <a:ext uri="{FF2B5EF4-FFF2-40B4-BE49-F238E27FC236}">
-                <a16:creationId xmlns:a16="http://schemas.microsoft.com/office/drawing/2014/main" id="{AE5C7B59-CE86-4E9A-B0E3-41C2EF158085}"/>
+                <a16:creationId xmlns:a16="http://schemas.microsoft.com/office/drawing/2014/main" id="{9C686FE8-88BC-4D2E-A199-ED6D8A897833}"/>
               </a:ext>
             </a:extLst>
           </p:cNvPr>
@@ -6107,7 +6107,7 @@
           <p:cNvPr id="4" name="s3-footer">
             <a:extLst xmlns:a="http://schemas.openxmlformats.org/drawingml/2006/main">
               <a:ext uri="{FF2B5EF4-FFF2-40B4-BE49-F238E27FC236}">
-                <a16:creationId xmlns:a16="http://schemas.microsoft.com/office/drawing/2014/main" id="{4CA33271-69D7-4E20-AB6D-0701E2432D98}"/>
+                <a16:creationId xmlns:a16="http://schemas.microsoft.com/office/drawing/2014/main" id="{A4CB1468-BEDA-41AB-A4BE-4B74A6079A7D}"/>
               </a:ext>
             </a:extLst>
           </p:cNvPr>
@@ -6138,7 +6138,7 @@
           <p:cNvPr id="5" name="s3-identity">
             <a:extLst xmlns:a="http://schemas.openxmlformats.org/drawingml/2006/main">
               <a:ext uri="{FF2B5EF4-FFF2-40B4-BE49-F238E27FC236}">
-                <a16:creationId xmlns:a16="http://schemas.microsoft.com/office/drawing/2014/main" id="{3307529C-FCE1-4AD2-ACA8-89AE4A5A123C}"/>
+                <a16:creationId xmlns:a16="http://schemas.microsoft.com/office/drawing/2014/main" id="{CDEA6E00-1ECA-4602-B810-E0F454AB2A01}"/>
               </a:ext>
             </a:extLst>
           </p:cNvPr>
@@ -6196,7 +6196,7 @@
           <p:cNvPr id="6" name="core-no-0">
             <a:extLst xmlns:a="http://schemas.openxmlformats.org/drawingml/2006/main">
               <a:ext uri="{FF2B5EF4-FFF2-40B4-BE49-F238E27FC236}">
-                <a16:creationId xmlns:a16="http://schemas.microsoft.com/office/drawing/2014/main" id="{6D755C1E-8C1B-4C1E-8D09-8D546696EADB}"/>
+                <a16:creationId xmlns:a16="http://schemas.microsoft.com/office/drawing/2014/main" id="{04822D8C-1E10-4A2C-B0D8-05133E4AEA2F}"/>
               </a:ext>
             </a:extLst>
           </p:cNvPr>
@@ -6254,7 +6254,7 @@
           <p:cNvPr id="7" name="core-label-0">
             <a:extLst xmlns:a="http://schemas.openxmlformats.org/drawingml/2006/main">
               <a:ext uri="{FF2B5EF4-FFF2-40B4-BE49-F238E27FC236}">
-                <a16:creationId xmlns:a16="http://schemas.microsoft.com/office/drawing/2014/main" id="{0671335D-8F36-4395-A327-510FA17138B3}"/>
+                <a16:creationId xmlns:a16="http://schemas.microsoft.com/office/drawing/2014/main" id="{D0A22AA3-078A-4A08-9134-0A4422AC0CB1}"/>
               </a:ext>
             </a:extLst>
           </p:cNvPr>
@@ -6312,7 +6312,7 @@
           <p:cNvPr id="8" name="core-body-0">
             <a:extLst xmlns:a="http://schemas.openxmlformats.org/drawingml/2006/main">
               <a:ext uri="{FF2B5EF4-FFF2-40B4-BE49-F238E27FC236}">
-                <a16:creationId xmlns:a16="http://schemas.microsoft.com/office/drawing/2014/main" id="{18C1B6E5-157B-4959-A2AA-AC002730D78A}"/>
+                <a16:creationId xmlns:a16="http://schemas.microsoft.com/office/drawing/2014/main" id="{9B074991-26C8-4DE5-84A3-FE4A85CF1B8D}"/>
               </a:ext>
             </a:extLst>
           </p:cNvPr>
@@ -6376,7 +6376,7 @@
           <p:cNvPr id="9" name="core-no-1">
             <a:extLst xmlns:a="http://schemas.openxmlformats.org/drawingml/2006/main">
               <a:ext uri="{FF2B5EF4-FFF2-40B4-BE49-F238E27FC236}">
-                <a16:creationId xmlns:a16="http://schemas.microsoft.com/office/drawing/2014/main" id="{7472B4C4-5DA2-4245-ACBF-06F2380EF08F}"/>
+                <a16:creationId xmlns:a16="http://schemas.microsoft.com/office/drawing/2014/main" id="{F2F738ED-40E8-4DCF-AD27-0DC250FC9281}"/>
               </a:ext>
             </a:extLst>
           </p:cNvPr>
@@ -6434,7 +6434,7 @@
           <p:cNvPr id="10" name="core-label-1">
             <a:extLst xmlns:a="http://schemas.openxmlformats.org/drawingml/2006/main">
               <a:ext uri="{FF2B5EF4-FFF2-40B4-BE49-F238E27FC236}">
-                <a16:creationId xmlns:a16="http://schemas.microsoft.com/office/drawing/2014/main" id="{2E24BA13-733C-4EC7-8980-81B74B23E2E9}"/>
+                <a16:creationId xmlns:a16="http://schemas.microsoft.com/office/drawing/2014/main" id="{2FAA83ED-8D67-44F2-BA86-775E89D4DF1D}"/>
               </a:ext>
             </a:extLst>
           </p:cNvPr>
@@ -6492,7 +6492,7 @@
           <p:cNvPr id="11" name="core-body-1">
             <a:extLst xmlns:a="http://schemas.openxmlformats.org/drawingml/2006/main">
               <a:ext uri="{FF2B5EF4-FFF2-40B4-BE49-F238E27FC236}">
-                <a16:creationId xmlns:a16="http://schemas.microsoft.com/office/drawing/2014/main" id="{CB98F80B-C2E5-4113-B0D0-CCFEC0191A67}"/>
+                <a16:creationId xmlns:a16="http://schemas.microsoft.com/office/drawing/2014/main" id="{E98D02FE-7716-4ADB-99D4-3449A95C0FB9}"/>
               </a:ext>
             </a:extLst>
           </p:cNvPr>
@@ -6556,7 +6556,7 @@
           <p:cNvPr id="12" name="s3-takeaway-rule">
             <a:extLst xmlns:a="http://schemas.openxmlformats.org/drawingml/2006/main">
               <a:ext uri="{FF2B5EF4-FFF2-40B4-BE49-F238E27FC236}">
-                <a16:creationId xmlns:a16="http://schemas.microsoft.com/office/drawing/2014/main" id="{6FA0E2C0-9913-49A1-BF6E-455CA6B2D935}"/>
+                <a16:creationId xmlns:a16="http://schemas.microsoft.com/office/drawing/2014/main" id="{1EE621E0-32B7-4B3F-A80A-90C3F2D199ED}"/>
               </a:ext>
             </a:extLst>
           </p:cNvPr>
@@ -6589,7 +6589,7 @@
           <p:cNvPr id="13" name="s3-takeaway">
             <a:extLst xmlns:a="http://schemas.openxmlformats.org/drawingml/2006/main">
               <a:ext uri="{FF2B5EF4-FFF2-40B4-BE49-F238E27FC236}">
-                <a16:creationId xmlns:a16="http://schemas.microsoft.com/office/drawing/2014/main" id="{9747496C-CBA6-4740-8081-0ADAA0D8863A}"/>
+                <a16:creationId xmlns:a16="http://schemas.microsoft.com/office/drawing/2014/main" id="{07FFFD93-DE1F-45A6-BB3D-0D759D38E812}"/>
               </a:ext>
             </a:extLst>
           </p:cNvPr>
@@ -6645,7 +6645,7 @@
     </p:spTree>
     <p:extLst>
       <p:ext uri="{BB962C8B-B14F-4D97-AF65-F5344CB8AC3E}">
-        <p14:creationId xmlns:p14="http://schemas.microsoft.com/office/powerpoint/2010/main" val="105908935"/>
+        <p14:creationId xmlns:p14="http://schemas.microsoft.com/office/powerpoint/2010/main" val="677632609"/>
       </p:ext>
     </p:extLst>
   </p:cSld>
@@ -6676,7 +6676,7 @@
           <p:cNvPr id="1" name="s4-rule">
             <a:extLst xmlns:a="http://schemas.openxmlformats.org/drawingml/2006/main">
               <a:ext uri="{FF2B5EF4-FFF2-40B4-BE49-F238E27FC236}">
-                <a16:creationId xmlns:a16="http://schemas.microsoft.com/office/drawing/2014/main" id="{498C0D2A-7EE2-4418-9BE0-BF22E32C0E2D}"/>
+                <a16:creationId xmlns:a16="http://schemas.microsoft.com/office/drawing/2014/main" id="{3521DE7E-E0FD-400D-865B-E2E454535163}"/>
               </a:ext>
             </a:extLst>
           </p:cNvPr>
@@ -6709,7 +6709,7 @@
           <p:cNvPr id="2" name="s4-eyebrow">
             <a:extLst xmlns:a="http://schemas.openxmlformats.org/drawingml/2006/main">
               <a:ext uri="{FF2B5EF4-FFF2-40B4-BE49-F238E27FC236}">
-                <a16:creationId xmlns:a16="http://schemas.microsoft.com/office/drawing/2014/main" id="{A067A991-E698-457C-85BE-2C19B5D0494C}"/>
+                <a16:creationId xmlns:a16="http://schemas.microsoft.com/office/drawing/2014/main" id="{F98ED0EC-D8A5-4E22-8C56-CAF7DA6492D5}"/>
               </a:ext>
             </a:extLst>
           </p:cNvPr>
@@ -6767,7 +6767,7 @@
           <p:cNvPr id="3" name="s4-title">
             <a:extLst xmlns:a="http://schemas.openxmlformats.org/drawingml/2006/main">
               <a:ext uri="{FF2B5EF4-FFF2-40B4-BE49-F238E27FC236}">
-                <a16:creationId xmlns:a16="http://schemas.microsoft.com/office/drawing/2014/main" id="{D5CA8205-BC64-4544-A8A8-196EBC8938A0}"/>
+                <a16:creationId xmlns:a16="http://schemas.microsoft.com/office/drawing/2014/main" id="{4A083ECE-5E46-4C36-856E-0AB6F4A8D1EA}"/>
               </a:ext>
             </a:extLst>
           </p:cNvPr>
@@ -6825,7 +6825,7 @@
           <p:cNvPr id="4" name="s4-footer">
             <a:extLst xmlns:a="http://schemas.openxmlformats.org/drawingml/2006/main">
               <a:ext uri="{FF2B5EF4-FFF2-40B4-BE49-F238E27FC236}">
-                <a16:creationId xmlns:a16="http://schemas.microsoft.com/office/drawing/2014/main" id="{62CA0693-16F6-43AC-9201-C36AFC9ABE5E}"/>
+                <a16:creationId xmlns:a16="http://schemas.microsoft.com/office/drawing/2014/main" id="{3B690972-517E-4CB3-AE76-B6D0B57B84C4}"/>
               </a:ext>
             </a:extLst>
           </p:cNvPr>
@@ -6856,7 +6856,7 @@
           <p:cNvPr id="5" name="s4-identity">
             <a:extLst xmlns:a="http://schemas.openxmlformats.org/drawingml/2006/main">
               <a:ext uri="{FF2B5EF4-FFF2-40B4-BE49-F238E27FC236}">
-                <a16:creationId xmlns:a16="http://schemas.microsoft.com/office/drawing/2014/main" id="{52F84B44-40B3-402D-89EE-BD6AFDCB9E15}"/>
+                <a16:creationId xmlns:a16="http://schemas.microsoft.com/office/drawing/2014/main" id="{9CA890DE-DD12-45BA-BFDC-A5EF66AB3872}"/>
               </a:ext>
             </a:extLst>
           </p:cNvPr>
@@ -6914,7 +6914,7 @@
           <p:cNvPr id="6" name="core-no-0">
             <a:extLst xmlns:a="http://schemas.openxmlformats.org/drawingml/2006/main">
               <a:ext uri="{FF2B5EF4-FFF2-40B4-BE49-F238E27FC236}">
-                <a16:creationId xmlns:a16="http://schemas.microsoft.com/office/drawing/2014/main" id="{17B67A88-A911-48C3-ACEB-9D031CE312A3}"/>
+                <a16:creationId xmlns:a16="http://schemas.microsoft.com/office/drawing/2014/main" id="{67FE54C2-FF40-4BDA-9D57-F704AD5B6642}"/>
               </a:ext>
             </a:extLst>
           </p:cNvPr>
@@ -6972,7 +6972,7 @@
           <p:cNvPr id="7" name="core-label-0">
             <a:extLst xmlns:a="http://schemas.openxmlformats.org/drawingml/2006/main">
               <a:ext uri="{FF2B5EF4-FFF2-40B4-BE49-F238E27FC236}">
-                <a16:creationId xmlns:a16="http://schemas.microsoft.com/office/drawing/2014/main" id="{840FEC20-1575-4A9B-82FB-A4AD2AD7105D}"/>
+                <a16:creationId xmlns:a16="http://schemas.microsoft.com/office/drawing/2014/main" id="{F6EF426B-A859-4EE7-B9B8-8C3ED9164378}"/>
               </a:ext>
             </a:extLst>
           </p:cNvPr>
@@ -7030,7 +7030,7 @@
           <p:cNvPr id="8" name="core-body-0">
             <a:extLst xmlns:a="http://schemas.openxmlformats.org/drawingml/2006/main">
               <a:ext uri="{FF2B5EF4-FFF2-40B4-BE49-F238E27FC236}">
-                <a16:creationId xmlns:a16="http://schemas.microsoft.com/office/drawing/2014/main" id="{87701F03-E017-4B21-9914-55E22DDC5568}"/>
+                <a16:creationId xmlns:a16="http://schemas.microsoft.com/office/drawing/2014/main" id="{F774C0DF-235C-4DB6-A362-6F8A331F23F6}"/>
               </a:ext>
             </a:extLst>
           </p:cNvPr>
@@ -7094,7 +7094,7 @@
           <p:cNvPr id="9" name="core-no-1">
             <a:extLst xmlns:a="http://schemas.openxmlformats.org/drawingml/2006/main">
               <a:ext uri="{FF2B5EF4-FFF2-40B4-BE49-F238E27FC236}">
-                <a16:creationId xmlns:a16="http://schemas.microsoft.com/office/drawing/2014/main" id="{84180E7A-D1A7-4161-B12D-49201E74E646}"/>
+                <a16:creationId xmlns:a16="http://schemas.microsoft.com/office/drawing/2014/main" id="{A67302AF-65E9-4B48-83C7-5BF97EA71845}"/>
               </a:ext>
             </a:extLst>
           </p:cNvPr>
@@ -7152,7 +7152,7 @@
           <p:cNvPr id="10" name="core-label-1">
             <a:extLst xmlns:a="http://schemas.openxmlformats.org/drawingml/2006/main">
               <a:ext uri="{FF2B5EF4-FFF2-40B4-BE49-F238E27FC236}">
-                <a16:creationId xmlns:a16="http://schemas.microsoft.com/office/drawing/2014/main" id="{C1727666-FD76-4F99-AC35-A82B462D1D78}"/>
+                <a16:creationId xmlns:a16="http://schemas.microsoft.com/office/drawing/2014/main" id="{782009AD-F120-43D5-9CC0-5CDC3FC8EBBB}"/>
               </a:ext>
             </a:extLst>
           </p:cNvPr>
@@ -7210,7 +7210,7 @@
           <p:cNvPr id="11" name="core-body-1">
             <a:extLst xmlns:a="http://schemas.openxmlformats.org/drawingml/2006/main">
               <a:ext uri="{FF2B5EF4-FFF2-40B4-BE49-F238E27FC236}">
-                <a16:creationId xmlns:a16="http://schemas.microsoft.com/office/drawing/2014/main" id="{09961410-86F0-4654-91A7-EA990E07A732}"/>
+                <a16:creationId xmlns:a16="http://schemas.microsoft.com/office/drawing/2014/main" id="{5929F46F-25A7-425F-8EE8-A388BE22654D}"/>
               </a:ext>
             </a:extLst>
           </p:cNvPr>
@@ -7274,7 +7274,7 @@
           <p:cNvPr id="12" name="s4-takeaway-rule">
             <a:extLst xmlns:a="http://schemas.openxmlformats.org/drawingml/2006/main">
               <a:ext uri="{FF2B5EF4-FFF2-40B4-BE49-F238E27FC236}">
-                <a16:creationId xmlns:a16="http://schemas.microsoft.com/office/drawing/2014/main" id="{CC1811AD-81E9-4403-B30E-BF7FBABB382E}"/>
+                <a16:creationId xmlns:a16="http://schemas.microsoft.com/office/drawing/2014/main" id="{1C6AE26F-BD31-4A16-9780-41A2C683BE3C}"/>
               </a:ext>
             </a:extLst>
           </p:cNvPr>
@@ -7307,7 +7307,7 @@
           <p:cNvPr id="13" name="s4-takeaway">
             <a:extLst xmlns:a="http://schemas.openxmlformats.org/drawingml/2006/main">
               <a:ext uri="{FF2B5EF4-FFF2-40B4-BE49-F238E27FC236}">
-                <a16:creationId xmlns:a16="http://schemas.microsoft.com/office/drawing/2014/main" id="{4DDD0C6D-F01E-4926-811C-7AAAE16810EE}"/>
+                <a16:creationId xmlns:a16="http://schemas.microsoft.com/office/drawing/2014/main" id="{F1D4290F-DEEC-49AC-8411-F4CB8D89E05B}"/>
               </a:ext>
             </a:extLst>
           </p:cNvPr>
@@ -7363,7 +7363,7 @@
     </p:spTree>
     <p:extLst>
       <p:ext uri="{BB962C8B-B14F-4D97-AF65-F5344CB8AC3E}">
-        <p14:creationId xmlns:p14="http://schemas.microsoft.com/office/powerpoint/2010/main" val="251654277"/>
+        <p14:creationId xmlns:p14="http://schemas.microsoft.com/office/powerpoint/2010/main" val="2015142183"/>
       </p:ext>
     </p:extLst>
   </p:cSld>
@@ -7394,7 +7394,7 @@
           <p:cNvPr id="1" name="s5-rule">
             <a:extLst xmlns:a="http://schemas.openxmlformats.org/drawingml/2006/main">
               <a:ext uri="{FF2B5EF4-FFF2-40B4-BE49-F238E27FC236}">
-                <a16:creationId xmlns:a16="http://schemas.microsoft.com/office/drawing/2014/main" id="{3D8929D3-DB11-4925-B9F4-595C71966DD0}"/>
+                <a16:creationId xmlns:a16="http://schemas.microsoft.com/office/drawing/2014/main" id="{3AC19306-AA9D-4F55-836F-B5E2391383AA}"/>
               </a:ext>
             </a:extLst>
           </p:cNvPr>
@@ -7427,7 +7427,7 @@
           <p:cNvPr id="2" name="s5-eyebrow">
             <a:extLst xmlns:a="http://schemas.openxmlformats.org/drawingml/2006/main">
               <a:ext uri="{FF2B5EF4-FFF2-40B4-BE49-F238E27FC236}">
-                <a16:creationId xmlns:a16="http://schemas.microsoft.com/office/drawing/2014/main" id="{8885A4F6-0AFD-4D30-BD47-E8433BF7273E}"/>
+                <a16:creationId xmlns:a16="http://schemas.microsoft.com/office/drawing/2014/main" id="{91D3EFC1-BCFF-4428-9A8F-CA3A03864B9F}"/>
               </a:ext>
             </a:extLst>
           </p:cNvPr>
@@ -7485,7 +7485,7 @@
           <p:cNvPr id="3" name="s5-title">
             <a:extLst xmlns:a="http://schemas.openxmlformats.org/drawingml/2006/main">
               <a:ext uri="{FF2B5EF4-FFF2-40B4-BE49-F238E27FC236}">
-                <a16:creationId xmlns:a16="http://schemas.microsoft.com/office/drawing/2014/main" id="{5E32C354-E15A-47D4-91CA-100A6C0C4CA8}"/>
+                <a16:creationId xmlns:a16="http://schemas.microsoft.com/office/drawing/2014/main" id="{5749592B-5AEE-4F0B-A1A6-CA9B793B1C19}"/>
               </a:ext>
             </a:extLst>
           </p:cNvPr>
@@ -7543,7 +7543,7 @@
           <p:cNvPr id="4" name="s5-footer">
             <a:extLst xmlns:a="http://schemas.openxmlformats.org/drawingml/2006/main">
               <a:ext uri="{FF2B5EF4-FFF2-40B4-BE49-F238E27FC236}">
-                <a16:creationId xmlns:a16="http://schemas.microsoft.com/office/drawing/2014/main" id="{74B76CCE-7796-41C3-9F9D-1C2D3877C674}"/>
+                <a16:creationId xmlns:a16="http://schemas.microsoft.com/office/drawing/2014/main" id="{AC1F05CF-E180-4A2A-897C-8F7853DB6167}"/>
               </a:ext>
             </a:extLst>
           </p:cNvPr>
@@ -7574,7 +7574,7 @@
           <p:cNvPr id="5" name="s5-identity">
             <a:extLst xmlns:a="http://schemas.openxmlformats.org/drawingml/2006/main">
               <a:ext uri="{FF2B5EF4-FFF2-40B4-BE49-F238E27FC236}">
-                <a16:creationId xmlns:a16="http://schemas.microsoft.com/office/drawing/2014/main" id="{696F4B2D-20DA-4C79-9FA8-4EC24A3D0A99}"/>
+                <a16:creationId xmlns:a16="http://schemas.microsoft.com/office/drawing/2014/main" id="{85057DEF-7985-4E7F-BE08-B38512551AB1}"/>
               </a:ext>
             </a:extLst>
           </p:cNvPr>
@@ -7632,7 +7632,7 @@
           <p:cNvPr id="6" name="core-no-0">
             <a:extLst xmlns:a="http://schemas.openxmlformats.org/drawingml/2006/main">
               <a:ext uri="{FF2B5EF4-FFF2-40B4-BE49-F238E27FC236}">
-                <a16:creationId xmlns:a16="http://schemas.microsoft.com/office/drawing/2014/main" id="{1CE7E0A0-9890-4AAA-A0BB-A51A6E72DE64}"/>
+                <a16:creationId xmlns:a16="http://schemas.microsoft.com/office/drawing/2014/main" id="{9BA625C0-F9FD-490F-BDE7-15E36762ADC0}"/>
               </a:ext>
             </a:extLst>
           </p:cNvPr>
@@ -7690,7 +7690,7 @@
           <p:cNvPr id="7" name="core-label-0">
             <a:extLst xmlns:a="http://schemas.openxmlformats.org/drawingml/2006/main">
               <a:ext uri="{FF2B5EF4-FFF2-40B4-BE49-F238E27FC236}">
-                <a16:creationId xmlns:a16="http://schemas.microsoft.com/office/drawing/2014/main" id="{1E161E52-DC02-40FD-BFEB-A0416593C7ED}"/>
+                <a16:creationId xmlns:a16="http://schemas.microsoft.com/office/drawing/2014/main" id="{352E9032-0D7B-45A9-9EC6-6BB8479C5E6E}"/>
               </a:ext>
             </a:extLst>
           </p:cNvPr>
@@ -7748,7 +7748,7 @@
           <p:cNvPr id="8" name="core-body-0">
             <a:extLst xmlns:a="http://schemas.openxmlformats.org/drawingml/2006/main">
               <a:ext uri="{FF2B5EF4-FFF2-40B4-BE49-F238E27FC236}">
-                <a16:creationId xmlns:a16="http://schemas.microsoft.com/office/drawing/2014/main" id="{68A9060E-97DD-4252-97CA-1ABFD0128D0A}"/>
+                <a16:creationId xmlns:a16="http://schemas.microsoft.com/office/drawing/2014/main" id="{30A27F59-FA0F-445C-ABAA-7834E45E6755}"/>
               </a:ext>
             </a:extLst>
           </p:cNvPr>
@@ -7812,7 +7812,7 @@
           <p:cNvPr id="9" name="core-no-1">
             <a:extLst xmlns:a="http://schemas.openxmlformats.org/drawingml/2006/main">
               <a:ext uri="{FF2B5EF4-FFF2-40B4-BE49-F238E27FC236}">
-                <a16:creationId xmlns:a16="http://schemas.microsoft.com/office/drawing/2014/main" id="{2E7C3881-DEE0-40DE-8C66-FB3C2324A0F8}"/>
+                <a16:creationId xmlns:a16="http://schemas.microsoft.com/office/drawing/2014/main" id="{D45A844E-80EC-43B3-9701-1C9A3D59EE96}"/>
               </a:ext>
             </a:extLst>
           </p:cNvPr>
@@ -7870,7 +7870,7 @@
           <p:cNvPr id="10" name="core-body-1">
             <a:extLst xmlns:a="http://schemas.openxmlformats.org/drawingml/2006/main">
               <a:ext uri="{FF2B5EF4-FFF2-40B4-BE49-F238E27FC236}">
-                <a16:creationId xmlns:a16="http://schemas.microsoft.com/office/drawing/2014/main" id="{387CC332-E413-42B0-A1FA-DD5A475CA237}"/>
+                <a16:creationId xmlns:a16="http://schemas.microsoft.com/office/drawing/2014/main" id="{F060EC3F-8524-48D1-86F9-BA62009A318F}"/>
               </a:ext>
             </a:extLst>
           </p:cNvPr>
@@ -7934,7 +7934,7 @@
           <p:cNvPr id="11" name="core-no-2">
             <a:extLst xmlns:a="http://schemas.openxmlformats.org/drawingml/2006/main">
               <a:ext uri="{FF2B5EF4-FFF2-40B4-BE49-F238E27FC236}">
-                <a16:creationId xmlns:a16="http://schemas.microsoft.com/office/drawing/2014/main" id="{8245714C-8016-4620-8D70-8361989B4FC3}"/>
+                <a16:creationId xmlns:a16="http://schemas.microsoft.com/office/drawing/2014/main" id="{857C7FAC-DB20-4C70-8F18-D0D376C59432}"/>
               </a:ext>
             </a:extLst>
           </p:cNvPr>
@@ -7992,7 +7992,7 @@
           <p:cNvPr id="12" name="core-body-2">
             <a:extLst xmlns:a="http://schemas.openxmlformats.org/drawingml/2006/main">
               <a:ext uri="{FF2B5EF4-FFF2-40B4-BE49-F238E27FC236}">
-                <a16:creationId xmlns:a16="http://schemas.microsoft.com/office/drawing/2014/main" id="{E2B11A45-68B2-4BE7-8F60-FC526E270F59}"/>
+                <a16:creationId xmlns:a16="http://schemas.microsoft.com/office/drawing/2014/main" id="{BA2C481A-D638-4C42-AAC9-93734518D0C1}"/>
               </a:ext>
             </a:extLst>
           </p:cNvPr>
@@ -8056,7 +8056,7 @@
           <p:cNvPr id="13" name="s5-takeaway-rule">
             <a:extLst xmlns:a="http://schemas.openxmlformats.org/drawingml/2006/main">
               <a:ext uri="{FF2B5EF4-FFF2-40B4-BE49-F238E27FC236}">
-                <a16:creationId xmlns:a16="http://schemas.microsoft.com/office/drawing/2014/main" id="{E0BC7FD1-EE79-4303-9F98-8617168FF347}"/>
+                <a16:creationId xmlns:a16="http://schemas.microsoft.com/office/drawing/2014/main" id="{BD109082-D066-4749-985B-77ADD0C73848}"/>
               </a:ext>
             </a:extLst>
           </p:cNvPr>
@@ -8089,7 +8089,7 @@
           <p:cNvPr id="14" name="s5-takeaway">
             <a:extLst xmlns:a="http://schemas.openxmlformats.org/drawingml/2006/main">
               <a:ext uri="{FF2B5EF4-FFF2-40B4-BE49-F238E27FC236}">
-                <a16:creationId xmlns:a16="http://schemas.microsoft.com/office/drawing/2014/main" id="{5AEA6A97-B32E-4590-BA87-901DEBB3349C}"/>
+                <a16:creationId xmlns:a16="http://schemas.microsoft.com/office/drawing/2014/main" id="{CFD710DB-30B0-45C2-9D87-929B3D01F9EF}"/>
               </a:ext>
             </a:extLst>
           </p:cNvPr>
@@ -8145,7 +8145,7 @@
     </p:spTree>
     <p:extLst>
       <p:ext uri="{BB962C8B-B14F-4D97-AF65-F5344CB8AC3E}">
-        <p14:creationId xmlns:p14="http://schemas.microsoft.com/office/powerpoint/2010/main" val="1473076637"/>
+        <p14:creationId xmlns:p14="http://schemas.microsoft.com/office/powerpoint/2010/main" val="1181332465"/>
       </p:ext>
     </p:extLst>
   </p:cSld>
@@ -8176,7 +8176,7 @@
           <p:cNvPr id="1" name="s6-rule">
             <a:extLst xmlns:a="http://schemas.openxmlformats.org/drawingml/2006/main">
               <a:ext uri="{FF2B5EF4-FFF2-40B4-BE49-F238E27FC236}">
-                <a16:creationId xmlns:a16="http://schemas.microsoft.com/office/drawing/2014/main" id="{9EBD83F1-BB4E-4B3F-9CE6-7F799AEC612A}"/>
+                <a16:creationId xmlns:a16="http://schemas.microsoft.com/office/drawing/2014/main" id="{2EFDEDC1-A84C-45A6-B1BD-5DF07109B819}"/>
               </a:ext>
             </a:extLst>
           </p:cNvPr>
@@ -8209,7 +8209,7 @@
           <p:cNvPr id="2" name="s6-eyebrow">
             <a:extLst xmlns:a="http://schemas.openxmlformats.org/drawingml/2006/main">
               <a:ext uri="{FF2B5EF4-FFF2-40B4-BE49-F238E27FC236}">
-                <a16:creationId xmlns:a16="http://schemas.microsoft.com/office/drawing/2014/main" id="{5D5DD061-E17E-47F5-91C9-7FA823F681E8}"/>
+                <a16:creationId xmlns:a16="http://schemas.microsoft.com/office/drawing/2014/main" id="{82CAFD8E-2542-4DCD-83B4-61F512AB86A2}"/>
               </a:ext>
             </a:extLst>
           </p:cNvPr>
@@ -8267,7 +8267,7 @@
           <p:cNvPr id="3" name="s6-title">
             <a:extLst xmlns:a="http://schemas.openxmlformats.org/drawingml/2006/main">
               <a:ext uri="{FF2B5EF4-FFF2-40B4-BE49-F238E27FC236}">
-                <a16:creationId xmlns:a16="http://schemas.microsoft.com/office/drawing/2014/main" id="{CE39BF34-9CFB-4892-9CA7-6874507D234D}"/>
+                <a16:creationId xmlns:a16="http://schemas.microsoft.com/office/drawing/2014/main" id="{153E333C-97D6-4EC3-A2D2-6318E021C416}"/>
               </a:ext>
             </a:extLst>
           </p:cNvPr>
@@ -8325,7 +8325,7 @@
           <p:cNvPr id="4" name="s6-footer">
             <a:extLst xmlns:a="http://schemas.openxmlformats.org/drawingml/2006/main">
               <a:ext uri="{FF2B5EF4-FFF2-40B4-BE49-F238E27FC236}">
-                <a16:creationId xmlns:a16="http://schemas.microsoft.com/office/drawing/2014/main" id="{E9466DC0-91F0-4F29-A14D-001ECF91412A}"/>
+                <a16:creationId xmlns:a16="http://schemas.microsoft.com/office/drawing/2014/main" id="{43A319DD-BDEE-49CB-9CED-597C480DA030}"/>
               </a:ext>
             </a:extLst>
           </p:cNvPr>
@@ -8356,7 +8356,7 @@
           <p:cNvPr id="5" name="s6-identity">
             <a:extLst xmlns:a="http://schemas.openxmlformats.org/drawingml/2006/main">
               <a:ext uri="{FF2B5EF4-FFF2-40B4-BE49-F238E27FC236}">
-                <a16:creationId xmlns:a16="http://schemas.microsoft.com/office/drawing/2014/main" id="{8A5FD55C-416D-4E05-A9B1-1730C799DFDC}"/>
+                <a16:creationId xmlns:a16="http://schemas.microsoft.com/office/drawing/2014/main" id="{379272C4-6958-4E91-B0D3-ACAE21EF90CC}"/>
               </a:ext>
             </a:extLst>
           </p:cNvPr>
@@ -8414,7 +8414,7 @@
           <p:cNvPr id="6" name="core-no-0">
             <a:extLst xmlns:a="http://schemas.openxmlformats.org/drawingml/2006/main">
               <a:ext uri="{FF2B5EF4-FFF2-40B4-BE49-F238E27FC236}">
-                <a16:creationId xmlns:a16="http://schemas.microsoft.com/office/drawing/2014/main" id="{6FE80503-D737-4B91-88CA-512DE2D260FA}"/>
+                <a16:creationId xmlns:a16="http://schemas.microsoft.com/office/drawing/2014/main" id="{F1A611E8-602B-4B44-B35A-BFB7C9B4FAF3}"/>
               </a:ext>
             </a:extLst>
           </p:cNvPr>
@@ -8472,7 +8472,7 @@
           <p:cNvPr id="7" name="core-label-0">
             <a:extLst xmlns:a="http://schemas.openxmlformats.org/drawingml/2006/main">
               <a:ext uri="{FF2B5EF4-FFF2-40B4-BE49-F238E27FC236}">
-                <a16:creationId xmlns:a16="http://schemas.microsoft.com/office/drawing/2014/main" id="{A700D2CC-E608-46B2-83C7-8CFB71DEFF3C}"/>
+                <a16:creationId xmlns:a16="http://schemas.microsoft.com/office/drawing/2014/main" id="{33D3D2DB-AF71-4111-9019-B44C441BDCC4}"/>
               </a:ext>
             </a:extLst>
           </p:cNvPr>
@@ -8530,7 +8530,7 @@
           <p:cNvPr id="8" name="core-body-0">
             <a:extLst xmlns:a="http://schemas.openxmlformats.org/drawingml/2006/main">
               <a:ext uri="{FF2B5EF4-FFF2-40B4-BE49-F238E27FC236}">
-                <a16:creationId xmlns:a16="http://schemas.microsoft.com/office/drawing/2014/main" id="{5CBBB40F-70E4-48D3-973A-481658021502}"/>
+                <a16:creationId xmlns:a16="http://schemas.microsoft.com/office/drawing/2014/main" id="{A696275D-3FE1-4CFF-855D-825C96A08CB8}"/>
               </a:ext>
             </a:extLst>
           </p:cNvPr>
@@ -8594,7 +8594,7 @@
           <p:cNvPr id="9" name="core-no-1">
             <a:extLst xmlns:a="http://schemas.openxmlformats.org/drawingml/2006/main">
               <a:ext uri="{FF2B5EF4-FFF2-40B4-BE49-F238E27FC236}">
-                <a16:creationId xmlns:a16="http://schemas.microsoft.com/office/drawing/2014/main" id="{9B521B7C-3FB6-4254-85CE-153D884A46B7}"/>
+                <a16:creationId xmlns:a16="http://schemas.microsoft.com/office/drawing/2014/main" id="{C5B96255-B1AB-4B28-B5D8-F48FE51BE983}"/>
               </a:ext>
             </a:extLst>
           </p:cNvPr>
@@ -8652,7 +8652,7 @@
           <p:cNvPr id="10" name="core-body-1">
             <a:extLst xmlns:a="http://schemas.openxmlformats.org/drawingml/2006/main">
               <a:ext uri="{FF2B5EF4-FFF2-40B4-BE49-F238E27FC236}">
-                <a16:creationId xmlns:a16="http://schemas.microsoft.com/office/drawing/2014/main" id="{CB0E5825-593D-47FA-856B-88C38ED0EC10}"/>
+                <a16:creationId xmlns:a16="http://schemas.microsoft.com/office/drawing/2014/main" id="{B218DF3E-374C-453A-ADF6-1901BCE232D3}"/>
               </a:ext>
             </a:extLst>
           </p:cNvPr>
@@ -8716,7 +8716,7 @@
           <p:cNvPr id="11" name="core-no-2">
             <a:extLst xmlns:a="http://schemas.openxmlformats.org/drawingml/2006/main">
               <a:ext uri="{FF2B5EF4-FFF2-40B4-BE49-F238E27FC236}">
-                <a16:creationId xmlns:a16="http://schemas.microsoft.com/office/drawing/2014/main" id="{47117AC5-B1FE-4593-960E-EDC2D71C3074}"/>
+                <a16:creationId xmlns:a16="http://schemas.microsoft.com/office/drawing/2014/main" id="{F3DC2A39-95C4-4A9B-AC8C-E8E9E9384E42}"/>
               </a:ext>
             </a:extLst>
           </p:cNvPr>
@@ -8774,7 +8774,7 @@
           <p:cNvPr id="12" name="core-body-2">
             <a:extLst xmlns:a="http://schemas.openxmlformats.org/drawingml/2006/main">
               <a:ext uri="{FF2B5EF4-FFF2-40B4-BE49-F238E27FC236}">
-                <a16:creationId xmlns:a16="http://schemas.microsoft.com/office/drawing/2014/main" id="{A5422489-04B1-4977-9E93-6685633EDD51}"/>
+                <a16:creationId xmlns:a16="http://schemas.microsoft.com/office/drawing/2014/main" id="{3D2E0EE8-F705-4E5A-906B-9D016620AB7F}"/>
               </a:ext>
             </a:extLst>
           </p:cNvPr>
@@ -8838,7 +8838,7 @@
           <p:cNvPr id="13" name="s6-takeaway-rule">
             <a:extLst xmlns:a="http://schemas.openxmlformats.org/drawingml/2006/main">
               <a:ext uri="{FF2B5EF4-FFF2-40B4-BE49-F238E27FC236}">
-                <a16:creationId xmlns:a16="http://schemas.microsoft.com/office/drawing/2014/main" id="{D66655ED-607F-4D46-B219-A15020887245}"/>
+                <a16:creationId xmlns:a16="http://schemas.microsoft.com/office/drawing/2014/main" id="{2242B3CD-D2BD-4E1B-AD10-4BEEA6561C49}"/>
               </a:ext>
             </a:extLst>
           </p:cNvPr>
@@ -8871,7 +8871,7 @@
           <p:cNvPr id="14" name="s6-takeaway">
             <a:extLst xmlns:a="http://schemas.openxmlformats.org/drawingml/2006/main">
               <a:ext uri="{FF2B5EF4-FFF2-40B4-BE49-F238E27FC236}">
-                <a16:creationId xmlns:a16="http://schemas.microsoft.com/office/drawing/2014/main" id="{EC607BF7-3F52-4CC5-8638-31D1D93065EA}"/>
+                <a16:creationId xmlns:a16="http://schemas.microsoft.com/office/drawing/2014/main" id="{2A502D88-83B2-415E-9037-A35A0F61E8BA}"/>
               </a:ext>
             </a:extLst>
           </p:cNvPr>
@@ -8927,7 +8927,7 @@
     </p:spTree>
     <p:extLst>
       <p:ext uri="{BB962C8B-B14F-4D97-AF65-F5344CB8AC3E}">
-        <p14:creationId xmlns:p14="http://schemas.microsoft.com/office/powerpoint/2010/main" val="778911157"/>
+        <p14:creationId xmlns:p14="http://schemas.microsoft.com/office/powerpoint/2010/main" val="1541063402"/>
       </p:ext>
     </p:extLst>
   </p:cSld>
@@ -8958,7 +8958,7 @@
           <p:cNvPr id="1" name="s7-rule">
             <a:extLst xmlns:a="http://schemas.openxmlformats.org/drawingml/2006/main">
               <a:ext uri="{FF2B5EF4-FFF2-40B4-BE49-F238E27FC236}">
-                <a16:creationId xmlns:a16="http://schemas.microsoft.com/office/drawing/2014/main" id="{ACF3DD37-4AE0-4AA3-B3AB-17F134D3EC0F}"/>
+                <a16:creationId xmlns:a16="http://schemas.microsoft.com/office/drawing/2014/main" id="{563A949C-D2E9-4214-9238-FE6A68F10123}"/>
               </a:ext>
             </a:extLst>
           </p:cNvPr>
@@ -8991,7 +8991,7 @@
           <p:cNvPr id="2" name="s7-eyebrow">
             <a:extLst xmlns:a="http://schemas.openxmlformats.org/drawingml/2006/main">
               <a:ext uri="{FF2B5EF4-FFF2-40B4-BE49-F238E27FC236}">
-                <a16:creationId xmlns:a16="http://schemas.microsoft.com/office/drawing/2014/main" id="{D7B905B0-6048-4E12-95F4-C35368C5EC76}"/>
+                <a16:creationId xmlns:a16="http://schemas.microsoft.com/office/drawing/2014/main" id="{F217CEA0-BC50-41D2-BD44-2EE976ABBDA9}"/>
               </a:ext>
             </a:extLst>
           </p:cNvPr>
@@ -9049,7 +9049,7 @@
           <p:cNvPr id="3" name="s7-title">
             <a:extLst xmlns:a="http://schemas.openxmlformats.org/drawingml/2006/main">
               <a:ext uri="{FF2B5EF4-FFF2-40B4-BE49-F238E27FC236}">
-                <a16:creationId xmlns:a16="http://schemas.microsoft.com/office/drawing/2014/main" id="{2F7626FC-223E-4D08-B9F6-A49587BF53DE}"/>
+                <a16:creationId xmlns:a16="http://schemas.microsoft.com/office/drawing/2014/main" id="{D562DC84-14E0-4E1A-812E-D5C44FE84EC4}"/>
               </a:ext>
             </a:extLst>
           </p:cNvPr>
@@ -9107,7 +9107,7 @@
           <p:cNvPr id="4" name="s7-footer">
             <a:extLst xmlns:a="http://schemas.openxmlformats.org/drawingml/2006/main">
               <a:ext uri="{FF2B5EF4-FFF2-40B4-BE49-F238E27FC236}">
-                <a16:creationId xmlns:a16="http://schemas.microsoft.com/office/drawing/2014/main" id="{F9E0CED7-9483-40A4-A56D-677C9349F597}"/>
+                <a16:creationId xmlns:a16="http://schemas.microsoft.com/office/drawing/2014/main" id="{560F0FA3-A193-42DA-9FCC-1FF0693CD9CA}"/>
               </a:ext>
             </a:extLst>
           </p:cNvPr>
@@ -9138,7 +9138,7 @@
           <p:cNvPr id="5" name="s7-identity">
             <a:extLst xmlns:a="http://schemas.openxmlformats.org/drawingml/2006/main">
               <a:ext uri="{FF2B5EF4-FFF2-40B4-BE49-F238E27FC236}">
-                <a16:creationId xmlns:a16="http://schemas.microsoft.com/office/drawing/2014/main" id="{4CE3DBE6-5883-49B1-A40B-E72E3303C3DE}"/>
+                <a16:creationId xmlns:a16="http://schemas.microsoft.com/office/drawing/2014/main" id="{2A1DBD1E-6250-42E2-BA20-AD6AF355C9E8}"/>
               </a:ext>
             </a:extLst>
           </p:cNvPr>
@@ -9196,7 +9196,7 @@
           <p:cNvPr id="6" name="core-no-0">
             <a:extLst xmlns:a="http://schemas.openxmlformats.org/drawingml/2006/main">
               <a:ext uri="{FF2B5EF4-FFF2-40B4-BE49-F238E27FC236}">
-                <a16:creationId xmlns:a16="http://schemas.microsoft.com/office/drawing/2014/main" id="{D95ACBB3-5049-48C2-8014-B449968B3927}"/>
+                <a16:creationId xmlns:a16="http://schemas.microsoft.com/office/drawing/2014/main" id="{DE43514B-6890-46E0-B4E4-5B53749E7913}"/>
               </a:ext>
             </a:extLst>
           </p:cNvPr>
@@ -9254,7 +9254,7 @@
           <p:cNvPr id="7" name="core-label-0">
             <a:extLst xmlns:a="http://schemas.openxmlformats.org/drawingml/2006/main">
               <a:ext uri="{FF2B5EF4-FFF2-40B4-BE49-F238E27FC236}">
-                <a16:creationId xmlns:a16="http://schemas.microsoft.com/office/drawing/2014/main" id="{EFEFA621-0761-4247-8D3E-1BD01EE77838}"/>
+                <a16:creationId xmlns:a16="http://schemas.microsoft.com/office/drawing/2014/main" id="{CF1D7B12-FD86-4A8C-9D46-6A5055FC0028}"/>
               </a:ext>
             </a:extLst>
           </p:cNvPr>
@@ -9312,7 +9312,7 @@
           <p:cNvPr id="8" name="core-body-0">
             <a:extLst xmlns:a="http://schemas.openxmlformats.org/drawingml/2006/main">
               <a:ext uri="{FF2B5EF4-FFF2-40B4-BE49-F238E27FC236}">
-                <a16:creationId xmlns:a16="http://schemas.microsoft.com/office/drawing/2014/main" id="{2EA540D1-9205-4340-A53D-8C5D6B398F4F}"/>
+                <a16:creationId xmlns:a16="http://schemas.microsoft.com/office/drawing/2014/main" id="{12355FC6-3904-4DC3-8670-05CB300944FB}"/>
               </a:ext>
             </a:extLst>
           </p:cNvPr>
@@ -9376,7 +9376,7 @@
           <p:cNvPr id="9" name="core-no-1">
             <a:extLst xmlns:a="http://schemas.openxmlformats.org/drawingml/2006/main">
               <a:ext uri="{FF2B5EF4-FFF2-40B4-BE49-F238E27FC236}">
-                <a16:creationId xmlns:a16="http://schemas.microsoft.com/office/drawing/2014/main" id="{14670EB7-3B63-46ED-B110-D5AE72D7D01C}"/>
+                <a16:creationId xmlns:a16="http://schemas.microsoft.com/office/drawing/2014/main" id="{97DC8DF7-F637-48E7-B4CC-3E0DD28E6756}"/>
               </a:ext>
             </a:extLst>
           </p:cNvPr>
@@ -9434,7 +9434,7 @@
           <p:cNvPr id="10" name="core-body-1">
             <a:extLst xmlns:a="http://schemas.openxmlformats.org/drawingml/2006/main">
               <a:ext uri="{FF2B5EF4-FFF2-40B4-BE49-F238E27FC236}">
-                <a16:creationId xmlns:a16="http://schemas.microsoft.com/office/drawing/2014/main" id="{19CFE4C6-3CA8-4EF1-A446-4890A72D5DB9}"/>
+                <a16:creationId xmlns:a16="http://schemas.microsoft.com/office/drawing/2014/main" id="{9DE2CD15-384F-49A3-8679-CD40F8A3ED2B}"/>
               </a:ext>
             </a:extLst>
           </p:cNvPr>
@@ -9498,7 +9498,7 @@
           <p:cNvPr id="11" name="s7-takeaway-rule">
             <a:extLst xmlns:a="http://schemas.openxmlformats.org/drawingml/2006/main">
               <a:ext uri="{FF2B5EF4-FFF2-40B4-BE49-F238E27FC236}">
-                <a16:creationId xmlns:a16="http://schemas.microsoft.com/office/drawing/2014/main" id="{70C2CB36-FADF-4AAE-BB1E-7C00DAF43EA6}"/>
+                <a16:creationId xmlns:a16="http://schemas.microsoft.com/office/drawing/2014/main" id="{5FBD9148-B152-4386-AACC-8A2D10F98F4F}"/>
               </a:ext>
             </a:extLst>
           </p:cNvPr>
@@ -9531,7 +9531,7 @@
           <p:cNvPr id="12" name="s7-takeaway">
             <a:extLst xmlns:a="http://schemas.openxmlformats.org/drawingml/2006/main">
               <a:ext uri="{FF2B5EF4-FFF2-40B4-BE49-F238E27FC236}">
-                <a16:creationId xmlns:a16="http://schemas.microsoft.com/office/drawing/2014/main" id="{38FBF1E6-C25C-492B-9133-F8760A028E38}"/>
+                <a16:creationId xmlns:a16="http://schemas.microsoft.com/office/drawing/2014/main" id="{7EB2B9C5-B2E8-40F2-A0BE-D4490981B720}"/>
               </a:ext>
             </a:extLst>
           </p:cNvPr>
@@ -9587,7 +9587,7 @@
     </p:spTree>
     <p:extLst>
       <p:ext uri="{BB962C8B-B14F-4D97-AF65-F5344CB8AC3E}">
-        <p14:creationId xmlns:p14="http://schemas.microsoft.com/office/powerpoint/2010/main" val="45943128"/>
+        <p14:creationId xmlns:p14="http://schemas.microsoft.com/office/powerpoint/2010/main" val="1307047198"/>
       </p:ext>
     </p:extLst>
   </p:cSld>
@@ -9618,7 +9618,7 @@
           <p:cNvPr id="1" name="s8-rule">
             <a:extLst xmlns:a="http://schemas.openxmlformats.org/drawingml/2006/main">
               <a:ext uri="{FF2B5EF4-FFF2-40B4-BE49-F238E27FC236}">
-                <a16:creationId xmlns:a16="http://schemas.microsoft.com/office/drawing/2014/main" id="{06E1F005-867B-40E3-B5FE-956BFB0F6652}"/>
+                <a16:creationId xmlns:a16="http://schemas.microsoft.com/office/drawing/2014/main" id="{E90D5C01-B3FE-45BB-A283-114AC782AA73}"/>
               </a:ext>
             </a:extLst>
           </p:cNvPr>
@@ -9651,7 +9651,7 @@
           <p:cNvPr id="2" name="s8-eyebrow">
             <a:extLst xmlns:a="http://schemas.openxmlformats.org/drawingml/2006/main">
               <a:ext uri="{FF2B5EF4-FFF2-40B4-BE49-F238E27FC236}">
-                <a16:creationId xmlns:a16="http://schemas.microsoft.com/office/drawing/2014/main" id="{D32A8B0D-7939-47F5-9143-B542310373C1}"/>
+                <a16:creationId xmlns:a16="http://schemas.microsoft.com/office/drawing/2014/main" id="{D84EE174-1CFB-419A-9B63-B9441AABC6AB}"/>
               </a:ext>
             </a:extLst>
           </p:cNvPr>
@@ -9709,7 +9709,7 @@
           <p:cNvPr id="3" name="s8-title">
             <a:extLst xmlns:a="http://schemas.openxmlformats.org/drawingml/2006/main">
               <a:ext uri="{FF2B5EF4-FFF2-40B4-BE49-F238E27FC236}">
-                <a16:creationId xmlns:a16="http://schemas.microsoft.com/office/drawing/2014/main" id="{BF1C518F-D19A-4B80-BB62-F7756BD45B1C}"/>
+                <a16:creationId xmlns:a16="http://schemas.microsoft.com/office/drawing/2014/main" id="{955A7844-CF59-46CD-90FD-9FD20897C84D}"/>
               </a:ext>
             </a:extLst>
           </p:cNvPr>
@@ -9767,7 +9767,7 @@
           <p:cNvPr id="4" name="s8-footer">
             <a:extLst xmlns:a="http://schemas.openxmlformats.org/drawingml/2006/main">
               <a:ext uri="{FF2B5EF4-FFF2-40B4-BE49-F238E27FC236}">
-                <a16:creationId xmlns:a16="http://schemas.microsoft.com/office/drawing/2014/main" id="{C76AB681-1FF0-4CBF-8EFF-AC86CC9A282F}"/>
+                <a16:creationId xmlns:a16="http://schemas.microsoft.com/office/drawing/2014/main" id="{46BBB803-AAE8-44AA-B67E-BB7F89E0F9D6}"/>
               </a:ext>
             </a:extLst>
           </p:cNvPr>
@@ -9798,7 +9798,7 @@
           <p:cNvPr id="5" name="s8-identity">
             <a:extLst xmlns:a="http://schemas.openxmlformats.org/drawingml/2006/main">
               <a:ext uri="{FF2B5EF4-FFF2-40B4-BE49-F238E27FC236}">
-                <a16:creationId xmlns:a16="http://schemas.microsoft.com/office/drawing/2014/main" id="{7C12F97B-13A2-483D-822E-C539D4DEBC44}"/>
+                <a16:creationId xmlns:a16="http://schemas.microsoft.com/office/drawing/2014/main" id="{66B8C504-6292-45F2-8AE3-D5B36FA4E5B4}"/>
               </a:ext>
             </a:extLst>
           </p:cNvPr>
@@ -9856,7 +9856,7 @@
           <p:cNvPr id="6" name="core-no-0">
             <a:extLst xmlns:a="http://schemas.openxmlformats.org/drawingml/2006/main">
               <a:ext uri="{FF2B5EF4-FFF2-40B4-BE49-F238E27FC236}">
-                <a16:creationId xmlns:a16="http://schemas.microsoft.com/office/drawing/2014/main" id="{00DC6B2E-B56F-4584-85A8-E0C68006A641}"/>
+                <a16:creationId xmlns:a16="http://schemas.microsoft.com/office/drawing/2014/main" id="{9EAC3431-3FD2-4290-A131-396C5CAD5677}"/>
               </a:ext>
             </a:extLst>
           </p:cNvPr>
@@ -9914,7 +9914,7 @@
           <p:cNvPr id="7" name="core-label-0">
             <a:extLst xmlns:a="http://schemas.openxmlformats.org/drawingml/2006/main">
               <a:ext uri="{FF2B5EF4-FFF2-40B4-BE49-F238E27FC236}">
-                <a16:creationId xmlns:a16="http://schemas.microsoft.com/office/drawing/2014/main" id="{C08BA3B8-588D-4580-A7ED-16E589BF5392}"/>
+                <a16:creationId xmlns:a16="http://schemas.microsoft.com/office/drawing/2014/main" id="{F88FC6C3-DD32-4D79-85CF-770E09A35A71}"/>
               </a:ext>
             </a:extLst>
           </p:cNvPr>
@@ -9972,7 +9972,7 @@
           <p:cNvPr id="8" name="core-body-0">
             <a:extLst xmlns:a="http://schemas.openxmlformats.org/drawingml/2006/main">
               <a:ext uri="{FF2B5EF4-FFF2-40B4-BE49-F238E27FC236}">
-                <a16:creationId xmlns:a16="http://schemas.microsoft.com/office/drawing/2014/main" id="{91D53F73-11F7-4B37-B34F-F0DEC7D3C4BC}"/>
+                <a16:creationId xmlns:a16="http://schemas.microsoft.com/office/drawing/2014/main" id="{404787E3-D702-44C5-9A79-936D6A03F2DB}"/>
               </a:ext>
             </a:extLst>
           </p:cNvPr>
@@ -10036,7 +10036,7 @@
           <p:cNvPr id="9" name="core-no-1">
             <a:extLst xmlns:a="http://schemas.openxmlformats.org/drawingml/2006/main">
               <a:ext uri="{FF2B5EF4-FFF2-40B4-BE49-F238E27FC236}">
-                <a16:creationId xmlns:a16="http://schemas.microsoft.com/office/drawing/2014/main" id="{F24D5CE1-FF16-4161-8F11-75DE7295EEC5}"/>
+                <a16:creationId xmlns:a16="http://schemas.microsoft.com/office/drawing/2014/main" id="{363DDCD9-2F04-401A-B860-70B1C782EE34}"/>
               </a:ext>
             </a:extLst>
           </p:cNvPr>
@@ -10094,7 +10094,7 @@
           <p:cNvPr id="10" name="core-body-1">
             <a:extLst xmlns:a="http://schemas.openxmlformats.org/drawingml/2006/main">
               <a:ext uri="{FF2B5EF4-FFF2-40B4-BE49-F238E27FC236}">
-                <a16:creationId xmlns:a16="http://schemas.microsoft.com/office/drawing/2014/main" id="{9FF58294-FF6C-43CE-8E36-1A35FE28859E}"/>
+                <a16:creationId xmlns:a16="http://schemas.microsoft.com/office/drawing/2014/main" id="{00CBF1D6-B6A5-435C-8EC6-1279E519157B}"/>
               </a:ext>
             </a:extLst>
           </p:cNvPr>
@@ -10158,7 +10158,7 @@
           <p:cNvPr id="11" name="s8-takeaway-rule">
             <a:extLst xmlns:a="http://schemas.openxmlformats.org/drawingml/2006/main">
               <a:ext uri="{FF2B5EF4-FFF2-40B4-BE49-F238E27FC236}">
-                <a16:creationId xmlns:a16="http://schemas.microsoft.com/office/drawing/2014/main" id="{9938ABD6-CEB1-4694-A5DE-33D1621319A4}"/>
+                <a16:creationId xmlns:a16="http://schemas.microsoft.com/office/drawing/2014/main" id="{7E8013EA-BD14-4E93-ADD9-99301D3AB9D2}"/>
               </a:ext>
             </a:extLst>
           </p:cNvPr>
@@ -10191,7 +10191,7 @@
           <p:cNvPr id="12" name="s8-takeaway">
             <a:extLst xmlns:a="http://schemas.openxmlformats.org/drawingml/2006/main">
               <a:ext uri="{FF2B5EF4-FFF2-40B4-BE49-F238E27FC236}">
-                <a16:creationId xmlns:a16="http://schemas.microsoft.com/office/drawing/2014/main" id="{31F9F2FF-A17E-452E-8700-52C28773D211}"/>
+                <a16:creationId xmlns:a16="http://schemas.microsoft.com/office/drawing/2014/main" id="{F5D0213C-F0A4-4F4F-A43E-ACEF5AA73CAB}"/>
               </a:ext>
             </a:extLst>
           </p:cNvPr>
@@ -10247,7 +10247,7 @@
     </p:spTree>
     <p:extLst>
       <p:ext uri="{BB962C8B-B14F-4D97-AF65-F5344CB8AC3E}">
-        <p14:creationId xmlns:p14="http://schemas.microsoft.com/office/powerpoint/2010/main" val="752521808"/>
+        <p14:creationId xmlns:p14="http://schemas.microsoft.com/office/powerpoint/2010/main" val="451912373"/>
       </p:ext>
     </p:extLst>
   </p:cSld>
@@ -10278,7 +10278,7 @@
           <p:cNvPr id="1" name="s9-rule">
             <a:extLst xmlns:a="http://schemas.openxmlformats.org/drawingml/2006/main">
               <a:ext uri="{FF2B5EF4-FFF2-40B4-BE49-F238E27FC236}">
-                <a16:creationId xmlns:a16="http://schemas.microsoft.com/office/drawing/2014/main" id="{9C8CE100-9BEE-4464-B123-269561995515}"/>
+                <a16:creationId xmlns:a16="http://schemas.microsoft.com/office/drawing/2014/main" id="{C95438FA-CB9E-4577-B3C8-315470E4159C}"/>
               </a:ext>
             </a:extLst>
           </p:cNvPr>
@@ -10311,7 +10311,7 @@
           <p:cNvPr id="2" name="s9-eyebrow">
             <a:extLst xmlns:a="http://schemas.openxmlformats.org/drawingml/2006/main">
               <a:ext uri="{FF2B5EF4-FFF2-40B4-BE49-F238E27FC236}">
-                <a16:creationId xmlns:a16="http://schemas.microsoft.com/office/drawing/2014/main" id="{39DBFB38-CBD9-45AD-9AE0-FF43209A21C6}"/>
+                <a16:creationId xmlns:a16="http://schemas.microsoft.com/office/drawing/2014/main" id="{4DCCEDB0-E95A-4CE0-82F7-D262B65642CF}"/>
               </a:ext>
             </a:extLst>
           </p:cNvPr>
@@ -10369,7 +10369,7 @@
           <p:cNvPr id="3" name="s9-title">
             <a:extLst xmlns:a="http://schemas.openxmlformats.org/drawingml/2006/main">
               <a:ext uri="{FF2B5EF4-FFF2-40B4-BE49-F238E27FC236}">
-                <a16:creationId xmlns:a16="http://schemas.microsoft.com/office/drawing/2014/main" id="{DE5F1851-F88B-4143-8F3A-66E6CD76E666}"/>
+                <a16:creationId xmlns:a16="http://schemas.microsoft.com/office/drawing/2014/main" id="{D94E5801-F21A-4E65-BD83-538472B6E3BB}"/>
               </a:ext>
             </a:extLst>
           </p:cNvPr>
@@ -10427,7 +10427,7 @@
           <p:cNvPr id="4" name="s9-footer">
             <a:extLst xmlns:a="http://schemas.openxmlformats.org/drawingml/2006/main">
               <a:ext uri="{FF2B5EF4-FFF2-40B4-BE49-F238E27FC236}">
-                <a16:creationId xmlns:a16="http://schemas.microsoft.com/office/drawing/2014/main" id="{3701E823-B412-4806-BD06-B7BD97168500}"/>
+                <a16:creationId xmlns:a16="http://schemas.microsoft.com/office/drawing/2014/main" id="{39BC0AA2-0636-4D23-8E05-4BAFB0B7FD3B}"/>
               </a:ext>
             </a:extLst>
           </p:cNvPr>
@@ -10458,7 +10458,7 @@
           <p:cNvPr id="5" name="s9-identity">
             <a:extLst xmlns:a="http://schemas.openxmlformats.org/drawingml/2006/main">
               <a:ext uri="{FF2B5EF4-FFF2-40B4-BE49-F238E27FC236}">
-                <a16:creationId xmlns:a16="http://schemas.microsoft.com/office/drawing/2014/main" id="{76D001A1-4805-4FA1-884A-783DFF43DCFF}"/>
+                <a16:creationId xmlns:a16="http://schemas.microsoft.com/office/drawing/2014/main" id="{D2784687-3CDB-4872-BF2A-7A59EEBC7929}"/>
               </a:ext>
             </a:extLst>
           </p:cNvPr>
@@ -10516,7 +10516,7 @@
           <p:cNvPr id="6" name="core-no-0">
             <a:extLst xmlns:a="http://schemas.openxmlformats.org/drawingml/2006/main">
               <a:ext uri="{FF2B5EF4-FFF2-40B4-BE49-F238E27FC236}">
-                <a16:creationId xmlns:a16="http://schemas.microsoft.com/office/drawing/2014/main" id="{8B1F37AE-A42E-4964-ACC8-AC297440F2A5}"/>
+                <a16:creationId xmlns:a16="http://schemas.microsoft.com/office/drawing/2014/main" id="{EC42AAED-B6CE-4250-A37C-FF9A7B3916FB}"/>
               </a:ext>
             </a:extLst>
           </p:cNvPr>
@@ -10574,7 +10574,7 @@
           <p:cNvPr id="7" name="core-label-0">
             <a:extLst xmlns:a="http://schemas.openxmlformats.org/drawingml/2006/main">
               <a:ext uri="{FF2B5EF4-FFF2-40B4-BE49-F238E27FC236}">
-                <a16:creationId xmlns:a16="http://schemas.microsoft.com/office/drawing/2014/main" id="{A21E42B7-87DA-42CA-AAB2-A91D58B7D6A2}"/>
+                <a16:creationId xmlns:a16="http://schemas.microsoft.com/office/drawing/2014/main" id="{E52260EC-3410-45A9-85F1-C8EA03A39C70}"/>
               </a:ext>
             </a:extLst>
           </p:cNvPr>
@@ -10632,7 +10632,7 @@
           <p:cNvPr id="8" name="core-body-0">
             <a:extLst xmlns:a="http://schemas.openxmlformats.org/drawingml/2006/main">
               <a:ext uri="{FF2B5EF4-FFF2-40B4-BE49-F238E27FC236}">
-                <a16:creationId xmlns:a16="http://schemas.microsoft.com/office/drawing/2014/main" id="{1AD11164-19B6-402E-97A6-B021013B151F}"/>
+                <a16:creationId xmlns:a16="http://schemas.microsoft.com/office/drawing/2014/main" id="{17C47365-F0D5-4AE8-B4B0-30BE6BAABD46}"/>
               </a:ext>
             </a:extLst>
           </p:cNvPr>
@@ -10696,7 +10696,7 @@
           <p:cNvPr id="9" name="s9-takeaway-rule">
             <a:extLst xmlns:a="http://schemas.openxmlformats.org/drawingml/2006/main">
               <a:ext uri="{FF2B5EF4-FFF2-40B4-BE49-F238E27FC236}">
-                <a16:creationId xmlns:a16="http://schemas.microsoft.com/office/drawing/2014/main" id="{7CF33610-BF1C-40CC-BABE-47A2F9CA06D9}"/>
+                <a16:creationId xmlns:a16="http://schemas.microsoft.com/office/drawing/2014/main" id="{A7BADE16-61C9-41E8-92CC-FD014BCDA428}"/>
               </a:ext>
             </a:extLst>
           </p:cNvPr>
@@ -10729,7 +10729,7 @@
           <p:cNvPr id="10" name="s9-takeaway">
             <a:extLst xmlns:a="http://schemas.openxmlformats.org/drawingml/2006/main">
               <a:ext uri="{FF2B5EF4-FFF2-40B4-BE49-F238E27FC236}">
-                <a16:creationId xmlns:a16="http://schemas.microsoft.com/office/drawing/2014/main" id="{94114708-77B0-455D-87E0-71E6A9948447}"/>
+                <a16:creationId xmlns:a16="http://schemas.microsoft.com/office/drawing/2014/main" id="{BABFE782-0571-4A91-80E1-5B431CD03B33}"/>
               </a:ext>
             </a:extLst>
           </p:cNvPr>
@@ -10785,7 +10785,7 @@
     </p:spTree>
     <p:extLst>
       <p:ext uri="{BB962C8B-B14F-4D97-AF65-F5344CB8AC3E}">
-        <p14:creationId xmlns:p14="http://schemas.microsoft.com/office/powerpoint/2010/main" val="572278543"/>
+        <p14:creationId xmlns:p14="http://schemas.microsoft.com/office/powerpoint/2010/main" val="1496091927"/>
       </p:ext>
     </p:extLst>
   </p:cSld>
